--- a/presentation/RIGOR_results.pptx
+++ b/presentation/RIGOR_results.pptx
@@ -1789,7 +1789,7 @@
                 <a:cs typeface="IBM Plex Sans"/>
                 <a:sym typeface="IBM Plex Sans"/>
               </a:rPr>
-              <a:t>[9:17–10:03]  SPOKEN SCRIPT (77 words)</a:t>
+              <a:t>[9:30–10:13]  SPOKEN SCRIPT (72 words)</a:t>
             </a:r>
           </a:p>
           <a:p>
@@ -1803,7 +1803,7 @@
                 <a:cs typeface="IBM Plex Sans"/>
                 <a:sym typeface="IBM Plex Sans"/>
               </a:rPr>
-              <a:t>So nothing is lost. But is meaning added? On the left, per ontology: direct mapping and the LLM baseline add no labels at all. Non-Iterative adds labels, but no provenance and no hierarchy. Only RIGOR adds all three. On the right, the modeling pitfalls that OOPS! finds: about five hundred per direct-mapping ontology, eight per RIGOR ontology. [pause] And the one critical pitfall, the second domain from our validation example, is gone in six of RIGOR's nine ontologies.</a:t>
+              <a:t>So nothing is lost. But is meaning added? On the left, per ontology: direct mapping and the LLM baseline add no labels at all. Non-Iterative adds labels, but no provenance and no hierarchy. Only RIGOR adds all three. On the right, the modeling pitfalls that OOPS! finds: about five hundred per direct-mapping ontology, eight per RIGOR ontology. Without validation, the small Mistral model reaches two hundred twenty on eICU; with RIGOR, two. [pause]</a:t>
             </a:r>
           </a:p>
           <a:p/>
@@ -1861,6 +1861,21 @@
                 <a:sym typeface="IBM Plex Sans"/>
               </a:rPr>
               <a:t>IF RUNNING LATE, DROP: "Non-Iterative adds labels, but no provenance and no hierarchy."</a:t>
+            </a:r>
+          </a:p>
+          <a:p/>
+          <a:p>
+            <a:r>
+              <a:rPr b="0" i="0" lang="en-US" sz="1200" u="none" cap="none" strike="noStrike">
+                <a:solidFill>
+                  <a:schemeClr val="dk1"/>
+                </a:solidFill>
+                <a:latin typeface="IBM Plex Sans"/>
+                <a:ea typeface="IBM Plex Sans"/>
+                <a:cs typeface="IBM Plex Sans"/>
+                <a:sym typeface="IBM Plex Sans"/>
+              </a:rPr>
+              <a:t>IF ASKED ABOUT CRITICAL ERRORS: P19 (multiple domains or ranges) is the only pitfall OOPS! rates critical, and it is the second-domain error from the validation slide. Per ontology: Direct Mapping 15, LLM baseline 17, Non-Iterative 5.4, RIGOR 2.8; zero in 6 of RIGOR's 9 ontologies (Table 7). RIGOR's prompt allows one domain and one range, and the graph check rejects a second.</a:t>
             </a:r>
           </a:p>
         </p:txBody>
@@ -2019,7 +2034,7 @@
                 <a:cs typeface="IBM Plex Sans"/>
                 <a:sym typeface="IBM Plex Sans"/>
               </a:rPr>
-              <a:t>[10:03–10:54]  SPOKEN SCRIPT (88 words)</a:t>
+              <a:t>[10:13–11:03]  SPOKEN SCRIPT (88 words)</a:t>
             </a:r>
           </a:p>
           <a:p>
@@ -2279,7 +2294,7 @@
                 <a:cs typeface="Calibri"/>
                 <a:sym typeface="Calibri"/>
               </a:rPr>
-              <a:t>[10:54–11:27]  SPOKEN SCRIPT (52 words)</a:t>
+              <a:t>[11:03–11:37]  SPOKEN SCRIPT (52 words)</a:t>
             </a:r>
           </a:p>
           <a:p>
@@ -2509,7 +2524,7 @@
                 <a:cs typeface="Calibri"/>
                 <a:sym typeface="Calibri"/>
               </a:rPr>
-              <a:t>[8:45–9:17]  SPOKEN SCRIPT (53 words)</a:t>
+              <a:t>[8:45–9:30]  SPOKEN SCRIPT (75 words)</a:t>
             </a:r>
           </a:p>
           <a:p>
@@ -2523,7 +2538,7 @@
                 <a:cs typeface="Calibri"/>
                 <a:sym typeface="Calibri"/>
               </a:rPr>
-              <a:t>We climb from the easiest check to the hardest. First: is anything lost? All thirty ontologies are valid OWL and logically consistent, for every method. On average, RIGOR covers ninety-three percent of the database columns, as much as direct mapping. Non-Iterative, with the same retrieved context but no seed, covers only a third. [pause]</a:t>
+              <a:t>We climb from the easiest check to the hardest. First: is anything lost? All thirty ontologies are valid OWL and logically consistent, for every method. On average, RIGOR covers ninety-three percent of the database columns, as much as direct mapping. Non-Iterative, with the same retrieved context but no seed, covers only a third, and swings with the LLM, from six to seventy-eight percent. With RIGOR, every LLM keeps at least seventy-seven percent, in every database. [pause]</a:t>
             </a:r>
           </a:p>
           <a:p/>
@@ -2740,7 +2755,7 @@
                 <a:cs typeface="Calibri"/>
                 <a:sym typeface="Calibri"/>
               </a:rPr>
-              <a:t>[11:27–12:11]  SPOKEN SCRIPT (73 words)</a:t>
+              <a:t>[11:37–12:21]  SPOKEN SCRIPT (73 words)</a:t>
             </a:r>
           </a:p>
           <a:p>
@@ -4711,7 +4726,7 @@
                 <a:latin typeface="Calibri"/>
                 <a:cs typeface="Calibri"/>
               </a:rPr>
-              <a:t xml:space="preserve">Averages per ontology, over all 30 ontologies.</a:t>
+              <a:t xml:space="preserve">What each method adds, and the modeling errors per ontology, for every LLM and database.</a:t>
             </a:r>
           </a:p>
         </p:txBody>
@@ -4975,7 +4990,7 @@
         <p:spPr>
           <a:xfrm>
             <a:off x="804672" y="2606040"/>
-            <a:ext cx="5989320" cy="3154680"/>
+            <a:ext cx="3474720" cy="3154680"/>
           </a:xfrm>
           <a:prstGeom prst="roundRect">
             <a:avLst>
@@ -5010,7 +5025,7 @@
         <p:spPr>
           <a:xfrm>
             <a:off x="1078992" y="2788920"/>
-            <a:ext cx="5440680" cy="274320"/>
+            <a:ext cx="2926079" cy="274320"/>
           </a:xfrm>
           <a:prstGeom prst="rect">
             <a:avLst/>
@@ -5049,7 +5064,7 @@
         <p:spPr>
           <a:xfrm>
             <a:off x="1078992" y="3081528"/>
-            <a:ext cx="5440680" cy="237744"/>
+            <a:ext cx="2926079" cy="237744"/>
           </a:xfrm>
           <a:prstGeom prst="rect">
             <a:avLst/>
@@ -5074,7 +5089,7 @@
                 <a:latin typeface="Calibri"/>
                 <a:cs typeface="Calibri"/>
               </a:rPr>
-              <a:t xml:space="preserve">elements per ontology</a:t>
+              <a:t xml:space="preserve">elements per ontology (avg)</a:t>
             </a:r>
           </a:p>
         </p:txBody>
@@ -5087,33 +5102,33 @@
         </p:nvSpPr>
         <p:spPr>
           <a:xfrm>
-            <a:off x="2907791" y="3383280"/>
-            <a:ext cx="1188720" cy="420624"/>
-          </a:xfrm>
-          <a:prstGeom prst="rect">
-            <a:avLst/>
-          </a:prstGeom>
-          <a:noFill/>
-          <a:ln>
-            <a:noFill/>
-          </a:ln>
-        </p:spPr>
-        <p:txBody>
-          <a:bodyPr wrap="square" lIns="0" tIns="0" rIns="0" bIns="0" anchor="b">
+            <a:off x="2029967" y="3474720"/>
+            <a:ext cx="822960" cy="237744"/>
+          </a:xfrm>
+          <a:prstGeom prst="rect">
+            <a:avLst/>
+          </a:prstGeom>
+          <a:noFill/>
+          <a:ln>
+            <a:noFill/>
+          </a:ln>
+        </p:spPr>
+        <p:txBody>
+          <a:bodyPr wrap="square" lIns="0" tIns="0" rIns="0" bIns="0" anchor="t">
             <a:noAutofit/>
           </a:bodyPr>
           <a:lstStyle/>
           <a:p>
             <a:pPr algn="ctr"/>
             <a:r>
-              <a:rPr lang="en-US" sz="1150" b="0" i="0" dirty="0">
+              <a:rPr lang="en-US" sz="1000" b="0" i="0" dirty="0">
                 <a:solidFill>
                   <a:srgbClr val="5B6770"/>
                 </a:solidFill>
                 <a:latin typeface="Calibri"/>
                 <a:cs typeface="Calibri"/>
               </a:rPr>
-              <a:t xml:space="preserve">Labels &amp; comments</a:t>
+              <a:t xml:space="preserve">Labels</a:t>
             </a:r>
           </a:p>
         </p:txBody>
@@ -5126,33 +5141,33 @@
         </p:nvSpPr>
         <p:spPr>
           <a:xfrm>
-            <a:off x="4187952" y="3383280"/>
-            <a:ext cx="1188720" cy="420624"/>
-          </a:xfrm>
-          <a:prstGeom prst="rect">
-            <a:avLst/>
-          </a:prstGeom>
-          <a:noFill/>
-          <a:ln>
-            <a:noFill/>
-          </a:ln>
-        </p:spPr>
-        <p:txBody>
-          <a:bodyPr wrap="square" lIns="0" tIns="0" rIns="0" bIns="0" anchor="b">
+            <a:off x="2743199" y="3474720"/>
+            <a:ext cx="822960" cy="237744"/>
+          </a:xfrm>
+          <a:prstGeom prst="rect">
+            <a:avLst/>
+          </a:prstGeom>
+          <a:noFill/>
+          <a:ln>
+            <a:noFill/>
+          </a:ln>
+        </p:spPr>
+        <p:txBody>
+          <a:bodyPr wrap="square" lIns="0" tIns="0" rIns="0" bIns="0" anchor="t">
             <a:noAutofit/>
           </a:bodyPr>
           <a:lstStyle/>
           <a:p>
             <a:pPr algn="ctr"/>
             <a:r>
-              <a:rPr lang="en-US" sz="1150" b="0" i="0" dirty="0">
+              <a:rPr lang="en-US" sz="1000" b="0" i="0" dirty="0">
                 <a:solidFill>
                   <a:srgbClr val="5B6770"/>
                 </a:solidFill>
                 <a:latin typeface="Calibri"/>
                 <a:cs typeface="Calibri"/>
               </a:rPr>
-              <a:t xml:space="preserve">Provenance links</a:t>
+              <a:t xml:space="preserve">Provenance</a:t>
             </a:r>
           </a:p>
         </p:txBody>
@@ -5165,33 +5180,33 @@
         </p:nvSpPr>
         <p:spPr>
           <a:xfrm>
-            <a:off x="5468112" y="3383280"/>
-            <a:ext cx="1188720" cy="420624"/>
-          </a:xfrm>
-          <a:prstGeom prst="rect">
-            <a:avLst/>
-          </a:prstGeom>
-          <a:noFill/>
-          <a:ln>
-            <a:noFill/>
-          </a:ln>
-        </p:spPr>
-        <p:txBody>
-          <a:bodyPr wrap="square" lIns="0" tIns="0" rIns="0" bIns="0" anchor="b">
+            <a:off x="3456432" y="3474720"/>
+            <a:ext cx="822960" cy="237744"/>
+          </a:xfrm>
+          <a:prstGeom prst="rect">
+            <a:avLst/>
+          </a:prstGeom>
+          <a:noFill/>
+          <a:ln>
+            <a:noFill/>
+          </a:ln>
+        </p:spPr>
+        <p:txBody>
+          <a:bodyPr wrap="square" lIns="0" tIns="0" rIns="0" bIns="0" anchor="t">
             <a:noAutofit/>
           </a:bodyPr>
           <a:lstStyle/>
           <a:p>
             <a:pPr algn="ctr"/>
             <a:r>
-              <a:rPr lang="en-US" sz="1150" b="0" i="0" dirty="0">
+              <a:rPr lang="en-US" sz="1000" b="0" i="0" dirty="0">
                 <a:solidFill>
                   <a:srgbClr val="5B6770"/>
                 </a:solidFill>
                 <a:latin typeface="Calibri"/>
                 <a:cs typeface="Calibri"/>
               </a:rPr>
-              <a:t xml:space="preserve">Subclass axioms</a:t>
+              <a:t xml:space="preserve">Hierarchy</a:t>
             </a:r>
           </a:p>
         </p:txBody>
@@ -5204,8 +5219,8 @@
         </p:nvSpPr>
         <p:spPr>
           <a:xfrm>
-            <a:off x="1078992" y="3867912"/>
-            <a:ext cx="5440680" cy="10972"/>
+            <a:off x="1033271" y="3749039"/>
+            <a:ext cx="3017520" cy="10972"/>
           </a:xfrm>
           <a:prstGeom prst="rect">
             <a:avLst/>
@@ -5235,8 +5250,8 @@
         </p:nvSpPr>
         <p:spPr>
           <a:xfrm>
-            <a:off x="1078992" y="3977639"/>
-            <a:ext cx="1828800" cy="310896"/>
+            <a:off x="1033271" y="3840480"/>
+            <a:ext cx="1097280" cy="310896"/>
           </a:xfrm>
           <a:prstGeom prst="rect">
             <a:avLst/>
@@ -5254,7 +5269,7 @@
           <a:p>
             <a:pPr algn="l"/>
             <a:r>
-              <a:rPr lang="en-US" sz="1450" b="0" i="0" dirty="0">
+              <a:rPr lang="en-US" sz="1150" b="0" i="0" dirty="0">
                 <a:solidFill>
                   <a:srgbClr val="1F2328"/>
                 </a:solidFill>
@@ -5274,8 +5289,8 @@
         </p:nvSpPr>
         <p:spPr>
           <a:xfrm>
-            <a:off x="2907791" y="3977639"/>
-            <a:ext cx="1188720" cy="310896"/>
+            <a:off x="2029967" y="3840480"/>
+            <a:ext cx="822960" cy="310896"/>
           </a:xfrm>
           <a:prstGeom prst="rect">
             <a:avLst/>
@@ -5293,7 +5308,7 @@
           <a:p>
             <a:pPr algn="ctr"/>
             <a:r>
-              <a:rPr lang="en-US" sz="1450" b="0" i="0" dirty="0">
+              <a:rPr lang="en-US" sz="1300" b="0" i="0" dirty="0">
                 <a:solidFill>
                   <a:srgbClr val="6B747B"/>
                 </a:solidFill>
@@ -5313,8 +5328,8 @@
         </p:nvSpPr>
         <p:spPr>
           <a:xfrm>
-            <a:off x="4187952" y="3977639"/>
-            <a:ext cx="1188720" cy="310896"/>
+            <a:off x="2743199" y="3840480"/>
+            <a:ext cx="822960" cy="310896"/>
           </a:xfrm>
           <a:prstGeom prst="rect">
             <a:avLst/>
@@ -5332,7 +5347,7 @@
           <a:p>
             <a:pPr algn="ctr"/>
             <a:r>
-              <a:rPr lang="en-US" sz="1450" b="0" i="0" dirty="0">
+              <a:rPr lang="en-US" sz="1300" b="0" i="0" dirty="0">
                 <a:solidFill>
                   <a:srgbClr val="6B747B"/>
                 </a:solidFill>
@@ -5352,8 +5367,8 @@
         </p:nvSpPr>
         <p:spPr>
           <a:xfrm>
-            <a:off x="5468112" y="3977639"/>
-            <a:ext cx="1188720" cy="310896"/>
+            <a:off x="3456432" y="3840480"/>
+            <a:ext cx="822960" cy="310896"/>
           </a:xfrm>
           <a:prstGeom prst="rect">
             <a:avLst/>
@@ -5371,7 +5386,7 @@
           <a:p>
             <a:pPr algn="ctr"/>
             <a:r>
-              <a:rPr lang="en-US" sz="1450" b="0" i="0" dirty="0">
+              <a:rPr lang="en-US" sz="1300" b="0" i="0" dirty="0">
                 <a:solidFill>
                   <a:srgbClr val="6B747B"/>
                 </a:solidFill>
@@ -5391,8 +5406,8 @@
         </p:nvSpPr>
         <p:spPr>
           <a:xfrm>
-            <a:off x="1078992" y="4389120"/>
-            <a:ext cx="1828800" cy="310896"/>
+            <a:off x="1033271" y="4242816"/>
+            <a:ext cx="1097280" cy="310896"/>
           </a:xfrm>
           <a:prstGeom prst="rect">
             <a:avLst/>
@@ -5410,7 +5425,7 @@
           <a:p>
             <a:pPr algn="l"/>
             <a:r>
-              <a:rPr lang="en-US" sz="1450" b="0" i="0" dirty="0">
+              <a:rPr lang="en-US" sz="1150" b="0" i="0" dirty="0">
                 <a:solidFill>
                   <a:srgbClr val="1F2328"/>
                 </a:solidFill>
@@ -5430,8 +5445,8 @@
         </p:nvSpPr>
         <p:spPr>
           <a:xfrm>
-            <a:off x="2907791" y="4389120"/>
-            <a:ext cx="1188720" cy="310896"/>
+            <a:off x="2029967" y="4242816"/>
+            <a:ext cx="822960" cy="310896"/>
           </a:xfrm>
           <a:prstGeom prst="rect">
             <a:avLst/>
@@ -5449,7 +5464,7 @@
           <a:p>
             <a:pPr algn="ctr"/>
             <a:r>
-              <a:rPr lang="en-US" sz="1450" b="0" i="0" dirty="0">
+              <a:rPr lang="en-US" sz="1300" b="0" i="0" dirty="0">
                 <a:solidFill>
                   <a:srgbClr val="6B747B"/>
                 </a:solidFill>
@@ -5469,8 +5484,8 @@
         </p:nvSpPr>
         <p:spPr>
           <a:xfrm>
-            <a:off x="4187952" y="4389120"/>
-            <a:ext cx="1188720" cy="310896"/>
+            <a:off x="2743199" y="4242816"/>
+            <a:ext cx="822960" cy="310896"/>
           </a:xfrm>
           <a:prstGeom prst="rect">
             <a:avLst/>
@@ -5488,7 +5503,7 @@
           <a:p>
             <a:pPr algn="ctr"/>
             <a:r>
-              <a:rPr lang="en-US" sz="1450" b="0" i="0" dirty="0">
+              <a:rPr lang="en-US" sz="1300" b="0" i="0" dirty="0">
                 <a:solidFill>
                   <a:srgbClr val="6B747B"/>
                 </a:solidFill>
@@ -5508,8 +5523,8 @@
         </p:nvSpPr>
         <p:spPr>
           <a:xfrm>
-            <a:off x="5468112" y="4389120"/>
-            <a:ext cx="1188720" cy="310896"/>
+            <a:off x="3456432" y="4242816"/>
+            <a:ext cx="822960" cy="310896"/>
           </a:xfrm>
           <a:prstGeom prst="rect">
             <a:avLst/>
@@ -5527,7 +5542,7 @@
           <a:p>
             <a:pPr algn="ctr"/>
             <a:r>
-              <a:rPr lang="en-US" sz="1450" b="0" i="0" dirty="0">
+              <a:rPr lang="en-US" sz="1300" b="0" i="0" dirty="0">
                 <a:solidFill>
                   <a:srgbClr val="6B747B"/>
                 </a:solidFill>
@@ -5547,8 +5562,8 @@
         </p:nvSpPr>
         <p:spPr>
           <a:xfrm>
-            <a:off x="1078992" y="4800600"/>
-            <a:ext cx="1828800" cy="310896"/>
+            <a:off x="1033271" y="4645152"/>
+            <a:ext cx="1097280" cy="310896"/>
           </a:xfrm>
           <a:prstGeom prst="rect">
             <a:avLst/>
@@ -5566,7 +5581,7 @@
           <a:p>
             <a:pPr algn="l"/>
             <a:r>
-              <a:rPr lang="en-US" sz="1450" b="0" i="0" dirty="0">
+              <a:rPr lang="en-US" sz="1150" b="0" i="0" dirty="0">
                 <a:solidFill>
                   <a:srgbClr val="1F2328"/>
                 </a:solidFill>
@@ -5586,8 +5601,8 @@
         </p:nvSpPr>
         <p:spPr>
           <a:xfrm>
-            <a:off x="2907791" y="4800600"/>
-            <a:ext cx="1188720" cy="310896"/>
+            <a:off x="2029967" y="4645152"/>
+            <a:ext cx="822960" cy="310896"/>
           </a:xfrm>
           <a:prstGeom prst="rect">
             <a:avLst/>
@@ -5605,7 +5620,7 @@
           <a:p>
             <a:pPr algn="ctr"/>
             <a:r>
-              <a:rPr lang="en-US" sz="1450" b="1" i="0" dirty="0">
+              <a:rPr lang="en-US" sz="1300" b="1" i="0" dirty="0">
                 <a:solidFill>
                   <a:srgbClr val="1F2328"/>
                 </a:solidFill>
@@ -5625,8 +5640,8 @@
         </p:nvSpPr>
         <p:spPr>
           <a:xfrm>
-            <a:off x="4187952" y="4800600"/>
-            <a:ext cx="1188720" cy="310896"/>
+            <a:off x="2743199" y="4645152"/>
+            <a:ext cx="822960" cy="310896"/>
           </a:xfrm>
           <a:prstGeom prst="rect">
             <a:avLst/>
@@ -5644,7 +5659,7 @@
           <a:p>
             <a:pPr algn="ctr"/>
             <a:r>
-              <a:rPr lang="en-US" sz="1450" b="0" i="0" dirty="0">
+              <a:rPr lang="en-US" sz="1300" b="0" i="0" dirty="0">
                 <a:solidFill>
                   <a:srgbClr val="6B747B"/>
                 </a:solidFill>
@@ -5664,8 +5679,8 @@
         </p:nvSpPr>
         <p:spPr>
           <a:xfrm>
-            <a:off x="5468112" y="4800600"/>
-            <a:ext cx="1188720" cy="310896"/>
+            <a:off x="3456432" y="4645152"/>
+            <a:ext cx="822960" cy="310896"/>
           </a:xfrm>
           <a:prstGeom prst="rect">
             <a:avLst/>
@@ -5683,7 +5698,7 @@
           <a:p>
             <a:pPr algn="ctr"/>
             <a:r>
-              <a:rPr lang="en-US" sz="1450" b="0" i="0" dirty="0">
+              <a:rPr lang="en-US" sz="1300" b="0" i="0" dirty="0">
                 <a:solidFill>
                   <a:srgbClr val="6B747B"/>
                 </a:solidFill>
@@ -5703,8 +5718,8 @@
         </p:nvSpPr>
         <p:spPr>
           <a:xfrm>
-            <a:off x="969264" y="5175503"/>
-            <a:ext cx="5660136" cy="384048"/>
+            <a:off x="941832" y="5020056"/>
+            <a:ext cx="3200400" cy="365760"/>
           </a:xfrm>
           <a:prstGeom prst="roundRect">
             <a:avLst>
@@ -5736,8 +5751,8 @@
         </p:nvSpPr>
         <p:spPr>
           <a:xfrm>
-            <a:off x="1078992" y="5212079"/>
-            <a:ext cx="1828800" cy="310896"/>
+            <a:off x="1033271" y="5047488"/>
+            <a:ext cx="1097280" cy="310896"/>
           </a:xfrm>
           <a:prstGeom prst="rect">
             <a:avLst/>
@@ -5755,7 +5770,7 @@
           <a:p>
             <a:pPr algn="l"/>
             <a:r>
-              <a:rPr lang="en-US" sz="1450" b="1" i="0" dirty="0">
+              <a:rPr lang="en-US" sz="1150" b="1" i="0" dirty="0">
                 <a:solidFill>
                   <a:srgbClr val="0B6E4F"/>
                 </a:solidFill>
@@ -5775,8 +5790,8 @@
         </p:nvSpPr>
         <p:spPr>
           <a:xfrm>
-            <a:off x="2907791" y="5212079"/>
-            <a:ext cx="1188720" cy="310896"/>
+            <a:off x="2029967" y="5047488"/>
+            <a:ext cx="822960" cy="310896"/>
           </a:xfrm>
           <a:prstGeom prst="rect">
             <a:avLst/>
@@ -5794,7 +5809,7 @@
           <a:p>
             <a:pPr algn="ctr"/>
             <a:r>
-              <a:rPr lang="en-US" sz="1600" b="1" i="0" dirty="0">
+              <a:rPr lang="en-US" sz="1300" b="1" i="0" dirty="0">
                 <a:solidFill>
                   <a:srgbClr val="0B6E4F"/>
                 </a:solidFill>
@@ -5814,8 +5829,8 @@
         </p:nvSpPr>
         <p:spPr>
           <a:xfrm>
-            <a:off x="4187952" y="5212079"/>
-            <a:ext cx="1188720" cy="310896"/>
+            <a:off x="2743199" y="5047488"/>
+            <a:ext cx="822960" cy="310896"/>
           </a:xfrm>
           <a:prstGeom prst="rect">
             <a:avLst/>
@@ -5833,7 +5848,7 @@
           <a:p>
             <a:pPr algn="ctr"/>
             <a:r>
-              <a:rPr lang="en-US" sz="1600" b="1" i="0" dirty="0">
+              <a:rPr lang="en-US" sz="1300" b="1" i="0" dirty="0">
                 <a:solidFill>
                   <a:srgbClr val="0B6E4F"/>
                 </a:solidFill>
@@ -5853,8 +5868,8 @@
         </p:nvSpPr>
         <p:spPr>
           <a:xfrm>
-            <a:off x="5468112" y="5212079"/>
-            <a:ext cx="1188720" cy="310896"/>
+            <a:off x="3456432" y="5047488"/>
+            <a:ext cx="822960" cy="310896"/>
           </a:xfrm>
           <a:prstGeom prst="rect">
             <a:avLst/>
@@ -5872,7 +5887,7 @@
           <a:p>
             <a:pPr algn="ctr"/>
             <a:r>
-              <a:rPr lang="en-US" sz="1600" b="1" i="0" dirty="0">
+              <a:rPr lang="en-US" sz="1300" b="1" i="0" dirty="0">
                 <a:solidFill>
                   <a:srgbClr val="0B6E4F"/>
                 </a:solidFill>
@@ -5886,14 +5901,53 @@
       </p:sp>
       <p:sp>
         <p:nvSpPr>
-          <p:cNvPr id="1177" name="Card"/>
+          <p:cNvPr id="1177" name="Note"/>
+          <p:cNvSpPr txBox="1"/>
+          <p:nvPr/>
+        </p:nvSpPr>
+        <p:spPr>
+          <a:xfrm>
+            <a:off x="1033271" y="5458968"/>
+            <a:ext cx="3017520" cy="256032"/>
+          </a:xfrm>
+          <a:prstGeom prst="rect">
+            <a:avLst/>
+          </a:prstGeom>
+          <a:noFill/>
+          <a:ln>
+            <a:noFill/>
+          </a:ln>
+        </p:spPr>
+        <p:txBody>
+          <a:bodyPr wrap="square" lIns="0" tIns="0" rIns="0" bIns="0" anchor="t">
+            <a:noAutofit/>
+          </a:bodyPr>
+          <a:lstStyle/>
+          <a:p>
+            <a:pPr algn="l"/>
+            <a:r>
+              <a:rPr lang="en-US" sz="1000" b="0" i="1" dirty="0">
+                <a:solidFill>
+                  <a:srgbClr val="5B6770"/>
+                </a:solidFill>
+                <a:latin typeface="Calibri"/>
+                <a:cs typeface="Calibri"/>
+              </a:rPr>
+              <a:t xml:space="preserve">Same pattern for every LLM and database.</a:t>
+            </a:r>
+          </a:p>
+        </p:txBody>
+      </p:sp>
+      <p:sp>
+        <p:nvSpPr>
+          <p:cNvPr id="1178" name="Card"/>
           <p:cNvSpPr/>
           <p:nvPr/>
         </p:nvSpPr>
         <p:spPr>
           <a:xfrm>
-            <a:off x="6976872" y="2606040"/>
-            <a:ext cx="4407408" cy="3154680"/>
+            <a:off x="4416552" y="2606040"/>
+            <a:ext cx="6967728" cy="3154680"/>
           </a:xfrm>
           <a:prstGeom prst="roundRect">
             <a:avLst>
@@ -5921,14 +5975,14 @@
       </p:sp>
       <p:sp>
         <p:nvSpPr>
-          <p:cNvPr id="1178" name="Card label"/>
+          <p:cNvPr id="1179" name="Card label"/>
           <p:cNvSpPr txBox="1"/>
           <p:nvPr/>
         </p:nvSpPr>
         <p:spPr>
           <a:xfrm>
-            <a:off x="7251192" y="2788920"/>
-            <a:ext cx="3858768" cy="274320"/>
+            <a:off x="4690872" y="2788920"/>
+            <a:ext cx="6419088" cy="274320"/>
           </a:xfrm>
           <a:prstGeom prst="rect">
             <a:avLst/>
@@ -5960,14 +6014,14 @@
       </p:sp>
       <p:sp>
         <p:nvSpPr>
-          <p:cNvPr id="1179" name="Card note"/>
+          <p:cNvPr id="1180" name="Card note"/>
           <p:cNvSpPr txBox="1"/>
           <p:nvPr/>
         </p:nvSpPr>
         <p:spPr>
           <a:xfrm>
-            <a:off x="7251192" y="3081528"/>
-            <a:ext cx="3858768" cy="237744"/>
+            <a:off x="4690872" y="3081528"/>
+            <a:ext cx="6419088" cy="237744"/>
           </a:xfrm>
           <a:prstGeom prst="rect">
             <a:avLst/>
@@ -5999,14 +6053,521 @@
       </p:sp>
       <p:sp>
         <p:nvSpPr>
-          <p:cNvPr id="1180" name="Method"/>
+          <p:cNvPr id="1181" name="Database"/>
           <p:cNvSpPr txBox="1"/>
           <p:nvPr/>
         </p:nvSpPr>
         <p:spPr>
           <a:xfrm>
-            <a:off x="7251192" y="3566160"/>
-            <a:ext cx="1508760" cy="292608"/>
+            <a:off x="5806440" y="3383280"/>
+            <a:ext cx="1591055" cy="219456"/>
+          </a:xfrm>
+          <a:prstGeom prst="rect">
+            <a:avLst/>
+          </a:prstGeom>
+          <a:noFill/>
+          <a:ln>
+            <a:noFill/>
+          </a:ln>
+        </p:spPr>
+        <p:txBody>
+          <a:bodyPr wrap="square" lIns="0" tIns="0" rIns="0" bIns="0" anchor="ctr">
+            <a:noAutofit/>
+          </a:bodyPr>
+          <a:lstStyle/>
+          <a:p>
+            <a:pPr algn="ctr"/>
+            <a:r>
+              <a:rPr lang="en-US" sz="1100" b="1" i="0" dirty="0">
+                <a:solidFill>
+                  <a:srgbClr val="1F2328"/>
+                </a:solidFill>
+                <a:latin typeface="Calibri"/>
+                <a:cs typeface="Calibri"/>
+              </a:rPr>
+              <a:t xml:space="preserve">Liver Cancer</a:t>
+            </a:r>
+          </a:p>
+        </p:txBody>
+      </p:sp>
+      <p:sp>
+        <p:nvSpPr>
+          <p:cNvPr id="1182" name="LLM"/>
+          <p:cNvSpPr txBox="1"/>
+          <p:nvPr/>
+        </p:nvSpPr>
+        <p:spPr>
+          <a:xfrm>
+            <a:off x="5806440" y="3611880"/>
+            <a:ext cx="530352" cy="182880"/>
+          </a:xfrm>
+          <a:prstGeom prst="rect">
+            <a:avLst/>
+          </a:prstGeom>
+          <a:noFill/>
+          <a:ln>
+            <a:noFill/>
+          </a:ln>
+        </p:spPr>
+        <p:txBody>
+          <a:bodyPr wrap="square" lIns="0" tIns="0" rIns="0" bIns="0" anchor="ctr">
+            <a:noAutofit/>
+          </a:bodyPr>
+          <a:lstStyle/>
+          <a:p>
+            <a:pPr algn="ctr"/>
+            <a:r>
+              <a:rPr lang="en-US" sz="850" b="0" i="0" dirty="0">
+                <a:solidFill>
+                  <a:srgbClr val="5B6770"/>
+                </a:solidFill>
+                <a:latin typeface="Calibri"/>
+                <a:cs typeface="Calibri"/>
+              </a:rPr>
+              <a:t xml:space="preserve">Claude</a:t>
+            </a:r>
+          </a:p>
+        </p:txBody>
+      </p:sp>
+      <p:sp>
+        <p:nvSpPr>
+          <p:cNvPr id="1183" name="LLM"/>
+          <p:cNvSpPr txBox="1"/>
+          <p:nvPr/>
+        </p:nvSpPr>
+        <p:spPr>
+          <a:xfrm>
+            <a:off x="6336792" y="3611880"/>
+            <a:ext cx="530352" cy="182880"/>
+          </a:xfrm>
+          <a:prstGeom prst="rect">
+            <a:avLst/>
+          </a:prstGeom>
+          <a:noFill/>
+          <a:ln>
+            <a:noFill/>
+          </a:ln>
+        </p:spPr>
+        <p:txBody>
+          <a:bodyPr wrap="square" lIns="0" tIns="0" rIns="0" bIns="0" anchor="ctr">
+            <a:noAutofit/>
+          </a:bodyPr>
+          <a:lstStyle/>
+          <a:p>
+            <a:pPr algn="ctr"/>
+            <a:r>
+              <a:rPr lang="en-US" sz="850" b="0" i="0" dirty="0">
+                <a:solidFill>
+                  <a:srgbClr val="5B6770"/>
+                </a:solidFill>
+                <a:latin typeface="Calibri"/>
+                <a:cs typeface="Calibri"/>
+              </a:rPr>
+              <a:t xml:space="preserve">Mistral</a:t>
+            </a:r>
+          </a:p>
+        </p:txBody>
+      </p:sp>
+      <p:sp>
+        <p:nvSpPr>
+          <p:cNvPr id="1184" name="LLM"/>
+          <p:cNvSpPr txBox="1"/>
+          <p:nvPr/>
+        </p:nvSpPr>
+        <p:spPr>
+          <a:xfrm>
+            <a:off x="6867144" y="3611880"/>
+            <a:ext cx="530352" cy="182880"/>
+          </a:xfrm>
+          <a:prstGeom prst="rect">
+            <a:avLst/>
+          </a:prstGeom>
+          <a:noFill/>
+          <a:ln>
+            <a:noFill/>
+          </a:ln>
+        </p:spPr>
+        <p:txBody>
+          <a:bodyPr wrap="square" lIns="0" tIns="0" rIns="0" bIns="0" anchor="ctr">
+            <a:noAutofit/>
+          </a:bodyPr>
+          <a:lstStyle/>
+          <a:p>
+            <a:pPr algn="ctr"/>
+            <a:r>
+              <a:rPr lang="en-US" sz="850" b="0" i="0" dirty="0">
+                <a:solidFill>
+                  <a:srgbClr val="5B6770"/>
+                </a:solidFill>
+                <a:latin typeface="Calibri"/>
+                <a:cs typeface="Calibri"/>
+              </a:rPr>
+              <a:t xml:space="preserve">DeepSeek</a:t>
+            </a:r>
+          </a:p>
+        </p:txBody>
+      </p:sp>
+      <p:sp>
+        <p:nvSpPr>
+          <p:cNvPr id="1185" name="Database"/>
+          <p:cNvSpPr txBox="1"/>
+          <p:nvPr/>
+        </p:nvSpPr>
+        <p:spPr>
+          <a:xfrm>
+            <a:off x="7397496" y="3383280"/>
+            <a:ext cx="1591055" cy="219456"/>
+          </a:xfrm>
+          <a:prstGeom prst="rect">
+            <a:avLst/>
+          </a:prstGeom>
+          <a:noFill/>
+          <a:ln>
+            <a:noFill/>
+          </a:ln>
+        </p:spPr>
+        <p:txBody>
+          <a:bodyPr wrap="square" lIns="0" tIns="0" rIns="0" bIns="0" anchor="ctr">
+            <a:noAutofit/>
+          </a:bodyPr>
+          <a:lstStyle/>
+          <a:p>
+            <a:pPr algn="ctr"/>
+            <a:r>
+              <a:rPr lang="en-US" sz="1100" b="1" i="0" dirty="0">
+                <a:solidFill>
+                  <a:srgbClr val="1F2328"/>
+                </a:solidFill>
+                <a:latin typeface="Calibri"/>
+                <a:cs typeface="Calibri"/>
+              </a:rPr>
+              <a:t xml:space="preserve">eICU-CRD</a:t>
+            </a:r>
+          </a:p>
+        </p:txBody>
+      </p:sp>
+      <p:sp>
+        <p:nvSpPr>
+          <p:cNvPr id="1186" name="LLM"/>
+          <p:cNvSpPr txBox="1"/>
+          <p:nvPr/>
+        </p:nvSpPr>
+        <p:spPr>
+          <a:xfrm>
+            <a:off x="7397496" y="3611880"/>
+            <a:ext cx="530352" cy="182880"/>
+          </a:xfrm>
+          <a:prstGeom prst="rect">
+            <a:avLst/>
+          </a:prstGeom>
+          <a:noFill/>
+          <a:ln>
+            <a:noFill/>
+          </a:ln>
+        </p:spPr>
+        <p:txBody>
+          <a:bodyPr wrap="square" lIns="0" tIns="0" rIns="0" bIns="0" anchor="ctr">
+            <a:noAutofit/>
+          </a:bodyPr>
+          <a:lstStyle/>
+          <a:p>
+            <a:pPr algn="ctr"/>
+            <a:r>
+              <a:rPr lang="en-US" sz="850" b="0" i="0" dirty="0">
+                <a:solidFill>
+                  <a:srgbClr val="5B6770"/>
+                </a:solidFill>
+                <a:latin typeface="Calibri"/>
+                <a:cs typeface="Calibri"/>
+              </a:rPr>
+              <a:t xml:space="preserve">Claude</a:t>
+            </a:r>
+          </a:p>
+        </p:txBody>
+      </p:sp>
+      <p:sp>
+        <p:nvSpPr>
+          <p:cNvPr id="1187" name="LLM"/>
+          <p:cNvSpPr txBox="1"/>
+          <p:nvPr/>
+        </p:nvSpPr>
+        <p:spPr>
+          <a:xfrm>
+            <a:off x="7927848" y="3611880"/>
+            <a:ext cx="530352" cy="182880"/>
+          </a:xfrm>
+          <a:prstGeom prst="rect">
+            <a:avLst/>
+          </a:prstGeom>
+          <a:noFill/>
+          <a:ln>
+            <a:noFill/>
+          </a:ln>
+        </p:spPr>
+        <p:txBody>
+          <a:bodyPr wrap="square" lIns="0" tIns="0" rIns="0" bIns="0" anchor="ctr">
+            <a:noAutofit/>
+          </a:bodyPr>
+          <a:lstStyle/>
+          <a:p>
+            <a:pPr algn="ctr"/>
+            <a:r>
+              <a:rPr lang="en-US" sz="850" b="0" i="0" dirty="0">
+                <a:solidFill>
+                  <a:srgbClr val="5B6770"/>
+                </a:solidFill>
+                <a:latin typeface="Calibri"/>
+                <a:cs typeface="Calibri"/>
+              </a:rPr>
+              <a:t xml:space="preserve">Mistral</a:t>
+            </a:r>
+          </a:p>
+        </p:txBody>
+      </p:sp>
+      <p:sp>
+        <p:nvSpPr>
+          <p:cNvPr id="1188" name="LLM"/>
+          <p:cNvSpPr txBox="1"/>
+          <p:nvPr/>
+        </p:nvSpPr>
+        <p:spPr>
+          <a:xfrm>
+            <a:off x="8458200" y="3611880"/>
+            <a:ext cx="530352" cy="182880"/>
+          </a:xfrm>
+          <a:prstGeom prst="rect">
+            <a:avLst/>
+          </a:prstGeom>
+          <a:noFill/>
+          <a:ln>
+            <a:noFill/>
+          </a:ln>
+        </p:spPr>
+        <p:txBody>
+          <a:bodyPr wrap="square" lIns="0" tIns="0" rIns="0" bIns="0" anchor="ctr">
+            <a:noAutofit/>
+          </a:bodyPr>
+          <a:lstStyle/>
+          <a:p>
+            <a:pPr algn="ctr"/>
+            <a:r>
+              <a:rPr lang="en-US" sz="850" b="0" i="0" dirty="0">
+                <a:solidFill>
+                  <a:srgbClr val="5B6770"/>
+                </a:solidFill>
+                <a:latin typeface="Calibri"/>
+                <a:cs typeface="Calibri"/>
+              </a:rPr>
+              <a:t xml:space="preserve">DeepSeek</a:t>
+            </a:r>
+          </a:p>
+        </p:txBody>
+      </p:sp>
+      <p:sp>
+        <p:nvSpPr>
+          <p:cNvPr id="1189" name="Database"/>
+          <p:cNvSpPr txBox="1"/>
+          <p:nvPr/>
+        </p:nvSpPr>
+        <p:spPr>
+          <a:xfrm>
+            <a:off x="8988551" y="3383280"/>
+            <a:ext cx="1591055" cy="219456"/>
+          </a:xfrm>
+          <a:prstGeom prst="rect">
+            <a:avLst/>
+          </a:prstGeom>
+          <a:noFill/>
+          <a:ln>
+            <a:noFill/>
+          </a:ln>
+        </p:spPr>
+        <p:txBody>
+          <a:bodyPr wrap="square" lIns="0" tIns="0" rIns="0" bIns="0" anchor="ctr">
+            <a:noAutofit/>
+          </a:bodyPr>
+          <a:lstStyle/>
+          <a:p>
+            <a:pPr algn="ctr"/>
+            <a:r>
+              <a:rPr lang="en-US" sz="1100" b="1" i="0" dirty="0">
+                <a:solidFill>
+                  <a:srgbClr val="1F2328"/>
+                </a:solidFill>
+                <a:latin typeface="Calibri"/>
+                <a:cs typeface="Calibri"/>
+              </a:rPr>
+              <a:t xml:space="preserve">Chinook</a:t>
+            </a:r>
+          </a:p>
+        </p:txBody>
+      </p:sp>
+      <p:sp>
+        <p:nvSpPr>
+          <p:cNvPr id="1190" name="LLM"/>
+          <p:cNvSpPr txBox="1"/>
+          <p:nvPr/>
+        </p:nvSpPr>
+        <p:spPr>
+          <a:xfrm>
+            <a:off x="8988551" y="3611880"/>
+            <a:ext cx="530352" cy="182880"/>
+          </a:xfrm>
+          <a:prstGeom prst="rect">
+            <a:avLst/>
+          </a:prstGeom>
+          <a:noFill/>
+          <a:ln>
+            <a:noFill/>
+          </a:ln>
+        </p:spPr>
+        <p:txBody>
+          <a:bodyPr wrap="square" lIns="0" tIns="0" rIns="0" bIns="0" anchor="ctr">
+            <a:noAutofit/>
+          </a:bodyPr>
+          <a:lstStyle/>
+          <a:p>
+            <a:pPr algn="ctr"/>
+            <a:r>
+              <a:rPr lang="en-US" sz="850" b="0" i="0" dirty="0">
+                <a:solidFill>
+                  <a:srgbClr val="5B6770"/>
+                </a:solidFill>
+                <a:latin typeface="Calibri"/>
+                <a:cs typeface="Calibri"/>
+              </a:rPr>
+              <a:t xml:space="preserve">Claude</a:t>
+            </a:r>
+          </a:p>
+        </p:txBody>
+      </p:sp>
+      <p:sp>
+        <p:nvSpPr>
+          <p:cNvPr id="1191" name="LLM"/>
+          <p:cNvSpPr txBox="1"/>
+          <p:nvPr/>
+        </p:nvSpPr>
+        <p:spPr>
+          <a:xfrm>
+            <a:off x="9518904" y="3611880"/>
+            <a:ext cx="530352" cy="182880"/>
+          </a:xfrm>
+          <a:prstGeom prst="rect">
+            <a:avLst/>
+          </a:prstGeom>
+          <a:noFill/>
+          <a:ln>
+            <a:noFill/>
+          </a:ln>
+        </p:spPr>
+        <p:txBody>
+          <a:bodyPr wrap="square" lIns="0" tIns="0" rIns="0" bIns="0" anchor="ctr">
+            <a:noAutofit/>
+          </a:bodyPr>
+          <a:lstStyle/>
+          <a:p>
+            <a:pPr algn="ctr"/>
+            <a:r>
+              <a:rPr lang="en-US" sz="850" b="0" i="0" dirty="0">
+                <a:solidFill>
+                  <a:srgbClr val="5B6770"/>
+                </a:solidFill>
+                <a:latin typeface="Calibri"/>
+                <a:cs typeface="Calibri"/>
+              </a:rPr>
+              <a:t xml:space="preserve">Mistral</a:t>
+            </a:r>
+          </a:p>
+        </p:txBody>
+      </p:sp>
+      <p:sp>
+        <p:nvSpPr>
+          <p:cNvPr id="1192" name="LLM"/>
+          <p:cNvSpPr txBox="1"/>
+          <p:nvPr/>
+        </p:nvSpPr>
+        <p:spPr>
+          <a:xfrm>
+            <a:off x="10049255" y="3611880"/>
+            <a:ext cx="530352" cy="182880"/>
+          </a:xfrm>
+          <a:prstGeom prst="rect">
+            <a:avLst/>
+          </a:prstGeom>
+          <a:noFill/>
+          <a:ln>
+            <a:noFill/>
+          </a:ln>
+        </p:spPr>
+        <p:txBody>
+          <a:bodyPr wrap="square" lIns="0" tIns="0" rIns="0" bIns="0" anchor="ctr">
+            <a:noAutofit/>
+          </a:bodyPr>
+          <a:lstStyle/>
+          <a:p>
+            <a:pPr algn="ctr"/>
+            <a:r>
+              <a:rPr lang="en-US" sz="850" b="0" i="0" dirty="0">
+                <a:solidFill>
+                  <a:srgbClr val="5B6770"/>
+                </a:solidFill>
+                <a:latin typeface="Calibri"/>
+                <a:cs typeface="Calibri"/>
+              </a:rPr>
+              <a:t xml:space="preserve">DeepSeek</a:t>
+            </a:r>
+          </a:p>
+        </p:txBody>
+      </p:sp>
+      <p:sp>
+        <p:nvSpPr>
+          <p:cNvPr id="1193" name="Avg head"/>
+          <p:cNvSpPr txBox="1"/>
+          <p:nvPr/>
+        </p:nvSpPr>
+        <p:spPr>
+          <a:xfrm>
+            <a:off x="10625328" y="3493008"/>
+            <a:ext cx="685800" cy="237744"/>
+          </a:xfrm>
+          <a:prstGeom prst="rect">
+            <a:avLst/>
+          </a:prstGeom>
+          <a:noFill/>
+          <a:ln>
+            <a:noFill/>
+          </a:ln>
+        </p:spPr>
+        <p:txBody>
+          <a:bodyPr wrap="square" lIns="0" tIns="0" rIns="0" bIns="0" anchor="ctr">
+            <a:noAutofit/>
+          </a:bodyPr>
+          <a:lstStyle/>
+          <a:p>
+            <a:pPr algn="ctr"/>
+            <a:r>
+              <a:rPr lang="en-US" sz="1000" b="1" i="0" dirty="0">
+                <a:solidFill>
+                  <a:srgbClr val="5B6770"/>
+                </a:solidFill>
+                <a:latin typeface="Calibri"/>
+                <a:cs typeface="Calibri"/>
+              </a:rPr>
+              <a:t xml:space="preserve">Avg</a:t>
+            </a:r>
+          </a:p>
+        </p:txBody>
+      </p:sp>
+      <p:sp>
+        <p:nvSpPr>
+          <p:cNvPr id="1194" name="Method"/>
+          <p:cNvSpPr txBox="1"/>
+          <p:nvPr/>
+        </p:nvSpPr>
+        <p:spPr>
+          <a:xfrm>
+            <a:off x="4617720" y="3840480"/>
+            <a:ext cx="1188720" cy="457200"/>
           </a:xfrm>
           <a:prstGeom prst="rect">
             <a:avLst/>
@@ -6024,7 +6585,7 @@
           <a:p>
             <a:pPr algn="l"/>
             <a:r>
-              <a:rPr lang="en-US" sz="1400" b="0" i="0" dirty="0">
+              <a:rPr lang="en-US" sz="1200" b="0" i="0" dirty="0">
                 <a:solidFill>
                   <a:srgbClr val="1F2328"/>
                 </a:solidFill>
@@ -6038,76 +6599,1070 @@
       </p:sp>
       <p:sp>
         <p:nvSpPr>
-          <p:cNvPr id="1181" name="Track"/>
+          <p:cNvPr id="1195" name="Cell"/>
           <p:cNvSpPr/>
           <p:nvPr/>
         </p:nvSpPr>
         <p:spPr>
           <a:xfrm>
-            <a:off x="8759952" y="3639312"/>
-            <a:ext cx="1709928" cy="146304"/>
+            <a:off x="5824727" y="3858768"/>
+            <a:ext cx="1554479" cy="420624"/>
           </a:xfrm>
           <a:prstGeom prst="rect">
             <a:avLst/>
           </a:prstGeom>
           <a:solidFill>
-            <a:srgbClr val="EEF1EF"/>
+            <a:srgbClr val="EDB8AC"/>
           </a:solidFill>
           <a:ln>
             <a:noFill/>
           </a:ln>
         </p:spPr>
         <p:txBody>
-          <a:bodyPr wrap="square" lIns="0" tIns="0" rIns="0" bIns="0" anchor="t">
+          <a:bodyPr wrap="square" lIns="0" tIns="0" rIns="0" bIns="0" anchor="ctr">
+            <a:noAutofit/>
+          </a:bodyPr>
+          <a:lstStyle/>
+          <a:p>
+            <a:pPr algn="ctr"/>
+            <a:r>
+              <a:rPr lang="en-US" sz="1100" b="0" i="0" dirty="0">
+                <a:solidFill>
+                  <a:srgbClr val="1F2328"/>
+                </a:solidFill>
+                <a:latin typeface="Calibri"/>
+                <a:cs typeface="Calibri"/>
+              </a:rPr>
+              <a:t xml:space="preserve">731</a:t>
+            </a:r>
+          </a:p>
+        </p:txBody>
+      </p:sp>
+      <p:sp>
+        <p:nvSpPr>
+          <p:cNvPr id="1196" name="Cell"/>
+          <p:cNvSpPr/>
+          <p:nvPr/>
+        </p:nvSpPr>
+        <p:spPr>
+          <a:xfrm>
+            <a:off x="7415783" y="3858768"/>
+            <a:ext cx="1554479" cy="420624"/>
+          </a:xfrm>
+          <a:prstGeom prst="rect">
+            <a:avLst/>
+          </a:prstGeom>
+          <a:solidFill>
+            <a:srgbClr val="EDB8AC"/>
+          </a:solidFill>
+          <a:ln>
+            <a:noFill/>
+          </a:ln>
+        </p:spPr>
+        <p:txBody>
+          <a:bodyPr wrap="square" lIns="0" tIns="0" rIns="0" bIns="0" anchor="ctr">
+            <a:noAutofit/>
+          </a:bodyPr>
+          <a:lstStyle/>
+          <a:p>
+            <a:pPr algn="ctr"/>
+            <a:r>
+              <a:rPr lang="en-US" sz="1100" b="0" i="0" dirty="0">
+                <a:solidFill>
+                  <a:srgbClr val="1F2328"/>
+                </a:solidFill>
+                <a:latin typeface="Calibri"/>
+                <a:cs typeface="Calibri"/>
+              </a:rPr>
+              <a:t xml:space="preserve">665</a:t>
+            </a:r>
+          </a:p>
+        </p:txBody>
+      </p:sp>
+      <p:sp>
+        <p:nvSpPr>
+          <p:cNvPr id="1197" name="Cell"/>
+          <p:cNvSpPr/>
+          <p:nvPr/>
+        </p:nvSpPr>
+        <p:spPr>
+          <a:xfrm>
+            <a:off x="9006839" y="3858768"/>
+            <a:ext cx="1554479" cy="420624"/>
+          </a:xfrm>
+          <a:prstGeom prst="rect">
+            <a:avLst/>
+          </a:prstGeom>
+          <a:solidFill>
+            <a:srgbClr val="F6DAD3"/>
+          </a:solidFill>
+          <a:ln>
+            <a:noFill/>
+          </a:ln>
+        </p:spPr>
+        <p:txBody>
+          <a:bodyPr wrap="square" lIns="0" tIns="0" rIns="0" bIns="0" anchor="ctr">
+            <a:noAutofit/>
+          </a:bodyPr>
+          <a:lstStyle/>
+          <a:p>
+            <a:pPr algn="ctr"/>
+            <a:r>
+              <a:rPr lang="en-US" sz="1100" b="0" i="0" dirty="0">
+                <a:solidFill>
+                  <a:srgbClr val="1F2328"/>
+                </a:solidFill>
+                <a:latin typeface="Calibri"/>
+                <a:cs typeface="Calibri"/>
+              </a:rPr>
+              <a:t xml:space="preserve">102</a:t>
+            </a:r>
+          </a:p>
+        </p:txBody>
+      </p:sp>
+      <p:sp>
+        <p:nvSpPr>
+          <p:cNvPr id="1198" name="Avg"/>
+          <p:cNvSpPr txBox="1"/>
+          <p:nvPr/>
+        </p:nvSpPr>
+        <p:spPr>
+          <a:xfrm>
+            <a:off x="10625328" y="3840480"/>
+            <a:ext cx="685800" cy="457200"/>
+          </a:xfrm>
+          <a:prstGeom prst="rect">
+            <a:avLst/>
+          </a:prstGeom>
+          <a:noFill/>
+          <a:ln>
+            <a:noFill/>
+          </a:ln>
+        </p:spPr>
+        <p:txBody>
+          <a:bodyPr wrap="square" lIns="0" tIns="0" rIns="0" bIns="0" anchor="ctr">
+            <a:noAutofit/>
+          </a:bodyPr>
+          <a:lstStyle/>
+          <a:p>
+            <a:pPr algn="ctr"/>
+            <a:r>
+              <a:rPr lang="en-US" sz="1250" b="1" i="0" dirty="0">
+                <a:solidFill>
+                  <a:srgbClr val="1F2328"/>
+                </a:solidFill>
+                <a:latin typeface="Calibri"/>
+                <a:cs typeface="Calibri"/>
+              </a:rPr>
+              <a:t xml:space="preserve">499</a:t>
+            </a:r>
+          </a:p>
+        </p:txBody>
+      </p:sp>
+      <p:sp>
+        <p:nvSpPr>
+          <p:cNvPr id="1199" name="Method"/>
+          <p:cNvSpPr txBox="1"/>
+          <p:nvPr/>
+        </p:nvSpPr>
+        <p:spPr>
+          <a:xfrm>
+            <a:off x="4617720" y="4297680"/>
+            <a:ext cx="1188720" cy="457200"/>
+          </a:xfrm>
+          <a:prstGeom prst="rect">
+            <a:avLst/>
+          </a:prstGeom>
+          <a:noFill/>
+          <a:ln>
+            <a:noFill/>
+          </a:ln>
+        </p:spPr>
+        <p:txBody>
+          <a:bodyPr wrap="square" lIns="0" tIns="0" rIns="0" bIns="0" anchor="ctr">
             <a:noAutofit/>
           </a:bodyPr>
           <a:lstStyle/>
           <a:p>
             <a:pPr algn="l"/>
-          </a:p>
-        </p:txBody>
-      </p:sp>
-      <p:sp>
-        <p:nvSpPr>
-          <p:cNvPr id="1182" name="Bar"/>
+            <a:r>
+              <a:rPr lang="en-US" sz="1200" b="0" i="0" dirty="0">
+                <a:solidFill>
+                  <a:srgbClr val="1F2328"/>
+                </a:solidFill>
+                <a:latin typeface="Calibri"/>
+                <a:cs typeface="Calibri"/>
+              </a:rPr>
+              <a:t xml:space="preserve">LLM baseline</a:t>
+            </a:r>
+          </a:p>
+        </p:txBody>
+      </p:sp>
+      <p:sp>
+        <p:nvSpPr>
+          <p:cNvPr id="1200" name="Cell"/>
           <p:cNvSpPr/>
           <p:nvPr/>
         </p:nvSpPr>
         <p:spPr>
           <a:xfrm>
-            <a:off x="8759952" y="3639312"/>
-            <a:ext cx="1709928" cy="146304"/>
+            <a:off x="5824727" y="4315968"/>
+            <a:ext cx="493775" cy="420624"/>
           </a:xfrm>
           <a:prstGeom prst="rect">
             <a:avLst/>
           </a:prstGeom>
           <a:solidFill>
-            <a:srgbClr val="9AA3A9"/>
+            <a:srgbClr val="EDB8AC"/>
           </a:solidFill>
           <a:ln>
             <a:noFill/>
           </a:ln>
         </p:spPr>
         <p:txBody>
-          <a:bodyPr wrap="square" lIns="0" tIns="0" rIns="0" bIns="0" anchor="t">
+          <a:bodyPr wrap="square" lIns="0" tIns="0" rIns="0" bIns="0" anchor="ctr">
+            <a:noAutofit/>
+          </a:bodyPr>
+          <a:lstStyle/>
+          <a:p>
+            <a:pPr algn="ctr"/>
+            <a:r>
+              <a:rPr lang="en-US" sz="1100" b="0" i="0" dirty="0">
+                <a:solidFill>
+                  <a:srgbClr val="1F2328"/>
+                </a:solidFill>
+                <a:latin typeface="Calibri"/>
+                <a:cs typeface="Calibri"/>
+              </a:rPr>
+              <a:t xml:space="preserve">422</a:t>
+            </a:r>
+          </a:p>
+        </p:txBody>
+      </p:sp>
+      <p:sp>
+        <p:nvSpPr>
+          <p:cNvPr id="1201" name="Cell"/>
+          <p:cNvSpPr/>
+          <p:nvPr/>
+        </p:nvSpPr>
+        <p:spPr>
+          <a:xfrm>
+            <a:off x="6355079" y="4315968"/>
+            <a:ext cx="493775" cy="420624"/>
+          </a:xfrm>
+          <a:prstGeom prst="rect">
+            <a:avLst/>
+          </a:prstGeom>
+          <a:solidFill>
+            <a:srgbClr val="EDB8AC"/>
+          </a:solidFill>
+          <a:ln>
+            <a:noFill/>
+          </a:ln>
+        </p:spPr>
+        <p:txBody>
+          <a:bodyPr wrap="square" lIns="0" tIns="0" rIns="0" bIns="0" anchor="ctr">
+            <a:noAutofit/>
+          </a:bodyPr>
+          <a:lstStyle/>
+          <a:p>
+            <a:pPr algn="ctr"/>
+            <a:r>
+              <a:rPr lang="en-US" sz="1100" b="0" i="0" dirty="0">
+                <a:solidFill>
+                  <a:srgbClr val="1F2328"/>
+                </a:solidFill>
+                <a:latin typeface="Calibri"/>
+                <a:cs typeface="Calibri"/>
+              </a:rPr>
+              <a:t xml:space="preserve">397</a:t>
+            </a:r>
+          </a:p>
+        </p:txBody>
+      </p:sp>
+      <p:sp>
+        <p:nvSpPr>
+          <p:cNvPr id="1202" name="Cell"/>
+          <p:cNvSpPr/>
+          <p:nvPr/>
+        </p:nvSpPr>
+        <p:spPr>
+          <a:xfrm>
+            <a:off x="6885431" y="4315968"/>
+            <a:ext cx="493775" cy="420624"/>
+          </a:xfrm>
+          <a:prstGeom prst="rect">
+            <a:avLst/>
+          </a:prstGeom>
+          <a:solidFill>
+            <a:srgbClr val="EDB8AC"/>
+          </a:solidFill>
+          <a:ln>
+            <a:noFill/>
+          </a:ln>
+        </p:spPr>
+        <p:txBody>
+          <a:bodyPr wrap="square" lIns="0" tIns="0" rIns="0" bIns="0" anchor="ctr">
+            <a:noAutofit/>
+          </a:bodyPr>
+          <a:lstStyle/>
+          <a:p>
+            <a:pPr algn="ctr"/>
+            <a:r>
+              <a:rPr lang="en-US" sz="1100" b="0" i="0" dirty="0">
+                <a:solidFill>
+                  <a:srgbClr val="1F2328"/>
+                </a:solidFill>
+                <a:latin typeface="Calibri"/>
+                <a:cs typeface="Calibri"/>
+              </a:rPr>
+              <a:t xml:space="preserve">403</a:t>
+            </a:r>
+          </a:p>
+        </p:txBody>
+      </p:sp>
+      <p:sp>
+        <p:nvSpPr>
+          <p:cNvPr id="1203" name="Cell"/>
+          <p:cNvSpPr/>
+          <p:nvPr/>
+        </p:nvSpPr>
+        <p:spPr>
+          <a:xfrm>
+            <a:off x="7415783" y="4315968"/>
+            <a:ext cx="493775" cy="420624"/>
+          </a:xfrm>
+          <a:prstGeom prst="rect">
+            <a:avLst/>
+          </a:prstGeom>
+          <a:solidFill>
+            <a:srgbClr val="EDB8AC"/>
+          </a:solidFill>
+          <a:ln>
+            <a:noFill/>
+          </a:ln>
+        </p:spPr>
+        <p:txBody>
+          <a:bodyPr wrap="square" lIns="0" tIns="0" rIns="0" bIns="0" anchor="ctr">
+            <a:noAutofit/>
+          </a:bodyPr>
+          <a:lstStyle/>
+          <a:p>
+            <a:pPr algn="ctr"/>
+            <a:r>
+              <a:rPr lang="en-US" sz="1100" b="0" i="0" dirty="0">
+                <a:solidFill>
+                  <a:srgbClr val="1F2328"/>
+                </a:solidFill>
+                <a:latin typeface="Calibri"/>
+                <a:cs typeface="Calibri"/>
+              </a:rPr>
+              <a:t xml:space="preserve">434</a:t>
+            </a:r>
+          </a:p>
+        </p:txBody>
+      </p:sp>
+      <p:sp>
+        <p:nvSpPr>
+          <p:cNvPr id="1204" name="Cell"/>
+          <p:cNvSpPr/>
+          <p:nvPr/>
+        </p:nvSpPr>
+        <p:spPr>
+          <a:xfrm>
+            <a:off x="7946136" y="4315968"/>
+            <a:ext cx="493775" cy="420624"/>
+          </a:xfrm>
+          <a:prstGeom prst="rect">
+            <a:avLst/>
+          </a:prstGeom>
+          <a:solidFill>
+            <a:srgbClr val="EDB8AC"/>
+          </a:solidFill>
+          <a:ln>
+            <a:noFill/>
+          </a:ln>
+        </p:spPr>
+        <p:txBody>
+          <a:bodyPr wrap="square" lIns="0" tIns="0" rIns="0" bIns="0" anchor="ctr">
+            <a:noAutofit/>
+          </a:bodyPr>
+          <a:lstStyle/>
+          <a:p>
+            <a:pPr algn="ctr"/>
+            <a:r>
+              <a:rPr lang="en-US" sz="1100" b="0" i="0" dirty="0">
+                <a:solidFill>
+                  <a:srgbClr val="1F2328"/>
+                </a:solidFill>
+                <a:latin typeface="Calibri"/>
+                <a:cs typeface="Calibri"/>
+              </a:rPr>
+              <a:t xml:space="preserve">440</a:t>
+            </a:r>
+          </a:p>
+        </p:txBody>
+      </p:sp>
+      <p:sp>
+        <p:nvSpPr>
+          <p:cNvPr id="1205" name="Cell"/>
+          <p:cNvSpPr/>
+          <p:nvPr/>
+        </p:nvSpPr>
+        <p:spPr>
+          <a:xfrm>
+            <a:off x="8476488" y="4315968"/>
+            <a:ext cx="493775" cy="420624"/>
+          </a:xfrm>
+          <a:prstGeom prst="rect">
+            <a:avLst/>
+          </a:prstGeom>
+          <a:solidFill>
+            <a:srgbClr val="EDB8AC"/>
+          </a:solidFill>
+          <a:ln>
+            <a:noFill/>
+          </a:ln>
+        </p:spPr>
+        <p:txBody>
+          <a:bodyPr wrap="square" lIns="0" tIns="0" rIns="0" bIns="0" anchor="ctr">
+            <a:noAutofit/>
+          </a:bodyPr>
+          <a:lstStyle/>
+          <a:p>
+            <a:pPr algn="ctr"/>
+            <a:r>
+              <a:rPr lang="en-US" sz="1100" b="0" i="0" dirty="0">
+                <a:solidFill>
+                  <a:srgbClr val="1F2328"/>
+                </a:solidFill>
+                <a:latin typeface="Calibri"/>
+                <a:cs typeface="Calibri"/>
+              </a:rPr>
+              <a:t xml:space="preserve">421</a:t>
+            </a:r>
+          </a:p>
+        </p:txBody>
+      </p:sp>
+      <p:sp>
+        <p:nvSpPr>
+          <p:cNvPr id="1206" name="Cell"/>
+          <p:cNvSpPr/>
+          <p:nvPr/>
+        </p:nvSpPr>
+        <p:spPr>
+          <a:xfrm>
+            <a:off x="9006839" y="4315968"/>
+            <a:ext cx="493775" cy="420624"/>
+          </a:xfrm>
+          <a:prstGeom prst="rect">
+            <a:avLst/>
+          </a:prstGeom>
+          <a:solidFill>
+            <a:srgbClr val="F1F3F2"/>
+          </a:solidFill>
+          <a:ln>
+            <a:noFill/>
+          </a:ln>
+        </p:spPr>
+        <p:txBody>
+          <a:bodyPr wrap="square" lIns="0" tIns="0" rIns="0" bIns="0" anchor="ctr">
+            <a:noAutofit/>
+          </a:bodyPr>
+          <a:lstStyle/>
+          <a:p>
+            <a:pPr algn="ctr"/>
+            <a:r>
+              <a:rPr lang="en-US" sz="1100" b="0" i="0" dirty="0">
+                <a:solidFill>
+                  <a:srgbClr val="1F2328"/>
+                </a:solidFill>
+                <a:latin typeface="Calibri"/>
+                <a:cs typeface="Calibri"/>
+              </a:rPr>
+              <a:t xml:space="preserve">95</a:t>
+            </a:r>
+          </a:p>
+        </p:txBody>
+      </p:sp>
+      <p:sp>
+        <p:nvSpPr>
+          <p:cNvPr id="1207" name="Cell"/>
+          <p:cNvSpPr/>
+          <p:nvPr/>
+        </p:nvSpPr>
+        <p:spPr>
+          <a:xfrm>
+            <a:off x="9537192" y="4315968"/>
+            <a:ext cx="493775" cy="420624"/>
+          </a:xfrm>
+          <a:prstGeom prst="rect">
+            <a:avLst/>
+          </a:prstGeom>
+          <a:solidFill>
+            <a:srgbClr val="F1F3F2"/>
+          </a:solidFill>
+          <a:ln>
+            <a:noFill/>
+          </a:ln>
+        </p:spPr>
+        <p:txBody>
+          <a:bodyPr wrap="square" lIns="0" tIns="0" rIns="0" bIns="0" anchor="ctr">
+            <a:noAutofit/>
+          </a:bodyPr>
+          <a:lstStyle/>
+          <a:p>
+            <a:pPr algn="ctr"/>
+            <a:r>
+              <a:rPr lang="en-US" sz="1100" b="0" i="0" dirty="0">
+                <a:solidFill>
+                  <a:srgbClr val="1F2328"/>
+                </a:solidFill>
+                <a:latin typeface="Calibri"/>
+                <a:cs typeface="Calibri"/>
+              </a:rPr>
+              <a:t xml:space="preserve">74</a:t>
+            </a:r>
+          </a:p>
+        </p:txBody>
+      </p:sp>
+      <p:sp>
+        <p:nvSpPr>
+          <p:cNvPr id="1208" name="Cell"/>
+          <p:cNvSpPr/>
+          <p:nvPr/>
+        </p:nvSpPr>
+        <p:spPr>
+          <a:xfrm>
+            <a:off x="10067543" y="4315968"/>
+            <a:ext cx="493775" cy="420624"/>
+          </a:xfrm>
+          <a:prstGeom prst="rect">
+            <a:avLst/>
+          </a:prstGeom>
+          <a:solidFill>
+            <a:srgbClr val="F1F3F2"/>
+          </a:solidFill>
+          <a:ln>
+            <a:noFill/>
+          </a:ln>
+        </p:spPr>
+        <p:txBody>
+          <a:bodyPr wrap="square" lIns="0" tIns="0" rIns="0" bIns="0" anchor="ctr">
+            <a:noAutofit/>
+          </a:bodyPr>
+          <a:lstStyle/>
+          <a:p>
+            <a:pPr algn="ctr"/>
+            <a:r>
+              <a:rPr lang="en-US" sz="1100" b="0" i="0" dirty="0">
+                <a:solidFill>
+                  <a:srgbClr val="1F2328"/>
+                </a:solidFill>
+                <a:latin typeface="Calibri"/>
+                <a:cs typeface="Calibri"/>
+              </a:rPr>
+              <a:t xml:space="preserve">81</a:t>
+            </a:r>
+          </a:p>
+        </p:txBody>
+      </p:sp>
+      <p:sp>
+        <p:nvSpPr>
+          <p:cNvPr id="1209" name="Avg"/>
+          <p:cNvSpPr txBox="1"/>
+          <p:nvPr/>
+        </p:nvSpPr>
+        <p:spPr>
+          <a:xfrm>
+            <a:off x="10625328" y="4297680"/>
+            <a:ext cx="685800" cy="457200"/>
+          </a:xfrm>
+          <a:prstGeom prst="rect">
+            <a:avLst/>
+          </a:prstGeom>
+          <a:noFill/>
+          <a:ln>
+            <a:noFill/>
+          </a:ln>
+        </p:spPr>
+        <p:txBody>
+          <a:bodyPr wrap="square" lIns="0" tIns="0" rIns="0" bIns="0" anchor="ctr">
+            <a:noAutofit/>
+          </a:bodyPr>
+          <a:lstStyle/>
+          <a:p>
+            <a:pPr algn="ctr"/>
+            <a:r>
+              <a:rPr lang="en-US" sz="1250" b="1" i="0" dirty="0">
+                <a:solidFill>
+                  <a:srgbClr val="1F2328"/>
+                </a:solidFill>
+                <a:latin typeface="Calibri"/>
+                <a:cs typeface="Calibri"/>
+              </a:rPr>
+              <a:t xml:space="preserve">307</a:t>
+            </a:r>
+          </a:p>
+        </p:txBody>
+      </p:sp>
+      <p:sp>
+        <p:nvSpPr>
+          <p:cNvPr id="1210" name="Method"/>
+          <p:cNvSpPr txBox="1"/>
+          <p:nvPr/>
+        </p:nvSpPr>
+        <p:spPr>
+          <a:xfrm>
+            <a:off x="4617720" y="4754880"/>
+            <a:ext cx="1188720" cy="457200"/>
+          </a:xfrm>
+          <a:prstGeom prst="rect">
+            <a:avLst/>
+          </a:prstGeom>
+          <a:noFill/>
+          <a:ln>
+            <a:noFill/>
+          </a:ln>
+        </p:spPr>
+        <p:txBody>
+          <a:bodyPr wrap="square" lIns="0" tIns="0" rIns="0" bIns="0" anchor="ctr">
             <a:noAutofit/>
           </a:bodyPr>
           <a:lstStyle/>
           <a:p>
             <a:pPr algn="l"/>
-          </a:p>
-        </p:txBody>
-      </p:sp>
-      <p:sp>
-        <p:nvSpPr>
-          <p:cNvPr id="1183" name="Value"/>
+            <a:r>
+              <a:rPr lang="en-US" sz="1200" b="0" i="0" dirty="0">
+                <a:solidFill>
+                  <a:srgbClr val="1F2328"/>
+                </a:solidFill>
+                <a:latin typeface="Calibri"/>
+                <a:cs typeface="Calibri"/>
+              </a:rPr>
+              <a:t xml:space="preserve">Non-Iterative</a:t>
+            </a:r>
+          </a:p>
+        </p:txBody>
+      </p:sp>
+      <p:sp>
+        <p:nvSpPr>
+          <p:cNvPr id="1211" name="Cell"/>
+          <p:cNvSpPr/>
+          <p:nvPr/>
+        </p:nvSpPr>
+        <p:spPr>
+          <a:xfrm>
+            <a:off x="5824727" y="4773168"/>
+            <a:ext cx="493775" cy="420624"/>
+          </a:xfrm>
+          <a:prstGeom prst="rect">
+            <a:avLst/>
+          </a:prstGeom>
+          <a:solidFill>
+            <a:srgbClr val="DDF0E5"/>
+          </a:solidFill>
+          <a:ln>
+            <a:noFill/>
+          </a:ln>
+        </p:spPr>
+        <p:txBody>
+          <a:bodyPr wrap="square" lIns="0" tIns="0" rIns="0" bIns="0" anchor="ctr">
+            <a:noAutofit/>
+          </a:bodyPr>
+          <a:lstStyle/>
+          <a:p>
+            <a:pPr algn="ctr"/>
+            <a:r>
+              <a:rPr lang="en-US" sz="1100" b="0" i="0" dirty="0">
+                <a:solidFill>
+                  <a:srgbClr val="1F2328"/>
+                </a:solidFill>
+                <a:latin typeface="Calibri"/>
+                <a:cs typeface="Calibri"/>
+              </a:rPr>
+              <a:t xml:space="preserve">29</a:t>
+            </a:r>
+          </a:p>
+        </p:txBody>
+      </p:sp>
+      <p:sp>
+        <p:nvSpPr>
+          <p:cNvPr id="1212" name="Cell"/>
+          <p:cNvSpPr/>
+          <p:nvPr/>
+        </p:nvSpPr>
+        <p:spPr>
+          <a:xfrm>
+            <a:off x="6355079" y="4773168"/>
+            <a:ext cx="493775" cy="420624"/>
+          </a:xfrm>
+          <a:prstGeom prst="rect">
+            <a:avLst/>
+          </a:prstGeom>
+          <a:solidFill>
+            <a:srgbClr val="F1F3F2"/>
+          </a:solidFill>
+          <a:ln>
+            <a:noFill/>
+          </a:ln>
+        </p:spPr>
+        <p:txBody>
+          <a:bodyPr wrap="square" lIns="0" tIns="0" rIns="0" bIns="0" anchor="ctr">
+            <a:noAutofit/>
+          </a:bodyPr>
+          <a:lstStyle/>
+          <a:p>
+            <a:pPr algn="ctr"/>
+            <a:r>
+              <a:rPr lang="en-US" sz="1100" b="0" i="0" dirty="0">
+                <a:solidFill>
+                  <a:srgbClr val="1F2328"/>
+                </a:solidFill>
+                <a:latin typeface="Calibri"/>
+                <a:cs typeface="Calibri"/>
+              </a:rPr>
+              <a:t xml:space="preserve">61</a:t>
+            </a:r>
+          </a:p>
+        </p:txBody>
+      </p:sp>
+      <p:sp>
+        <p:nvSpPr>
+          <p:cNvPr id="1213" name="Cell"/>
+          <p:cNvSpPr/>
+          <p:nvPr/>
+        </p:nvSpPr>
+        <p:spPr>
+          <a:xfrm>
+            <a:off x="6885431" y="4773168"/>
+            <a:ext cx="493775" cy="420624"/>
+          </a:xfrm>
+          <a:prstGeom prst="rect">
+            <a:avLst/>
+          </a:prstGeom>
+          <a:solidFill>
+            <a:srgbClr val="DDF0E5"/>
+          </a:solidFill>
+          <a:ln>
+            <a:noFill/>
+          </a:ln>
+        </p:spPr>
+        <p:txBody>
+          <a:bodyPr wrap="square" lIns="0" tIns="0" rIns="0" bIns="0" anchor="ctr">
+            <a:noAutofit/>
+          </a:bodyPr>
+          <a:lstStyle/>
+          <a:p>
+            <a:pPr algn="ctr"/>
+            <a:r>
+              <a:rPr lang="en-US" sz="1100" b="0" i="0" dirty="0">
+                <a:solidFill>
+                  <a:srgbClr val="1F2328"/>
+                </a:solidFill>
+                <a:latin typeface="Calibri"/>
+                <a:cs typeface="Calibri"/>
+              </a:rPr>
+              <a:t xml:space="preserve">18</a:t>
+            </a:r>
+          </a:p>
+        </p:txBody>
+      </p:sp>
+      <p:sp>
+        <p:nvSpPr>
+          <p:cNvPr id="1214" name="Cell"/>
+          <p:cNvSpPr/>
+          <p:nvPr/>
+        </p:nvSpPr>
+        <p:spPr>
+          <a:xfrm>
+            <a:off x="7415783" y="4773168"/>
+            <a:ext cx="493775" cy="420624"/>
+          </a:xfrm>
+          <a:prstGeom prst="rect">
+            <a:avLst/>
+          </a:prstGeom>
+          <a:solidFill>
+            <a:srgbClr val="F1F3F2"/>
+          </a:solidFill>
+          <a:ln>
+            <a:noFill/>
+          </a:ln>
+        </p:spPr>
+        <p:txBody>
+          <a:bodyPr wrap="square" lIns="0" tIns="0" rIns="0" bIns="0" anchor="ctr">
+            <a:noAutofit/>
+          </a:bodyPr>
+          <a:lstStyle/>
+          <a:p>
+            <a:pPr algn="ctr"/>
+            <a:r>
+              <a:rPr lang="en-US" sz="1100" b="0" i="0" dirty="0">
+                <a:solidFill>
+                  <a:srgbClr val="1F2328"/>
+                </a:solidFill>
+                <a:latin typeface="Calibri"/>
+                <a:cs typeface="Calibri"/>
+              </a:rPr>
+              <a:t xml:space="preserve">39</a:t>
+            </a:r>
+          </a:p>
+        </p:txBody>
+      </p:sp>
+      <p:sp>
+        <p:nvSpPr>
+          <p:cNvPr id="1215" name="Cell"/>
+          <p:cNvSpPr/>
+          <p:nvPr/>
+        </p:nvSpPr>
+        <p:spPr>
+          <a:xfrm>
+            <a:off x="7946136" y="4773168"/>
+            <a:ext cx="493775" cy="420624"/>
+          </a:xfrm>
+          <a:prstGeom prst="rect">
+            <a:avLst/>
+          </a:prstGeom>
+          <a:solidFill>
+            <a:srgbClr val="F6DAD3"/>
+          </a:solidFill>
+          <a:ln>
+            <a:noFill/>
+          </a:ln>
+        </p:spPr>
+        <p:txBody>
+          <a:bodyPr wrap="square" lIns="0" tIns="0" rIns="0" bIns="0" anchor="ctr">
+            <a:noAutofit/>
+          </a:bodyPr>
+          <a:lstStyle/>
+          <a:p>
+            <a:pPr algn="ctr"/>
+            <a:r>
+              <a:rPr lang="en-US" sz="1100" b="0" i="0" dirty="0">
+                <a:solidFill>
+                  <a:srgbClr val="1F2328"/>
+                </a:solidFill>
+                <a:latin typeface="Calibri"/>
+                <a:cs typeface="Calibri"/>
+              </a:rPr>
+              <a:t xml:space="preserve">220</a:t>
+            </a:r>
+          </a:p>
+        </p:txBody>
+      </p:sp>
+      <p:sp>
+        <p:nvSpPr>
+          <p:cNvPr id="1216" name="Cell"/>
+          <p:cNvSpPr/>
+          <p:nvPr/>
+        </p:nvSpPr>
+        <p:spPr>
+          <a:xfrm>
+            <a:off x="8476488" y="4773168"/>
+            <a:ext cx="493775" cy="420624"/>
+          </a:xfrm>
+          <a:prstGeom prst="rect">
+            <a:avLst/>
+          </a:prstGeom>
+          <a:solidFill>
+            <a:srgbClr val="DDF0E5"/>
+          </a:solidFill>
+          <a:ln>
+            <a:noFill/>
+          </a:ln>
+        </p:spPr>
+        <p:txBody>
+          <a:bodyPr wrap="square" lIns="0" tIns="0" rIns="0" bIns="0" anchor="ctr">
+            <a:noAutofit/>
+          </a:bodyPr>
+          <a:lstStyle/>
+          <a:p>
+            <a:pPr algn="ctr"/>
+            <a:r>
+              <a:rPr lang="en-US" sz="1100" b="0" i="0" dirty="0">
+                <a:solidFill>
+                  <a:srgbClr val="1F2328"/>
+                </a:solidFill>
+                <a:latin typeface="Calibri"/>
+                <a:cs typeface="Calibri"/>
+              </a:rPr>
+              <a:t xml:space="preserve">27</a:t>
+            </a:r>
+          </a:p>
+        </p:txBody>
+      </p:sp>
+      <p:sp>
+        <p:nvSpPr>
+          <p:cNvPr id="1217" name="Cell"/>
+          <p:cNvSpPr/>
+          <p:nvPr/>
+        </p:nvSpPr>
+        <p:spPr>
+          <a:xfrm>
+            <a:off x="9006839" y="4773168"/>
+            <a:ext cx="493775" cy="420624"/>
+          </a:xfrm>
+          <a:prstGeom prst="rect">
+            <a:avLst/>
+          </a:prstGeom>
+          <a:solidFill>
+            <a:srgbClr val="DDF0E5"/>
+          </a:solidFill>
+          <a:ln>
+            <a:noFill/>
+          </a:ln>
+        </p:spPr>
+        <p:txBody>
+          <a:bodyPr wrap="square" lIns="0" tIns="0" rIns="0" bIns="0" anchor="ctr">
+            <a:noAutofit/>
+          </a:bodyPr>
+          <a:lstStyle/>
+          <a:p>
+            <a:pPr algn="ctr"/>
+            <a:r>
+              <a:rPr lang="en-US" sz="1100" b="0" i="0" dirty="0">
+                <a:solidFill>
+                  <a:srgbClr val="1F2328"/>
+                </a:solidFill>
+                <a:latin typeface="Calibri"/>
+                <a:cs typeface="Calibri"/>
+              </a:rPr>
+              <a:t xml:space="preserve">24</a:t>
+            </a:r>
+          </a:p>
+        </p:txBody>
+      </p:sp>
+      <p:sp>
+        <p:nvSpPr>
+          <p:cNvPr id="1218" name="Cell"/>
+          <p:cNvSpPr/>
+          <p:nvPr/>
+        </p:nvSpPr>
+        <p:spPr>
+          <a:xfrm>
+            <a:off x="9537192" y="4773168"/>
+            <a:ext cx="493775" cy="420624"/>
+          </a:xfrm>
+          <a:prstGeom prst="rect">
+            <a:avLst/>
+          </a:prstGeom>
+          <a:solidFill>
+            <a:srgbClr val="F1F3F2"/>
+          </a:solidFill>
+          <a:ln>
+            <a:noFill/>
+          </a:ln>
+        </p:spPr>
+        <p:txBody>
+          <a:bodyPr wrap="square" lIns="0" tIns="0" rIns="0" bIns="0" anchor="ctr">
+            <a:noAutofit/>
+          </a:bodyPr>
+          <a:lstStyle/>
+          <a:p>
+            <a:pPr algn="ctr"/>
+            <a:r>
+              <a:rPr lang="en-US" sz="1100" b="0" i="0" dirty="0">
+                <a:solidFill>
+                  <a:srgbClr val="1F2328"/>
+                </a:solidFill>
+                <a:latin typeface="Calibri"/>
+                <a:cs typeface="Calibri"/>
+              </a:rPr>
+              <a:t xml:space="preserve">35</a:t>
+            </a:r>
+          </a:p>
+        </p:txBody>
+      </p:sp>
+      <p:sp>
+        <p:nvSpPr>
+          <p:cNvPr id="1219" name="Cell"/>
+          <p:cNvSpPr/>
+          <p:nvPr/>
+        </p:nvSpPr>
+        <p:spPr>
+          <a:xfrm>
+            <a:off x="10067543" y="4773168"/>
+            <a:ext cx="493775" cy="420624"/>
+          </a:xfrm>
+          <a:prstGeom prst="rect">
+            <a:avLst/>
+          </a:prstGeom>
+          <a:solidFill>
+            <a:srgbClr val="DDF0E5"/>
+          </a:solidFill>
+          <a:ln>
+            <a:noFill/>
+          </a:ln>
+        </p:spPr>
+        <p:txBody>
+          <a:bodyPr wrap="square" lIns="0" tIns="0" rIns="0" bIns="0" anchor="ctr">
+            <a:noAutofit/>
+          </a:bodyPr>
+          <a:lstStyle/>
+          <a:p>
+            <a:pPr algn="ctr"/>
+            <a:r>
+              <a:rPr lang="en-US" sz="1100" b="0" i="0" dirty="0">
+                <a:solidFill>
+                  <a:srgbClr val="1F2328"/>
+                </a:solidFill>
+                <a:latin typeface="Calibri"/>
+                <a:cs typeface="Calibri"/>
+              </a:rPr>
+              <a:t xml:space="preserve">14</a:t>
+            </a:r>
+          </a:p>
+        </p:txBody>
+      </p:sp>
+      <p:sp>
+        <p:nvSpPr>
+          <p:cNvPr id="1220" name="Avg"/>
           <p:cNvSpPr txBox="1"/>
           <p:nvPr/>
         </p:nvSpPr>
         <p:spPr>
           <a:xfrm>
-            <a:off x="10543032" y="3566160"/>
-            <a:ext cx="731520" cy="292608"/>
+            <a:off x="10625328" y="4754880"/>
+            <a:ext cx="685800" cy="457200"/>
+          </a:xfrm>
+          <a:prstGeom prst="rect">
+            <a:avLst/>
+          </a:prstGeom>
+          <a:noFill/>
+          <a:ln>
+            <a:noFill/>
+          </a:ln>
+        </p:spPr>
+        <p:txBody>
+          <a:bodyPr wrap="square" lIns="0" tIns="0" rIns="0" bIns="0" anchor="ctr">
+            <a:noAutofit/>
+          </a:bodyPr>
+          <a:lstStyle/>
+          <a:p>
+            <a:pPr algn="ctr"/>
+            <a:r>
+              <a:rPr lang="en-US" sz="1250" b="1" i="0" dirty="0">
+                <a:solidFill>
+                  <a:srgbClr val="1F2328"/>
+                </a:solidFill>
+                <a:latin typeface="Calibri"/>
+                <a:cs typeface="Calibri"/>
+              </a:rPr>
+              <a:t xml:space="preserve">52</a:t>
+            </a:r>
+          </a:p>
+        </p:txBody>
+      </p:sp>
+      <p:sp>
+        <p:nvSpPr>
+          <p:cNvPr id="1221" name="Method"/>
+          <p:cNvSpPr txBox="1"/>
+          <p:nvPr/>
+        </p:nvSpPr>
+        <p:spPr>
+          <a:xfrm>
+            <a:off x="4617720" y="5212080"/>
+            <a:ext cx="1188720" cy="457200"/>
           </a:xfrm>
           <a:prstGeom prst="rect">
             <a:avLst/>
@@ -6125,433 +7680,421 @@
           <a:p>
             <a:pPr algn="l"/>
             <a:r>
-              <a:rPr lang="en-US" sz="1500" b="1" i="0" dirty="0">
-                <a:solidFill>
-                  <a:srgbClr val="3A434C"/>
-                </a:solidFill>
-                <a:latin typeface="Calibri"/>
-                <a:cs typeface="Calibri"/>
-              </a:rPr>
-              <a:t xml:space="preserve">499</a:t>
-            </a:r>
-          </a:p>
-        </p:txBody>
-      </p:sp>
-      <p:sp>
-        <p:nvSpPr>
-          <p:cNvPr id="1184" name="Method"/>
+              <a:rPr lang="en-US" sz="1200" b="1" i="0" dirty="0">
+                <a:solidFill>
+                  <a:srgbClr val="0B6E4F"/>
+                </a:solidFill>
+                <a:latin typeface="Calibri"/>
+                <a:cs typeface="Calibri"/>
+              </a:rPr>
+              <a:t xml:space="preserve">RIGOR</a:t>
+            </a:r>
+          </a:p>
+        </p:txBody>
+      </p:sp>
+      <p:sp>
+        <p:nvSpPr>
+          <p:cNvPr id="1222" name="Cell"/>
+          <p:cNvSpPr/>
+          <p:nvPr/>
+        </p:nvSpPr>
+        <p:spPr>
+          <a:xfrm>
+            <a:off x="5824727" y="5230368"/>
+            <a:ext cx="493775" cy="420624"/>
+          </a:xfrm>
+          <a:prstGeom prst="rect">
+            <a:avLst/>
+          </a:prstGeom>
+          <a:solidFill>
+            <a:srgbClr val="DDF0E5"/>
+          </a:solidFill>
+          <a:ln>
+            <a:noFill/>
+          </a:ln>
+        </p:spPr>
+        <p:txBody>
+          <a:bodyPr wrap="square" lIns="0" tIns="0" rIns="0" bIns="0" anchor="ctr">
+            <a:noAutofit/>
+          </a:bodyPr>
+          <a:lstStyle/>
+          <a:p>
+            <a:pPr algn="ctr"/>
+            <a:r>
+              <a:rPr lang="en-US" sz="1100" b="1" i="0" dirty="0">
+                <a:solidFill>
+                  <a:srgbClr val="1F2328"/>
+                </a:solidFill>
+                <a:latin typeface="Calibri"/>
+                <a:cs typeface="Calibri"/>
+              </a:rPr>
+              <a:t xml:space="preserve">20</a:t>
+            </a:r>
+          </a:p>
+        </p:txBody>
+      </p:sp>
+      <p:sp>
+        <p:nvSpPr>
+          <p:cNvPr id="1223" name="Cell"/>
+          <p:cNvSpPr/>
+          <p:nvPr/>
+        </p:nvSpPr>
+        <p:spPr>
+          <a:xfrm>
+            <a:off x="6355079" y="5230368"/>
+            <a:ext cx="493775" cy="420624"/>
+          </a:xfrm>
+          <a:prstGeom prst="rect">
+            <a:avLst/>
+          </a:prstGeom>
+          <a:solidFill>
+            <a:srgbClr val="DDF0E5"/>
+          </a:solidFill>
+          <a:ln>
+            <a:noFill/>
+          </a:ln>
+        </p:spPr>
+        <p:txBody>
+          <a:bodyPr wrap="square" lIns="0" tIns="0" rIns="0" bIns="0" anchor="ctr">
+            <a:noAutofit/>
+          </a:bodyPr>
+          <a:lstStyle/>
+          <a:p>
+            <a:pPr algn="ctr"/>
+            <a:r>
+              <a:rPr lang="en-US" sz="1100" b="1" i="0" dirty="0">
+                <a:solidFill>
+                  <a:srgbClr val="1F2328"/>
+                </a:solidFill>
+                <a:latin typeface="Calibri"/>
+                <a:cs typeface="Calibri"/>
+              </a:rPr>
+              <a:t xml:space="preserve">23</a:t>
+            </a:r>
+          </a:p>
+        </p:txBody>
+      </p:sp>
+      <p:sp>
+        <p:nvSpPr>
+          <p:cNvPr id="1224" name="Cell"/>
+          <p:cNvSpPr/>
+          <p:nvPr/>
+        </p:nvSpPr>
+        <p:spPr>
+          <a:xfrm>
+            <a:off x="6885431" y="5230368"/>
+            <a:ext cx="493775" cy="420624"/>
+          </a:xfrm>
+          <a:prstGeom prst="rect">
+            <a:avLst/>
+          </a:prstGeom>
+          <a:solidFill>
+            <a:srgbClr val="BFE3CF"/>
+          </a:solidFill>
+          <a:ln>
+            <a:noFill/>
+          </a:ln>
+        </p:spPr>
+        <p:txBody>
+          <a:bodyPr wrap="square" lIns="0" tIns="0" rIns="0" bIns="0" anchor="ctr">
+            <a:noAutofit/>
+          </a:bodyPr>
+          <a:lstStyle/>
+          <a:p>
+            <a:pPr algn="ctr"/>
+            <a:r>
+              <a:rPr lang="en-US" sz="1100" b="1" i="0" dirty="0">
+                <a:solidFill>
+                  <a:srgbClr val="1F2328"/>
+                </a:solidFill>
+                <a:latin typeface="Calibri"/>
+                <a:cs typeface="Calibri"/>
+              </a:rPr>
+              <a:t xml:space="preserve">3</a:t>
+            </a:r>
+          </a:p>
+        </p:txBody>
+      </p:sp>
+      <p:sp>
+        <p:nvSpPr>
+          <p:cNvPr id="1225" name="Cell"/>
+          <p:cNvSpPr/>
+          <p:nvPr/>
+        </p:nvSpPr>
+        <p:spPr>
+          <a:xfrm>
+            <a:off x="7415783" y="5230368"/>
+            <a:ext cx="493775" cy="420624"/>
+          </a:xfrm>
+          <a:prstGeom prst="rect">
+            <a:avLst/>
+          </a:prstGeom>
+          <a:solidFill>
+            <a:srgbClr val="BFE3CF"/>
+          </a:solidFill>
+          <a:ln>
+            <a:noFill/>
+          </a:ln>
+        </p:spPr>
+        <p:txBody>
+          <a:bodyPr wrap="square" lIns="0" tIns="0" rIns="0" bIns="0" anchor="ctr">
+            <a:noAutofit/>
+          </a:bodyPr>
+          <a:lstStyle/>
+          <a:p>
+            <a:pPr algn="ctr"/>
+            <a:r>
+              <a:rPr lang="en-US" sz="1100" b="1" i="0" dirty="0">
+                <a:solidFill>
+                  <a:srgbClr val="1F2328"/>
+                </a:solidFill>
+                <a:latin typeface="Calibri"/>
+                <a:cs typeface="Calibri"/>
+              </a:rPr>
+              <a:t xml:space="preserve">2</a:t>
+            </a:r>
+          </a:p>
+        </p:txBody>
+      </p:sp>
+      <p:sp>
+        <p:nvSpPr>
+          <p:cNvPr id="1226" name="Cell"/>
+          <p:cNvSpPr/>
+          <p:nvPr/>
+        </p:nvSpPr>
+        <p:spPr>
+          <a:xfrm>
+            <a:off x="7946136" y="5230368"/>
+            <a:ext cx="493775" cy="420624"/>
+          </a:xfrm>
+          <a:prstGeom prst="rect">
+            <a:avLst/>
+          </a:prstGeom>
+          <a:solidFill>
+            <a:srgbClr val="BFE3CF"/>
+          </a:solidFill>
+          <a:ln>
+            <a:noFill/>
+          </a:ln>
+        </p:spPr>
+        <p:txBody>
+          <a:bodyPr wrap="square" lIns="0" tIns="0" rIns="0" bIns="0" anchor="ctr">
+            <a:noAutofit/>
+          </a:bodyPr>
+          <a:lstStyle/>
+          <a:p>
+            <a:pPr algn="ctr"/>
+            <a:r>
+              <a:rPr lang="en-US" sz="1100" b="1" i="0" dirty="0">
+                <a:solidFill>
+                  <a:srgbClr val="1F2328"/>
+                </a:solidFill>
+                <a:latin typeface="Calibri"/>
+                <a:cs typeface="Calibri"/>
+              </a:rPr>
+              <a:t xml:space="preserve">2</a:t>
+            </a:r>
+          </a:p>
+        </p:txBody>
+      </p:sp>
+      <p:sp>
+        <p:nvSpPr>
+          <p:cNvPr id="1227" name="Cell"/>
+          <p:cNvSpPr/>
+          <p:nvPr/>
+        </p:nvSpPr>
+        <p:spPr>
+          <a:xfrm>
+            <a:off x="8476488" y="5230368"/>
+            <a:ext cx="493775" cy="420624"/>
+          </a:xfrm>
+          <a:prstGeom prst="rect">
+            <a:avLst/>
+          </a:prstGeom>
+          <a:solidFill>
+            <a:srgbClr val="DDF0E5"/>
+          </a:solidFill>
+          <a:ln>
+            <a:noFill/>
+          </a:ln>
+        </p:spPr>
+        <p:txBody>
+          <a:bodyPr wrap="square" lIns="0" tIns="0" rIns="0" bIns="0" anchor="ctr">
+            <a:noAutofit/>
+          </a:bodyPr>
+          <a:lstStyle/>
+          <a:p>
+            <a:pPr algn="ctr"/>
+            <a:r>
+              <a:rPr lang="en-US" sz="1100" b="1" i="0" dirty="0">
+                <a:solidFill>
+                  <a:srgbClr val="1F2328"/>
+                </a:solidFill>
+                <a:latin typeface="Calibri"/>
+                <a:cs typeface="Calibri"/>
+              </a:rPr>
+              <a:t xml:space="preserve">26</a:t>
+            </a:r>
+          </a:p>
+        </p:txBody>
+      </p:sp>
+      <p:sp>
+        <p:nvSpPr>
+          <p:cNvPr id="1228" name="Cell"/>
+          <p:cNvSpPr/>
+          <p:nvPr/>
+        </p:nvSpPr>
+        <p:spPr>
+          <a:xfrm>
+            <a:off x="9006839" y="5230368"/>
+            <a:ext cx="493775" cy="420624"/>
+          </a:xfrm>
+          <a:prstGeom prst="rect">
+            <a:avLst/>
+          </a:prstGeom>
+          <a:solidFill>
+            <a:srgbClr val="BFE3CF"/>
+          </a:solidFill>
+          <a:ln>
+            <a:noFill/>
+          </a:ln>
+        </p:spPr>
+        <p:txBody>
+          <a:bodyPr wrap="square" lIns="0" tIns="0" rIns="0" bIns="0" anchor="ctr">
+            <a:noAutofit/>
+          </a:bodyPr>
+          <a:lstStyle/>
+          <a:p>
+            <a:pPr algn="ctr"/>
+            <a:r>
+              <a:rPr lang="en-US" sz="1100" b="1" i="0" dirty="0">
+                <a:solidFill>
+                  <a:srgbClr val="1F2328"/>
+                </a:solidFill>
+                <a:latin typeface="Calibri"/>
+                <a:cs typeface="Calibri"/>
+              </a:rPr>
+              <a:t xml:space="preserve">0</a:t>
+            </a:r>
+          </a:p>
+        </p:txBody>
+      </p:sp>
+      <p:sp>
+        <p:nvSpPr>
+          <p:cNvPr id="1229" name="Cell"/>
+          <p:cNvSpPr/>
+          <p:nvPr/>
+        </p:nvSpPr>
+        <p:spPr>
+          <a:xfrm>
+            <a:off x="9537192" y="5230368"/>
+            <a:ext cx="493775" cy="420624"/>
+          </a:xfrm>
+          <a:prstGeom prst="rect">
+            <a:avLst/>
+          </a:prstGeom>
+          <a:solidFill>
+            <a:srgbClr val="BFE3CF"/>
+          </a:solidFill>
+          <a:ln>
+            <a:noFill/>
+          </a:ln>
+        </p:spPr>
+        <p:txBody>
+          <a:bodyPr wrap="square" lIns="0" tIns="0" rIns="0" bIns="0" anchor="ctr">
+            <a:noAutofit/>
+          </a:bodyPr>
+          <a:lstStyle/>
+          <a:p>
+            <a:pPr algn="ctr"/>
+            <a:r>
+              <a:rPr lang="en-US" sz="1100" b="1" i="0" dirty="0">
+                <a:solidFill>
+                  <a:srgbClr val="1F2328"/>
+                </a:solidFill>
+                <a:latin typeface="Calibri"/>
+                <a:cs typeface="Calibri"/>
+              </a:rPr>
+              <a:t xml:space="preserve">0</a:t>
+            </a:r>
+          </a:p>
+        </p:txBody>
+      </p:sp>
+      <p:sp>
+        <p:nvSpPr>
+          <p:cNvPr id="1230" name="Cell"/>
+          <p:cNvSpPr/>
+          <p:nvPr/>
+        </p:nvSpPr>
+        <p:spPr>
+          <a:xfrm>
+            <a:off x="10067543" y="5230368"/>
+            <a:ext cx="493775" cy="420624"/>
+          </a:xfrm>
+          <a:prstGeom prst="rect">
+            <a:avLst/>
+          </a:prstGeom>
+          <a:solidFill>
+            <a:srgbClr val="BFE3CF"/>
+          </a:solidFill>
+          <a:ln>
+            <a:noFill/>
+          </a:ln>
+        </p:spPr>
+        <p:txBody>
+          <a:bodyPr wrap="square" lIns="0" tIns="0" rIns="0" bIns="0" anchor="ctr">
+            <a:noAutofit/>
+          </a:bodyPr>
+          <a:lstStyle/>
+          <a:p>
+            <a:pPr algn="ctr"/>
+            <a:r>
+              <a:rPr lang="en-US" sz="1100" b="1" i="0" dirty="0">
+                <a:solidFill>
+                  <a:srgbClr val="1F2328"/>
+                </a:solidFill>
+                <a:latin typeface="Calibri"/>
+                <a:cs typeface="Calibri"/>
+              </a:rPr>
+              <a:t xml:space="preserve">0</a:t>
+            </a:r>
+          </a:p>
+        </p:txBody>
+      </p:sp>
+      <p:sp>
+        <p:nvSpPr>
+          <p:cNvPr id="1231" name="Avg"/>
           <p:cNvSpPr txBox="1"/>
           <p:nvPr/>
         </p:nvSpPr>
         <p:spPr>
           <a:xfrm>
-            <a:off x="7251192" y="4069080"/>
-            <a:ext cx="1508760" cy="292608"/>
-          </a:xfrm>
-          <a:prstGeom prst="rect">
-            <a:avLst/>
-          </a:prstGeom>
-          <a:noFill/>
-          <a:ln>
-            <a:noFill/>
-          </a:ln>
-        </p:spPr>
-        <p:txBody>
-          <a:bodyPr wrap="square" lIns="0" tIns="0" rIns="0" bIns="0" anchor="ctr">
-            <a:noAutofit/>
-          </a:bodyPr>
-          <a:lstStyle/>
-          <a:p>
-            <a:pPr algn="l"/>
-            <a:r>
-              <a:rPr lang="en-US" sz="1400" b="0" i="0" dirty="0">
-                <a:solidFill>
-                  <a:srgbClr val="1F2328"/>
-                </a:solidFill>
-                <a:latin typeface="Calibri"/>
-                <a:cs typeface="Calibri"/>
-              </a:rPr>
-              <a:t xml:space="preserve">LLM baseline</a:t>
-            </a:r>
-          </a:p>
-        </p:txBody>
-      </p:sp>
-      <p:sp>
-        <p:nvSpPr>
-          <p:cNvPr id="1185" name="Track"/>
-          <p:cNvSpPr/>
-          <p:nvPr/>
-        </p:nvSpPr>
-        <p:spPr>
-          <a:xfrm>
-            <a:off x="8759952" y="4142232"/>
-            <a:ext cx="1709928" cy="146304"/>
-          </a:xfrm>
-          <a:prstGeom prst="rect">
-            <a:avLst/>
-          </a:prstGeom>
-          <a:solidFill>
-            <a:srgbClr val="EEF1EF"/>
-          </a:solidFill>
-          <a:ln>
-            <a:noFill/>
-          </a:ln>
-        </p:spPr>
-        <p:txBody>
-          <a:bodyPr wrap="square" lIns="0" tIns="0" rIns="0" bIns="0" anchor="t">
-            <a:noAutofit/>
-          </a:bodyPr>
-          <a:lstStyle/>
-          <a:p>
-            <a:pPr algn="l"/>
-          </a:p>
-        </p:txBody>
-      </p:sp>
-      <p:sp>
-        <p:nvSpPr>
-          <p:cNvPr id="1186" name="Bar"/>
-          <p:cNvSpPr/>
-          <p:nvPr/>
-        </p:nvSpPr>
-        <p:spPr>
-          <a:xfrm>
-            <a:off x="8759952" y="4142232"/>
-            <a:ext cx="1051999" cy="146304"/>
-          </a:xfrm>
-          <a:prstGeom prst="rect">
-            <a:avLst/>
-          </a:prstGeom>
-          <a:solidFill>
-            <a:srgbClr val="9AA3A9"/>
-          </a:solidFill>
-          <a:ln>
-            <a:noFill/>
-          </a:ln>
-        </p:spPr>
-        <p:txBody>
-          <a:bodyPr wrap="square" lIns="0" tIns="0" rIns="0" bIns="0" anchor="t">
-            <a:noAutofit/>
-          </a:bodyPr>
-          <a:lstStyle/>
-          <a:p>
-            <a:pPr algn="l"/>
-          </a:p>
-        </p:txBody>
-      </p:sp>
-      <p:sp>
-        <p:nvSpPr>
-          <p:cNvPr id="1187" name="Value"/>
-          <p:cNvSpPr txBox="1"/>
-          <p:nvPr/>
-        </p:nvSpPr>
-        <p:spPr>
-          <a:xfrm>
-            <a:off x="10543032" y="4069080"/>
-            <a:ext cx="731520" cy="292608"/>
-          </a:xfrm>
-          <a:prstGeom prst="rect">
-            <a:avLst/>
-          </a:prstGeom>
-          <a:noFill/>
-          <a:ln>
-            <a:noFill/>
-          </a:ln>
-        </p:spPr>
-        <p:txBody>
-          <a:bodyPr wrap="square" lIns="0" tIns="0" rIns="0" bIns="0" anchor="ctr">
-            <a:noAutofit/>
-          </a:bodyPr>
-          <a:lstStyle/>
-          <a:p>
-            <a:pPr algn="l"/>
-            <a:r>
-              <a:rPr lang="en-US" sz="1500" b="1" i="0" dirty="0">
-                <a:solidFill>
-                  <a:srgbClr val="3A434C"/>
-                </a:solidFill>
-                <a:latin typeface="Calibri"/>
-                <a:cs typeface="Calibri"/>
-              </a:rPr>
-              <a:t xml:space="preserve">307</a:t>
-            </a:r>
-          </a:p>
-        </p:txBody>
-      </p:sp>
-      <p:sp>
-        <p:nvSpPr>
-          <p:cNvPr id="1188" name="Method"/>
-          <p:cNvSpPr txBox="1"/>
-          <p:nvPr/>
-        </p:nvSpPr>
-        <p:spPr>
-          <a:xfrm>
-            <a:off x="7251192" y="4572000"/>
-            <a:ext cx="1508760" cy="292608"/>
-          </a:xfrm>
-          <a:prstGeom prst="rect">
-            <a:avLst/>
-          </a:prstGeom>
-          <a:noFill/>
-          <a:ln>
-            <a:noFill/>
-          </a:ln>
-        </p:spPr>
-        <p:txBody>
-          <a:bodyPr wrap="square" lIns="0" tIns="0" rIns="0" bIns="0" anchor="ctr">
-            <a:noAutofit/>
-          </a:bodyPr>
-          <a:lstStyle/>
-          <a:p>
-            <a:pPr algn="l"/>
-            <a:r>
-              <a:rPr lang="en-US" sz="1400" b="0" i="0" dirty="0">
-                <a:solidFill>
-                  <a:srgbClr val="1F2328"/>
-                </a:solidFill>
-                <a:latin typeface="Calibri"/>
-                <a:cs typeface="Calibri"/>
-              </a:rPr>
-              <a:t xml:space="preserve">Non-Iterative</a:t>
-            </a:r>
-          </a:p>
-        </p:txBody>
-      </p:sp>
-      <p:sp>
-        <p:nvSpPr>
-          <p:cNvPr id="1189" name="Track"/>
-          <p:cNvSpPr/>
-          <p:nvPr/>
-        </p:nvSpPr>
-        <p:spPr>
-          <a:xfrm>
-            <a:off x="8759952" y="4645152"/>
-            <a:ext cx="1709928" cy="146304"/>
-          </a:xfrm>
-          <a:prstGeom prst="rect">
-            <a:avLst/>
-          </a:prstGeom>
-          <a:solidFill>
-            <a:srgbClr val="EEF1EF"/>
-          </a:solidFill>
-          <a:ln>
-            <a:noFill/>
-          </a:ln>
-        </p:spPr>
-        <p:txBody>
-          <a:bodyPr wrap="square" lIns="0" tIns="0" rIns="0" bIns="0" anchor="t">
-            <a:noAutofit/>
-          </a:bodyPr>
-          <a:lstStyle/>
-          <a:p>
-            <a:pPr algn="l"/>
-          </a:p>
-        </p:txBody>
-      </p:sp>
-      <p:sp>
-        <p:nvSpPr>
-          <p:cNvPr id="1190" name="Bar"/>
-          <p:cNvSpPr/>
-          <p:nvPr/>
-        </p:nvSpPr>
-        <p:spPr>
-          <a:xfrm>
-            <a:off x="8759952" y="4645152"/>
-            <a:ext cx="178188" cy="146304"/>
-          </a:xfrm>
-          <a:prstGeom prst="rect">
-            <a:avLst/>
-          </a:prstGeom>
-          <a:solidFill>
-            <a:srgbClr val="9AA3A9"/>
-          </a:solidFill>
-          <a:ln>
-            <a:noFill/>
-          </a:ln>
-        </p:spPr>
-        <p:txBody>
-          <a:bodyPr wrap="square" lIns="0" tIns="0" rIns="0" bIns="0" anchor="t">
-            <a:noAutofit/>
-          </a:bodyPr>
-          <a:lstStyle/>
-          <a:p>
-            <a:pPr algn="l"/>
-          </a:p>
-        </p:txBody>
-      </p:sp>
-      <p:sp>
-        <p:nvSpPr>
-          <p:cNvPr id="1191" name="Value"/>
-          <p:cNvSpPr txBox="1"/>
-          <p:nvPr/>
-        </p:nvSpPr>
-        <p:spPr>
-          <a:xfrm>
-            <a:off x="10543032" y="4572000"/>
-            <a:ext cx="731520" cy="292608"/>
-          </a:xfrm>
-          <a:prstGeom prst="rect">
-            <a:avLst/>
-          </a:prstGeom>
-          <a:noFill/>
-          <a:ln>
-            <a:noFill/>
-          </a:ln>
-        </p:spPr>
-        <p:txBody>
-          <a:bodyPr wrap="square" lIns="0" tIns="0" rIns="0" bIns="0" anchor="ctr">
-            <a:noAutofit/>
-          </a:bodyPr>
-          <a:lstStyle/>
-          <a:p>
-            <a:pPr algn="l"/>
-            <a:r>
-              <a:rPr lang="en-US" sz="1500" b="1" i="0" dirty="0">
-                <a:solidFill>
-                  <a:srgbClr val="3A434C"/>
-                </a:solidFill>
-                <a:latin typeface="Calibri"/>
-                <a:cs typeface="Calibri"/>
-              </a:rPr>
-              <a:t xml:space="preserve">52</a:t>
-            </a:r>
-          </a:p>
-        </p:txBody>
-      </p:sp>
-      <p:sp>
-        <p:nvSpPr>
-          <p:cNvPr id="1192" name="Method"/>
-          <p:cNvSpPr txBox="1"/>
-          <p:nvPr/>
-        </p:nvSpPr>
-        <p:spPr>
-          <a:xfrm>
-            <a:off x="7251192" y="5074920"/>
-            <a:ext cx="1508760" cy="292608"/>
-          </a:xfrm>
-          <a:prstGeom prst="rect">
-            <a:avLst/>
-          </a:prstGeom>
-          <a:noFill/>
-          <a:ln>
-            <a:noFill/>
-          </a:ln>
-        </p:spPr>
-        <p:txBody>
-          <a:bodyPr wrap="square" lIns="0" tIns="0" rIns="0" bIns="0" anchor="ctr">
-            <a:noAutofit/>
-          </a:bodyPr>
-          <a:lstStyle/>
-          <a:p>
-            <a:pPr algn="l"/>
-            <a:r>
-              <a:rPr lang="en-US" sz="1400" b="1" i="0" dirty="0">
+            <a:off x="10625328" y="5212080"/>
+            <a:ext cx="685800" cy="457200"/>
+          </a:xfrm>
+          <a:prstGeom prst="rect">
+            <a:avLst/>
+          </a:prstGeom>
+          <a:noFill/>
+          <a:ln>
+            <a:noFill/>
+          </a:ln>
+        </p:spPr>
+        <p:txBody>
+          <a:bodyPr wrap="square" lIns="0" tIns="0" rIns="0" bIns="0" anchor="ctr">
+            <a:noAutofit/>
+          </a:bodyPr>
+          <a:lstStyle/>
+          <a:p>
+            <a:pPr algn="ctr"/>
+            <a:r>
+              <a:rPr lang="en-US" sz="1250" b="1" i="0" dirty="0">
                 <a:solidFill>
                   <a:srgbClr val="0B6E4F"/>
                 </a:solidFill>
                 <a:latin typeface="Calibri"/>
                 <a:cs typeface="Calibri"/>
               </a:rPr>
-              <a:t xml:space="preserve">RIGOR</a:t>
-            </a:r>
-          </a:p>
-        </p:txBody>
-      </p:sp>
-      <p:sp>
-        <p:nvSpPr>
-          <p:cNvPr id="1193" name="Track"/>
-          <p:cNvSpPr/>
-          <p:nvPr/>
-        </p:nvSpPr>
-        <p:spPr>
-          <a:xfrm>
-            <a:off x="8759952" y="5148072"/>
-            <a:ext cx="1709928" cy="146304"/>
-          </a:xfrm>
-          <a:prstGeom prst="rect">
-            <a:avLst/>
-          </a:prstGeom>
-          <a:solidFill>
-            <a:srgbClr val="EEF1EF"/>
-          </a:solidFill>
-          <a:ln>
-            <a:noFill/>
-          </a:ln>
-        </p:spPr>
-        <p:txBody>
-          <a:bodyPr wrap="square" lIns="0" tIns="0" rIns="0" bIns="0" anchor="t">
-            <a:noAutofit/>
-          </a:bodyPr>
-          <a:lstStyle/>
-          <a:p>
-            <a:pPr algn="l"/>
-          </a:p>
-        </p:txBody>
-      </p:sp>
-      <p:sp>
-        <p:nvSpPr>
-          <p:cNvPr id="1194" name="Bar"/>
-          <p:cNvSpPr/>
-          <p:nvPr/>
-        </p:nvSpPr>
-        <p:spPr>
-          <a:xfrm>
-            <a:off x="8759952" y="5148072"/>
-            <a:ext cx="27432" cy="146304"/>
-          </a:xfrm>
-          <a:prstGeom prst="rect">
-            <a:avLst/>
-          </a:prstGeom>
-          <a:solidFill>
-            <a:srgbClr val="0B6E4F"/>
-          </a:solidFill>
-          <a:ln>
-            <a:noFill/>
-          </a:ln>
-        </p:spPr>
-        <p:txBody>
-          <a:bodyPr wrap="square" lIns="0" tIns="0" rIns="0" bIns="0" anchor="t">
-            <a:noAutofit/>
-          </a:bodyPr>
-          <a:lstStyle/>
-          <a:p>
-            <a:pPr algn="l"/>
-          </a:p>
-        </p:txBody>
-      </p:sp>
-      <p:sp>
-        <p:nvSpPr>
-          <p:cNvPr id="1195" name="Value"/>
-          <p:cNvSpPr txBox="1"/>
-          <p:nvPr/>
-        </p:nvSpPr>
-        <p:spPr>
-          <a:xfrm>
-            <a:off x="10543032" y="5074920"/>
-            <a:ext cx="731520" cy="292608"/>
-          </a:xfrm>
-          <a:prstGeom prst="rect">
-            <a:avLst/>
-          </a:prstGeom>
-          <a:noFill/>
-          <a:ln>
-            <a:noFill/>
-          </a:ln>
-        </p:spPr>
-        <p:txBody>
-          <a:bodyPr wrap="square" lIns="0" tIns="0" rIns="0" bIns="0" anchor="ctr">
-            <a:noAutofit/>
-          </a:bodyPr>
-          <a:lstStyle/>
-          <a:p>
-            <a:pPr algn="l"/>
-            <a:r>
-              <a:rPr lang="en-US" sz="1500" b="1" i="0" dirty="0">
-                <a:solidFill>
-                  <a:srgbClr val="0B6E4F"/>
-                </a:solidFill>
-                <a:latin typeface="Calibri"/>
-                <a:cs typeface="Calibri"/>
-              </a:rPr>
               <a:t xml:space="preserve">8</a:t>
             </a:r>
           </a:p>
@@ -6559,7 +8102,7 @@
       </p:sp>
       <p:sp>
         <p:nvSpPr>
-          <p:cNvPr id="1196" name="Strip"/>
+          <p:cNvPr id="1232" name="Strip"/>
           <p:cNvSpPr/>
           <p:nvPr/>
         </p:nvSpPr>
@@ -6588,14 +8131,24 @@
           <a:p>
             <a:pPr algn="l"/>
             <a:r>
+              <a:rPr lang="en-US" sz="1400" b="0" i="0" dirty="0">
+                <a:solidFill>
+                  <a:srgbClr val="3A434C"/>
+                </a:solidFill>
+                <a:latin typeface="Calibri"/>
+                <a:cs typeface="Calibri"/>
+              </a:rPr>
+              <a:t xml:space="preserve">Without validation, the smaller LLM fails hardest: </a:t>
+            </a:r>
+            <a:r>
               <a:rPr lang="en-US" sz="1400" b="1" i="0" dirty="0">
                 <a:solidFill>
-                  <a:srgbClr val="1F2328"/>
-                </a:solidFill>
-                <a:latin typeface="Calibri"/>
-                <a:cs typeface="Calibri"/>
-              </a:rPr>
-              <a:t xml:space="preserve">72%</a:t>
+                  <a:srgbClr val="B23A1E"/>
+                </a:solidFill>
+                <a:latin typeface="Calibri"/>
+                <a:cs typeface="Calibri"/>
+              </a:rPr>
+              <a:t xml:space="preserve">Mistral on eICU, 220.</a:t>
             </a:r>
             <a:r>
               <a:rPr lang="en-US" sz="1400" b="0" i="0" dirty="0">
@@ -6605,7 +8158,7 @@
                 <a:latin typeface="Calibri"/>
                 <a:cs typeface="Calibri"/>
               </a:rPr>
-              <a:t xml:space="preserve"> of the others' pitfalls: missing annotations.  The critical one, a second domain: </a:t>
+              <a:t xml:space="preserve">  With RIGOR: </a:t>
             </a:r>
             <a:r>
               <a:rPr lang="en-US" sz="1400" b="1" i="0" dirty="0">
@@ -6615,24 +8168,14 @@
                 <a:latin typeface="Calibri"/>
                 <a:cs typeface="Calibri"/>
               </a:rPr>
-              <a:t xml:space="preserve">zero in 6 of 9</a:t>
-            </a:r>
-            <a:r>
-              <a:rPr lang="en-US" sz="1400" b="0" i="0" dirty="0">
-                <a:solidFill>
-                  <a:srgbClr val="3A434C"/>
-                </a:solidFill>
-                <a:latin typeface="Calibri"/>
-                <a:cs typeface="Calibri"/>
-              </a:rPr>
-              <a:t xml:space="preserve"> RIGOR ontologies.</a:t>
-            </a:r>
-          </a:p>
-        </p:txBody>
-      </p:sp>
-      <p:sp>
-        <p:nvSpPr>
-          <p:cNvPr id="1197" name="Source"/>
+              <a:t xml:space="preserve">2, and zero on Chinook for every LLM.</a:t>
+            </a:r>
+          </a:p>
+        </p:txBody>
+      </p:sp>
+      <p:sp>
+        <p:nvSpPr>
+          <p:cNvPr id="1233" name="Source"/>
           <p:cNvSpPr txBox="1"/>
           <p:nvPr/>
         </p:nvSpPr>
@@ -6664,7 +8207,7 @@
                 <a:latin typeface="Calibri"/>
                 <a:cs typeface="Calibri"/>
               </a:rPr>
-              <a:t xml:space="preserve">Paper Table 8 (annotation assertions, prov:wasDerivedFrom, SubClassOf) and Table 7 (OOPS!; P08 missing annotations, P19 multiple domains or ranges).</a:t>
+              <a:t xml:space="preserve">Paper Table 8 (annotations, prov:wasDerivedFrom, SubClassOf) and Table 7 (OOPS! totals). 72% of the other methods' pitfalls are missing annotations (P08).</a:t>
             </a:r>
           </a:p>
         </p:txBody>
@@ -9898,7 +11441,7 @@
                 <a:latin typeface="Calibri"/>
                 <a:cs typeface="Calibri"/>
               </a:rPr>
-              <a:t xml:space="preserve">Both ranked four anonymized ontologies per table, from first to fourth.</a:t>
+              <a:t xml:space="preserve">Blind rankings of four anonymized ontologies per table, broken down by database.</a:t>
             </a:r>
           </a:p>
         </p:txBody>
@@ -10158,7 +11701,7 @@
         <p:spPr>
           <a:xfrm>
             <a:off x="804672" y="2606040"/>
-            <a:ext cx="5212080" cy="3154680"/>
+            <a:ext cx="5760720" cy="3154680"/>
           </a:xfrm>
           <a:prstGeom prst="roundRect">
             <a:avLst>
@@ -10193,7 +11736,7 @@
         <p:spPr>
           <a:xfrm>
             <a:off x="1078992" y="2788920"/>
-            <a:ext cx="4663440" cy="274320"/>
+            <a:ext cx="5212080" cy="274320"/>
           </a:xfrm>
           <a:prstGeom prst="rect">
             <a:avLst/>
@@ -10231,8 +11774,8 @@
         </p:nvSpPr>
         <p:spPr>
           <a:xfrm>
-            <a:off x="1078992" y="3108960"/>
-            <a:ext cx="4663440" cy="914400"/>
+            <a:off x="1078992" y="3063240"/>
+            <a:ext cx="2377440" cy="685800"/>
           </a:xfrm>
           <a:prstGeom prst="rect">
             <a:avLst/>
@@ -10250,7 +11793,7 @@
           <a:p>
             <a:pPr algn="l"/>
             <a:r>
-              <a:rPr lang="en-US" sz="5400" b="1" i="0" dirty="0">
+              <a:rPr lang="en-US" sz="4000" b="1" i="0" dirty="0">
                 <a:solidFill>
                   <a:srgbClr val="1F2328"/>
                 </a:solidFill>
@@ -10270,8 +11813,47 @@
         </p:nvSpPr>
         <p:spPr>
           <a:xfrm>
-            <a:off x="1078992" y="4023360"/>
-            <a:ext cx="4663440" cy="365760"/>
+            <a:off x="3410712" y="3172968"/>
+            <a:ext cx="2926079" cy="502920"/>
+          </a:xfrm>
+          <a:prstGeom prst="rect">
+            <a:avLst/>
+          </a:prstGeom>
+          <a:noFill/>
+          <a:ln>
+            <a:noFill/>
+          </a:ln>
+        </p:spPr>
+        <p:txBody>
+          <a:bodyPr wrap="square" lIns="0" tIns="0" rIns="0" bIns="0" anchor="ctr">
+            <a:noAutofit/>
+          </a:bodyPr>
+          <a:lstStyle/>
+          <a:p>
+            <a:pPr algn="l"/>
+            <a:r>
+              <a:rPr lang="en-US" sz="1600" b="1" i="0" dirty="0">
+                <a:solidFill>
+                  <a:srgbClr val="0B6E4F"/>
+                </a:solidFill>
+                <a:latin typeface="Calibri"/>
+                <a:cs typeface="Calibri"/>
+              </a:rPr>
+              <a:t xml:space="preserve">tables with RIGOR ranked first</a:t>
+            </a:r>
+          </a:p>
+        </p:txBody>
+      </p:sp>
+      <p:sp>
+        <p:nvSpPr>
+          <p:cNvPr id="1269" name="Note"/>
+          <p:cNvSpPr txBox="1"/>
+          <p:nvPr/>
+        </p:nvSpPr>
+        <p:spPr>
+          <a:xfrm>
+            <a:off x="1078992" y="3776472"/>
+            <a:ext cx="5212080" cy="219456"/>
           </a:xfrm>
           <a:prstGeom prst="rect">
             <a:avLst/>
@@ -10289,116 +11871,793 @@
           <a:p>
             <a:pPr algn="l"/>
             <a:r>
-              <a:rPr lang="en-US" sz="1800" b="1" i="0" dirty="0">
+              <a:rPr lang="en-US" sz="1050" b="0" i="1" dirty="0">
+                <a:solidFill>
+                  <a:srgbClr val="5B6770"/>
+                </a:solidFill>
+                <a:latin typeface="Calibri"/>
+                <a:cs typeface="Calibri"/>
+              </a:rPr>
+              <a:t xml:space="preserve">average score, 0–5 (Claude ontologies)</a:t>
+            </a:r>
+          </a:p>
+        </p:txBody>
+      </p:sp>
+      <p:sp>
+        <p:nvSpPr>
+          <p:cNvPr id="1270" name="Database"/>
+          <p:cNvSpPr txBox="1"/>
+          <p:nvPr/>
+        </p:nvSpPr>
+        <p:spPr>
+          <a:xfrm>
+            <a:off x="2359152" y="3995928"/>
+            <a:ext cx="1298448" cy="219456"/>
+          </a:xfrm>
+          <a:prstGeom prst="rect">
+            <a:avLst/>
+          </a:prstGeom>
+          <a:noFill/>
+          <a:ln>
+            <a:noFill/>
+          </a:ln>
+        </p:spPr>
+        <p:txBody>
+          <a:bodyPr wrap="square" lIns="0" tIns="0" rIns="0" bIns="0" anchor="ctr">
+            <a:noAutofit/>
+          </a:bodyPr>
+          <a:lstStyle/>
+          <a:p>
+            <a:pPr algn="ctr"/>
+            <a:r>
+              <a:rPr lang="en-US" sz="1100" b="1" i="0" dirty="0">
+                <a:solidFill>
+                  <a:srgbClr val="1F2328"/>
+                </a:solidFill>
+                <a:latin typeface="Calibri"/>
+                <a:cs typeface="Calibri"/>
+              </a:rPr>
+              <a:t xml:space="preserve">Liver Cancer</a:t>
+            </a:r>
+          </a:p>
+        </p:txBody>
+      </p:sp>
+      <p:sp>
+        <p:nvSpPr>
+          <p:cNvPr id="1271" name="Database"/>
+          <p:cNvSpPr txBox="1"/>
+          <p:nvPr/>
+        </p:nvSpPr>
+        <p:spPr>
+          <a:xfrm>
+            <a:off x="3657600" y="3995928"/>
+            <a:ext cx="1298448" cy="219456"/>
+          </a:xfrm>
+          <a:prstGeom prst="rect">
+            <a:avLst/>
+          </a:prstGeom>
+          <a:noFill/>
+          <a:ln>
+            <a:noFill/>
+          </a:ln>
+        </p:spPr>
+        <p:txBody>
+          <a:bodyPr wrap="square" lIns="0" tIns="0" rIns="0" bIns="0" anchor="ctr">
+            <a:noAutofit/>
+          </a:bodyPr>
+          <a:lstStyle/>
+          <a:p>
+            <a:pPr algn="ctr"/>
+            <a:r>
+              <a:rPr lang="en-US" sz="1100" b="1" i="0" dirty="0">
+                <a:solidFill>
+                  <a:srgbClr val="1F2328"/>
+                </a:solidFill>
+                <a:latin typeface="Calibri"/>
+                <a:cs typeface="Calibri"/>
+              </a:rPr>
+              <a:t xml:space="preserve">eICU-CRD</a:t>
+            </a:r>
+          </a:p>
+        </p:txBody>
+      </p:sp>
+      <p:sp>
+        <p:nvSpPr>
+          <p:cNvPr id="1272" name="Database"/>
+          <p:cNvSpPr txBox="1"/>
+          <p:nvPr/>
+        </p:nvSpPr>
+        <p:spPr>
+          <a:xfrm>
+            <a:off x="4956048" y="3995928"/>
+            <a:ext cx="1298448" cy="219456"/>
+          </a:xfrm>
+          <a:prstGeom prst="rect">
+            <a:avLst/>
+          </a:prstGeom>
+          <a:noFill/>
+          <a:ln>
+            <a:noFill/>
+          </a:ln>
+        </p:spPr>
+        <p:txBody>
+          <a:bodyPr wrap="square" lIns="0" tIns="0" rIns="0" bIns="0" anchor="ctr">
+            <a:noAutofit/>
+          </a:bodyPr>
+          <a:lstStyle/>
+          <a:p>
+            <a:pPr algn="ctr"/>
+            <a:r>
+              <a:rPr lang="en-US" sz="1100" b="1" i="0" dirty="0">
+                <a:solidFill>
+                  <a:srgbClr val="1F2328"/>
+                </a:solidFill>
+                <a:latin typeface="Calibri"/>
+                <a:cs typeface="Calibri"/>
+              </a:rPr>
+              <a:t xml:space="preserve">Chinook</a:t>
+            </a:r>
+          </a:p>
+        </p:txBody>
+      </p:sp>
+      <p:sp>
+        <p:nvSpPr>
+          <p:cNvPr id="1273" name="Method"/>
+          <p:cNvSpPr txBox="1"/>
+          <p:nvPr/>
+        </p:nvSpPr>
+        <p:spPr>
+          <a:xfrm>
+            <a:off x="1033271" y="4251960"/>
+            <a:ext cx="1325880" cy="347472"/>
+          </a:xfrm>
+          <a:prstGeom prst="rect">
+            <a:avLst/>
+          </a:prstGeom>
+          <a:noFill/>
+          <a:ln>
+            <a:noFill/>
+          </a:ln>
+        </p:spPr>
+        <p:txBody>
+          <a:bodyPr wrap="square" lIns="0" tIns="0" rIns="0" bIns="0" anchor="ctr">
+            <a:noAutofit/>
+          </a:bodyPr>
+          <a:lstStyle/>
+          <a:p>
+            <a:pPr algn="l"/>
+            <a:r>
+              <a:rPr lang="en-US" sz="1200" b="0" i="0" dirty="0">
+                <a:solidFill>
+                  <a:srgbClr val="1F2328"/>
+                </a:solidFill>
+                <a:latin typeface="Calibri"/>
+                <a:cs typeface="Calibri"/>
+              </a:rPr>
+              <a:t xml:space="preserve">Direct Mapping</a:t>
+            </a:r>
+          </a:p>
+        </p:txBody>
+      </p:sp>
+      <p:sp>
+        <p:nvSpPr>
+          <p:cNvPr id="1274" name="Cell"/>
+          <p:cNvSpPr/>
+          <p:nvPr/>
+        </p:nvSpPr>
+        <p:spPr>
+          <a:xfrm>
+            <a:off x="2377440" y="4270248"/>
+            <a:ext cx="1261872" cy="310896"/>
+          </a:xfrm>
+          <a:prstGeom prst="rect">
+            <a:avLst/>
+          </a:prstGeom>
+          <a:solidFill>
+            <a:srgbClr val="F1F3F2"/>
+          </a:solidFill>
+          <a:ln>
+            <a:noFill/>
+          </a:ln>
+        </p:spPr>
+        <p:txBody>
+          <a:bodyPr wrap="square" lIns="0" tIns="0" rIns="0" bIns="0" anchor="ctr">
+            <a:noAutofit/>
+          </a:bodyPr>
+          <a:lstStyle/>
+          <a:p>
+            <a:pPr algn="ctr"/>
+            <a:r>
+              <a:rPr lang="en-US" sz="1100" b="0" i="0" dirty="0">
+                <a:solidFill>
+                  <a:srgbClr val="1F2328"/>
+                </a:solidFill>
+                <a:latin typeface="Calibri"/>
+                <a:cs typeface="Calibri"/>
+              </a:rPr>
+              <a:t xml:space="preserve">2.05</a:t>
+            </a:r>
+          </a:p>
+        </p:txBody>
+      </p:sp>
+      <p:sp>
+        <p:nvSpPr>
+          <p:cNvPr id="1275" name="Cell"/>
+          <p:cNvSpPr/>
+          <p:nvPr/>
+        </p:nvSpPr>
+        <p:spPr>
+          <a:xfrm>
+            <a:off x="3675887" y="4270248"/>
+            <a:ext cx="1261872" cy="310896"/>
+          </a:xfrm>
+          <a:prstGeom prst="rect">
+            <a:avLst/>
+          </a:prstGeom>
+          <a:solidFill>
+            <a:srgbClr val="F1F3F2"/>
+          </a:solidFill>
+          <a:ln>
+            <a:noFill/>
+          </a:ln>
+        </p:spPr>
+        <p:txBody>
+          <a:bodyPr wrap="square" lIns="0" tIns="0" rIns="0" bIns="0" anchor="ctr">
+            <a:noAutofit/>
+          </a:bodyPr>
+          <a:lstStyle/>
+          <a:p>
+            <a:pPr algn="ctr"/>
+            <a:r>
+              <a:rPr lang="en-US" sz="1100" b="0" i="0" dirty="0">
+                <a:solidFill>
+                  <a:srgbClr val="1F2328"/>
+                </a:solidFill>
+                <a:latin typeface="Calibri"/>
+                <a:cs typeface="Calibri"/>
+              </a:rPr>
+              <a:t xml:space="preserve">2.13</a:t>
+            </a:r>
+          </a:p>
+        </p:txBody>
+      </p:sp>
+      <p:sp>
+        <p:nvSpPr>
+          <p:cNvPr id="1276" name="Cell"/>
+          <p:cNvSpPr/>
+          <p:nvPr/>
+        </p:nvSpPr>
+        <p:spPr>
+          <a:xfrm>
+            <a:off x="4974336" y="4270248"/>
+            <a:ext cx="1261872" cy="310896"/>
+          </a:xfrm>
+          <a:prstGeom prst="rect">
+            <a:avLst/>
+          </a:prstGeom>
+          <a:solidFill>
+            <a:srgbClr val="EDB8AC"/>
+          </a:solidFill>
+          <a:ln>
+            <a:noFill/>
+          </a:ln>
+        </p:spPr>
+        <p:txBody>
+          <a:bodyPr wrap="square" lIns="0" tIns="0" rIns="0" bIns="0" anchor="ctr">
+            <a:noAutofit/>
+          </a:bodyPr>
+          <a:lstStyle/>
+          <a:p>
+            <a:pPr algn="ctr"/>
+            <a:r>
+              <a:rPr lang="en-US" sz="1100" b="0" i="0" dirty="0">
+                <a:solidFill>
+                  <a:srgbClr val="1F2328"/>
+                </a:solidFill>
+                <a:latin typeface="Calibri"/>
+                <a:cs typeface="Calibri"/>
+              </a:rPr>
+              <a:t xml:space="preserve">0.13</a:t>
+            </a:r>
+          </a:p>
+        </p:txBody>
+      </p:sp>
+      <p:sp>
+        <p:nvSpPr>
+          <p:cNvPr id="1277" name="Method"/>
+          <p:cNvSpPr txBox="1"/>
+          <p:nvPr/>
+        </p:nvSpPr>
+        <p:spPr>
+          <a:xfrm>
+            <a:off x="1033271" y="4599432"/>
+            <a:ext cx="1325880" cy="347472"/>
+          </a:xfrm>
+          <a:prstGeom prst="rect">
+            <a:avLst/>
+          </a:prstGeom>
+          <a:noFill/>
+          <a:ln>
+            <a:noFill/>
+          </a:ln>
+        </p:spPr>
+        <p:txBody>
+          <a:bodyPr wrap="square" lIns="0" tIns="0" rIns="0" bIns="0" anchor="ctr">
+            <a:noAutofit/>
+          </a:bodyPr>
+          <a:lstStyle/>
+          <a:p>
+            <a:pPr algn="l"/>
+            <a:r>
+              <a:rPr lang="en-US" sz="1200" b="0" i="0" dirty="0">
+                <a:solidFill>
+                  <a:srgbClr val="1F2328"/>
+                </a:solidFill>
+                <a:latin typeface="Calibri"/>
+                <a:cs typeface="Calibri"/>
+              </a:rPr>
+              <a:t xml:space="preserve">LLM baseline</a:t>
+            </a:r>
+          </a:p>
+        </p:txBody>
+      </p:sp>
+      <p:sp>
+        <p:nvSpPr>
+          <p:cNvPr id="1278" name="Cell"/>
+          <p:cNvSpPr/>
+          <p:nvPr/>
+        </p:nvSpPr>
+        <p:spPr>
+          <a:xfrm>
+            <a:off x="2377440" y="4617720"/>
+            <a:ext cx="1261872" cy="310896"/>
+          </a:xfrm>
+          <a:prstGeom prst="rect">
+            <a:avLst/>
+          </a:prstGeom>
+          <a:solidFill>
+            <a:srgbClr val="F6DAD3"/>
+          </a:solidFill>
+          <a:ln>
+            <a:noFill/>
+          </a:ln>
+        </p:spPr>
+        <p:txBody>
+          <a:bodyPr wrap="square" lIns="0" tIns="0" rIns="0" bIns="0" anchor="ctr">
+            <a:noAutofit/>
+          </a:bodyPr>
+          <a:lstStyle/>
+          <a:p>
+            <a:pPr algn="ctr"/>
+            <a:r>
+              <a:rPr lang="en-US" sz="1100" b="0" i="0" dirty="0">
+                <a:solidFill>
+                  <a:srgbClr val="1F2328"/>
+                </a:solidFill>
+                <a:latin typeface="Calibri"/>
+                <a:cs typeface="Calibri"/>
+              </a:rPr>
+              <a:t xml:space="preserve">1.38</a:t>
+            </a:r>
+          </a:p>
+        </p:txBody>
+      </p:sp>
+      <p:sp>
+        <p:nvSpPr>
+          <p:cNvPr id="1279" name="Cell"/>
+          <p:cNvSpPr/>
+          <p:nvPr/>
+        </p:nvSpPr>
+        <p:spPr>
+          <a:xfrm>
+            <a:off x="3675887" y="4617720"/>
+            <a:ext cx="1261872" cy="310896"/>
+          </a:xfrm>
+          <a:prstGeom prst="rect">
+            <a:avLst/>
+          </a:prstGeom>
+          <a:solidFill>
+            <a:srgbClr val="EDB8AC"/>
+          </a:solidFill>
+          <a:ln>
+            <a:noFill/>
+          </a:ln>
+        </p:spPr>
+        <p:txBody>
+          <a:bodyPr wrap="square" lIns="0" tIns="0" rIns="0" bIns="0" anchor="ctr">
+            <a:noAutofit/>
+          </a:bodyPr>
+          <a:lstStyle/>
+          <a:p>
+            <a:pPr algn="ctr"/>
+            <a:r>
+              <a:rPr lang="en-US" sz="1100" b="0" i="0" dirty="0">
+                <a:solidFill>
+                  <a:srgbClr val="1F2328"/>
+                </a:solidFill>
+                <a:latin typeface="Calibri"/>
+                <a:cs typeface="Calibri"/>
+              </a:rPr>
+              <a:t xml:space="preserve">0.28</a:t>
+            </a:r>
+          </a:p>
+        </p:txBody>
+      </p:sp>
+      <p:sp>
+        <p:nvSpPr>
+          <p:cNvPr id="1280" name="Cell"/>
+          <p:cNvSpPr/>
+          <p:nvPr/>
+        </p:nvSpPr>
+        <p:spPr>
+          <a:xfrm>
+            <a:off x="4974336" y="4617720"/>
+            <a:ext cx="1261872" cy="310896"/>
+          </a:xfrm>
+          <a:prstGeom prst="rect">
+            <a:avLst/>
+          </a:prstGeom>
+          <a:solidFill>
+            <a:srgbClr val="F6DAD3"/>
+          </a:solidFill>
+          <a:ln>
+            <a:noFill/>
+          </a:ln>
+        </p:spPr>
+        <p:txBody>
+          <a:bodyPr wrap="square" lIns="0" tIns="0" rIns="0" bIns="0" anchor="ctr">
+            <a:noAutofit/>
+          </a:bodyPr>
+          <a:lstStyle/>
+          <a:p>
+            <a:pPr algn="ctr"/>
+            <a:r>
+              <a:rPr lang="en-US" sz="1100" b="0" i="0" dirty="0">
+                <a:solidFill>
+                  <a:srgbClr val="1F2328"/>
+                </a:solidFill>
+                <a:latin typeface="Calibri"/>
+                <a:cs typeface="Calibri"/>
+              </a:rPr>
+              <a:t xml:space="preserve">1.48</a:t>
+            </a:r>
+          </a:p>
+        </p:txBody>
+      </p:sp>
+      <p:sp>
+        <p:nvSpPr>
+          <p:cNvPr id="1281" name="Method"/>
+          <p:cNvSpPr txBox="1"/>
+          <p:nvPr/>
+        </p:nvSpPr>
+        <p:spPr>
+          <a:xfrm>
+            <a:off x="1033271" y="4946904"/>
+            <a:ext cx="1325880" cy="347472"/>
+          </a:xfrm>
+          <a:prstGeom prst="rect">
+            <a:avLst/>
+          </a:prstGeom>
+          <a:noFill/>
+          <a:ln>
+            <a:noFill/>
+          </a:ln>
+        </p:spPr>
+        <p:txBody>
+          <a:bodyPr wrap="square" lIns="0" tIns="0" rIns="0" bIns="0" anchor="ctr">
+            <a:noAutofit/>
+          </a:bodyPr>
+          <a:lstStyle/>
+          <a:p>
+            <a:pPr algn="l"/>
+            <a:r>
+              <a:rPr lang="en-US" sz="1200" b="0" i="0" dirty="0">
+                <a:solidFill>
+                  <a:srgbClr val="1F2328"/>
+                </a:solidFill>
+                <a:latin typeface="Calibri"/>
+                <a:cs typeface="Calibri"/>
+              </a:rPr>
+              <a:t xml:space="preserve">Non-Iterative</a:t>
+            </a:r>
+          </a:p>
+        </p:txBody>
+      </p:sp>
+      <p:sp>
+        <p:nvSpPr>
+          <p:cNvPr id="1282" name="Cell"/>
+          <p:cNvSpPr/>
+          <p:nvPr/>
+        </p:nvSpPr>
+        <p:spPr>
+          <a:xfrm>
+            <a:off x="2377440" y="4965192"/>
+            <a:ext cx="1261872" cy="310896"/>
+          </a:xfrm>
+          <a:prstGeom prst="rect">
+            <a:avLst/>
+          </a:prstGeom>
+          <a:solidFill>
+            <a:srgbClr val="F6DAD3"/>
+          </a:solidFill>
+          <a:ln>
+            <a:noFill/>
+          </a:ln>
+        </p:spPr>
+        <p:txBody>
+          <a:bodyPr wrap="square" lIns="0" tIns="0" rIns="0" bIns="0" anchor="ctr">
+            <a:noAutofit/>
+          </a:bodyPr>
+          <a:lstStyle/>
+          <a:p>
+            <a:pPr algn="ctr"/>
+            <a:r>
+              <a:rPr lang="en-US" sz="1100" b="0" i="0" dirty="0">
+                <a:solidFill>
+                  <a:srgbClr val="1F2328"/>
+                </a:solidFill>
+                <a:latin typeface="Calibri"/>
+                <a:cs typeface="Calibri"/>
+              </a:rPr>
+              <a:t xml:space="preserve">1.89</a:t>
+            </a:r>
+          </a:p>
+        </p:txBody>
+      </p:sp>
+      <p:sp>
+        <p:nvSpPr>
+          <p:cNvPr id="1283" name="Cell"/>
+          <p:cNvSpPr/>
+          <p:nvPr/>
+        </p:nvSpPr>
+        <p:spPr>
+          <a:xfrm>
+            <a:off x="3675887" y="4965192"/>
+            <a:ext cx="1261872" cy="310896"/>
+          </a:xfrm>
+          <a:prstGeom prst="rect">
+            <a:avLst/>
+          </a:prstGeom>
+          <a:solidFill>
+            <a:srgbClr val="EDB8AC"/>
+          </a:solidFill>
+          <a:ln>
+            <a:noFill/>
+          </a:ln>
+        </p:spPr>
+        <p:txBody>
+          <a:bodyPr wrap="square" lIns="0" tIns="0" rIns="0" bIns="0" anchor="ctr">
+            <a:noAutofit/>
+          </a:bodyPr>
+          <a:lstStyle/>
+          <a:p>
+            <a:pPr algn="ctr"/>
+            <a:r>
+              <a:rPr lang="en-US" sz="1100" b="0" i="0" dirty="0">
+                <a:solidFill>
+                  <a:srgbClr val="1F2328"/>
+                </a:solidFill>
+                <a:latin typeface="Calibri"/>
+                <a:cs typeface="Calibri"/>
+              </a:rPr>
+              <a:t xml:space="preserve">0.67</a:t>
+            </a:r>
+          </a:p>
+        </p:txBody>
+      </p:sp>
+      <p:sp>
+        <p:nvSpPr>
+          <p:cNvPr id="1284" name="Cell"/>
+          <p:cNvSpPr/>
+          <p:nvPr/>
+        </p:nvSpPr>
+        <p:spPr>
+          <a:xfrm>
+            <a:off x="4974336" y="4965192"/>
+            <a:ext cx="1261872" cy="310896"/>
+          </a:xfrm>
+          <a:prstGeom prst="rect">
+            <a:avLst/>
+          </a:prstGeom>
+          <a:solidFill>
+            <a:srgbClr val="F1F3F2"/>
+          </a:solidFill>
+          <a:ln>
+            <a:noFill/>
+          </a:ln>
+        </p:spPr>
+        <p:txBody>
+          <a:bodyPr wrap="square" lIns="0" tIns="0" rIns="0" bIns="0" anchor="ctr">
+            <a:noAutofit/>
+          </a:bodyPr>
+          <a:lstStyle/>
+          <a:p>
+            <a:pPr algn="ctr"/>
+            <a:r>
+              <a:rPr lang="en-US" sz="1100" b="0" i="0" dirty="0">
+                <a:solidFill>
+                  <a:srgbClr val="1F2328"/>
+                </a:solidFill>
+                <a:latin typeface="Calibri"/>
+                <a:cs typeface="Calibri"/>
+              </a:rPr>
+              <a:t xml:space="preserve">2.77</a:t>
+            </a:r>
+          </a:p>
+        </p:txBody>
+      </p:sp>
+      <p:sp>
+        <p:nvSpPr>
+          <p:cNvPr id="1285" name="Method"/>
+          <p:cNvSpPr txBox="1"/>
+          <p:nvPr/>
+        </p:nvSpPr>
+        <p:spPr>
+          <a:xfrm>
+            <a:off x="1033271" y="5294376"/>
+            <a:ext cx="1325880" cy="347472"/>
+          </a:xfrm>
+          <a:prstGeom prst="rect">
+            <a:avLst/>
+          </a:prstGeom>
+          <a:noFill/>
+          <a:ln>
+            <a:noFill/>
+          </a:ln>
+        </p:spPr>
+        <p:txBody>
+          <a:bodyPr wrap="square" lIns="0" tIns="0" rIns="0" bIns="0" anchor="ctr">
+            <a:noAutofit/>
+          </a:bodyPr>
+          <a:lstStyle/>
+          <a:p>
+            <a:pPr algn="l"/>
+            <a:r>
+              <a:rPr lang="en-US" sz="1200" b="1" i="0" dirty="0">
                 <a:solidFill>
                   <a:srgbClr val="0B6E4F"/>
                 </a:solidFill>
                 <a:latin typeface="Calibri"/>
                 <a:cs typeface="Calibri"/>
               </a:rPr>
-              <a:t xml:space="preserve">tables with RIGOR ranked first</a:t>
-            </a:r>
-          </a:p>
-        </p:txBody>
-      </p:sp>
-      <p:sp>
-        <p:nvSpPr>
-          <p:cNvPr id="1269" name="Split"/>
-          <p:cNvSpPr txBox="1"/>
-          <p:nvPr/>
-        </p:nvSpPr>
-        <p:spPr>
-          <a:xfrm>
-            <a:off x="1078992" y="4572000"/>
-            <a:ext cx="4663440" cy="292608"/>
-          </a:xfrm>
-          <a:prstGeom prst="rect">
-            <a:avLst/>
-          </a:prstGeom>
-          <a:noFill/>
-          <a:ln>
-            <a:noFill/>
-          </a:ln>
-        </p:spPr>
-        <p:txBody>
-          <a:bodyPr wrap="square" lIns="0" tIns="0" rIns="0" bIns="0" anchor="t">
-            <a:noAutofit/>
-          </a:bodyPr>
-          <a:lstStyle/>
-          <a:p>
-            <a:pPr algn="l"/>
-            <a:r>
-              <a:rPr lang="en-US" sz="1350" b="0" i="0" dirty="0">
-                <a:solidFill>
-                  <a:srgbClr val="3A434C"/>
-                </a:solidFill>
-                <a:latin typeface="Calibri"/>
-                <a:cs typeface="Calibri"/>
-              </a:rPr>
-              <a:t xml:space="preserve">Liver Cancer 16/16  ·  eICU-CRD 31/31  ·  Chinook 11/11</a:t>
-            </a:r>
-          </a:p>
-        </p:txBody>
-      </p:sp>
-      <p:sp>
-        <p:nvSpPr>
-          <p:cNvPr id="1270" name="Gains"/>
-          <p:cNvSpPr txBox="1"/>
-          <p:nvPr/>
-        </p:nvSpPr>
-        <p:spPr>
-          <a:xfrm>
-            <a:off x="1078992" y="5029200"/>
-            <a:ext cx="4663440" cy="502920"/>
-          </a:xfrm>
-          <a:prstGeom prst="rect">
-            <a:avLst/>
-          </a:prstGeom>
-          <a:noFill/>
-          <a:ln>
-            <a:noFill/>
-          </a:ln>
-        </p:spPr>
-        <p:txBody>
-          <a:bodyPr wrap="square" lIns="0" tIns="0" rIns="0" bIns="0" anchor="t">
-            <a:noAutofit/>
-          </a:bodyPr>
-          <a:lstStyle/>
-          <a:p>
-            <a:pPr algn="l"/>
-            <a:r>
-              <a:rPr lang="en-US" sz="1350" b="1" i="0" dirty="0">
+              <a:t xml:space="preserve">RIGOR</a:t>
+            </a:r>
+          </a:p>
+        </p:txBody>
+      </p:sp>
+      <p:sp>
+        <p:nvSpPr>
+          <p:cNvPr id="1286" name="Cell"/>
+          <p:cNvSpPr/>
+          <p:nvPr/>
+        </p:nvSpPr>
+        <p:spPr>
+          <a:xfrm>
+            <a:off x="2377440" y="5312664"/>
+            <a:ext cx="1261872" cy="310896"/>
+          </a:xfrm>
+          <a:prstGeom prst="rect">
+            <a:avLst/>
+          </a:prstGeom>
+          <a:solidFill>
+            <a:srgbClr val="BFE3CF"/>
+          </a:solidFill>
+          <a:ln>
+            <a:noFill/>
+          </a:ln>
+        </p:spPr>
+        <p:txBody>
+          <a:bodyPr wrap="square" lIns="0" tIns="0" rIns="0" bIns="0" anchor="ctr">
+            <a:noAutofit/>
+          </a:bodyPr>
+          <a:lstStyle/>
+          <a:p>
+            <a:pPr algn="ctr"/>
+            <a:r>
+              <a:rPr lang="en-US" sz="1100" b="1" i="0" dirty="0">
                 <a:solidFill>
                   <a:srgbClr val="1F2328"/>
                 </a:solidFill>
                 <a:latin typeface="Calibri"/>
                 <a:cs typeface="Calibri"/>
               </a:rPr>
-              <a:t xml:space="preserve">Largest gains: </a:t>
-            </a:r>
-            <a:r>
-              <a:rPr lang="en-US" sz="1350" b="0" i="0" dirty="0">
-                <a:solidFill>
-                  <a:srgbClr val="3A434C"/>
-                </a:solidFill>
-                <a:latin typeface="Calibri"/>
-                <a:cs typeface="Calibri"/>
-              </a:rPr>
-              <a:t xml:space="preserve">clarity and domain enrichment.</a:t>
-            </a:r>
-          </a:p>
-        </p:txBody>
-      </p:sp>
-      <p:sp>
-        <p:nvSpPr>
-          <p:cNvPr id="1271" name="Card"/>
+              <a:t xml:space="preserve">3.93</a:t>
+            </a:r>
+          </a:p>
+        </p:txBody>
+      </p:sp>
+      <p:sp>
+        <p:nvSpPr>
+          <p:cNvPr id="1287" name="Cell"/>
           <p:cNvSpPr/>
           <p:nvPr/>
         </p:nvSpPr>
         <p:spPr>
           <a:xfrm>
-            <a:off x="6172200" y="2606040"/>
-            <a:ext cx="5212080" cy="3154680"/>
+            <a:off x="3675887" y="5312664"/>
+            <a:ext cx="1261872" cy="310896"/>
+          </a:xfrm>
+          <a:prstGeom prst="rect">
+            <a:avLst/>
+          </a:prstGeom>
+          <a:solidFill>
+            <a:srgbClr val="BFE3CF"/>
+          </a:solidFill>
+          <a:ln>
+            <a:noFill/>
+          </a:ln>
+        </p:spPr>
+        <p:txBody>
+          <a:bodyPr wrap="square" lIns="0" tIns="0" rIns="0" bIns="0" anchor="ctr">
+            <a:noAutofit/>
+          </a:bodyPr>
+          <a:lstStyle/>
+          <a:p>
+            <a:pPr algn="ctr"/>
+            <a:r>
+              <a:rPr lang="en-US" sz="1100" b="1" i="0" dirty="0">
+                <a:solidFill>
+                  <a:srgbClr val="1F2328"/>
+                </a:solidFill>
+                <a:latin typeface="Calibri"/>
+                <a:cs typeface="Calibri"/>
+              </a:rPr>
+              <a:t xml:space="preserve">3.64</a:t>
+            </a:r>
+          </a:p>
+        </p:txBody>
+      </p:sp>
+      <p:sp>
+        <p:nvSpPr>
+          <p:cNvPr id="1288" name="Cell"/>
+          <p:cNvSpPr/>
+          <p:nvPr/>
+        </p:nvSpPr>
+        <p:spPr>
+          <a:xfrm>
+            <a:off x="4974336" y="5312664"/>
+            <a:ext cx="1261872" cy="310896"/>
+          </a:xfrm>
+          <a:prstGeom prst="rect">
+            <a:avLst/>
+          </a:prstGeom>
+          <a:solidFill>
+            <a:srgbClr val="DDF0E5"/>
+          </a:solidFill>
+          <a:ln>
+            <a:noFill/>
+          </a:ln>
+        </p:spPr>
+        <p:txBody>
+          <a:bodyPr wrap="square" lIns="0" tIns="0" rIns="0" bIns="0" anchor="ctr">
+            <a:noAutofit/>
+          </a:bodyPr>
+          <a:lstStyle/>
+          <a:p>
+            <a:pPr algn="ctr"/>
+            <a:r>
+              <a:rPr lang="en-US" sz="1100" b="1" i="0" dirty="0">
+                <a:solidFill>
+                  <a:srgbClr val="1F2328"/>
+                </a:solidFill>
+                <a:latin typeface="Calibri"/>
+                <a:cs typeface="Calibri"/>
+              </a:rPr>
+              <a:t xml:space="preserve">3.32</a:t>
+            </a:r>
+          </a:p>
+        </p:txBody>
+      </p:sp>
+      <p:sp>
+        <p:nvSpPr>
+          <p:cNvPr id="1289" name="Card"/>
+          <p:cNvSpPr/>
+          <p:nvPr/>
+        </p:nvSpPr>
+        <p:spPr>
+          <a:xfrm>
+            <a:off x="6702552" y="2606040"/>
+            <a:ext cx="4681728" cy="3154680"/>
           </a:xfrm>
           <a:prstGeom prst="roundRect">
             <a:avLst>
@@ -10426,14 +12685,14 @@
       </p:sp>
       <p:sp>
         <p:nvSpPr>
-          <p:cNvPr id="1272" name="Card label"/>
+          <p:cNvPr id="1290" name="Card label"/>
           <p:cNvSpPr txBox="1"/>
           <p:nvPr/>
         </p:nvSpPr>
         <p:spPr>
           <a:xfrm>
-            <a:off x="6446520" y="2788920"/>
-            <a:ext cx="4663440" cy="274320"/>
+            <a:off x="6976872" y="2788920"/>
+            <a:ext cx="4133088" cy="274320"/>
           </a:xfrm>
           <a:prstGeom prst="rect">
             <a:avLst/>
@@ -10465,14 +12724,14 @@
       </p:sp>
       <p:sp>
         <p:nvSpPr>
-          <p:cNvPr id="1273" name="Big"/>
+          <p:cNvPr id="1291" name="Big"/>
           <p:cNvSpPr txBox="1"/>
           <p:nvPr/>
         </p:nvSpPr>
         <p:spPr>
           <a:xfrm>
-            <a:off x="6446520" y="3108960"/>
-            <a:ext cx="4663440" cy="914400"/>
+            <a:off x="6976872" y="3063240"/>
+            <a:ext cx="2377440" cy="685800"/>
           </a:xfrm>
           <a:prstGeom prst="rect">
             <a:avLst/>
@@ -10490,7 +12749,7 @@
           <a:p>
             <a:pPr algn="l"/>
             <a:r>
-              <a:rPr lang="en-US" sz="5400" b="1" i="0" dirty="0">
+              <a:rPr lang="en-US" sz="4000" b="1" i="0" dirty="0">
                 <a:solidFill>
                   <a:srgbClr val="1F2328"/>
                 </a:solidFill>
@@ -10504,14 +12763,53 @@
       </p:sp>
       <p:sp>
         <p:nvSpPr>
-          <p:cNvPr id="1274" name="Claim"/>
+          <p:cNvPr id="1292" name="Claim"/>
           <p:cNvSpPr txBox="1"/>
           <p:nvPr/>
         </p:nvSpPr>
         <p:spPr>
           <a:xfrm>
-            <a:off x="6446520" y="4023360"/>
-            <a:ext cx="4663440" cy="365760"/>
+            <a:off x="9262872" y="3172968"/>
+            <a:ext cx="1938528" cy="502920"/>
+          </a:xfrm>
+          <a:prstGeom prst="rect">
+            <a:avLst/>
+          </a:prstGeom>
+          <a:noFill/>
+          <a:ln>
+            <a:noFill/>
+          </a:ln>
+        </p:spPr>
+        <p:txBody>
+          <a:bodyPr wrap="square" lIns="0" tIns="0" rIns="0" bIns="0" anchor="ctr">
+            <a:noAutofit/>
+          </a:bodyPr>
+          <a:lstStyle/>
+          <a:p>
+            <a:pPr algn="l"/>
+            <a:r>
+              <a:rPr lang="en-US" sz="1600" b="1" i="0" dirty="0">
+                <a:solidFill>
+                  <a:srgbClr val="0B6E4F"/>
+                </a:solidFill>
+                <a:latin typeface="Calibri"/>
+                <a:cs typeface="Calibri"/>
+              </a:rPr>
+              <a:t xml:space="preserve">rankings with RIGOR first (70%)</a:t>
+            </a:r>
+          </a:p>
+        </p:txBody>
+      </p:sp>
+      <p:sp>
+        <p:nvSpPr>
+          <p:cNvPr id="1293" name="Note"/>
+          <p:cNvSpPr txBox="1"/>
+          <p:nvPr/>
+        </p:nvSpPr>
+        <p:spPr>
+          <a:xfrm>
+            <a:off x="6976872" y="3776472"/>
+            <a:ext cx="4133088" cy="219456"/>
           </a:xfrm>
           <a:prstGeom prst="rect">
             <a:avLst/>
@@ -10529,581 +12827,583 @@
           <a:p>
             <a:pPr algn="l"/>
             <a:r>
-              <a:rPr lang="en-US" sz="1800" b="1" i="0" dirty="0">
+              <a:rPr lang="en-US" sz="1050" b="0" i="1" dirty="0">
+                <a:solidFill>
+                  <a:srgbClr val="5B6770"/>
+                </a:solidFill>
+                <a:latin typeface="Calibri"/>
+                <a:cs typeface="Calibri"/>
+              </a:rPr>
+              <a:t xml:space="preserve">first places, of 20 per database</a:t>
+            </a:r>
+          </a:p>
+        </p:txBody>
+      </p:sp>
+      <p:sp>
+        <p:nvSpPr>
+          <p:cNvPr id="1294" name="Database"/>
+          <p:cNvSpPr txBox="1"/>
+          <p:nvPr/>
+        </p:nvSpPr>
+        <p:spPr>
+          <a:xfrm>
+            <a:off x="8257031" y="3995928"/>
+            <a:ext cx="1417320" cy="219456"/>
+          </a:xfrm>
+          <a:prstGeom prst="rect">
+            <a:avLst/>
+          </a:prstGeom>
+          <a:noFill/>
+          <a:ln>
+            <a:noFill/>
+          </a:ln>
+        </p:spPr>
+        <p:txBody>
+          <a:bodyPr wrap="square" lIns="0" tIns="0" rIns="0" bIns="0" anchor="ctr">
+            <a:noAutofit/>
+          </a:bodyPr>
+          <a:lstStyle/>
+          <a:p>
+            <a:pPr algn="ctr"/>
+            <a:r>
+              <a:rPr lang="en-US" sz="1100" b="1" i="0" dirty="0">
+                <a:solidFill>
+                  <a:srgbClr val="1F2328"/>
+                </a:solidFill>
+                <a:latin typeface="Calibri"/>
+                <a:cs typeface="Calibri"/>
+              </a:rPr>
+              <a:t xml:space="preserve">Liver Cancer</a:t>
+            </a:r>
+          </a:p>
+        </p:txBody>
+      </p:sp>
+      <p:sp>
+        <p:nvSpPr>
+          <p:cNvPr id="1295" name="Database"/>
+          <p:cNvSpPr txBox="1"/>
+          <p:nvPr/>
+        </p:nvSpPr>
+        <p:spPr>
+          <a:xfrm>
+            <a:off x="9674352" y="3995928"/>
+            <a:ext cx="1417320" cy="219456"/>
+          </a:xfrm>
+          <a:prstGeom prst="rect">
+            <a:avLst/>
+          </a:prstGeom>
+          <a:noFill/>
+          <a:ln>
+            <a:noFill/>
+          </a:ln>
+        </p:spPr>
+        <p:txBody>
+          <a:bodyPr wrap="square" lIns="0" tIns="0" rIns="0" bIns="0" anchor="ctr">
+            <a:noAutofit/>
+          </a:bodyPr>
+          <a:lstStyle/>
+          <a:p>
+            <a:pPr algn="ctr"/>
+            <a:r>
+              <a:rPr lang="en-US" sz="1100" b="1" i="0" dirty="0">
+                <a:solidFill>
+                  <a:srgbClr val="1F2328"/>
+                </a:solidFill>
+                <a:latin typeface="Calibri"/>
+                <a:cs typeface="Calibri"/>
+              </a:rPr>
+              <a:t xml:space="preserve">eICU-CRD</a:t>
+            </a:r>
+          </a:p>
+        </p:txBody>
+      </p:sp>
+      <p:sp>
+        <p:nvSpPr>
+          <p:cNvPr id="1296" name="Method"/>
+          <p:cNvSpPr txBox="1"/>
+          <p:nvPr/>
+        </p:nvSpPr>
+        <p:spPr>
+          <a:xfrm>
+            <a:off x="6931152" y="4251960"/>
+            <a:ext cx="1325880" cy="347472"/>
+          </a:xfrm>
+          <a:prstGeom prst="rect">
+            <a:avLst/>
+          </a:prstGeom>
+          <a:noFill/>
+          <a:ln>
+            <a:noFill/>
+          </a:ln>
+        </p:spPr>
+        <p:txBody>
+          <a:bodyPr wrap="square" lIns="0" tIns="0" rIns="0" bIns="0" anchor="ctr">
+            <a:noAutofit/>
+          </a:bodyPr>
+          <a:lstStyle/>
+          <a:p>
+            <a:pPr algn="l"/>
+            <a:r>
+              <a:rPr lang="en-US" sz="1200" b="0" i="0" dirty="0">
+                <a:solidFill>
+                  <a:srgbClr val="1F2328"/>
+                </a:solidFill>
+                <a:latin typeface="Calibri"/>
+                <a:cs typeface="Calibri"/>
+              </a:rPr>
+              <a:t xml:space="preserve">Direct Mapping</a:t>
+            </a:r>
+          </a:p>
+        </p:txBody>
+      </p:sp>
+      <p:sp>
+        <p:nvSpPr>
+          <p:cNvPr id="1297" name="Cell"/>
+          <p:cNvSpPr/>
+          <p:nvPr/>
+        </p:nvSpPr>
+        <p:spPr>
+          <a:xfrm>
+            <a:off x="8275319" y="4270248"/>
+            <a:ext cx="1380744" cy="310896"/>
+          </a:xfrm>
+          <a:prstGeom prst="rect">
+            <a:avLst/>
+          </a:prstGeom>
+          <a:solidFill>
+            <a:srgbClr val="F1F3F2"/>
+          </a:solidFill>
+          <a:ln>
+            <a:noFill/>
+          </a:ln>
+        </p:spPr>
+        <p:txBody>
+          <a:bodyPr wrap="square" lIns="0" tIns="0" rIns="0" bIns="0" anchor="ctr">
+            <a:noAutofit/>
+          </a:bodyPr>
+          <a:lstStyle/>
+          <a:p>
+            <a:pPr algn="ctr"/>
+            <a:r>
+              <a:rPr lang="en-US" sz="1100" b="0" i="0" dirty="0">
+                <a:solidFill>
+                  <a:srgbClr val="1F2328"/>
+                </a:solidFill>
+                <a:latin typeface="Calibri"/>
+                <a:cs typeface="Calibri"/>
+              </a:rPr>
+              <a:t xml:space="preserve">3</a:t>
+            </a:r>
+          </a:p>
+        </p:txBody>
+      </p:sp>
+      <p:sp>
+        <p:nvSpPr>
+          <p:cNvPr id="1298" name="Cell"/>
+          <p:cNvSpPr/>
+          <p:nvPr/>
+        </p:nvSpPr>
+        <p:spPr>
+          <a:xfrm>
+            <a:off x="9692640" y="4270248"/>
+            <a:ext cx="1380744" cy="310896"/>
+          </a:xfrm>
+          <a:prstGeom prst="rect">
+            <a:avLst/>
+          </a:prstGeom>
+          <a:solidFill>
+            <a:srgbClr val="F6DAD3"/>
+          </a:solidFill>
+          <a:ln>
+            <a:noFill/>
+          </a:ln>
+        </p:spPr>
+        <p:txBody>
+          <a:bodyPr wrap="square" lIns="0" tIns="0" rIns="0" bIns="0" anchor="ctr">
+            <a:noAutofit/>
+          </a:bodyPr>
+          <a:lstStyle/>
+          <a:p>
+            <a:pPr algn="ctr"/>
+            <a:r>
+              <a:rPr lang="en-US" sz="1100" b="0" i="0" dirty="0">
+                <a:solidFill>
+                  <a:srgbClr val="1F2328"/>
+                </a:solidFill>
+                <a:latin typeface="Calibri"/>
+                <a:cs typeface="Calibri"/>
+              </a:rPr>
+              <a:t xml:space="preserve">2</a:t>
+            </a:r>
+          </a:p>
+        </p:txBody>
+      </p:sp>
+      <p:sp>
+        <p:nvSpPr>
+          <p:cNvPr id="1299" name="Method"/>
+          <p:cNvSpPr txBox="1"/>
+          <p:nvPr/>
+        </p:nvSpPr>
+        <p:spPr>
+          <a:xfrm>
+            <a:off x="6931152" y="4599432"/>
+            <a:ext cx="1325880" cy="347472"/>
+          </a:xfrm>
+          <a:prstGeom prst="rect">
+            <a:avLst/>
+          </a:prstGeom>
+          <a:noFill/>
+          <a:ln>
+            <a:noFill/>
+          </a:ln>
+        </p:spPr>
+        <p:txBody>
+          <a:bodyPr wrap="square" lIns="0" tIns="0" rIns="0" bIns="0" anchor="ctr">
+            <a:noAutofit/>
+          </a:bodyPr>
+          <a:lstStyle/>
+          <a:p>
+            <a:pPr algn="l"/>
+            <a:r>
+              <a:rPr lang="en-US" sz="1200" b="0" i="0" dirty="0">
+                <a:solidFill>
+                  <a:srgbClr val="1F2328"/>
+                </a:solidFill>
+                <a:latin typeface="Calibri"/>
+                <a:cs typeface="Calibri"/>
+              </a:rPr>
+              <a:t xml:space="preserve">LLM baseline</a:t>
+            </a:r>
+          </a:p>
+        </p:txBody>
+      </p:sp>
+      <p:sp>
+        <p:nvSpPr>
+          <p:cNvPr id="1300" name="Cell"/>
+          <p:cNvSpPr/>
+          <p:nvPr/>
+        </p:nvSpPr>
+        <p:spPr>
+          <a:xfrm>
+            <a:off x="8275319" y="4617720"/>
+            <a:ext cx="1380744" cy="310896"/>
+          </a:xfrm>
+          <a:prstGeom prst="rect">
+            <a:avLst/>
+          </a:prstGeom>
+          <a:solidFill>
+            <a:srgbClr val="F6DAD3"/>
+          </a:solidFill>
+          <a:ln>
+            <a:noFill/>
+          </a:ln>
+        </p:spPr>
+        <p:txBody>
+          <a:bodyPr wrap="square" lIns="0" tIns="0" rIns="0" bIns="0" anchor="ctr">
+            <a:noAutofit/>
+          </a:bodyPr>
+          <a:lstStyle/>
+          <a:p>
+            <a:pPr algn="ctr"/>
+            <a:r>
+              <a:rPr lang="en-US" sz="1100" b="0" i="0" dirty="0">
+                <a:solidFill>
+                  <a:srgbClr val="1F2328"/>
+                </a:solidFill>
+                <a:latin typeface="Calibri"/>
+                <a:cs typeface="Calibri"/>
+              </a:rPr>
+              <a:t xml:space="preserve">1</a:t>
+            </a:r>
+          </a:p>
+        </p:txBody>
+      </p:sp>
+      <p:sp>
+        <p:nvSpPr>
+          <p:cNvPr id="1301" name="Cell"/>
+          <p:cNvSpPr/>
+          <p:nvPr/>
+        </p:nvSpPr>
+        <p:spPr>
+          <a:xfrm>
+            <a:off x="9692640" y="4617720"/>
+            <a:ext cx="1380744" cy="310896"/>
+          </a:xfrm>
+          <a:prstGeom prst="rect">
+            <a:avLst/>
+          </a:prstGeom>
+          <a:solidFill>
+            <a:srgbClr val="F1F3F2"/>
+          </a:solidFill>
+          <a:ln>
+            <a:noFill/>
+          </a:ln>
+        </p:spPr>
+        <p:txBody>
+          <a:bodyPr wrap="square" lIns="0" tIns="0" rIns="0" bIns="0" anchor="ctr">
+            <a:noAutofit/>
+          </a:bodyPr>
+          <a:lstStyle/>
+          <a:p>
+            <a:pPr algn="ctr"/>
+            <a:r>
+              <a:rPr lang="en-US" sz="1100" b="0" i="0" dirty="0">
+                <a:solidFill>
+                  <a:srgbClr val="1F2328"/>
+                </a:solidFill>
+                <a:latin typeface="Calibri"/>
+                <a:cs typeface="Calibri"/>
+              </a:rPr>
+              <a:t xml:space="preserve">4</a:t>
+            </a:r>
+          </a:p>
+        </p:txBody>
+      </p:sp>
+      <p:sp>
+        <p:nvSpPr>
+          <p:cNvPr id="1302" name="Method"/>
+          <p:cNvSpPr txBox="1"/>
+          <p:nvPr/>
+        </p:nvSpPr>
+        <p:spPr>
+          <a:xfrm>
+            <a:off x="6931152" y="4946904"/>
+            <a:ext cx="1325880" cy="347472"/>
+          </a:xfrm>
+          <a:prstGeom prst="rect">
+            <a:avLst/>
+          </a:prstGeom>
+          <a:noFill/>
+          <a:ln>
+            <a:noFill/>
+          </a:ln>
+        </p:spPr>
+        <p:txBody>
+          <a:bodyPr wrap="square" lIns="0" tIns="0" rIns="0" bIns="0" anchor="ctr">
+            <a:noAutofit/>
+          </a:bodyPr>
+          <a:lstStyle/>
+          <a:p>
+            <a:pPr algn="l"/>
+            <a:r>
+              <a:rPr lang="en-US" sz="1200" b="0" i="0" dirty="0">
+                <a:solidFill>
+                  <a:srgbClr val="1F2328"/>
+                </a:solidFill>
+                <a:latin typeface="Calibri"/>
+                <a:cs typeface="Calibri"/>
+              </a:rPr>
+              <a:t xml:space="preserve">Non-Iterative</a:t>
+            </a:r>
+          </a:p>
+        </p:txBody>
+      </p:sp>
+      <p:sp>
+        <p:nvSpPr>
+          <p:cNvPr id="1303" name="Cell"/>
+          <p:cNvSpPr/>
+          <p:nvPr/>
+        </p:nvSpPr>
+        <p:spPr>
+          <a:xfrm>
+            <a:off x="8275319" y="4965192"/>
+            <a:ext cx="1380744" cy="310896"/>
+          </a:xfrm>
+          <a:prstGeom prst="rect">
+            <a:avLst/>
+          </a:prstGeom>
+          <a:solidFill>
+            <a:srgbClr val="F6DAD3"/>
+          </a:solidFill>
+          <a:ln>
+            <a:noFill/>
+          </a:ln>
+        </p:spPr>
+        <p:txBody>
+          <a:bodyPr wrap="square" lIns="0" tIns="0" rIns="0" bIns="0" anchor="ctr">
+            <a:noAutofit/>
+          </a:bodyPr>
+          <a:lstStyle/>
+          <a:p>
+            <a:pPr algn="ctr"/>
+            <a:r>
+              <a:rPr lang="en-US" sz="1100" b="0" i="0" dirty="0">
+                <a:solidFill>
+                  <a:srgbClr val="1F2328"/>
+                </a:solidFill>
+                <a:latin typeface="Calibri"/>
+                <a:cs typeface="Calibri"/>
+              </a:rPr>
+              <a:t xml:space="preserve">2</a:t>
+            </a:r>
+          </a:p>
+        </p:txBody>
+      </p:sp>
+      <p:sp>
+        <p:nvSpPr>
+          <p:cNvPr id="1304" name="Cell"/>
+          <p:cNvSpPr/>
+          <p:nvPr/>
+        </p:nvSpPr>
+        <p:spPr>
+          <a:xfrm>
+            <a:off x="9692640" y="4965192"/>
+            <a:ext cx="1380744" cy="310896"/>
+          </a:xfrm>
+          <a:prstGeom prst="rect">
+            <a:avLst/>
+          </a:prstGeom>
+          <a:solidFill>
+            <a:srgbClr val="EDB8AC"/>
+          </a:solidFill>
+          <a:ln>
+            <a:noFill/>
+          </a:ln>
+        </p:spPr>
+        <p:txBody>
+          <a:bodyPr wrap="square" lIns="0" tIns="0" rIns="0" bIns="0" anchor="ctr">
+            <a:noAutofit/>
+          </a:bodyPr>
+          <a:lstStyle/>
+          <a:p>
+            <a:pPr algn="ctr"/>
+            <a:r>
+              <a:rPr lang="en-US" sz="1100" b="0" i="0" dirty="0">
+                <a:solidFill>
+                  <a:srgbClr val="1F2328"/>
+                </a:solidFill>
+                <a:latin typeface="Calibri"/>
+                <a:cs typeface="Calibri"/>
+              </a:rPr>
+              <a:t xml:space="preserve">0</a:t>
+            </a:r>
+          </a:p>
+        </p:txBody>
+      </p:sp>
+      <p:sp>
+        <p:nvSpPr>
+          <p:cNvPr id="1305" name="Method"/>
+          <p:cNvSpPr txBox="1"/>
+          <p:nvPr/>
+        </p:nvSpPr>
+        <p:spPr>
+          <a:xfrm>
+            <a:off x="6931152" y="5294376"/>
+            <a:ext cx="1325880" cy="347472"/>
+          </a:xfrm>
+          <a:prstGeom prst="rect">
+            <a:avLst/>
+          </a:prstGeom>
+          <a:noFill/>
+          <a:ln>
+            <a:noFill/>
+          </a:ln>
+        </p:spPr>
+        <p:txBody>
+          <a:bodyPr wrap="square" lIns="0" tIns="0" rIns="0" bIns="0" anchor="ctr">
+            <a:noAutofit/>
+          </a:bodyPr>
+          <a:lstStyle/>
+          <a:p>
+            <a:pPr algn="l"/>
+            <a:r>
+              <a:rPr lang="en-US" sz="1200" b="1" i="0" dirty="0">
                 <a:solidFill>
                   <a:srgbClr val="0B6E4F"/>
                 </a:solidFill>
                 <a:latin typeface="Calibri"/>
                 <a:cs typeface="Calibri"/>
               </a:rPr>
-              <a:t xml:space="preserve">rankings with RIGOR first (70%)</a:t>
-            </a:r>
-          </a:p>
-        </p:txBody>
-      </p:sp>
-      <p:sp>
-        <p:nvSpPr>
-          <p:cNvPr id="1275" name="Method"/>
-          <p:cNvSpPr txBox="1"/>
-          <p:nvPr/>
-        </p:nvSpPr>
-        <p:spPr>
-          <a:xfrm>
-            <a:off x="6446520" y="4526280"/>
-            <a:ext cx="1600200" cy="256032"/>
-          </a:xfrm>
-          <a:prstGeom prst="rect">
-            <a:avLst/>
-          </a:prstGeom>
-          <a:noFill/>
-          <a:ln>
-            <a:noFill/>
-          </a:ln>
-        </p:spPr>
-        <p:txBody>
-          <a:bodyPr wrap="square" lIns="0" tIns="0" rIns="0" bIns="0" anchor="ctr">
-            <a:noAutofit/>
-          </a:bodyPr>
-          <a:lstStyle/>
-          <a:p>
-            <a:pPr algn="l"/>
-            <a:r>
-              <a:rPr lang="en-US" sz="1250" b="0" i="0" dirty="0">
-                <a:solidFill>
-                  <a:srgbClr val="3A434C"/>
-                </a:solidFill>
-                <a:latin typeface="Calibri"/>
-                <a:cs typeface="Calibri"/>
-              </a:rPr>
-              <a:t xml:space="preserve">Direct Mapping</a:t>
-            </a:r>
-          </a:p>
-        </p:txBody>
-      </p:sp>
-      <p:sp>
-        <p:nvSpPr>
-          <p:cNvPr id="1276" name="Track"/>
+              <a:t xml:space="preserve">RIGOR</a:t>
+            </a:r>
+          </a:p>
+        </p:txBody>
+      </p:sp>
+      <p:sp>
+        <p:nvSpPr>
+          <p:cNvPr id="1306" name="Cell"/>
           <p:cNvSpPr/>
           <p:nvPr/>
         </p:nvSpPr>
         <p:spPr>
           <a:xfrm>
-            <a:off x="8092440" y="4590288"/>
-            <a:ext cx="2377440" cy="128016"/>
+            <a:off x="8275319" y="5312664"/>
+            <a:ext cx="1380744" cy="310896"/>
           </a:xfrm>
           <a:prstGeom prst="rect">
             <a:avLst/>
           </a:prstGeom>
           <a:solidFill>
-            <a:srgbClr val="E1E6E3"/>
+            <a:srgbClr val="BFE3CF"/>
           </a:solidFill>
           <a:ln>
             <a:noFill/>
           </a:ln>
         </p:spPr>
         <p:txBody>
-          <a:bodyPr wrap="square" lIns="0" tIns="0" rIns="0" bIns="0" anchor="t">
-            <a:noAutofit/>
-          </a:bodyPr>
-          <a:lstStyle/>
-          <a:p>
-            <a:pPr algn="l"/>
-          </a:p>
-        </p:txBody>
-      </p:sp>
-      <p:sp>
-        <p:nvSpPr>
-          <p:cNvPr id="1277" name="Bar"/>
+          <a:bodyPr wrap="square" lIns="0" tIns="0" rIns="0" bIns="0" anchor="ctr">
+            <a:noAutofit/>
+          </a:bodyPr>
+          <a:lstStyle/>
+          <a:p>
+            <a:pPr algn="ctr"/>
+            <a:r>
+              <a:rPr lang="en-US" sz="1100" b="1" i="0" dirty="0">
+                <a:solidFill>
+                  <a:srgbClr val="1F2328"/>
+                </a:solidFill>
+                <a:latin typeface="Calibri"/>
+                <a:cs typeface="Calibri"/>
+              </a:rPr>
+              <a:t xml:space="preserve">14</a:t>
+            </a:r>
+          </a:p>
+        </p:txBody>
+      </p:sp>
+      <p:sp>
+        <p:nvSpPr>
+          <p:cNvPr id="1307" name="Cell"/>
           <p:cNvSpPr/>
           <p:nvPr/>
         </p:nvSpPr>
         <p:spPr>
           <a:xfrm>
-            <a:off x="8092440" y="4590288"/>
-            <a:ext cx="297180" cy="128016"/>
+            <a:off x="9692640" y="5312664"/>
+            <a:ext cx="1380744" cy="310896"/>
           </a:xfrm>
           <a:prstGeom prst="rect">
             <a:avLst/>
           </a:prstGeom>
           <a:solidFill>
-            <a:srgbClr val="9AA3A9"/>
+            <a:srgbClr val="BFE3CF"/>
           </a:solidFill>
           <a:ln>
             <a:noFill/>
           </a:ln>
         </p:spPr>
         <p:txBody>
-          <a:bodyPr wrap="square" lIns="0" tIns="0" rIns="0" bIns="0" anchor="t">
-            <a:noAutofit/>
-          </a:bodyPr>
-          <a:lstStyle/>
-          <a:p>
-            <a:pPr algn="l"/>
-          </a:p>
-        </p:txBody>
-      </p:sp>
-      <p:sp>
-        <p:nvSpPr>
-          <p:cNvPr id="1278" name="Count"/>
-          <p:cNvSpPr txBox="1"/>
-          <p:nvPr/>
-        </p:nvSpPr>
-        <p:spPr>
-          <a:xfrm>
-            <a:off x="10561320" y="4526280"/>
-            <a:ext cx="548640" cy="256032"/>
-          </a:xfrm>
-          <a:prstGeom prst="rect">
-            <a:avLst/>
-          </a:prstGeom>
-          <a:noFill/>
-          <a:ln>
-            <a:noFill/>
-          </a:ln>
-        </p:spPr>
-        <p:txBody>
-          <a:bodyPr wrap="square" lIns="0" tIns="0" rIns="0" bIns="0" anchor="ctr">
-            <a:noAutofit/>
-          </a:bodyPr>
-          <a:lstStyle/>
-          <a:p>
-            <a:pPr algn="r"/>
-            <a:r>
-              <a:rPr lang="en-US" sz="1250" b="0" i="0" dirty="0">
-                <a:solidFill>
-                  <a:srgbClr val="3A434C"/>
-                </a:solidFill>
-                <a:latin typeface="Calibri"/>
-                <a:cs typeface="Calibri"/>
-              </a:rPr>
-              <a:t xml:space="preserve">5</a:t>
-            </a:r>
-          </a:p>
-        </p:txBody>
-      </p:sp>
-      <p:sp>
-        <p:nvSpPr>
-          <p:cNvPr id="1279" name="Method"/>
-          <p:cNvSpPr txBox="1"/>
-          <p:nvPr/>
-        </p:nvSpPr>
-        <p:spPr>
-          <a:xfrm>
-            <a:off x="6446520" y="4800600"/>
-            <a:ext cx="1600200" cy="256032"/>
-          </a:xfrm>
-          <a:prstGeom prst="rect">
-            <a:avLst/>
-          </a:prstGeom>
-          <a:noFill/>
-          <a:ln>
-            <a:noFill/>
-          </a:ln>
-        </p:spPr>
-        <p:txBody>
-          <a:bodyPr wrap="square" lIns="0" tIns="0" rIns="0" bIns="0" anchor="ctr">
-            <a:noAutofit/>
-          </a:bodyPr>
-          <a:lstStyle/>
-          <a:p>
-            <a:pPr algn="l"/>
-            <a:r>
-              <a:rPr lang="en-US" sz="1250" b="0" i="0" dirty="0">
-                <a:solidFill>
-                  <a:srgbClr val="3A434C"/>
-                </a:solidFill>
-                <a:latin typeface="Calibri"/>
-                <a:cs typeface="Calibri"/>
-              </a:rPr>
-              <a:t xml:space="preserve">LLM baseline</a:t>
-            </a:r>
-          </a:p>
-        </p:txBody>
-      </p:sp>
-      <p:sp>
-        <p:nvSpPr>
-          <p:cNvPr id="1280" name="Track"/>
-          <p:cNvSpPr/>
-          <p:nvPr/>
-        </p:nvSpPr>
-        <p:spPr>
-          <a:xfrm>
-            <a:off x="8092440" y="4864608"/>
-            <a:ext cx="2377440" cy="128016"/>
-          </a:xfrm>
-          <a:prstGeom prst="rect">
-            <a:avLst/>
-          </a:prstGeom>
-          <a:solidFill>
-            <a:srgbClr val="E1E6E3"/>
-          </a:solidFill>
-          <a:ln>
-            <a:noFill/>
-          </a:ln>
-        </p:spPr>
-        <p:txBody>
-          <a:bodyPr wrap="square" lIns="0" tIns="0" rIns="0" bIns="0" anchor="t">
-            <a:noAutofit/>
-          </a:bodyPr>
-          <a:lstStyle/>
-          <a:p>
-            <a:pPr algn="l"/>
-          </a:p>
-        </p:txBody>
-      </p:sp>
-      <p:sp>
-        <p:nvSpPr>
-          <p:cNvPr id="1281" name="Bar"/>
-          <p:cNvSpPr/>
-          <p:nvPr/>
-        </p:nvSpPr>
-        <p:spPr>
-          <a:xfrm>
-            <a:off x="8092440" y="4864608"/>
-            <a:ext cx="297180" cy="128016"/>
-          </a:xfrm>
-          <a:prstGeom prst="rect">
-            <a:avLst/>
-          </a:prstGeom>
-          <a:solidFill>
-            <a:srgbClr val="9AA3A9"/>
-          </a:solidFill>
-          <a:ln>
-            <a:noFill/>
-          </a:ln>
-        </p:spPr>
-        <p:txBody>
-          <a:bodyPr wrap="square" lIns="0" tIns="0" rIns="0" bIns="0" anchor="t">
-            <a:noAutofit/>
-          </a:bodyPr>
-          <a:lstStyle/>
-          <a:p>
-            <a:pPr algn="l"/>
-          </a:p>
-        </p:txBody>
-      </p:sp>
-      <p:sp>
-        <p:nvSpPr>
-          <p:cNvPr id="1282" name="Count"/>
-          <p:cNvSpPr txBox="1"/>
-          <p:nvPr/>
-        </p:nvSpPr>
-        <p:spPr>
-          <a:xfrm>
-            <a:off x="10561320" y="4800600"/>
-            <a:ext cx="548640" cy="256032"/>
-          </a:xfrm>
-          <a:prstGeom prst="rect">
-            <a:avLst/>
-          </a:prstGeom>
-          <a:noFill/>
-          <a:ln>
-            <a:noFill/>
-          </a:ln>
-        </p:spPr>
-        <p:txBody>
-          <a:bodyPr wrap="square" lIns="0" tIns="0" rIns="0" bIns="0" anchor="ctr">
-            <a:noAutofit/>
-          </a:bodyPr>
-          <a:lstStyle/>
-          <a:p>
-            <a:pPr algn="r"/>
-            <a:r>
-              <a:rPr lang="en-US" sz="1250" b="0" i="0" dirty="0">
-                <a:solidFill>
-                  <a:srgbClr val="3A434C"/>
-                </a:solidFill>
-                <a:latin typeface="Calibri"/>
-                <a:cs typeface="Calibri"/>
-              </a:rPr>
-              <a:t xml:space="preserve">5</a:t>
-            </a:r>
-          </a:p>
-        </p:txBody>
-      </p:sp>
-      <p:sp>
-        <p:nvSpPr>
-          <p:cNvPr id="1283" name="Method"/>
-          <p:cNvSpPr txBox="1"/>
-          <p:nvPr/>
-        </p:nvSpPr>
-        <p:spPr>
-          <a:xfrm>
-            <a:off x="6446520" y="5074920"/>
-            <a:ext cx="1600200" cy="256032"/>
-          </a:xfrm>
-          <a:prstGeom prst="rect">
-            <a:avLst/>
-          </a:prstGeom>
-          <a:noFill/>
-          <a:ln>
-            <a:noFill/>
-          </a:ln>
-        </p:spPr>
-        <p:txBody>
-          <a:bodyPr wrap="square" lIns="0" tIns="0" rIns="0" bIns="0" anchor="ctr">
-            <a:noAutofit/>
-          </a:bodyPr>
-          <a:lstStyle/>
-          <a:p>
-            <a:pPr algn="l"/>
-            <a:r>
-              <a:rPr lang="en-US" sz="1250" b="0" i="0" dirty="0">
-                <a:solidFill>
-                  <a:srgbClr val="3A434C"/>
-                </a:solidFill>
-                <a:latin typeface="Calibri"/>
-                <a:cs typeface="Calibri"/>
-              </a:rPr>
-              <a:t xml:space="preserve">Non-Iterative</a:t>
-            </a:r>
-          </a:p>
-        </p:txBody>
-      </p:sp>
-      <p:sp>
-        <p:nvSpPr>
-          <p:cNvPr id="1284" name="Track"/>
-          <p:cNvSpPr/>
-          <p:nvPr/>
-        </p:nvSpPr>
-        <p:spPr>
-          <a:xfrm>
-            <a:off x="8092440" y="5138928"/>
-            <a:ext cx="2377440" cy="128016"/>
-          </a:xfrm>
-          <a:prstGeom prst="rect">
-            <a:avLst/>
-          </a:prstGeom>
-          <a:solidFill>
-            <a:srgbClr val="E1E6E3"/>
-          </a:solidFill>
-          <a:ln>
-            <a:noFill/>
-          </a:ln>
-        </p:spPr>
-        <p:txBody>
-          <a:bodyPr wrap="square" lIns="0" tIns="0" rIns="0" bIns="0" anchor="t">
-            <a:noAutofit/>
-          </a:bodyPr>
-          <a:lstStyle/>
-          <a:p>
-            <a:pPr algn="l"/>
-          </a:p>
-        </p:txBody>
-      </p:sp>
-      <p:sp>
-        <p:nvSpPr>
-          <p:cNvPr id="1285" name="Bar"/>
-          <p:cNvSpPr/>
-          <p:nvPr/>
-        </p:nvSpPr>
-        <p:spPr>
-          <a:xfrm>
-            <a:off x="8092440" y="5138928"/>
-            <a:ext cx="118872" cy="128016"/>
-          </a:xfrm>
-          <a:prstGeom prst="rect">
-            <a:avLst/>
-          </a:prstGeom>
-          <a:solidFill>
-            <a:srgbClr val="9AA3A9"/>
-          </a:solidFill>
-          <a:ln>
-            <a:noFill/>
-          </a:ln>
-        </p:spPr>
-        <p:txBody>
-          <a:bodyPr wrap="square" lIns="0" tIns="0" rIns="0" bIns="0" anchor="t">
-            <a:noAutofit/>
-          </a:bodyPr>
-          <a:lstStyle/>
-          <a:p>
-            <a:pPr algn="l"/>
-          </a:p>
-        </p:txBody>
-      </p:sp>
-      <p:sp>
-        <p:nvSpPr>
-          <p:cNvPr id="1286" name="Count"/>
-          <p:cNvSpPr txBox="1"/>
-          <p:nvPr/>
-        </p:nvSpPr>
-        <p:spPr>
-          <a:xfrm>
-            <a:off x="10561320" y="5074920"/>
-            <a:ext cx="548640" cy="256032"/>
-          </a:xfrm>
-          <a:prstGeom prst="rect">
-            <a:avLst/>
-          </a:prstGeom>
-          <a:noFill/>
-          <a:ln>
-            <a:noFill/>
-          </a:ln>
-        </p:spPr>
-        <p:txBody>
-          <a:bodyPr wrap="square" lIns="0" tIns="0" rIns="0" bIns="0" anchor="ctr">
-            <a:noAutofit/>
-          </a:bodyPr>
-          <a:lstStyle/>
-          <a:p>
-            <a:pPr algn="r"/>
-            <a:r>
-              <a:rPr lang="en-US" sz="1250" b="0" i="0" dirty="0">
-                <a:solidFill>
-                  <a:srgbClr val="3A434C"/>
-                </a:solidFill>
-                <a:latin typeface="Calibri"/>
-                <a:cs typeface="Calibri"/>
-              </a:rPr>
-              <a:t xml:space="preserve">2</a:t>
-            </a:r>
-          </a:p>
-        </p:txBody>
-      </p:sp>
-      <p:sp>
-        <p:nvSpPr>
-          <p:cNvPr id="1287" name="Method"/>
-          <p:cNvSpPr txBox="1"/>
-          <p:nvPr/>
-        </p:nvSpPr>
-        <p:spPr>
-          <a:xfrm>
-            <a:off x="6446520" y="5349240"/>
-            <a:ext cx="1600200" cy="256032"/>
-          </a:xfrm>
-          <a:prstGeom prst="rect">
-            <a:avLst/>
-          </a:prstGeom>
-          <a:noFill/>
-          <a:ln>
-            <a:noFill/>
-          </a:ln>
-        </p:spPr>
-        <p:txBody>
-          <a:bodyPr wrap="square" lIns="0" tIns="0" rIns="0" bIns="0" anchor="ctr">
-            <a:noAutofit/>
-          </a:bodyPr>
-          <a:lstStyle/>
-          <a:p>
-            <a:pPr algn="l"/>
-            <a:r>
-              <a:rPr lang="en-US" sz="1250" b="1" i="0" dirty="0">
-                <a:solidFill>
-                  <a:srgbClr val="0B6E4F"/>
-                </a:solidFill>
-                <a:latin typeface="Calibri"/>
-                <a:cs typeface="Calibri"/>
-              </a:rPr>
-              <a:t xml:space="preserve">RIGOR</a:t>
-            </a:r>
-          </a:p>
-        </p:txBody>
-      </p:sp>
-      <p:sp>
-        <p:nvSpPr>
-          <p:cNvPr id="1288" name="Track"/>
-          <p:cNvSpPr/>
-          <p:nvPr/>
-        </p:nvSpPr>
-        <p:spPr>
-          <a:xfrm>
-            <a:off x="8092440" y="5413248"/>
-            <a:ext cx="2377440" cy="128016"/>
-          </a:xfrm>
-          <a:prstGeom prst="rect">
-            <a:avLst/>
-          </a:prstGeom>
-          <a:solidFill>
-            <a:srgbClr val="E1E6E3"/>
-          </a:solidFill>
-          <a:ln>
-            <a:noFill/>
-          </a:ln>
-        </p:spPr>
-        <p:txBody>
-          <a:bodyPr wrap="square" lIns="0" tIns="0" rIns="0" bIns="0" anchor="t">
-            <a:noAutofit/>
-          </a:bodyPr>
-          <a:lstStyle/>
-          <a:p>
-            <a:pPr algn="l"/>
-          </a:p>
-        </p:txBody>
-      </p:sp>
-      <p:sp>
-        <p:nvSpPr>
-          <p:cNvPr id="1289" name="Bar"/>
-          <p:cNvSpPr/>
-          <p:nvPr/>
-        </p:nvSpPr>
-        <p:spPr>
-          <a:xfrm>
-            <a:off x="8092440" y="5413248"/>
-            <a:ext cx="1664207" cy="128016"/>
-          </a:xfrm>
-          <a:prstGeom prst="rect">
-            <a:avLst/>
-          </a:prstGeom>
-          <a:solidFill>
-            <a:srgbClr val="0B6E4F"/>
-          </a:solidFill>
-          <a:ln>
-            <a:noFill/>
-          </a:ln>
-        </p:spPr>
-        <p:txBody>
-          <a:bodyPr wrap="square" lIns="0" tIns="0" rIns="0" bIns="0" anchor="t">
-            <a:noAutofit/>
-          </a:bodyPr>
-          <a:lstStyle/>
-          <a:p>
-            <a:pPr algn="l"/>
-          </a:p>
-        </p:txBody>
-      </p:sp>
-      <p:sp>
-        <p:nvSpPr>
-          <p:cNvPr id="1290" name="Count"/>
-          <p:cNvSpPr txBox="1"/>
-          <p:nvPr/>
-        </p:nvSpPr>
-        <p:spPr>
-          <a:xfrm>
-            <a:off x="10561320" y="5349240"/>
-            <a:ext cx="548640" cy="256032"/>
-          </a:xfrm>
-          <a:prstGeom prst="rect">
-            <a:avLst/>
-          </a:prstGeom>
-          <a:noFill/>
-          <a:ln>
-            <a:noFill/>
-          </a:ln>
-        </p:spPr>
-        <p:txBody>
-          <a:bodyPr wrap="square" lIns="0" tIns="0" rIns="0" bIns="0" anchor="ctr">
-            <a:noAutofit/>
-          </a:bodyPr>
-          <a:lstStyle/>
-          <a:p>
-            <a:pPr algn="r"/>
-            <a:r>
-              <a:rPr lang="en-US" sz="1250" b="1" i="0" dirty="0">
-                <a:solidFill>
-                  <a:srgbClr val="0B6E4F"/>
-                </a:solidFill>
-                <a:latin typeface="Calibri"/>
-                <a:cs typeface="Calibri"/>
-              </a:rPr>
-              <a:t xml:space="preserve">28</a:t>
-            </a:r>
-          </a:p>
-        </p:txBody>
-      </p:sp>
-      <p:sp>
-        <p:nvSpPr>
-          <p:cNvPr id="1291" name="Strip"/>
+          <a:bodyPr wrap="square" lIns="0" tIns="0" rIns="0" bIns="0" anchor="ctr">
+            <a:noAutofit/>
+          </a:bodyPr>
+          <a:lstStyle/>
+          <a:p>
+            <a:pPr algn="ctr"/>
+            <a:r>
+              <a:rPr lang="en-US" sz="1100" b="1" i="0" dirty="0">
+                <a:solidFill>
+                  <a:srgbClr val="1F2328"/>
+                </a:solidFill>
+                <a:latin typeface="Calibri"/>
+                <a:cs typeface="Calibri"/>
+              </a:rPr>
+              <a:t xml:space="preserve">14</a:t>
+            </a:r>
+          </a:p>
+        </p:txBody>
+      </p:sp>
+      <p:sp>
+        <p:nvSpPr>
+          <p:cNvPr id="1308" name="Strip"/>
           <p:cNvSpPr/>
           <p:nvPr/>
         </p:nvSpPr>
@@ -11156,7 +13456,7 @@
       </p:sp>
       <p:sp>
         <p:nvSpPr>
-          <p:cNvPr id="1292" name="Source"/>
+          <p:cNvPr id="1309" name="Source"/>
           <p:cNvSpPr txBox="1"/>
           <p:nvPr/>
         </p:nvSpPr>
@@ -11188,7 +13488,7 @@
                 <a:latin typeface="Calibri"/>
                 <a:cs typeface="Calibri"/>
               </a:rPr>
-              <a:t xml:space="preserve">Paper Table 1 (rankings), Table 10 (judge dimensions), Table 12 (expert agreement, Kendall's W 0.39–0.72). Judge: 290 competency questions. Experts: 4 medical tables.</a:t>
+              <a:t xml:space="preserve">Paper Table 1 (scores, rankings; judge: 58 tables, 290 competency questions) and Table 12 (expert agreement, Kendall's W 0.39–0.72; 4 medical tables).</a:t>
             </a:r>
           </a:p>
         </p:txBody>
@@ -11365,7 +13665,7 @@
                 <a:latin typeface="Calibri"/>
                 <a:cs typeface="Calibri"/>
               </a:rPr>
-              <a:t xml:space="preserve">We climb from the easiest check to the hardest. Every number covers all 30 ontologies.</a:t>
+              <a:t xml:space="preserve">Every LLM, every database. We climb from the easiest check to the hardest.</a:t>
             </a:r>
           </a:p>
         </p:txBody>
@@ -11633,7 +13933,7 @@
         <p:spPr>
           <a:xfrm>
             <a:off x="804672" y="2606040"/>
-            <a:ext cx="3246120" cy="3154680"/>
+            <a:ext cx="2240280" cy="3154680"/>
           </a:xfrm>
           <a:prstGeom prst="roundRect">
             <a:avLst>
@@ -11668,7 +13968,7 @@
         <p:spPr>
           <a:xfrm>
             <a:off x="1078992" y="2788920"/>
-            <a:ext cx="2697479" cy="274320"/>
+            <a:ext cx="1691640" cy="274320"/>
           </a:xfrm>
           <a:prstGeom prst="rect">
             <a:avLst/>
@@ -11706,8 +14006,8 @@
         </p:nvSpPr>
         <p:spPr>
           <a:xfrm>
-            <a:off x="1078992" y="3246120"/>
-            <a:ext cx="2743200" cy="914400"/>
+            <a:off x="1033271" y="3246120"/>
+            <a:ext cx="1920240" cy="822960"/>
           </a:xfrm>
           <a:prstGeom prst="rect">
             <a:avLst/>
@@ -11725,7 +14025,7 @@
           <a:p>
             <a:pPr algn="l"/>
             <a:r>
-              <a:rPr lang="en-US" sz="5400" b="1" i="0" dirty="0">
+              <a:rPr lang="en-US" sz="4000" b="1" i="0" dirty="0">
                 <a:solidFill>
                   <a:srgbClr val="1F2328"/>
                 </a:solidFill>
@@ -11745,8 +14045,8 @@
         </p:nvSpPr>
         <p:spPr>
           <a:xfrm>
-            <a:off x="1078992" y="4206240"/>
-            <a:ext cx="2743200" cy="1097280"/>
+            <a:off x="1033271" y="4069080"/>
+            <a:ext cx="1828800" cy="1463040"/>
           </a:xfrm>
           <a:prstGeom prst="rect">
             <a:avLst/>
@@ -11764,14 +14064,14 @@
           <a:p>
             <a:pPr algn="l"/>
             <a:r>
-              <a:rPr lang="en-US" sz="1500" b="0" i="0" dirty="0">
+              <a:rPr lang="en-US" sz="1350" b="0" i="0" dirty="0">
                 <a:solidFill>
                   <a:srgbClr val="3A434C"/>
                 </a:solidFill>
                 <a:latin typeface="Calibri"/>
                 <a:cs typeface="Calibri"/>
               </a:rPr>
-              <a:t xml:space="preserve">ontologies are valid OWL 2 DL and logically consistent, for every method.</a:t>
+              <a:t xml:space="preserve">ontologies are valid OWL 2 DL and logically consistent, for every method and LLM.</a:t>
             </a:r>
           </a:p>
         </p:txBody>
@@ -11784,8 +14084,8 @@
         </p:nvSpPr>
         <p:spPr>
           <a:xfrm>
-            <a:off x="4233672" y="2606040"/>
-            <a:ext cx="7150608" cy="3154680"/>
+            <a:off x="3182112" y="2606040"/>
+            <a:ext cx="8202168" cy="3154680"/>
           </a:xfrm>
           <a:prstGeom prst="roundRect">
             <a:avLst>
@@ -11819,8 +14119,8 @@
         </p:nvSpPr>
         <p:spPr>
           <a:xfrm>
-            <a:off x="4507992" y="2788920"/>
-            <a:ext cx="6601968" cy="274320"/>
+            <a:off x="3456432" y="2788920"/>
+            <a:ext cx="7653528" cy="274320"/>
           </a:xfrm>
           <a:prstGeom prst="rect">
             <a:avLst/>
@@ -11858,8 +14158,8 @@
         </p:nvSpPr>
         <p:spPr>
           <a:xfrm>
-            <a:off x="4507992" y="3081528"/>
-            <a:ext cx="6601968" cy="237744"/>
+            <a:off x="3456432" y="3081528"/>
+            <a:ext cx="7653528" cy="237744"/>
           </a:xfrm>
           <a:prstGeom prst="rect">
             <a:avLst/>
@@ -11884,21 +14184,528 @@
                 <a:latin typeface="Calibri"/>
                 <a:cs typeface="Calibri"/>
               </a:rPr>
-              <a:t xml:space="preserve">share of database columns covered, per ontology</a:t>
-            </a:r>
-          </a:p>
-        </p:txBody>
-      </p:sp>
-      <p:sp>
-        <p:nvSpPr>
-          <p:cNvPr id="1160" name="Method"/>
+              <a:t xml:space="preserve">share of database columns covered, per ontology (%)</a:t>
+            </a:r>
+          </a:p>
+        </p:txBody>
+      </p:sp>
+      <p:sp>
+        <p:nvSpPr>
+          <p:cNvPr id="1160" name="Database"/>
           <p:cNvSpPr txBox="1"/>
           <p:nvPr/>
         </p:nvSpPr>
         <p:spPr>
           <a:xfrm>
-            <a:off x="4507992" y="3566160"/>
-            <a:ext cx="1600200" cy="292608"/>
+            <a:off x="4736592" y="3383280"/>
+            <a:ext cx="1920239" cy="219456"/>
+          </a:xfrm>
+          <a:prstGeom prst="rect">
+            <a:avLst/>
+          </a:prstGeom>
+          <a:noFill/>
+          <a:ln>
+            <a:noFill/>
+          </a:ln>
+        </p:spPr>
+        <p:txBody>
+          <a:bodyPr wrap="square" lIns="0" tIns="0" rIns="0" bIns="0" anchor="ctr">
+            <a:noAutofit/>
+          </a:bodyPr>
+          <a:lstStyle/>
+          <a:p>
+            <a:pPr algn="ctr"/>
+            <a:r>
+              <a:rPr lang="en-US" sz="1100" b="1" i="0" dirty="0">
+                <a:solidFill>
+                  <a:srgbClr val="1F2328"/>
+                </a:solidFill>
+                <a:latin typeface="Calibri"/>
+                <a:cs typeface="Calibri"/>
+              </a:rPr>
+              <a:t xml:space="preserve">Liver Cancer</a:t>
+            </a:r>
+          </a:p>
+        </p:txBody>
+      </p:sp>
+      <p:sp>
+        <p:nvSpPr>
+          <p:cNvPr id="1161" name="LLM"/>
+          <p:cNvSpPr txBox="1"/>
+          <p:nvPr/>
+        </p:nvSpPr>
+        <p:spPr>
+          <a:xfrm>
+            <a:off x="4736592" y="3611880"/>
+            <a:ext cx="640080" cy="182880"/>
+          </a:xfrm>
+          <a:prstGeom prst="rect">
+            <a:avLst/>
+          </a:prstGeom>
+          <a:noFill/>
+          <a:ln>
+            <a:noFill/>
+          </a:ln>
+        </p:spPr>
+        <p:txBody>
+          <a:bodyPr wrap="square" lIns="0" tIns="0" rIns="0" bIns="0" anchor="ctr">
+            <a:noAutofit/>
+          </a:bodyPr>
+          <a:lstStyle/>
+          <a:p>
+            <a:pPr algn="ctr"/>
+            <a:r>
+              <a:rPr lang="en-US" sz="850" b="0" i="0" dirty="0">
+                <a:solidFill>
+                  <a:srgbClr val="5B6770"/>
+                </a:solidFill>
+                <a:latin typeface="Calibri"/>
+                <a:cs typeface="Calibri"/>
+              </a:rPr>
+              <a:t xml:space="preserve">Claude</a:t>
+            </a:r>
+          </a:p>
+        </p:txBody>
+      </p:sp>
+      <p:sp>
+        <p:nvSpPr>
+          <p:cNvPr id="1162" name="LLM"/>
+          <p:cNvSpPr txBox="1"/>
+          <p:nvPr/>
+        </p:nvSpPr>
+        <p:spPr>
+          <a:xfrm>
+            <a:off x="5376672" y="3611880"/>
+            <a:ext cx="640080" cy="182880"/>
+          </a:xfrm>
+          <a:prstGeom prst="rect">
+            <a:avLst/>
+          </a:prstGeom>
+          <a:noFill/>
+          <a:ln>
+            <a:noFill/>
+          </a:ln>
+        </p:spPr>
+        <p:txBody>
+          <a:bodyPr wrap="square" lIns="0" tIns="0" rIns="0" bIns="0" anchor="ctr">
+            <a:noAutofit/>
+          </a:bodyPr>
+          <a:lstStyle/>
+          <a:p>
+            <a:pPr algn="ctr"/>
+            <a:r>
+              <a:rPr lang="en-US" sz="850" b="0" i="0" dirty="0">
+                <a:solidFill>
+                  <a:srgbClr val="5B6770"/>
+                </a:solidFill>
+                <a:latin typeface="Calibri"/>
+                <a:cs typeface="Calibri"/>
+              </a:rPr>
+              <a:t xml:space="preserve">Mistral</a:t>
+            </a:r>
+          </a:p>
+        </p:txBody>
+      </p:sp>
+      <p:sp>
+        <p:nvSpPr>
+          <p:cNvPr id="1163" name="LLM"/>
+          <p:cNvSpPr txBox="1"/>
+          <p:nvPr/>
+        </p:nvSpPr>
+        <p:spPr>
+          <a:xfrm>
+            <a:off x="6016752" y="3611880"/>
+            <a:ext cx="640080" cy="182880"/>
+          </a:xfrm>
+          <a:prstGeom prst="rect">
+            <a:avLst/>
+          </a:prstGeom>
+          <a:noFill/>
+          <a:ln>
+            <a:noFill/>
+          </a:ln>
+        </p:spPr>
+        <p:txBody>
+          <a:bodyPr wrap="square" lIns="0" tIns="0" rIns="0" bIns="0" anchor="ctr">
+            <a:noAutofit/>
+          </a:bodyPr>
+          <a:lstStyle/>
+          <a:p>
+            <a:pPr algn="ctr"/>
+            <a:r>
+              <a:rPr lang="en-US" sz="850" b="0" i="0" dirty="0">
+                <a:solidFill>
+                  <a:srgbClr val="5B6770"/>
+                </a:solidFill>
+                <a:latin typeface="Calibri"/>
+                <a:cs typeface="Calibri"/>
+              </a:rPr>
+              <a:t xml:space="preserve">DeepSeek</a:t>
+            </a:r>
+          </a:p>
+        </p:txBody>
+      </p:sp>
+      <p:sp>
+        <p:nvSpPr>
+          <p:cNvPr id="1164" name="Database"/>
+          <p:cNvSpPr txBox="1"/>
+          <p:nvPr/>
+        </p:nvSpPr>
+        <p:spPr>
+          <a:xfrm>
+            <a:off x="6656831" y="3383280"/>
+            <a:ext cx="1920239" cy="219456"/>
+          </a:xfrm>
+          <a:prstGeom prst="rect">
+            <a:avLst/>
+          </a:prstGeom>
+          <a:noFill/>
+          <a:ln>
+            <a:noFill/>
+          </a:ln>
+        </p:spPr>
+        <p:txBody>
+          <a:bodyPr wrap="square" lIns="0" tIns="0" rIns="0" bIns="0" anchor="ctr">
+            <a:noAutofit/>
+          </a:bodyPr>
+          <a:lstStyle/>
+          <a:p>
+            <a:pPr algn="ctr"/>
+            <a:r>
+              <a:rPr lang="en-US" sz="1100" b="1" i="0" dirty="0">
+                <a:solidFill>
+                  <a:srgbClr val="1F2328"/>
+                </a:solidFill>
+                <a:latin typeface="Calibri"/>
+                <a:cs typeface="Calibri"/>
+              </a:rPr>
+              <a:t xml:space="preserve">eICU-CRD</a:t>
+            </a:r>
+          </a:p>
+        </p:txBody>
+      </p:sp>
+      <p:sp>
+        <p:nvSpPr>
+          <p:cNvPr id="1165" name="LLM"/>
+          <p:cNvSpPr txBox="1"/>
+          <p:nvPr/>
+        </p:nvSpPr>
+        <p:spPr>
+          <a:xfrm>
+            <a:off x="6656831" y="3611880"/>
+            <a:ext cx="640080" cy="182880"/>
+          </a:xfrm>
+          <a:prstGeom prst="rect">
+            <a:avLst/>
+          </a:prstGeom>
+          <a:noFill/>
+          <a:ln>
+            <a:noFill/>
+          </a:ln>
+        </p:spPr>
+        <p:txBody>
+          <a:bodyPr wrap="square" lIns="0" tIns="0" rIns="0" bIns="0" anchor="ctr">
+            <a:noAutofit/>
+          </a:bodyPr>
+          <a:lstStyle/>
+          <a:p>
+            <a:pPr algn="ctr"/>
+            <a:r>
+              <a:rPr lang="en-US" sz="850" b="0" i="0" dirty="0">
+                <a:solidFill>
+                  <a:srgbClr val="5B6770"/>
+                </a:solidFill>
+                <a:latin typeface="Calibri"/>
+                <a:cs typeface="Calibri"/>
+              </a:rPr>
+              <a:t xml:space="preserve">Claude</a:t>
+            </a:r>
+          </a:p>
+        </p:txBody>
+      </p:sp>
+      <p:sp>
+        <p:nvSpPr>
+          <p:cNvPr id="1166" name="LLM"/>
+          <p:cNvSpPr txBox="1"/>
+          <p:nvPr/>
+        </p:nvSpPr>
+        <p:spPr>
+          <a:xfrm>
+            <a:off x="7296912" y="3611880"/>
+            <a:ext cx="640080" cy="182880"/>
+          </a:xfrm>
+          <a:prstGeom prst="rect">
+            <a:avLst/>
+          </a:prstGeom>
+          <a:noFill/>
+          <a:ln>
+            <a:noFill/>
+          </a:ln>
+        </p:spPr>
+        <p:txBody>
+          <a:bodyPr wrap="square" lIns="0" tIns="0" rIns="0" bIns="0" anchor="ctr">
+            <a:noAutofit/>
+          </a:bodyPr>
+          <a:lstStyle/>
+          <a:p>
+            <a:pPr algn="ctr"/>
+            <a:r>
+              <a:rPr lang="en-US" sz="850" b="0" i="0" dirty="0">
+                <a:solidFill>
+                  <a:srgbClr val="5B6770"/>
+                </a:solidFill>
+                <a:latin typeface="Calibri"/>
+                <a:cs typeface="Calibri"/>
+              </a:rPr>
+              <a:t xml:space="preserve">Mistral</a:t>
+            </a:r>
+          </a:p>
+        </p:txBody>
+      </p:sp>
+      <p:sp>
+        <p:nvSpPr>
+          <p:cNvPr id="1167" name="LLM"/>
+          <p:cNvSpPr txBox="1"/>
+          <p:nvPr/>
+        </p:nvSpPr>
+        <p:spPr>
+          <a:xfrm>
+            <a:off x="7936992" y="3611880"/>
+            <a:ext cx="640080" cy="182880"/>
+          </a:xfrm>
+          <a:prstGeom prst="rect">
+            <a:avLst/>
+          </a:prstGeom>
+          <a:noFill/>
+          <a:ln>
+            <a:noFill/>
+          </a:ln>
+        </p:spPr>
+        <p:txBody>
+          <a:bodyPr wrap="square" lIns="0" tIns="0" rIns="0" bIns="0" anchor="ctr">
+            <a:noAutofit/>
+          </a:bodyPr>
+          <a:lstStyle/>
+          <a:p>
+            <a:pPr algn="ctr"/>
+            <a:r>
+              <a:rPr lang="en-US" sz="850" b="0" i="0" dirty="0">
+                <a:solidFill>
+                  <a:srgbClr val="5B6770"/>
+                </a:solidFill>
+                <a:latin typeface="Calibri"/>
+                <a:cs typeface="Calibri"/>
+              </a:rPr>
+              <a:t xml:space="preserve">DeepSeek</a:t>
+            </a:r>
+          </a:p>
+        </p:txBody>
+      </p:sp>
+      <p:sp>
+        <p:nvSpPr>
+          <p:cNvPr id="1168" name="Database"/>
+          <p:cNvSpPr txBox="1"/>
+          <p:nvPr/>
+        </p:nvSpPr>
+        <p:spPr>
+          <a:xfrm>
+            <a:off x="8577072" y="3383280"/>
+            <a:ext cx="1920239" cy="219456"/>
+          </a:xfrm>
+          <a:prstGeom prst="rect">
+            <a:avLst/>
+          </a:prstGeom>
+          <a:noFill/>
+          <a:ln>
+            <a:noFill/>
+          </a:ln>
+        </p:spPr>
+        <p:txBody>
+          <a:bodyPr wrap="square" lIns="0" tIns="0" rIns="0" bIns="0" anchor="ctr">
+            <a:noAutofit/>
+          </a:bodyPr>
+          <a:lstStyle/>
+          <a:p>
+            <a:pPr algn="ctr"/>
+            <a:r>
+              <a:rPr lang="en-US" sz="1100" b="1" i="0" dirty="0">
+                <a:solidFill>
+                  <a:srgbClr val="1F2328"/>
+                </a:solidFill>
+                <a:latin typeface="Calibri"/>
+                <a:cs typeface="Calibri"/>
+              </a:rPr>
+              <a:t xml:space="preserve">Chinook</a:t>
+            </a:r>
+          </a:p>
+        </p:txBody>
+      </p:sp>
+      <p:sp>
+        <p:nvSpPr>
+          <p:cNvPr id="1169" name="LLM"/>
+          <p:cNvSpPr txBox="1"/>
+          <p:nvPr/>
+        </p:nvSpPr>
+        <p:spPr>
+          <a:xfrm>
+            <a:off x="8577072" y="3611880"/>
+            <a:ext cx="640080" cy="182880"/>
+          </a:xfrm>
+          <a:prstGeom prst="rect">
+            <a:avLst/>
+          </a:prstGeom>
+          <a:noFill/>
+          <a:ln>
+            <a:noFill/>
+          </a:ln>
+        </p:spPr>
+        <p:txBody>
+          <a:bodyPr wrap="square" lIns="0" tIns="0" rIns="0" bIns="0" anchor="ctr">
+            <a:noAutofit/>
+          </a:bodyPr>
+          <a:lstStyle/>
+          <a:p>
+            <a:pPr algn="ctr"/>
+            <a:r>
+              <a:rPr lang="en-US" sz="850" b="0" i="0" dirty="0">
+                <a:solidFill>
+                  <a:srgbClr val="5B6770"/>
+                </a:solidFill>
+                <a:latin typeface="Calibri"/>
+                <a:cs typeface="Calibri"/>
+              </a:rPr>
+              <a:t xml:space="preserve">Claude</a:t>
+            </a:r>
+          </a:p>
+        </p:txBody>
+      </p:sp>
+      <p:sp>
+        <p:nvSpPr>
+          <p:cNvPr id="1170" name="LLM"/>
+          <p:cNvSpPr txBox="1"/>
+          <p:nvPr/>
+        </p:nvSpPr>
+        <p:spPr>
+          <a:xfrm>
+            <a:off x="9217151" y="3611880"/>
+            <a:ext cx="640080" cy="182880"/>
+          </a:xfrm>
+          <a:prstGeom prst="rect">
+            <a:avLst/>
+          </a:prstGeom>
+          <a:noFill/>
+          <a:ln>
+            <a:noFill/>
+          </a:ln>
+        </p:spPr>
+        <p:txBody>
+          <a:bodyPr wrap="square" lIns="0" tIns="0" rIns="0" bIns="0" anchor="ctr">
+            <a:noAutofit/>
+          </a:bodyPr>
+          <a:lstStyle/>
+          <a:p>
+            <a:pPr algn="ctr"/>
+            <a:r>
+              <a:rPr lang="en-US" sz="850" b="0" i="0" dirty="0">
+                <a:solidFill>
+                  <a:srgbClr val="5B6770"/>
+                </a:solidFill>
+                <a:latin typeface="Calibri"/>
+                <a:cs typeface="Calibri"/>
+              </a:rPr>
+              <a:t xml:space="preserve">Mistral</a:t>
+            </a:r>
+          </a:p>
+        </p:txBody>
+      </p:sp>
+      <p:sp>
+        <p:nvSpPr>
+          <p:cNvPr id="1171" name="LLM"/>
+          <p:cNvSpPr txBox="1"/>
+          <p:nvPr/>
+        </p:nvSpPr>
+        <p:spPr>
+          <a:xfrm>
+            <a:off x="9857232" y="3611880"/>
+            <a:ext cx="640080" cy="182880"/>
+          </a:xfrm>
+          <a:prstGeom prst="rect">
+            <a:avLst/>
+          </a:prstGeom>
+          <a:noFill/>
+          <a:ln>
+            <a:noFill/>
+          </a:ln>
+        </p:spPr>
+        <p:txBody>
+          <a:bodyPr wrap="square" lIns="0" tIns="0" rIns="0" bIns="0" anchor="ctr">
+            <a:noAutofit/>
+          </a:bodyPr>
+          <a:lstStyle/>
+          <a:p>
+            <a:pPr algn="ctr"/>
+            <a:r>
+              <a:rPr lang="en-US" sz="850" b="0" i="0" dirty="0">
+                <a:solidFill>
+                  <a:srgbClr val="5B6770"/>
+                </a:solidFill>
+                <a:latin typeface="Calibri"/>
+                <a:cs typeface="Calibri"/>
+              </a:rPr>
+              <a:t xml:space="preserve">DeepSeek</a:t>
+            </a:r>
+          </a:p>
+        </p:txBody>
+      </p:sp>
+      <p:sp>
+        <p:nvSpPr>
+          <p:cNvPr id="1172" name="Avg head"/>
+          <p:cNvSpPr txBox="1"/>
+          <p:nvPr/>
+        </p:nvSpPr>
+        <p:spPr>
+          <a:xfrm>
+            <a:off x="10543032" y="3493008"/>
+            <a:ext cx="685800" cy="237744"/>
+          </a:xfrm>
+          <a:prstGeom prst="rect">
+            <a:avLst/>
+          </a:prstGeom>
+          <a:noFill/>
+          <a:ln>
+            <a:noFill/>
+          </a:ln>
+        </p:spPr>
+        <p:txBody>
+          <a:bodyPr wrap="square" lIns="0" tIns="0" rIns="0" bIns="0" anchor="ctr">
+            <a:noAutofit/>
+          </a:bodyPr>
+          <a:lstStyle/>
+          <a:p>
+            <a:pPr algn="ctr"/>
+            <a:r>
+              <a:rPr lang="en-US" sz="1000" b="1" i="0" dirty="0">
+                <a:solidFill>
+                  <a:srgbClr val="5B6770"/>
+                </a:solidFill>
+                <a:latin typeface="Calibri"/>
+                <a:cs typeface="Calibri"/>
+              </a:rPr>
+              <a:t xml:space="preserve">Avg</a:t>
+            </a:r>
+          </a:p>
+        </p:txBody>
+      </p:sp>
+      <p:sp>
+        <p:nvSpPr>
+          <p:cNvPr id="1173" name="Method"/>
+          <p:cNvSpPr txBox="1"/>
+          <p:nvPr/>
+        </p:nvSpPr>
+        <p:spPr>
+          <a:xfrm>
+            <a:off x="3410712" y="3840480"/>
+            <a:ext cx="1325880" cy="457200"/>
           </a:xfrm>
           <a:prstGeom prst="rect">
             <a:avLst/>
@@ -11916,7 +14723,7 @@
           <a:p>
             <a:pPr algn="l"/>
             <a:r>
-              <a:rPr lang="en-US" sz="1400" b="0" i="0" dirty="0">
+              <a:rPr lang="en-US" sz="1200" b="0" i="0" dirty="0">
                 <a:solidFill>
                   <a:srgbClr val="1F2328"/>
                 </a:solidFill>
@@ -11930,76 +14737,1070 @@
       </p:sp>
       <p:sp>
         <p:nvSpPr>
-          <p:cNvPr id="1161" name="Track"/>
+          <p:cNvPr id="1174" name="Cell"/>
           <p:cNvSpPr/>
           <p:nvPr/>
         </p:nvSpPr>
         <p:spPr>
           <a:xfrm>
-            <a:off x="6108192" y="3639312"/>
-            <a:ext cx="4251960" cy="146304"/>
+            <a:off x="4754879" y="3858768"/>
+            <a:ext cx="1883663" cy="420624"/>
           </a:xfrm>
           <a:prstGeom prst="rect">
             <a:avLst/>
           </a:prstGeom>
           <a:solidFill>
-            <a:srgbClr val="EEF1EF"/>
+            <a:srgbClr val="BFE3CF"/>
           </a:solidFill>
           <a:ln>
             <a:noFill/>
           </a:ln>
         </p:spPr>
         <p:txBody>
-          <a:bodyPr wrap="square" lIns="0" tIns="0" rIns="0" bIns="0" anchor="t">
+          <a:bodyPr wrap="square" lIns="0" tIns="0" rIns="0" bIns="0" anchor="ctr">
+            <a:noAutofit/>
+          </a:bodyPr>
+          <a:lstStyle/>
+          <a:p>
+            <a:pPr algn="ctr"/>
+            <a:r>
+              <a:rPr lang="en-US" sz="1100" b="0" i="0" dirty="0">
+                <a:solidFill>
+                  <a:srgbClr val="1F2328"/>
+                </a:solidFill>
+                <a:latin typeface="Calibri"/>
+                <a:cs typeface="Calibri"/>
+              </a:rPr>
+              <a:t xml:space="preserve">97</a:t>
+            </a:r>
+          </a:p>
+        </p:txBody>
+      </p:sp>
+      <p:sp>
+        <p:nvSpPr>
+          <p:cNvPr id="1175" name="Cell"/>
+          <p:cNvSpPr/>
+          <p:nvPr/>
+        </p:nvSpPr>
+        <p:spPr>
+          <a:xfrm>
+            <a:off x="6675119" y="3858768"/>
+            <a:ext cx="1883663" cy="420624"/>
+          </a:xfrm>
+          <a:prstGeom prst="rect">
+            <a:avLst/>
+          </a:prstGeom>
+          <a:solidFill>
+            <a:srgbClr val="BFE3CF"/>
+          </a:solidFill>
+          <a:ln>
+            <a:noFill/>
+          </a:ln>
+        </p:spPr>
+        <p:txBody>
+          <a:bodyPr wrap="square" lIns="0" tIns="0" rIns="0" bIns="0" anchor="ctr">
+            <a:noAutofit/>
+          </a:bodyPr>
+          <a:lstStyle/>
+          <a:p>
+            <a:pPr algn="ctr"/>
+            <a:r>
+              <a:rPr lang="en-US" sz="1100" b="0" i="0" dirty="0">
+                <a:solidFill>
+                  <a:srgbClr val="1F2328"/>
+                </a:solidFill>
+                <a:latin typeface="Calibri"/>
+                <a:cs typeface="Calibri"/>
+              </a:rPr>
+              <a:t xml:space="preserve">99</a:t>
+            </a:r>
+          </a:p>
+        </p:txBody>
+      </p:sp>
+      <p:sp>
+        <p:nvSpPr>
+          <p:cNvPr id="1176" name="Cell"/>
+          <p:cNvSpPr/>
+          <p:nvPr/>
+        </p:nvSpPr>
+        <p:spPr>
+          <a:xfrm>
+            <a:off x="8595359" y="3858768"/>
+            <a:ext cx="1883663" cy="420624"/>
+          </a:xfrm>
+          <a:prstGeom prst="rect">
+            <a:avLst/>
+          </a:prstGeom>
+          <a:solidFill>
+            <a:srgbClr val="DDF0E5"/>
+          </a:solidFill>
+          <a:ln>
+            <a:noFill/>
+          </a:ln>
+        </p:spPr>
+        <p:txBody>
+          <a:bodyPr wrap="square" lIns="0" tIns="0" rIns="0" bIns="0" anchor="ctr">
+            <a:noAutofit/>
+          </a:bodyPr>
+          <a:lstStyle/>
+          <a:p>
+            <a:pPr algn="ctr"/>
+            <a:r>
+              <a:rPr lang="en-US" sz="1100" b="0" i="0" dirty="0">
+                <a:solidFill>
+                  <a:srgbClr val="1F2328"/>
+                </a:solidFill>
+                <a:latin typeface="Calibri"/>
+                <a:cs typeface="Calibri"/>
+              </a:rPr>
+              <a:t xml:space="preserve">78</a:t>
+            </a:r>
+          </a:p>
+        </p:txBody>
+      </p:sp>
+      <p:sp>
+        <p:nvSpPr>
+          <p:cNvPr id="1177" name="Avg"/>
+          <p:cNvSpPr txBox="1"/>
+          <p:nvPr/>
+        </p:nvSpPr>
+        <p:spPr>
+          <a:xfrm>
+            <a:off x="10543032" y="3840480"/>
+            <a:ext cx="685800" cy="457200"/>
+          </a:xfrm>
+          <a:prstGeom prst="rect">
+            <a:avLst/>
+          </a:prstGeom>
+          <a:noFill/>
+          <a:ln>
+            <a:noFill/>
+          </a:ln>
+        </p:spPr>
+        <p:txBody>
+          <a:bodyPr wrap="square" lIns="0" tIns="0" rIns="0" bIns="0" anchor="ctr">
+            <a:noAutofit/>
+          </a:bodyPr>
+          <a:lstStyle/>
+          <a:p>
+            <a:pPr algn="ctr"/>
+            <a:r>
+              <a:rPr lang="en-US" sz="1250" b="1" i="0" dirty="0">
+                <a:solidFill>
+                  <a:srgbClr val="1F2328"/>
+                </a:solidFill>
+                <a:latin typeface="Calibri"/>
+                <a:cs typeface="Calibri"/>
+              </a:rPr>
+              <a:t xml:space="preserve">91%</a:t>
+            </a:r>
+          </a:p>
+        </p:txBody>
+      </p:sp>
+      <p:sp>
+        <p:nvSpPr>
+          <p:cNvPr id="1178" name="Method"/>
+          <p:cNvSpPr txBox="1"/>
+          <p:nvPr/>
+        </p:nvSpPr>
+        <p:spPr>
+          <a:xfrm>
+            <a:off x="3410712" y="4297680"/>
+            <a:ext cx="1325880" cy="457200"/>
+          </a:xfrm>
+          <a:prstGeom prst="rect">
+            <a:avLst/>
+          </a:prstGeom>
+          <a:noFill/>
+          <a:ln>
+            <a:noFill/>
+          </a:ln>
+        </p:spPr>
+        <p:txBody>
+          <a:bodyPr wrap="square" lIns="0" tIns="0" rIns="0" bIns="0" anchor="ctr">
             <a:noAutofit/>
           </a:bodyPr>
           <a:lstStyle/>
           <a:p>
             <a:pPr algn="l"/>
-          </a:p>
-        </p:txBody>
-      </p:sp>
-      <p:sp>
-        <p:nvSpPr>
-          <p:cNvPr id="1162" name="Bar"/>
+            <a:r>
+              <a:rPr lang="en-US" sz="1200" b="0" i="0" dirty="0">
+                <a:solidFill>
+                  <a:srgbClr val="1F2328"/>
+                </a:solidFill>
+                <a:latin typeface="Calibri"/>
+                <a:cs typeface="Calibri"/>
+              </a:rPr>
+              <a:t xml:space="preserve">LLM baseline</a:t>
+            </a:r>
+          </a:p>
+        </p:txBody>
+      </p:sp>
+      <p:sp>
+        <p:nvSpPr>
+          <p:cNvPr id="1179" name="Cell"/>
           <p:cNvSpPr/>
           <p:nvPr/>
         </p:nvSpPr>
         <p:spPr>
           <a:xfrm>
-            <a:off x="6108192" y="3639312"/>
-            <a:ext cx="3869283" cy="146304"/>
+            <a:off x="4754879" y="4315968"/>
+            <a:ext cx="603503" cy="420624"/>
           </a:xfrm>
           <a:prstGeom prst="rect">
             <a:avLst/>
           </a:prstGeom>
           <a:solidFill>
-            <a:srgbClr val="9AA3A9"/>
+            <a:srgbClr val="BFE3CF"/>
           </a:solidFill>
           <a:ln>
             <a:noFill/>
           </a:ln>
         </p:spPr>
         <p:txBody>
-          <a:bodyPr wrap="square" lIns="0" tIns="0" rIns="0" bIns="0" anchor="t">
+          <a:bodyPr wrap="square" lIns="0" tIns="0" rIns="0" bIns="0" anchor="ctr">
+            <a:noAutofit/>
+          </a:bodyPr>
+          <a:lstStyle/>
+          <a:p>
+            <a:pPr algn="ctr"/>
+            <a:r>
+              <a:rPr lang="en-US" sz="1100" b="0" i="0" dirty="0">
+                <a:solidFill>
+                  <a:srgbClr val="1F2328"/>
+                </a:solidFill>
+                <a:latin typeface="Calibri"/>
+                <a:cs typeface="Calibri"/>
+              </a:rPr>
+              <a:t xml:space="preserve">94</a:t>
+            </a:r>
+          </a:p>
+        </p:txBody>
+      </p:sp>
+      <p:sp>
+        <p:nvSpPr>
+          <p:cNvPr id="1180" name="Cell"/>
+          <p:cNvSpPr/>
+          <p:nvPr/>
+        </p:nvSpPr>
+        <p:spPr>
+          <a:xfrm>
+            <a:off x="5394959" y="4315968"/>
+            <a:ext cx="603503" cy="420624"/>
+          </a:xfrm>
+          <a:prstGeom prst="rect">
+            <a:avLst/>
+          </a:prstGeom>
+          <a:solidFill>
+            <a:srgbClr val="F6DAD3"/>
+          </a:solidFill>
+          <a:ln>
+            <a:noFill/>
+          </a:ln>
+        </p:spPr>
+        <p:txBody>
+          <a:bodyPr wrap="square" lIns="0" tIns="0" rIns="0" bIns="0" anchor="ctr">
+            <a:noAutofit/>
+          </a:bodyPr>
+          <a:lstStyle/>
+          <a:p>
+            <a:pPr algn="ctr"/>
+            <a:r>
+              <a:rPr lang="en-US" sz="1100" b="0" i="0" dirty="0">
+                <a:solidFill>
+                  <a:srgbClr val="1F2328"/>
+                </a:solidFill>
+                <a:latin typeface="Calibri"/>
+                <a:cs typeface="Calibri"/>
+              </a:rPr>
+              <a:t xml:space="preserve">31</a:t>
+            </a:r>
+          </a:p>
+        </p:txBody>
+      </p:sp>
+      <p:sp>
+        <p:nvSpPr>
+          <p:cNvPr id="1181" name="Cell"/>
+          <p:cNvSpPr/>
+          <p:nvPr/>
+        </p:nvSpPr>
+        <p:spPr>
+          <a:xfrm>
+            <a:off x="6035040" y="4315968"/>
+            <a:ext cx="603503" cy="420624"/>
+          </a:xfrm>
+          <a:prstGeom prst="rect">
+            <a:avLst/>
+          </a:prstGeom>
+          <a:solidFill>
+            <a:srgbClr val="DDF0E5"/>
+          </a:solidFill>
+          <a:ln>
+            <a:noFill/>
+          </a:ln>
+        </p:spPr>
+        <p:txBody>
+          <a:bodyPr wrap="square" lIns="0" tIns="0" rIns="0" bIns="0" anchor="ctr">
+            <a:noAutofit/>
+          </a:bodyPr>
+          <a:lstStyle/>
+          <a:p>
+            <a:pPr algn="ctr"/>
+            <a:r>
+              <a:rPr lang="en-US" sz="1100" b="0" i="0" dirty="0">
+                <a:solidFill>
+                  <a:srgbClr val="1F2328"/>
+                </a:solidFill>
+                <a:latin typeface="Calibri"/>
+                <a:cs typeface="Calibri"/>
+              </a:rPr>
+              <a:t xml:space="preserve">89</a:t>
+            </a:r>
+          </a:p>
+        </p:txBody>
+      </p:sp>
+      <p:sp>
+        <p:nvSpPr>
+          <p:cNvPr id="1182" name="Cell"/>
+          <p:cNvSpPr/>
+          <p:nvPr/>
+        </p:nvSpPr>
+        <p:spPr>
+          <a:xfrm>
+            <a:off x="6675119" y="4315968"/>
+            <a:ext cx="603503" cy="420624"/>
+          </a:xfrm>
+          <a:prstGeom prst="rect">
+            <a:avLst/>
+          </a:prstGeom>
+          <a:solidFill>
+            <a:srgbClr val="BFE3CF"/>
+          </a:solidFill>
+          <a:ln>
+            <a:noFill/>
+          </a:ln>
+        </p:spPr>
+        <p:txBody>
+          <a:bodyPr wrap="square" lIns="0" tIns="0" rIns="0" bIns="0" anchor="ctr">
+            <a:noAutofit/>
+          </a:bodyPr>
+          <a:lstStyle/>
+          <a:p>
+            <a:pPr algn="ctr"/>
+            <a:r>
+              <a:rPr lang="en-US" sz="1100" b="0" i="0" dirty="0">
+                <a:solidFill>
+                  <a:srgbClr val="1F2328"/>
+                </a:solidFill>
+                <a:latin typeface="Calibri"/>
+                <a:cs typeface="Calibri"/>
+              </a:rPr>
+              <a:t xml:space="preserve">96</a:t>
+            </a:r>
+          </a:p>
+        </p:txBody>
+      </p:sp>
+      <p:sp>
+        <p:nvSpPr>
+          <p:cNvPr id="1183" name="Cell"/>
+          <p:cNvSpPr/>
+          <p:nvPr/>
+        </p:nvSpPr>
+        <p:spPr>
+          <a:xfrm>
+            <a:off x="7315199" y="4315968"/>
+            <a:ext cx="603503" cy="420624"/>
+          </a:xfrm>
+          <a:prstGeom prst="rect">
+            <a:avLst/>
+          </a:prstGeom>
+          <a:solidFill>
+            <a:srgbClr val="F1F3F2"/>
+          </a:solidFill>
+          <a:ln>
+            <a:noFill/>
+          </a:ln>
+        </p:spPr>
+        <p:txBody>
+          <a:bodyPr wrap="square" lIns="0" tIns="0" rIns="0" bIns="0" anchor="ctr">
+            <a:noAutofit/>
+          </a:bodyPr>
+          <a:lstStyle/>
+          <a:p>
+            <a:pPr algn="ctr"/>
+            <a:r>
+              <a:rPr lang="en-US" sz="1100" b="0" i="0" dirty="0">
+                <a:solidFill>
+                  <a:srgbClr val="1F2328"/>
+                </a:solidFill>
+                <a:latin typeface="Calibri"/>
+                <a:cs typeface="Calibri"/>
+              </a:rPr>
+              <a:t xml:space="preserve">68</a:t>
+            </a:r>
+          </a:p>
+        </p:txBody>
+      </p:sp>
+      <p:sp>
+        <p:nvSpPr>
+          <p:cNvPr id="1184" name="Cell"/>
+          <p:cNvSpPr/>
+          <p:nvPr/>
+        </p:nvSpPr>
+        <p:spPr>
+          <a:xfrm>
+            <a:off x="7955279" y="4315968"/>
+            <a:ext cx="603503" cy="420624"/>
+          </a:xfrm>
+          <a:prstGeom prst="rect">
+            <a:avLst/>
+          </a:prstGeom>
+          <a:solidFill>
+            <a:srgbClr val="DDF0E5"/>
+          </a:solidFill>
+          <a:ln>
+            <a:noFill/>
+          </a:ln>
+        </p:spPr>
+        <p:txBody>
+          <a:bodyPr wrap="square" lIns="0" tIns="0" rIns="0" bIns="0" anchor="ctr">
+            <a:noAutofit/>
+          </a:bodyPr>
+          <a:lstStyle/>
+          <a:p>
+            <a:pPr algn="ctr"/>
+            <a:r>
+              <a:rPr lang="en-US" sz="1100" b="0" i="0" dirty="0">
+                <a:solidFill>
+                  <a:srgbClr val="1F2328"/>
+                </a:solidFill>
+                <a:latin typeface="Calibri"/>
+                <a:cs typeface="Calibri"/>
+              </a:rPr>
+              <a:t xml:space="preserve">86</a:t>
+            </a:r>
+          </a:p>
+        </p:txBody>
+      </p:sp>
+      <p:sp>
+        <p:nvSpPr>
+          <p:cNvPr id="1185" name="Cell"/>
+          <p:cNvSpPr/>
+          <p:nvPr/>
+        </p:nvSpPr>
+        <p:spPr>
+          <a:xfrm>
+            <a:off x="8595359" y="4315968"/>
+            <a:ext cx="603503" cy="420624"/>
+          </a:xfrm>
+          <a:prstGeom prst="rect">
+            <a:avLst/>
+          </a:prstGeom>
+          <a:solidFill>
+            <a:srgbClr val="BFE3CF"/>
+          </a:solidFill>
+          <a:ln>
+            <a:noFill/>
+          </a:ln>
+        </p:spPr>
+        <p:txBody>
+          <a:bodyPr wrap="square" lIns="0" tIns="0" rIns="0" bIns="0" anchor="ctr">
+            <a:noAutofit/>
+          </a:bodyPr>
+          <a:lstStyle/>
+          <a:p>
+            <a:pPr algn="ctr"/>
+            <a:r>
+              <a:rPr lang="en-US" sz="1100" b="0" i="0" dirty="0">
+                <a:solidFill>
+                  <a:srgbClr val="1F2328"/>
+                </a:solidFill>
+                <a:latin typeface="Calibri"/>
+                <a:cs typeface="Calibri"/>
+              </a:rPr>
+              <a:t xml:space="preserve">100</a:t>
+            </a:r>
+          </a:p>
+        </p:txBody>
+      </p:sp>
+      <p:sp>
+        <p:nvSpPr>
+          <p:cNvPr id="1186" name="Cell"/>
+          <p:cNvSpPr/>
+          <p:nvPr/>
+        </p:nvSpPr>
+        <p:spPr>
+          <a:xfrm>
+            <a:off x="9235439" y="4315968"/>
+            <a:ext cx="603503" cy="420624"/>
+          </a:xfrm>
+          <a:prstGeom prst="rect">
+            <a:avLst/>
+          </a:prstGeom>
+          <a:solidFill>
+            <a:srgbClr val="F1F3F2"/>
+          </a:solidFill>
+          <a:ln>
+            <a:noFill/>
+          </a:ln>
+        </p:spPr>
+        <p:txBody>
+          <a:bodyPr wrap="square" lIns="0" tIns="0" rIns="0" bIns="0" anchor="ctr">
+            <a:noAutofit/>
+          </a:bodyPr>
+          <a:lstStyle/>
+          <a:p>
+            <a:pPr algn="ctr"/>
+            <a:r>
+              <a:rPr lang="en-US" sz="1100" b="0" i="0" dirty="0">
+                <a:solidFill>
+                  <a:srgbClr val="1F2328"/>
+                </a:solidFill>
+                <a:latin typeface="Calibri"/>
+                <a:cs typeface="Calibri"/>
+              </a:rPr>
+              <a:t xml:space="preserve">50</a:t>
+            </a:r>
+          </a:p>
+        </p:txBody>
+      </p:sp>
+      <p:sp>
+        <p:nvSpPr>
+          <p:cNvPr id="1187" name="Cell"/>
+          <p:cNvSpPr/>
+          <p:nvPr/>
+        </p:nvSpPr>
+        <p:spPr>
+          <a:xfrm>
+            <a:off x="9875519" y="4315968"/>
+            <a:ext cx="603503" cy="420624"/>
+          </a:xfrm>
+          <a:prstGeom prst="rect">
+            <a:avLst/>
+          </a:prstGeom>
+          <a:solidFill>
+            <a:srgbClr val="F1F3F2"/>
+          </a:solidFill>
+          <a:ln>
+            <a:noFill/>
+          </a:ln>
+        </p:spPr>
+        <p:txBody>
+          <a:bodyPr wrap="square" lIns="0" tIns="0" rIns="0" bIns="0" anchor="ctr">
+            <a:noAutofit/>
+          </a:bodyPr>
+          <a:lstStyle/>
+          <a:p>
+            <a:pPr algn="ctr"/>
+            <a:r>
+              <a:rPr lang="en-US" sz="1100" b="0" i="0" dirty="0">
+                <a:solidFill>
+                  <a:srgbClr val="1F2328"/>
+                </a:solidFill>
+                <a:latin typeface="Calibri"/>
+                <a:cs typeface="Calibri"/>
+              </a:rPr>
+              <a:t xml:space="preserve">52</a:t>
+            </a:r>
+          </a:p>
+        </p:txBody>
+      </p:sp>
+      <p:sp>
+        <p:nvSpPr>
+          <p:cNvPr id="1188" name="Avg"/>
+          <p:cNvSpPr txBox="1"/>
+          <p:nvPr/>
+        </p:nvSpPr>
+        <p:spPr>
+          <a:xfrm>
+            <a:off x="10543032" y="4297680"/>
+            <a:ext cx="685800" cy="457200"/>
+          </a:xfrm>
+          <a:prstGeom prst="rect">
+            <a:avLst/>
+          </a:prstGeom>
+          <a:noFill/>
+          <a:ln>
+            <a:noFill/>
+          </a:ln>
+        </p:spPr>
+        <p:txBody>
+          <a:bodyPr wrap="square" lIns="0" tIns="0" rIns="0" bIns="0" anchor="ctr">
+            <a:noAutofit/>
+          </a:bodyPr>
+          <a:lstStyle/>
+          <a:p>
+            <a:pPr algn="ctr"/>
+            <a:r>
+              <a:rPr lang="en-US" sz="1250" b="1" i="0" dirty="0">
+                <a:solidFill>
+                  <a:srgbClr val="1F2328"/>
+                </a:solidFill>
+                <a:latin typeface="Calibri"/>
+                <a:cs typeface="Calibri"/>
+              </a:rPr>
+              <a:t xml:space="preserve">74%</a:t>
+            </a:r>
+          </a:p>
+        </p:txBody>
+      </p:sp>
+      <p:sp>
+        <p:nvSpPr>
+          <p:cNvPr id="1189" name="Method"/>
+          <p:cNvSpPr txBox="1"/>
+          <p:nvPr/>
+        </p:nvSpPr>
+        <p:spPr>
+          <a:xfrm>
+            <a:off x="3410712" y="4754880"/>
+            <a:ext cx="1325880" cy="457200"/>
+          </a:xfrm>
+          <a:prstGeom prst="rect">
+            <a:avLst/>
+          </a:prstGeom>
+          <a:noFill/>
+          <a:ln>
+            <a:noFill/>
+          </a:ln>
+        </p:spPr>
+        <p:txBody>
+          <a:bodyPr wrap="square" lIns="0" tIns="0" rIns="0" bIns="0" anchor="ctr">
             <a:noAutofit/>
           </a:bodyPr>
           <a:lstStyle/>
           <a:p>
             <a:pPr algn="l"/>
-          </a:p>
-        </p:txBody>
-      </p:sp>
-      <p:sp>
-        <p:nvSpPr>
-          <p:cNvPr id="1163" name="Value"/>
+            <a:r>
+              <a:rPr lang="en-US" sz="1200" b="0" i="0" dirty="0">
+                <a:solidFill>
+                  <a:srgbClr val="1F2328"/>
+                </a:solidFill>
+                <a:latin typeface="Calibri"/>
+                <a:cs typeface="Calibri"/>
+              </a:rPr>
+              <a:t xml:space="preserve">Non-Iterative</a:t>
+            </a:r>
+          </a:p>
+        </p:txBody>
+      </p:sp>
+      <p:sp>
+        <p:nvSpPr>
+          <p:cNvPr id="1190" name="Cell"/>
+          <p:cNvSpPr/>
+          <p:nvPr/>
+        </p:nvSpPr>
+        <p:spPr>
+          <a:xfrm>
+            <a:off x="4754879" y="4773168"/>
+            <a:ext cx="603503" cy="420624"/>
+          </a:xfrm>
+          <a:prstGeom prst="rect">
+            <a:avLst/>
+          </a:prstGeom>
+          <a:solidFill>
+            <a:srgbClr val="F6DAD3"/>
+          </a:solidFill>
+          <a:ln>
+            <a:noFill/>
+          </a:ln>
+        </p:spPr>
+        <p:txBody>
+          <a:bodyPr wrap="square" lIns="0" tIns="0" rIns="0" bIns="0" anchor="ctr">
+            <a:noAutofit/>
+          </a:bodyPr>
+          <a:lstStyle/>
+          <a:p>
+            <a:pPr algn="ctr"/>
+            <a:r>
+              <a:rPr lang="en-US" sz="1100" b="0" i="0" dirty="0">
+                <a:solidFill>
+                  <a:srgbClr val="1F2328"/>
+                </a:solidFill>
+                <a:latin typeface="Calibri"/>
+                <a:cs typeface="Calibri"/>
+              </a:rPr>
+              <a:t xml:space="preserve">41</a:t>
+            </a:r>
+          </a:p>
+        </p:txBody>
+      </p:sp>
+      <p:sp>
+        <p:nvSpPr>
+          <p:cNvPr id="1191" name="Cell"/>
+          <p:cNvSpPr/>
+          <p:nvPr/>
+        </p:nvSpPr>
+        <p:spPr>
+          <a:xfrm>
+            <a:off x="5394959" y="4773168"/>
+            <a:ext cx="603503" cy="420624"/>
+          </a:xfrm>
+          <a:prstGeom prst="rect">
+            <a:avLst/>
+          </a:prstGeom>
+          <a:solidFill>
+            <a:srgbClr val="EDB8AC"/>
+          </a:solidFill>
+          <a:ln>
+            <a:noFill/>
+          </a:ln>
+        </p:spPr>
+        <p:txBody>
+          <a:bodyPr wrap="square" lIns="0" tIns="0" rIns="0" bIns="0" anchor="ctr">
+            <a:noAutofit/>
+          </a:bodyPr>
+          <a:lstStyle/>
+          <a:p>
+            <a:pPr algn="ctr"/>
+            <a:r>
+              <a:rPr lang="en-US" sz="1100" b="0" i="0" dirty="0">
+                <a:solidFill>
+                  <a:srgbClr val="1F2328"/>
+                </a:solidFill>
+                <a:latin typeface="Calibri"/>
+                <a:cs typeface="Calibri"/>
+              </a:rPr>
+              <a:t xml:space="preserve">6</a:t>
+            </a:r>
+          </a:p>
+        </p:txBody>
+      </p:sp>
+      <p:sp>
+        <p:nvSpPr>
+          <p:cNvPr id="1192" name="Cell"/>
+          <p:cNvSpPr/>
+          <p:nvPr/>
+        </p:nvSpPr>
+        <p:spPr>
+          <a:xfrm>
+            <a:off x="6035040" y="4773168"/>
+            <a:ext cx="603503" cy="420624"/>
+          </a:xfrm>
+          <a:prstGeom prst="rect">
+            <a:avLst/>
+          </a:prstGeom>
+          <a:solidFill>
+            <a:srgbClr val="EDB8AC"/>
+          </a:solidFill>
+          <a:ln>
+            <a:noFill/>
+          </a:ln>
+        </p:spPr>
+        <p:txBody>
+          <a:bodyPr wrap="square" lIns="0" tIns="0" rIns="0" bIns="0" anchor="ctr">
+            <a:noAutofit/>
+          </a:bodyPr>
+          <a:lstStyle/>
+          <a:p>
+            <a:pPr algn="ctr"/>
+            <a:r>
+              <a:rPr lang="en-US" sz="1100" b="0" i="0" dirty="0">
+                <a:solidFill>
+                  <a:srgbClr val="1F2328"/>
+                </a:solidFill>
+                <a:latin typeface="Calibri"/>
+                <a:cs typeface="Calibri"/>
+              </a:rPr>
+              <a:t xml:space="preserve">12</a:t>
+            </a:r>
+          </a:p>
+        </p:txBody>
+      </p:sp>
+      <p:sp>
+        <p:nvSpPr>
+          <p:cNvPr id="1193" name="Cell"/>
+          <p:cNvSpPr/>
+          <p:nvPr/>
+        </p:nvSpPr>
+        <p:spPr>
+          <a:xfrm>
+            <a:off x="6675119" y="4773168"/>
+            <a:ext cx="603503" cy="420624"/>
+          </a:xfrm>
+          <a:prstGeom prst="rect">
+            <a:avLst/>
+          </a:prstGeom>
+          <a:solidFill>
+            <a:srgbClr val="F6DAD3"/>
+          </a:solidFill>
+          <a:ln>
+            <a:noFill/>
+          </a:ln>
+        </p:spPr>
+        <p:txBody>
+          <a:bodyPr wrap="square" lIns="0" tIns="0" rIns="0" bIns="0" anchor="ctr">
+            <a:noAutofit/>
+          </a:bodyPr>
+          <a:lstStyle/>
+          <a:p>
+            <a:pPr algn="ctr"/>
+            <a:r>
+              <a:rPr lang="en-US" sz="1100" b="0" i="0" dirty="0">
+                <a:solidFill>
+                  <a:srgbClr val="1F2328"/>
+                </a:solidFill>
+                <a:latin typeface="Calibri"/>
+                <a:cs typeface="Calibri"/>
+              </a:rPr>
+              <a:t xml:space="preserve">22</a:t>
+            </a:r>
+          </a:p>
+        </p:txBody>
+      </p:sp>
+      <p:sp>
+        <p:nvSpPr>
+          <p:cNvPr id="1194" name="Cell"/>
+          <p:cNvSpPr/>
+          <p:nvPr/>
+        </p:nvSpPr>
+        <p:spPr>
+          <a:xfrm>
+            <a:off x="7315199" y="4773168"/>
+            <a:ext cx="603503" cy="420624"/>
+          </a:xfrm>
+          <a:prstGeom prst="rect">
+            <a:avLst/>
+          </a:prstGeom>
+          <a:solidFill>
+            <a:srgbClr val="F6DAD3"/>
+          </a:solidFill>
+          <a:ln>
+            <a:noFill/>
+          </a:ln>
+        </p:spPr>
+        <p:txBody>
+          <a:bodyPr wrap="square" lIns="0" tIns="0" rIns="0" bIns="0" anchor="ctr">
+            <a:noAutofit/>
+          </a:bodyPr>
+          <a:lstStyle/>
+          <a:p>
+            <a:pPr algn="ctr"/>
+            <a:r>
+              <a:rPr lang="en-US" sz="1100" b="0" i="0" dirty="0">
+                <a:solidFill>
+                  <a:srgbClr val="1F2328"/>
+                </a:solidFill>
+                <a:latin typeface="Calibri"/>
+                <a:cs typeface="Calibri"/>
+              </a:rPr>
+              <a:t xml:space="preserve">28</a:t>
+            </a:r>
+          </a:p>
+        </p:txBody>
+      </p:sp>
+      <p:sp>
+        <p:nvSpPr>
+          <p:cNvPr id="1195" name="Cell"/>
+          <p:cNvSpPr/>
+          <p:nvPr/>
+        </p:nvSpPr>
+        <p:spPr>
+          <a:xfrm>
+            <a:off x="7955279" y="4773168"/>
+            <a:ext cx="603503" cy="420624"/>
+          </a:xfrm>
+          <a:prstGeom prst="rect">
+            <a:avLst/>
+          </a:prstGeom>
+          <a:solidFill>
+            <a:srgbClr val="F6DAD3"/>
+          </a:solidFill>
+          <a:ln>
+            <a:noFill/>
+          </a:ln>
+        </p:spPr>
+        <p:txBody>
+          <a:bodyPr wrap="square" lIns="0" tIns="0" rIns="0" bIns="0" anchor="ctr">
+            <a:noAutofit/>
+          </a:bodyPr>
+          <a:lstStyle/>
+          <a:p>
+            <a:pPr algn="ctr"/>
+            <a:r>
+              <a:rPr lang="en-US" sz="1100" b="0" i="0" dirty="0">
+                <a:solidFill>
+                  <a:srgbClr val="1F2328"/>
+                </a:solidFill>
+                <a:latin typeface="Calibri"/>
+                <a:cs typeface="Calibri"/>
+              </a:rPr>
+              <a:t xml:space="preserve">46</a:t>
+            </a:r>
+          </a:p>
+        </p:txBody>
+      </p:sp>
+      <p:sp>
+        <p:nvSpPr>
+          <p:cNvPr id="1196" name="Cell"/>
+          <p:cNvSpPr/>
+          <p:nvPr/>
+        </p:nvSpPr>
+        <p:spPr>
+          <a:xfrm>
+            <a:off x="8595359" y="4773168"/>
+            <a:ext cx="603503" cy="420624"/>
+          </a:xfrm>
+          <a:prstGeom prst="rect">
+            <a:avLst/>
+          </a:prstGeom>
+          <a:solidFill>
+            <a:srgbClr val="F1F3F2"/>
+          </a:solidFill>
+          <a:ln>
+            <a:noFill/>
+          </a:ln>
+        </p:spPr>
+        <p:txBody>
+          <a:bodyPr wrap="square" lIns="0" tIns="0" rIns="0" bIns="0" anchor="ctr">
+            <a:noAutofit/>
+          </a:bodyPr>
+          <a:lstStyle/>
+          <a:p>
+            <a:pPr algn="ctr"/>
+            <a:r>
+              <a:rPr lang="en-US" sz="1100" b="0" i="0" dirty="0">
+                <a:solidFill>
+                  <a:srgbClr val="1F2328"/>
+                </a:solidFill>
+                <a:latin typeface="Calibri"/>
+                <a:cs typeface="Calibri"/>
+              </a:rPr>
+              <a:t xml:space="preserve">58</a:t>
+            </a:r>
+          </a:p>
+        </p:txBody>
+      </p:sp>
+      <p:sp>
+        <p:nvSpPr>
+          <p:cNvPr id="1197" name="Cell"/>
+          <p:cNvSpPr/>
+          <p:nvPr/>
+        </p:nvSpPr>
+        <p:spPr>
+          <a:xfrm>
+            <a:off x="9235439" y="4773168"/>
+            <a:ext cx="603503" cy="420624"/>
+          </a:xfrm>
+          <a:prstGeom prst="rect">
+            <a:avLst/>
+          </a:prstGeom>
+          <a:solidFill>
+            <a:srgbClr val="EDB8AC"/>
+          </a:solidFill>
+          <a:ln>
+            <a:noFill/>
+          </a:ln>
+        </p:spPr>
+        <p:txBody>
+          <a:bodyPr wrap="square" lIns="0" tIns="0" rIns="0" bIns="0" anchor="ctr">
+            <a:noAutofit/>
+          </a:bodyPr>
+          <a:lstStyle/>
+          <a:p>
+            <a:pPr algn="ctr"/>
+            <a:r>
+              <a:rPr lang="en-US" sz="1100" b="0" i="0" dirty="0">
+                <a:solidFill>
+                  <a:srgbClr val="1F2328"/>
+                </a:solidFill>
+                <a:latin typeface="Calibri"/>
+                <a:cs typeface="Calibri"/>
+              </a:rPr>
+              <a:t xml:space="preserve">16</a:t>
+            </a:r>
+          </a:p>
+        </p:txBody>
+      </p:sp>
+      <p:sp>
+        <p:nvSpPr>
+          <p:cNvPr id="1198" name="Cell"/>
+          <p:cNvSpPr/>
+          <p:nvPr/>
+        </p:nvSpPr>
+        <p:spPr>
+          <a:xfrm>
+            <a:off x="9875519" y="4773168"/>
+            <a:ext cx="603503" cy="420624"/>
+          </a:xfrm>
+          <a:prstGeom prst="rect">
+            <a:avLst/>
+          </a:prstGeom>
+          <a:solidFill>
+            <a:srgbClr val="DDF0E5"/>
+          </a:solidFill>
+          <a:ln>
+            <a:noFill/>
+          </a:ln>
+        </p:spPr>
+        <p:txBody>
+          <a:bodyPr wrap="square" lIns="0" tIns="0" rIns="0" bIns="0" anchor="ctr">
+            <a:noAutofit/>
+          </a:bodyPr>
+          <a:lstStyle/>
+          <a:p>
+            <a:pPr algn="ctr"/>
+            <a:r>
+              <a:rPr lang="en-US" sz="1100" b="0" i="0" dirty="0">
+                <a:solidFill>
+                  <a:srgbClr val="1F2328"/>
+                </a:solidFill>
+                <a:latin typeface="Calibri"/>
+                <a:cs typeface="Calibri"/>
+              </a:rPr>
+              <a:t xml:space="preserve">78</a:t>
+            </a:r>
+          </a:p>
+        </p:txBody>
+      </p:sp>
+      <p:sp>
+        <p:nvSpPr>
+          <p:cNvPr id="1199" name="Avg"/>
           <p:cNvSpPr txBox="1"/>
           <p:nvPr/>
         </p:nvSpPr>
         <p:spPr>
           <a:xfrm>
-            <a:off x="10433304" y="3566160"/>
-            <a:ext cx="731520" cy="292608"/>
+            <a:off x="10543032" y="4754880"/>
+            <a:ext cx="685800" cy="457200"/>
+          </a:xfrm>
+          <a:prstGeom prst="rect">
+            <a:avLst/>
+          </a:prstGeom>
+          <a:noFill/>
+          <a:ln>
+            <a:noFill/>
+          </a:ln>
+        </p:spPr>
+        <p:txBody>
+          <a:bodyPr wrap="square" lIns="0" tIns="0" rIns="0" bIns="0" anchor="ctr">
+            <a:noAutofit/>
+          </a:bodyPr>
+          <a:lstStyle/>
+          <a:p>
+            <a:pPr algn="ctr"/>
+            <a:r>
+              <a:rPr lang="en-US" sz="1250" b="1" i="0" dirty="0">
+                <a:solidFill>
+                  <a:srgbClr val="1F2328"/>
+                </a:solidFill>
+                <a:latin typeface="Calibri"/>
+                <a:cs typeface="Calibri"/>
+              </a:rPr>
+              <a:t xml:space="preserve">34%</a:t>
+            </a:r>
+          </a:p>
+        </p:txBody>
+      </p:sp>
+      <p:sp>
+        <p:nvSpPr>
+          <p:cNvPr id="1200" name="Method"/>
+          <p:cNvSpPr txBox="1"/>
+          <p:nvPr/>
+        </p:nvSpPr>
+        <p:spPr>
+          <a:xfrm>
+            <a:off x="3410712" y="5212080"/>
+            <a:ext cx="1325880" cy="457200"/>
           </a:xfrm>
           <a:prstGeom prst="rect">
             <a:avLst/>
@@ -12017,433 +15818,421 @@
           <a:p>
             <a:pPr algn="l"/>
             <a:r>
-              <a:rPr lang="en-US" sz="1500" b="1" i="0" dirty="0">
-                <a:solidFill>
-                  <a:srgbClr val="3A434C"/>
-                </a:solidFill>
-                <a:latin typeface="Calibri"/>
-                <a:cs typeface="Calibri"/>
-              </a:rPr>
-              <a:t xml:space="preserve">91%</a:t>
-            </a:r>
-          </a:p>
-        </p:txBody>
-      </p:sp>
-      <p:sp>
-        <p:nvSpPr>
-          <p:cNvPr id="1164" name="Method"/>
+              <a:rPr lang="en-US" sz="1200" b="1" i="0" dirty="0">
+                <a:solidFill>
+                  <a:srgbClr val="0B6E4F"/>
+                </a:solidFill>
+                <a:latin typeface="Calibri"/>
+                <a:cs typeface="Calibri"/>
+              </a:rPr>
+              <a:t xml:space="preserve">RIGOR</a:t>
+            </a:r>
+          </a:p>
+        </p:txBody>
+      </p:sp>
+      <p:sp>
+        <p:nvSpPr>
+          <p:cNvPr id="1201" name="Cell"/>
+          <p:cNvSpPr/>
+          <p:nvPr/>
+        </p:nvSpPr>
+        <p:spPr>
+          <a:xfrm>
+            <a:off x="4754879" y="5230368"/>
+            <a:ext cx="603503" cy="420624"/>
+          </a:xfrm>
+          <a:prstGeom prst="rect">
+            <a:avLst/>
+          </a:prstGeom>
+          <a:solidFill>
+            <a:srgbClr val="BFE3CF"/>
+          </a:solidFill>
+          <a:ln>
+            <a:noFill/>
+          </a:ln>
+        </p:spPr>
+        <p:txBody>
+          <a:bodyPr wrap="square" lIns="0" tIns="0" rIns="0" bIns="0" anchor="ctr">
+            <a:noAutofit/>
+          </a:bodyPr>
+          <a:lstStyle/>
+          <a:p>
+            <a:pPr algn="ctr"/>
+            <a:r>
+              <a:rPr lang="en-US" sz="1100" b="1" i="0" dirty="0">
+                <a:solidFill>
+                  <a:srgbClr val="1F2328"/>
+                </a:solidFill>
+                <a:latin typeface="Calibri"/>
+                <a:cs typeface="Calibri"/>
+              </a:rPr>
+              <a:t xml:space="preserve">91</a:t>
+            </a:r>
+          </a:p>
+        </p:txBody>
+      </p:sp>
+      <p:sp>
+        <p:nvSpPr>
+          <p:cNvPr id="1202" name="Cell"/>
+          <p:cNvSpPr/>
+          <p:nvPr/>
+        </p:nvSpPr>
+        <p:spPr>
+          <a:xfrm>
+            <a:off x="5394959" y="5230368"/>
+            <a:ext cx="603503" cy="420624"/>
+          </a:xfrm>
+          <a:prstGeom prst="rect">
+            <a:avLst/>
+          </a:prstGeom>
+          <a:solidFill>
+            <a:srgbClr val="BFE3CF"/>
+          </a:solidFill>
+          <a:ln>
+            <a:noFill/>
+          </a:ln>
+        </p:spPr>
+        <p:txBody>
+          <a:bodyPr wrap="square" lIns="0" tIns="0" rIns="0" bIns="0" anchor="ctr">
+            <a:noAutofit/>
+          </a:bodyPr>
+          <a:lstStyle/>
+          <a:p>
+            <a:pPr algn="ctr"/>
+            <a:r>
+              <a:rPr lang="en-US" sz="1100" b="1" i="0" dirty="0">
+                <a:solidFill>
+                  <a:srgbClr val="1F2328"/>
+                </a:solidFill>
+                <a:latin typeface="Calibri"/>
+                <a:cs typeface="Calibri"/>
+              </a:rPr>
+              <a:t xml:space="preserve">99</a:t>
+            </a:r>
+          </a:p>
+        </p:txBody>
+      </p:sp>
+      <p:sp>
+        <p:nvSpPr>
+          <p:cNvPr id="1203" name="Cell"/>
+          <p:cNvSpPr/>
+          <p:nvPr/>
+        </p:nvSpPr>
+        <p:spPr>
+          <a:xfrm>
+            <a:off x="6035040" y="5230368"/>
+            <a:ext cx="603503" cy="420624"/>
+          </a:xfrm>
+          <a:prstGeom prst="rect">
+            <a:avLst/>
+          </a:prstGeom>
+          <a:solidFill>
+            <a:srgbClr val="DDF0E5"/>
+          </a:solidFill>
+          <a:ln>
+            <a:noFill/>
+          </a:ln>
+        </p:spPr>
+        <p:txBody>
+          <a:bodyPr wrap="square" lIns="0" tIns="0" rIns="0" bIns="0" anchor="ctr">
+            <a:noAutofit/>
+          </a:bodyPr>
+          <a:lstStyle/>
+          <a:p>
+            <a:pPr algn="ctr"/>
+            <a:r>
+              <a:rPr lang="en-US" sz="1100" b="1" i="0" dirty="0">
+                <a:solidFill>
+                  <a:srgbClr val="1F2328"/>
+                </a:solidFill>
+                <a:latin typeface="Calibri"/>
+                <a:cs typeface="Calibri"/>
+              </a:rPr>
+              <a:t xml:space="preserve">87</a:t>
+            </a:r>
+          </a:p>
+        </p:txBody>
+      </p:sp>
+      <p:sp>
+        <p:nvSpPr>
+          <p:cNvPr id="1204" name="Cell"/>
+          <p:cNvSpPr/>
+          <p:nvPr/>
+        </p:nvSpPr>
+        <p:spPr>
+          <a:xfrm>
+            <a:off x="6675119" y="5230368"/>
+            <a:ext cx="603503" cy="420624"/>
+          </a:xfrm>
+          <a:prstGeom prst="rect">
+            <a:avLst/>
+          </a:prstGeom>
+          <a:solidFill>
+            <a:srgbClr val="BFE3CF"/>
+          </a:solidFill>
+          <a:ln>
+            <a:noFill/>
+          </a:ln>
+        </p:spPr>
+        <p:txBody>
+          <a:bodyPr wrap="square" lIns="0" tIns="0" rIns="0" bIns="0" anchor="ctr">
+            <a:noAutofit/>
+          </a:bodyPr>
+          <a:lstStyle/>
+          <a:p>
+            <a:pPr algn="ctr"/>
+            <a:r>
+              <a:rPr lang="en-US" sz="1100" b="1" i="0" dirty="0">
+                <a:solidFill>
+                  <a:srgbClr val="1F2328"/>
+                </a:solidFill>
+                <a:latin typeface="Calibri"/>
+                <a:cs typeface="Calibri"/>
+              </a:rPr>
+              <a:t xml:space="preserve">100</a:t>
+            </a:r>
+          </a:p>
+        </p:txBody>
+      </p:sp>
+      <p:sp>
+        <p:nvSpPr>
+          <p:cNvPr id="1205" name="Cell"/>
+          <p:cNvSpPr/>
+          <p:nvPr/>
+        </p:nvSpPr>
+        <p:spPr>
+          <a:xfrm>
+            <a:off x="7315199" y="5230368"/>
+            <a:ext cx="603503" cy="420624"/>
+          </a:xfrm>
+          <a:prstGeom prst="rect">
+            <a:avLst/>
+          </a:prstGeom>
+          <a:solidFill>
+            <a:srgbClr val="BFE3CF"/>
+          </a:solidFill>
+          <a:ln>
+            <a:noFill/>
+          </a:ln>
+        </p:spPr>
+        <p:txBody>
+          <a:bodyPr wrap="square" lIns="0" tIns="0" rIns="0" bIns="0" anchor="ctr">
+            <a:noAutofit/>
+          </a:bodyPr>
+          <a:lstStyle/>
+          <a:p>
+            <a:pPr algn="ctr"/>
+            <a:r>
+              <a:rPr lang="en-US" sz="1100" b="1" i="0" dirty="0">
+                <a:solidFill>
+                  <a:srgbClr val="1F2328"/>
+                </a:solidFill>
+                <a:latin typeface="Calibri"/>
+                <a:cs typeface="Calibri"/>
+              </a:rPr>
+              <a:t xml:space="preserve">99</a:t>
+            </a:r>
+          </a:p>
+        </p:txBody>
+      </p:sp>
+      <p:sp>
+        <p:nvSpPr>
+          <p:cNvPr id="1206" name="Cell"/>
+          <p:cNvSpPr/>
+          <p:nvPr/>
+        </p:nvSpPr>
+        <p:spPr>
+          <a:xfrm>
+            <a:off x="7955279" y="5230368"/>
+            <a:ext cx="603503" cy="420624"/>
+          </a:xfrm>
+          <a:prstGeom prst="rect">
+            <a:avLst/>
+          </a:prstGeom>
+          <a:solidFill>
+            <a:srgbClr val="DDF0E5"/>
+          </a:solidFill>
+          <a:ln>
+            <a:noFill/>
+          </a:ln>
+        </p:spPr>
+        <p:txBody>
+          <a:bodyPr wrap="square" lIns="0" tIns="0" rIns="0" bIns="0" anchor="ctr">
+            <a:noAutofit/>
+          </a:bodyPr>
+          <a:lstStyle/>
+          <a:p>
+            <a:pPr algn="ctr"/>
+            <a:r>
+              <a:rPr lang="en-US" sz="1100" b="1" i="0" dirty="0">
+                <a:solidFill>
+                  <a:srgbClr val="1F2328"/>
+                </a:solidFill>
+                <a:latin typeface="Calibri"/>
+                <a:cs typeface="Calibri"/>
+              </a:rPr>
+              <a:t xml:space="preserve">77</a:t>
+            </a:r>
+          </a:p>
+        </p:txBody>
+      </p:sp>
+      <p:sp>
+        <p:nvSpPr>
+          <p:cNvPr id="1207" name="Cell"/>
+          <p:cNvSpPr/>
+          <p:nvPr/>
+        </p:nvSpPr>
+        <p:spPr>
+          <a:xfrm>
+            <a:off x="8595359" y="5230368"/>
+            <a:ext cx="603503" cy="420624"/>
+          </a:xfrm>
+          <a:prstGeom prst="rect">
+            <a:avLst/>
+          </a:prstGeom>
+          <a:solidFill>
+            <a:srgbClr val="BFE3CF"/>
+          </a:solidFill>
+          <a:ln>
+            <a:noFill/>
+          </a:ln>
+        </p:spPr>
+        <p:txBody>
+          <a:bodyPr wrap="square" lIns="0" tIns="0" rIns="0" bIns="0" anchor="ctr">
+            <a:noAutofit/>
+          </a:bodyPr>
+          <a:lstStyle/>
+          <a:p>
+            <a:pPr algn="ctr"/>
+            <a:r>
+              <a:rPr lang="en-US" sz="1100" b="1" i="0" dirty="0">
+                <a:solidFill>
+                  <a:srgbClr val="1F2328"/>
+                </a:solidFill>
+                <a:latin typeface="Calibri"/>
+                <a:cs typeface="Calibri"/>
+              </a:rPr>
+              <a:t xml:space="preserve">95</a:t>
+            </a:r>
+          </a:p>
+        </p:txBody>
+      </p:sp>
+      <p:sp>
+        <p:nvSpPr>
+          <p:cNvPr id="1208" name="Cell"/>
+          <p:cNvSpPr/>
+          <p:nvPr/>
+        </p:nvSpPr>
+        <p:spPr>
+          <a:xfrm>
+            <a:off x="9235439" y="5230368"/>
+            <a:ext cx="603503" cy="420624"/>
+          </a:xfrm>
+          <a:prstGeom prst="rect">
+            <a:avLst/>
+          </a:prstGeom>
+          <a:solidFill>
+            <a:srgbClr val="BFE3CF"/>
+          </a:solidFill>
+          <a:ln>
+            <a:noFill/>
+          </a:ln>
+        </p:spPr>
+        <p:txBody>
+          <a:bodyPr wrap="square" lIns="0" tIns="0" rIns="0" bIns="0" anchor="ctr">
+            <a:noAutofit/>
+          </a:bodyPr>
+          <a:lstStyle/>
+          <a:p>
+            <a:pPr algn="ctr"/>
+            <a:r>
+              <a:rPr lang="en-US" sz="1100" b="1" i="0" dirty="0">
+                <a:solidFill>
+                  <a:srgbClr val="1F2328"/>
+                </a:solidFill>
+                <a:latin typeface="Calibri"/>
+                <a:cs typeface="Calibri"/>
+              </a:rPr>
+              <a:t xml:space="preserve">95</a:t>
+            </a:r>
+          </a:p>
+        </p:txBody>
+      </p:sp>
+      <p:sp>
+        <p:nvSpPr>
+          <p:cNvPr id="1209" name="Cell"/>
+          <p:cNvSpPr/>
+          <p:nvPr/>
+        </p:nvSpPr>
+        <p:spPr>
+          <a:xfrm>
+            <a:off x="9875519" y="5230368"/>
+            <a:ext cx="603503" cy="420624"/>
+          </a:xfrm>
+          <a:prstGeom prst="rect">
+            <a:avLst/>
+          </a:prstGeom>
+          <a:solidFill>
+            <a:srgbClr val="BFE3CF"/>
+          </a:solidFill>
+          <a:ln>
+            <a:noFill/>
+          </a:ln>
+        </p:spPr>
+        <p:txBody>
+          <a:bodyPr wrap="square" lIns="0" tIns="0" rIns="0" bIns="0" anchor="ctr">
+            <a:noAutofit/>
+          </a:bodyPr>
+          <a:lstStyle/>
+          <a:p>
+            <a:pPr algn="ctr"/>
+            <a:r>
+              <a:rPr lang="en-US" sz="1100" b="1" i="0" dirty="0">
+                <a:solidFill>
+                  <a:srgbClr val="1F2328"/>
+                </a:solidFill>
+                <a:latin typeface="Calibri"/>
+                <a:cs typeface="Calibri"/>
+              </a:rPr>
+              <a:t xml:space="preserve">95</a:t>
+            </a:r>
+          </a:p>
+        </p:txBody>
+      </p:sp>
+      <p:sp>
+        <p:nvSpPr>
+          <p:cNvPr id="1210" name="Avg"/>
           <p:cNvSpPr txBox="1"/>
           <p:nvPr/>
         </p:nvSpPr>
         <p:spPr>
           <a:xfrm>
-            <a:off x="4507992" y="4069080"/>
-            <a:ext cx="1600200" cy="292608"/>
-          </a:xfrm>
-          <a:prstGeom prst="rect">
-            <a:avLst/>
-          </a:prstGeom>
-          <a:noFill/>
-          <a:ln>
-            <a:noFill/>
-          </a:ln>
-        </p:spPr>
-        <p:txBody>
-          <a:bodyPr wrap="square" lIns="0" tIns="0" rIns="0" bIns="0" anchor="ctr">
-            <a:noAutofit/>
-          </a:bodyPr>
-          <a:lstStyle/>
-          <a:p>
-            <a:pPr algn="l"/>
-            <a:r>
-              <a:rPr lang="en-US" sz="1400" b="0" i="0" dirty="0">
-                <a:solidFill>
-                  <a:srgbClr val="1F2328"/>
-                </a:solidFill>
-                <a:latin typeface="Calibri"/>
-                <a:cs typeface="Calibri"/>
-              </a:rPr>
-              <a:t xml:space="preserve">LLM baseline</a:t>
-            </a:r>
-          </a:p>
-        </p:txBody>
-      </p:sp>
-      <p:sp>
-        <p:nvSpPr>
-          <p:cNvPr id="1165" name="Track"/>
-          <p:cNvSpPr/>
-          <p:nvPr/>
-        </p:nvSpPr>
-        <p:spPr>
-          <a:xfrm>
-            <a:off x="6108192" y="4142232"/>
-            <a:ext cx="4251960" cy="146304"/>
-          </a:xfrm>
-          <a:prstGeom prst="rect">
-            <a:avLst/>
-          </a:prstGeom>
-          <a:solidFill>
-            <a:srgbClr val="EEF1EF"/>
-          </a:solidFill>
-          <a:ln>
-            <a:noFill/>
-          </a:ln>
-        </p:spPr>
-        <p:txBody>
-          <a:bodyPr wrap="square" lIns="0" tIns="0" rIns="0" bIns="0" anchor="t">
-            <a:noAutofit/>
-          </a:bodyPr>
-          <a:lstStyle/>
-          <a:p>
-            <a:pPr algn="l"/>
-          </a:p>
-        </p:txBody>
-      </p:sp>
-      <p:sp>
-        <p:nvSpPr>
-          <p:cNvPr id="1166" name="Bar"/>
-          <p:cNvSpPr/>
-          <p:nvPr/>
-        </p:nvSpPr>
-        <p:spPr>
-          <a:xfrm>
-            <a:off x="6108192" y="4142232"/>
-            <a:ext cx="3146450" cy="146304"/>
-          </a:xfrm>
-          <a:prstGeom prst="rect">
-            <a:avLst/>
-          </a:prstGeom>
-          <a:solidFill>
-            <a:srgbClr val="9AA3A9"/>
-          </a:solidFill>
-          <a:ln>
-            <a:noFill/>
-          </a:ln>
-        </p:spPr>
-        <p:txBody>
-          <a:bodyPr wrap="square" lIns="0" tIns="0" rIns="0" bIns="0" anchor="t">
-            <a:noAutofit/>
-          </a:bodyPr>
-          <a:lstStyle/>
-          <a:p>
-            <a:pPr algn="l"/>
-          </a:p>
-        </p:txBody>
-      </p:sp>
-      <p:sp>
-        <p:nvSpPr>
-          <p:cNvPr id="1167" name="Value"/>
-          <p:cNvSpPr txBox="1"/>
-          <p:nvPr/>
-        </p:nvSpPr>
-        <p:spPr>
-          <a:xfrm>
-            <a:off x="10433304" y="4069080"/>
-            <a:ext cx="731520" cy="292608"/>
-          </a:xfrm>
-          <a:prstGeom prst="rect">
-            <a:avLst/>
-          </a:prstGeom>
-          <a:noFill/>
-          <a:ln>
-            <a:noFill/>
-          </a:ln>
-        </p:spPr>
-        <p:txBody>
-          <a:bodyPr wrap="square" lIns="0" tIns="0" rIns="0" bIns="0" anchor="ctr">
-            <a:noAutofit/>
-          </a:bodyPr>
-          <a:lstStyle/>
-          <a:p>
-            <a:pPr algn="l"/>
-            <a:r>
-              <a:rPr lang="en-US" sz="1500" b="1" i="0" dirty="0">
-                <a:solidFill>
-                  <a:srgbClr val="3A434C"/>
-                </a:solidFill>
-                <a:latin typeface="Calibri"/>
-                <a:cs typeface="Calibri"/>
-              </a:rPr>
-              <a:t xml:space="preserve">74%</a:t>
-            </a:r>
-          </a:p>
-        </p:txBody>
-      </p:sp>
-      <p:sp>
-        <p:nvSpPr>
-          <p:cNvPr id="1168" name="Method"/>
-          <p:cNvSpPr txBox="1"/>
-          <p:nvPr/>
-        </p:nvSpPr>
-        <p:spPr>
-          <a:xfrm>
-            <a:off x="4507992" y="4572000"/>
-            <a:ext cx="1600200" cy="292608"/>
-          </a:xfrm>
-          <a:prstGeom prst="rect">
-            <a:avLst/>
-          </a:prstGeom>
-          <a:noFill/>
-          <a:ln>
-            <a:noFill/>
-          </a:ln>
-        </p:spPr>
-        <p:txBody>
-          <a:bodyPr wrap="square" lIns="0" tIns="0" rIns="0" bIns="0" anchor="ctr">
-            <a:noAutofit/>
-          </a:bodyPr>
-          <a:lstStyle/>
-          <a:p>
-            <a:pPr algn="l"/>
-            <a:r>
-              <a:rPr lang="en-US" sz="1400" b="0" i="0" dirty="0">
-                <a:solidFill>
-                  <a:srgbClr val="1F2328"/>
-                </a:solidFill>
-                <a:latin typeface="Calibri"/>
-                <a:cs typeface="Calibri"/>
-              </a:rPr>
-              <a:t xml:space="preserve">Non-Iterative</a:t>
-            </a:r>
-          </a:p>
-        </p:txBody>
-      </p:sp>
-      <p:sp>
-        <p:nvSpPr>
-          <p:cNvPr id="1169" name="Track"/>
-          <p:cNvSpPr/>
-          <p:nvPr/>
-        </p:nvSpPr>
-        <p:spPr>
-          <a:xfrm>
-            <a:off x="6108192" y="4645152"/>
-            <a:ext cx="4251960" cy="146304"/>
-          </a:xfrm>
-          <a:prstGeom prst="rect">
-            <a:avLst/>
-          </a:prstGeom>
-          <a:solidFill>
-            <a:srgbClr val="EEF1EF"/>
-          </a:solidFill>
-          <a:ln>
-            <a:noFill/>
-          </a:ln>
-        </p:spPr>
-        <p:txBody>
-          <a:bodyPr wrap="square" lIns="0" tIns="0" rIns="0" bIns="0" anchor="t">
-            <a:noAutofit/>
-          </a:bodyPr>
-          <a:lstStyle/>
-          <a:p>
-            <a:pPr algn="l"/>
-          </a:p>
-        </p:txBody>
-      </p:sp>
-      <p:sp>
-        <p:nvSpPr>
-          <p:cNvPr id="1170" name="Bar"/>
-          <p:cNvSpPr/>
-          <p:nvPr/>
-        </p:nvSpPr>
-        <p:spPr>
-          <a:xfrm>
-            <a:off x="6108192" y="4645152"/>
-            <a:ext cx="1445666" cy="146304"/>
-          </a:xfrm>
-          <a:prstGeom prst="rect">
-            <a:avLst/>
-          </a:prstGeom>
-          <a:solidFill>
-            <a:srgbClr val="B23A1E"/>
-          </a:solidFill>
-          <a:ln>
-            <a:noFill/>
-          </a:ln>
-        </p:spPr>
-        <p:txBody>
-          <a:bodyPr wrap="square" lIns="0" tIns="0" rIns="0" bIns="0" anchor="t">
-            <a:noAutofit/>
-          </a:bodyPr>
-          <a:lstStyle/>
-          <a:p>
-            <a:pPr algn="l"/>
-          </a:p>
-        </p:txBody>
-      </p:sp>
-      <p:sp>
-        <p:nvSpPr>
-          <p:cNvPr id="1171" name="Value"/>
-          <p:cNvSpPr txBox="1"/>
-          <p:nvPr/>
-        </p:nvSpPr>
-        <p:spPr>
-          <a:xfrm>
-            <a:off x="10433304" y="4572000"/>
-            <a:ext cx="731520" cy="292608"/>
-          </a:xfrm>
-          <a:prstGeom prst="rect">
-            <a:avLst/>
-          </a:prstGeom>
-          <a:noFill/>
-          <a:ln>
-            <a:noFill/>
-          </a:ln>
-        </p:spPr>
-        <p:txBody>
-          <a:bodyPr wrap="square" lIns="0" tIns="0" rIns="0" bIns="0" anchor="ctr">
-            <a:noAutofit/>
-          </a:bodyPr>
-          <a:lstStyle/>
-          <a:p>
-            <a:pPr algn="l"/>
-            <a:r>
-              <a:rPr lang="en-US" sz="1500" b="1" i="0" dirty="0">
-                <a:solidFill>
-                  <a:srgbClr val="B23A1E"/>
-                </a:solidFill>
-                <a:latin typeface="Calibri"/>
-                <a:cs typeface="Calibri"/>
-              </a:rPr>
-              <a:t xml:space="preserve">34%</a:t>
-            </a:r>
-          </a:p>
-        </p:txBody>
-      </p:sp>
-      <p:sp>
-        <p:nvSpPr>
-          <p:cNvPr id="1172" name="Method"/>
-          <p:cNvSpPr txBox="1"/>
-          <p:nvPr/>
-        </p:nvSpPr>
-        <p:spPr>
-          <a:xfrm>
-            <a:off x="4507992" y="5074920"/>
-            <a:ext cx="1600200" cy="292608"/>
-          </a:xfrm>
-          <a:prstGeom prst="rect">
-            <a:avLst/>
-          </a:prstGeom>
-          <a:noFill/>
-          <a:ln>
-            <a:noFill/>
-          </a:ln>
-        </p:spPr>
-        <p:txBody>
-          <a:bodyPr wrap="square" lIns="0" tIns="0" rIns="0" bIns="0" anchor="ctr">
-            <a:noAutofit/>
-          </a:bodyPr>
-          <a:lstStyle/>
-          <a:p>
-            <a:pPr algn="l"/>
-            <a:r>
-              <a:rPr lang="en-US" sz="1400" b="1" i="0" dirty="0">
+            <a:off x="10543032" y="5212080"/>
+            <a:ext cx="685800" cy="457200"/>
+          </a:xfrm>
+          <a:prstGeom prst="rect">
+            <a:avLst/>
+          </a:prstGeom>
+          <a:noFill/>
+          <a:ln>
+            <a:noFill/>
+          </a:ln>
+        </p:spPr>
+        <p:txBody>
+          <a:bodyPr wrap="square" lIns="0" tIns="0" rIns="0" bIns="0" anchor="ctr">
+            <a:noAutofit/>
+          </a:bodyPr>
+          <a:lstStyle/>
+          <a:p>
+            <a:pPr algn="ctr"/>
+            <a:r>
+              <a:rPr lang="en-US" sz="1250" b="1" i="0" dirty="0">
                 <a:solidFill>
                   <a:srgbClr val="0B6E4F"/>
                 </a:solidFill>
                 <a:latin typeface="Calibri"/>
                 <a:cs typeface="Calibri"/>
               </a:rPr>
-              <a:t xml:space="preserve">RIGOR</a:t>
-            </a:r>
-          </a:p>
-        </p:txBody>
-      </p:sp>
-      <p:sp>
-        <p:nvSpPr>
-          <p:cNvPr id="1173" name="Track"/>
-          <p:cNvSpPr/>
-          <p:nvPr/>
-        </p:nvSpPr>
-        <p:spPr>
-          <a:xfrm>
-            <a:off x="6108192" y="5148072"/>
-            <a:ext cx="4251960" cy="146304"/>
-          </a:xfrm>
-          <a:prstGeom prst="rect">
-            <a:avLst/>
-          </a:prstGeom>
-          <a:solidFill>
-            <a:srgbClr val="EEF1EF"/>
-          </a:solidFill>
-          <a:ln>
-            <a:noFill/>
-          </a:ln>
-        </p:spPr>
-        <p:txBody>
-          <a:bodyPr wrap="square" lIns="0" tIns="0" rIns="0" bIns="0" anchor="t">
-            <a:noAutofit/>
-          </a:bodyPr>
-          <a:lstStyle/>
-          <a:p>
-            <a:pPr algn="l"/>
-          </a:p>
-        </p:txBody>
-      </p:sp>
-      <p:sp>
-        <p:nvSpPr>
-          <p:cNvPr id="1174" name="Bar"/>
-          <p:cNvSpPr/>
-          <p:nvPr/>
-        </p:nvSpPr>
-        <p:spPr>
-          <a:xfrm>
-            <a:off x="6108192" y="5148072"/>
-            <a:ext cx="3954322" cy="146304"/>
-          </a:xfrm>
-          <a:prstGeom prst="rect">
-            <a:avLst/>
-          </a:prstGeom>
-          <a:solidFill>
-            <a:srgbClr val="0B6E4F"/>
-          </a:solidFill>
-          <a:ln>
-            <a:noFill/>
-          </a:ln>
-        </p:spPr>
-        <p:txBody>
-          <a:bodyPr wrap="square" lIns="0" tIns="0" rIns="0" bIns="0" anchor="t">
-            <a:noAutofit/>
-          </a:bodyPr>
-          <a:lstStyle/>
-          <a:p>
-            <a:pPr algn="l"/>
-          </a:p>
-        </p:txBody>
-      </p:sp>
-      <p:sp>
-        <p:nvSpPr>
-          <p:cNvPr id="1175" name="Value"/>
-          <p:cNvSpPr txBox="1"/>
-          <p:nvPr/>
-        </p:nvSpPr>
-        <p:spPr>
-          <a:xfrm>
-            <a:off x="10433304" y="5074920"/>
-            <a:ext cx="731520" cy="292608"/>
-          </a:xfrm>
-          <a:prstGeom prst="rect">
-            <a:avLst/>
-          </a:prstGeom>
-          <a:noFill/>
-          <a:ln>
-            <a:noFill/>
-          </a:ln>
-        </p:spPr>
-        <p:txBody>
-          <a:bodyPr wrap="square" lIns="0" tIns="0" rIns="0" bIns="0" anchor="ctr">
-            <a:noAutofit/>
-          </a:bodyPr>
-          <a:lstStyle/>
-          <a:p>
-            <a:pPr algn="l"/>
-            <a:r>
-              <a:rPr lang="en-US" sz="1500" b="1" i="0" dirty="0">
-                <a:solidFill>
-                  <a:srgbClr val="0B6E4F"/>
-                </a:solidFill>
-                <a:latin typeface="Calibri"/>
-                <a:cs typeface="Calibri"/>
-              </a:rPr>
               <a:t xml:space="preserve">93%</a:t>
             </a:r>
           </a:p>
@@ -12451,7 +16240,7 @@
       </p:sp>
       <p:sp>
         <p:nvSpPr>
-          <p:cNvPr id="1176" name="Strip"/>
+          <p:cNvPr id="1211" name="Strip"/>
           <p:cNvSpPr/>
           <p:nvPr/>
         </p:nvSpPr>
@@ -12480,31 +16269,41 @@
           <a:p>
             <a:pPr algn="l"/>
             <a:r>
+              <a:rPr lang="en-US" sz="1400" b="0" i="0" dirty="0">
+                <a:solidFill>
+                  <a:srgbClr val="3A434C"/>
+                </a:solidFill>
+                <a:latin typeface="Calibri"/>
+                <a:cs typeface="Calibri"/>
+              </a:rPr>
+              <a:t xml:space="preserve">Without the seed, coverage swings with the LLM: </a:t>
+            </a:r>
+            <a:r>
               <a:rPr lang="en-US" sz="1400" b="1" i="0" dirty="0">
                 <a:solidFill>
-                  <a:srgbClr val="1F2328"/>
-                </a:solidFill>
-                <a:latin typeface="Calibri"/>
-                <a:cs typeface="Calibri"/>
-              </a:rPr>
-              <a:t xml:space="preserve">Same retrieved context, no seed: </a:t>
-            </a:r>
-            <a:r>
-              <a:rPr lang="en-US" sz="1400" b="0" i="0" dirty="0">
-                <a:solidFill>
-                  <a:srgbClr val="3A434C"/>
-                </a:solidFill>
-                <a:latin typeface="Calibri"/>
-                <a:cs typeface="Calibri"/>
-              </a:rPr>
-              <a:t xml:space="preserve">Non-Iterative covers only a third of the columns. RIGOR's direct-mapping seed keeps them.</a:t>
-            </a:r>
-          </a:p>
-        </p:txBody>
-      </p:sp>
-      <p:sp>
-        <p:nvSpPr>
-          <p:cNvPr id="1177" name="Source"/>
+                  <a:srgbClr val="B23A1E"/>
+                </a:solidFill>
+                <a:latin typeface="Calibri"/>
+                <a:cs typeface="Calibri"/>
+              </a:rPr>
+              <a:t xml:space="preserve">Non-Iterative 6–78%.</a:t>
+            </a:r>
+            <a:r>
+              <a:rPr lang="en-US" sz="1400" b="1" i="0" dirty="0">
+                <a:solidFill>
+                  <a:srgbClr val="0B6E4F"/>
+                </a:solidFill>
+                <a:latin typeface="Calibri"/>
+                <a:cs typeface="Calibri"/>
+              </a:rPr>
+              <a:t xml:space="preserve">  With RIGOR, every LLM keeps ≥ 77% in every database.</a:t>
+            </a:r>
+          </a:p>
+        </p:txBody>
+      </p:sp>
+      <p:sp>
+        <p:nvSpPr>
+          <p:cNvPr id="1212" name="Source"/>
           <p:cNvSpPr txBox="1"/>
           <p:nvPr/>
         </p:nvSpPr>
@@ -12536,7 +16335,7 @@
                 <a:latin typeface="Calibri"/>
                 <a:cs typeface="Calibri"/>
               </a:rPr>
-              <a:t xml:space="preserve">Validity: RDFLib; consistency: HermiT. Coverage: a column counts as covered when an ontology class or property name is similar to it (embedding similarity ≥ 0.55), averaged over each method's ontologies. Paper Sec. 4.6–4.7, Table 9.</a:t>
+              <a:t xml:space="preserve">Validity: RDFLib; consistency: HermiT. Coverage: a column counts as covered when an ontology class or property name is similar to it (embedding similarity ≥ 0.55). Paper Sec. 4.6–4.7, Table 9.</a:t>
             </a:r>
           </a:p>
         </p:txBody>

--- a/presentation/RIGOR_results.pptx
+++ b/presentation/RIGOR_results.pptx
@@ -2049,7 +2049,7 @@
                 <a:cs typeface="IBM Plex Sans"/>
                 <a:sym typeface="IBM Plex Sans"/>
               </a:rPr>
-              <a:t>[10:33–11:20]  SPOKEN SCRIPT (81 words)</a:t>
+              <a:t>[10:21–11:07]  SPOKEN SCRIPT (81 words)</a:t>
             </a:r>
           </a:p>
           <a:p>
@@ -2309,7 +2309,7 @@
                 <a:cs typeface="Calibri"/>
                 <a:sym typeface="Calibri"/>
               </a:rPr>
-              <a:t>[11:20–12:11]  SPOKEN SCRIPT (82 words)</a:t>
+              <a:t>[11:07–11:58]  SPOKEN SCRIPT (82 words)</a:t>
             </a:r>
           </a:p>
           <a:p>
@@ -2785,7 +2785,7 @@
                 <a:cs typeface="Calibri"/>
                 <a:sym typeface="Calibri"/>
               </a:rPr>
-              <a:t>[9:57–10:33]  SPOKEN SCRIPT (61 words)</a:t>
+              <a:t>[9:57–10:21]  SPOKEN SCRIPT (39 words)</a:t>
             </a:r>
           </a:p>
           <a:p>
@@ -2799,7 +2799,7 @@
                 <a:cs typeface="Calibri"/>
                 <a:sym typeface="Calibri"/>
               </a:rPr>
-              <a:t>Nothing is lost. Is meaning added? Direct mapping and the LLM baseline add none, in any run. Non-Iterative adds labels, but no provenance and no hierarchy. Only RIGOR adds all three, with every LLM, in every database. [pause] And the hierarchies follow what the LLM knows: over a hundred subclass axioms for the music store, only a few for the clinical schemas.</a:t>
+              <a:t>Nothing is lost. Is meaning added? Direct mapping and the LLM baseline add none, in any run. Non-Iterative RAG adds labels, but no provenance and no class hierarchy. Only RIGOR adds all three, with every LLM, in every database. [pause]</a:t>
             </a:r>
           </a:p>
           <a:p/>
@@ -2814,7 +2814,7 @@
                 <a:cs typeface="Calibri"/>
                 <a:sym typeface="Calibri"/>
               </a:rPr>
-              <a:t>PRESENTER / POINTER: Labels row pair, then provenance, then hierarchy; land on the Chinook hierarchy cells.</a:t>
+              <a:t>PRESENTER / POINTER: Point at the red block first, then the three RIGOR rows.</a:t>
             </a:r>
           </a:p>
           <a:p>
@@ -2828,7 +2828,7 @@
                 <a:cs typeface="Calibri"/>
                 <a:sym typeface="Calibri"/>
               </a:rPr>
-              <a:t>AUDIENCE TAKEAWAY: Only RIGOR adds labels, provenance and hierarchy, with every LLM.</a:t>
+              <a:t>AUDIENCE TAKEAWAY: Only RIGOR adds labels, provenance and a class hierarchy, with every LLM.</a:t>
             </a:r>
           </a:p>
           <a:p>
@@ -2842,7 +2842,7 @@
                 <a:cs typeface="Calibri"/>
                 <a:sym typeface="Calibri"/>
               </a:rPr>
-              <a:t>SOURCE AND SCOPE: Paper Table 8 (annotation assertions, prov:wasDerivedFrom, SubClassOf per run).</a:t>
+              <a:t>SOURCE AND SCOPE: Paper Table 8. Hierarchy as inheritance richness (subclass axioms per class; OntoQA, Tartir et al. 2005; OntoMetrics, Lantow 2016), computed from Table 8 counts. Shading is within each database.</a:t>
             </a:r>
           </a:p>
           <a:p>
@@ -2856,7 +2856,37 @@
                 <a:cs typeface="Calibri"/>
                 <a:sym typeface="Calibri"/>
               </a:rPr>
-              <a:t>IF RUNNING LATE, DROP: "Non-Iterative adds labels, but no provenance and no hierarchy."</a:t>
+              <a:t>IF RUNNING LATE, DROP: "Non-Iterative RAG adds labels, but no provenance and no class hierarchy."</a:t>
+            </a:r>
+          </a:p>
+          <a:p/>
+          <a:p>
+            <a:r>
+              <a:rPr lang="en-US" sz="1200">
+                <a:solidFill>
+                  <a:schemeClr val="dk1"/>
+                </a:solidFill>
+                <a:latin typeface="Calibri"/>
+                <a:ea typeface="Calibri"/>
+                <a:cs typeface="Calibri"/>
+                <a:sym typeface="Calibri"/>
+              </a:rPr>
+              <a:t>IF ASKED 'DOES CHINOOK NEED SO MANY SUBCLASSES?': Count is not quality, so we report whether a hierarchy exists, and only RIGOR builds one. RIGOR's Chinook ontologies have zero OOPS! pitfalls and the judge ranks RIGOR first on all 11 Chinook tables; it does score RIGOR's conciseness lower there (2.59 vs 3.32 for the baseline, Table 10), so tighter hierarchies are future work.</a:t>
+            </a:r>
+          </a:p>
+          <a:p/>
+          <a:p>
+            <a:r>
+              <a:rPr lang="en-US" sz="1200">
+                <a:solidFill>
+                  <a:schemeClr val="dk1"/>
+                </a:solidFill>
+                <a:latin typeface="Calibri"/>
+                <a:ea typeface="Calibri"/>
+                <a:cs typeface="Calibri"/>
+                <a:sym typeface="Calibri"/>
+              </a:rPr>
+              <a:t>DOMAIN PATTERN (notes only): inheritance richness is 0.10-0.70 on the clinical schemas and 2.1-4.1 on the music store; the LLM proposes more specializations in a familiar domain.</a:t>
             </a:r>
           </a:p>
         </p:txBody>
@@ -15278,7 +15308,7 @@
                 <a:latin typeface="Calibri"/>
                 <a:cs typeface="Calibri"/>
               </a:rPr>
-              <a:t xml:space="preserve">Elements per ontology, for every LLM and database. Direct Mapping and LLM baseline add none, in any run.</a:t>
+              <a:t xml:space="preserve">Per ontology, for every LLM and database.</a:t>
             </a:r>
           </a:p>
         </p:txBody>
@@ -15568,14 +15598,14 @@
       </p:sp>
       <p:sp>
         <p:nvSpPr>
-          <p:cNvPr id="1154" name="Metric"/>
+          <p:cNvPr id="1154" name="Database"/>
           <p:cNvSpPr txBox="1"/>
           <p:nvPr/>
         </p:nvSpPr>
         <p:spPr>
           <a:xfrm>
-            <a:off x="1078992" y="3474720"/>
-            <a:ext cx="1417320" cy="658368"/>
+            <a:off x="3794760" y="2990088"/>
+            <a:ext cx="2249424" cy="219456"/>
           </a:xfrm>
           <a:prstGeom prst="rect">
             <a:avLst/>
@@ -15591,30 +15621,30 @@
           </a:bodyPr>
           <a:lstStyle/>
           <a:p>
-            <a:pPr algn="l"/>
-            <a:r>
-              <a:rPr lang="en-US" sz="1150" b="1" i="0" dirty="0">
-                <a:solidFill>
-                  <a:srgbClr val="2F6B78"/>
-                </a:solidFill>
-                <a:latin typeface="Calibri"/>
-                <a:cs typeface="Calibri"/>
-              </a:rPr>
-              <a:t xml:space="preserve">Labels &amp; comments</a:t>
-            </a:r>
-          </a:p>
-        </p:txBody>
-      </p:sp>
-      <p:sp>
-        <p:nvSpPr>
-          <p:cNvPr id="1155" name="Database"/>
+            <a:pPr algn="ctr"/>
+            <a:r>
+              <a:rPr lang="en-US" sz="1100" b="1" i="0" dirty="0">
+                <a:solidFill>
+                  <a:srgbClr val="1F2328"/>
+                </a:solidFill>
+                <a:latin typeface="Calibri"/>
+                <a:cs typeface="Calibri"/>
+              </a:rPr>
+              <a:t xml:space="preserve">Liver Cancer</a:t>
+            </a:r>
+          </a:p>
+        </p:txBody>
+      </p:sp>
+      <p:sp>
+        <p:nvSpPr>
+          <p:cNvPr id="1155" name="LLM"/>
           <p:cNvSpPr txBox="1"/>
           <p:nvPr/>
         </p:nvSpPr>
         <p:spPr>
           <a:xfrm>
-            <a:off x="3794760" y="3017520"/>
-            <a:ext cx="2249424" cy="219456"/>
+            <a:off x="3794760" y="3218688"/>
+            <a:ext cx="749808" cy="182880"/>
           </a:xfrm>
           <a:prstGeom prst="rect">
             <a:avLst/>
@@ -15632,14 +15662,14 @@
           <a:p>
             <a:pPr algn="ctr"/>
             <a:r>
-              <a:rPr lang="en-US" sz="1100" b="1" i="0" dirty="0">
-                <a:solidFill>
-                  <a:srgbClr val="1F2328"/>
-                </a:solidFill>
-                <a:latin typeface="Calibri"/>
-                <a:cs typeface="Calibri"/>
-              </a:rPr>
-              <a:t xml:space="preserve">Liver Cancer</a:t>
+              <a:rPr lang="en-US" sz="850" b="0" i="0" dirty="0">
+                <a:solidFill>
+                  <a:srgbClr val="5B6770"/>
+                </a:solidFill>
+                <a:latin typeface="Calibri"/>
+                <a:cs typeface="Calibri"/>
+              </a:rPr>
+              <a:t xml:space="preserve">Claude</a:t>
             </a:r>
           </a:p>
         </p:txBody>
@@ -15652,7 +15682,7 @@
         </p:nvSpPr>
         <p:spPr>
           <a:xfrm>
-            <a:off x="3794760" y="3246120"/>
+            <a:off x="4544568" y="3218688"/>
             <a:ext cx="749808" cy="182880"/>
           </a:xfrm>
           <a:prstGeom prst="rect">
@@ -15678,7 +15708,7 @@
                 <a:latin typeface="Calibri"/>
                 <a:cs typeface="Calibri"/>
               </a:rPr>
-              <a:t xml:space="preserve">Claude</a:t>
+              <a:t xml:space="preserve">Mistral</a:t>
             </a:r>
           </a:p>
         </p:txBody>
@@ -15691,7 +15721,7 @@
         </p:nvSpPr>
         <p:spPr>
           <a:xfrm>
-            <a:off x="4544568" y="3246120"/>
+            <a:off x="5294376" y="3218688"/>
             <a:ext cx="749808" cy="182880"/>
           </a:xfrm>
           <a:prstGeom prst="rect">
@@ -15717,20 +15747,59 @@
                 <a:latin typeface="Calibri"/>
                 <a:cs typeface="Calibri"/>
               </a:rPr>
-              <a:t xml:space="preserve">Mistral</a:t>
-            </a:r>
-          </a:p>
-        </p:txBody>
-      </p:sp>
-      <p:sp>
-        <p:nvSpPr>
-          <p:cNvPr id="1158" name="LLM"/>
+              <a:t xml:space="preserve">DeepSeek</a:t>
+            </a:r>
+          </a:p>
+        </p:txBody>
+      </p:sp>
+      <p:sp>
+        <p:nvSpPr>
+          <p:cNvPr id="1158" name="Database"/>
           <p:cNvSpPr txBox="1"/>
           <p:nvPr/>
         </p:nvSpPr>
         <p:spPr>
           <a:xfrm>
-            <a:off x="5294376" y="3246120"/>
+            <a:off x="6044184" y="2990088"/>
+            <a:ext cx="2249424" cy="219456"/>
+          </a:xfrm>
+          <a:prstGeom prst="rect">
+            <a:avLst/>
+          </a:prstGeom>
+          <a:noFill/>
+          <a:ln>
+            <a:noFill/>
+          </a:ln>
+        </p:spPr>
+        <p:txBody>
+          <a:bodyPr wrap="square" lIns="0" tIns="0" rIns="0" bIns="0" anchor="ctr">
+            <a:noAutofit/>
+          </a:bodyPr>
+          <a:lstStyle/>
+          <a:p>
+            <a:pPr algn="ctr"/>
+            <a:r>
+              <a:rPr lang="en-US" sz="1100" b="1" i="0" dirty="0">
+                <a:solidFill>
+                  <a:srgbClr val="1F2328"/>
+                </a:solidFill>
+                <a:latin typeface="Calibri"/>
+                <a:cs typeface="Calibri"/>
+              </a:rPr>
+              <a:t xml:space="preserve">eICU-CRD</a:t>
+            </a:r>
+          </a:p>
+        </p:txBody>
+      </p:sp>
+      <p:sp>
+        <p:nvSpPr>
+          <p:cNvPr id="1159" name="LLM"/>
+          <p:cNvSpPr txBox="1"/>
+          <p:nvPr/>
+        </p:nvSpPr>
+        <p:spPr>
+          <a:xfrm>
+            <a:off x="6044184" y="3218688"/>
             <a:ext cx="749808" cy="182880"/>
           </a:xfrm>
           <a:prstGeom prst="rect">
@@ -15756,46 +15825,7 @@
                 <a:latin typeface="Calibri"/>
                 <a:cs typeface="Calibri"/>
               </a:rPr>
-              <a:t xml:space="preserve">DeepSeek</a:t>
-            </a:r>
-          </a:p>
-        </p:txBody>
-      </p:sp>
-      <p:sp>
-        <p:nvSpPr>
-          <p:cNvPr id="1159" name="Database"/>
-          <p:cNvSpPr txBox="1"/>
-          <p:nvPr/>
-        </p:nvSpPr>
-        <p:spPr>
-          <a:xfrm>
-            <a:off x="6044184" y="3017520"/>
-            <a:ext cx="2249424" cy="219456"/>
-          </a:xfrm>
-          <a:prstGeom prst="rect">
-            <a:avLst/>
-          </a:prstGeom>
-          <a:noFill/>
-          <a:ln>
-            <a:noFill/>
-          </a:ln>
-        </p:spPr>
-        <p:txBody>
-          <a:bodyPr wrap="square" lIns="0" tIns="0" rIns="0" bIns="0" anchor="ctr">
-            <a:noAutofit/>
-          </a:bodyPr>
-          <a:lstStyle/>
-          <a:p>
-            <a:pPr algn="ctr"/>
-            <a:r>
-              <a:rPr lang="en-US" sz="1100" b="1" i="0" dirty="0">
-                <a:solidFill>
-                  <a:srgbClr val="1F2328"/>
-                </a:solidFill>
-                <a:latin typeface="Calibri"/>
-                <a:cs typeface="Calibri"/>
-              </a:rPr>
-              <a:t xml:space="preserve">eICU-CRD</a:t>
+              <a:t xml:space="preserve">Claude</a:t>
             </a:r>
           </a:p>
         </p:txBody>
@@ -15808,7 +15838,7 @@
         </p:nvSpPr>
         <p:spPr>
           <a:xfrm>
-            <a:off x="6044184" y="3246120"/>
+            <a:off x="6793992" y="3218688"/>
             <a:ext cx="749808" cy="182880"/>
           </a:xfrm>
           <a:prstGeom prst="rect">
@@ -15834,7 +15864,7 @@
                 <a:latin typeface="Calibri"/>
                 <a:cs typeface="Calibri"/>
               </a:rPr>
-              <a:t xml:space="preserve">Claude</a:t>
+              <a:t xml:space="preserve">Mistral</a:t>
             </a:r>
           </a:p>
         </p:txBody>
@@ -15847,7 +15877,7 @@
         </p:nvSpPr>
         <p:spPr>
           <a:xfrm>
-            <a:off x="6793992" y="3246120"/>
+            <a:off x="7543800" y="3218688"/>
             <a:ext cx="749808" cy="182880"/>
           </a:xfrm>
           <a:prstGeom prst="rect">
@@ -15873,20 +15903,59 @@
                 <a:latin typeface="Calibri"/>
                 <a:cs typeface="Calibri"/>
               </a:rPr>
-              <a:t xml:space="preserve">Mistral</a:t>
-            </a:r>
-          </a:p>
-        </p:txBody>
-      </p:sp>
-      <p:sp>
-        <p:nvSpPr>
-          <p:cNvPr id="1162" name="LLM"/>
+              <a:t xml:space="preserve">DeepSeek</a:t>
+            </a:r>
+          </a:p>
+        </p:txBody>
+      </p:sp>
+      <p:sp>
+        <p:nvSpPr>
+          <p:cNvPr id="1162" name="Database"/>
           <p:cNvSpPr txBox="1"/>
           <p:nvPr/>
         </p:nvSpPr>
         <p:spPr>
           <a:xfrm>
-            <a:off x="7543800" y="3246120"/>
+            <a:off x="8293608" y="2990088"/>
+            <a:ext cx="2249424" cy="219456"/>
+          </a:xfrm>
+          <a:prstGeom prst="rect">
+            <a:avLst/>
+          </a:prstGeom>
+          <a:noFill/>
+          <a:ln>
+            <a:noFill/>
+          </a:ln>
+        </p:spPr>
+        <p:txBody>
+          <a:bodyPr wrap="square" lIns="0" tIns="0" rIns="0" bIns="0" anchor="ctr">
+            <a:noAutofit/>
+          </a:bodyPr>
+          <a:lstStyle/>
+          <a:p>
+            <a:pPr algn="ctr"/>
+            <a:r>
+              <a:rPr lang="en-US" sz="1100" b="1" i="0" dirty="0">
+                <a:solidFill>
+                  <a:srgbClr val="1F2328"/>
+                </a:solidFill>
+                <a:latin typeface="Calibri"/>
+                <a:cs typeface="Calibri"/>
+              </a:rPr>
+              <a:t xml:space="preserve">Chinook</a:t>
+            </a:r>
+          </a:p>
+        </p:txBody>
+      </p:sp>
+      <p:sp>
+        <p:nvSpPr>
+          <p:cNvPr id="1163" name="LLM"/>
+          <p:cNvSpPr txBox="1"/>
+          <p:nvPr/>
+        </p:nvSpPr>
+        <p:spPr>
+          <a:xfrm>
+            <a:off x="8293608" y="3218688"/>
             <a:ext cx="749808" cy="182880"/>
           </a:xfrm>
           <a:prstGeom prst="rect">
@@ -15912,46 +15981,7 @@
                 <a:latin typeface="Calibri"/>
                 <a:cs typeface="Calibri"/>
               </a:rPr>
-              <a:t xml:space="preserve">DeepSeek</a:t>
-            </a:r>
-          </a:p>
-        </p:txBody>
-      </p:sp>
-      <p:sp>
-        <p:nvSpPr>
-          <p:cNvPr id="1163" name="Database"/>
-          <p:cNvSpPr txBox="1"/>
-          <p:nvPr/>
-        </p:nvSpPr>
-        <p:spPr>
-          <a:xfrm>
-            <a:off x="8293608" y="3017520"/>
-            <a:ext cx="2249424" cy="219456"/>
-          </a:xfrm>
-          <a:prstGeom prst="rect">
-            <a:avLst/>
-          </a:prstGeom>
-          <a:noFill/>
-          <a:ln>
-            <a:noFill/>
-          </a:ln>
-        </p:spPr>
-        <p:txBody>
-          <a:bodyPr wrap="square" lIns="0" tIns="0" rIns="0" bIns="0" anchor="ctr">
-            <a:noAutofit/>
-          </a:bodyPr>
-          <a:lstStyle/>
-          <a:p>
-            <a:pPr algn="ctr"/>
-            <a:r>
-              <a:rPr lang="en-US" sz="1100" b="1" i="0" dirty="0">
-                <a:solidFill>
-                  <a:srgbClr val="1F2328"/>
-                </a:solidFill>
-                <a:latin typeface="Calibri"/>
-                <a:cs typeface="Calibri"/>
-              </a:rPr>
-              <a:t xml:space="preserve">Chinook</a:t>
+              <a:t xml:space="preserve">Claude</a:t>
             </a:r>
           </a:p>
         </p:txBody>
@@ -15964,7 +15994,7 @@
         </p:nvSpPr>
         <p:spPr>
           <a:xfrm>
-            <a:off x="8293608" y="3246120"/>
+            <a:off x="9043416" y="3218688"/>
             <a:ext cx="749808" cy="182880"/>
           </a:xfrm>
           <a:prstGeom prst="rect">
@@ -15990,7 +16020,7 @@
                 <a:latin typeface="Calibri"/>
                 <a:cs typeface="Calibri"/>
               </a:rPr>
-              <a:t xml:space="preserve">Claude</a:t>
+              <a:t xml:space="preserve">Mistral</a:t>
             </a:r>
           </a:p>
         </p:txBody>
@@ -16003,7 +16033,7 @@
         </p:nvSpPr>
         <p:spPr>
           <a:xfrm>
-            <a:off x="9043416" y="3246120"/>
+            <a:off x="9793224" y="3218688"/>
             <a:ext cx="749808" cy="182880"/>
           </a:xfrm>
           <a:prstGeom prst="rect">
@@ -16029,21 +16059,21 @@
                 <a:latin typeface="Calibri"/>
                 <a:cs typeface="Calibri"/>
               </a:rPr>
-              <a:t xml:space="preserve">Mistral</a:t>
-            </a:r>
-          </a:p>
-        </p:txBody>
-      </p:sp>
-      <p:sp>
-        <p:nvSpPr>
-          <p:cNvPr id="1166" name="LLM"/>
+              <a:t xml:space="preserve">DeepSeek</a:t>
+            </a:r>
+          </a:p>
+        </p:txBody>
+      </p:sp>
+      <p:sp>
+        <p:nvSpPr>
+          <p:cNvPr id="1166" name="Avg head"/>
           <p:cNvSpPr txBox="1"/>
           <p:nvPr/>
         </p:nvSpPr>
         <p:spPr>
           <a:xfrm>
-            <a:off x="9793224" y="3246120"/>
-            <a:ext cx="749808" cy="182880"/>
+            <a:off x="10588752" y="3099816"/>
+            <a:ext cx="685800" cy="237744"/>
           </a:xfrm>
           <a:prstGeom prst="rect">
             <a:avLst/>
@@ -16061,28 +16091,28 @@
           <a:p>
             <a:pPr algn="ctr"/>
             <a:r>
-              <a:rPr lang="en-US" sz="850" b="0" i="0" dirty="0">
+              <a:rPr lang="en-US" sz="1000" b="1" i="0" dirty="0">
                 <a:solidFill>
                   <a:srgbClr val="5B6770"/>
                 </a:solidFill>
                 <a:latin typeface="Calibri"/>
                 <a:cs typeface="Calibri"/>
               </a:rPr>
-              <a:t xml:space="preserve">DeepSeek</a:t>
-            </a:r>
-          </a:p>
-        </p:txBody>
-      </p:sp>
-      <p:sp>
-        <p:nvSpPr>
-          <p:cNvPr id="1167" name="Avg head"/>
+              <a:t xml:space="preserve">Avg</a:t>
+            </a:r>
+          </a:p>
+        </p:txBody>
+      </p:sp>
+      <p:sp>
+        <p:nvSpPr>
+          <p:cNvPr id="1167" name="Method"/>
           <p:cNvSpPr txBox="1"/>
           <p:nvPr/>
         </p:nvSpPr>
         <p:spPr>
           <a:xfrm>
-            <a:off x="10588752" y="3127248"/>
-            <a:ext cx="685800" cy="237744"/>
+            <a:off x="2514600" y="3447288"/>
+            <a:ext cx="1280160" cy="182880"/>
           </a:xfrm>
           <a:prstGeom prst="rect">
             <a:avLst/>
@@ -16098,16 +16128,16 @@
           </a:bodyPr>
           <a:lstStyle/>
           <a:p>
-            <a:pPr algn="ctr"/>
-            <a:r>
-              <a:rPr lang="en-US" sz="1000" b="1" i="0" dirty="0">
-                <a:solidFill>
-                  <a:srgbClr val="5B6770"/>
-                </a:solidFill>
-                <a:latin typeface="Calibri"/>
-                <a:cs typeface="Calibri"/>
-              </a:rPr>
-              <a:t xml:space="preserve">Avg</a:t>
+            <a:pPr algn="l"/>
+            <a:r>
+              <a:rPr lang="en-US" sz="1100" b="0" i="0" dirty="0">
+                <a:solidFill>
+                  <a:srgbClr val="1F2328"/>
+                </a:solidFill>
+                <a:latin typeface="Calibri"/>
+                <a:cs typeface="Calibri"/>
+              </a:rPr>
+              <a:t xml:space="preserve">Direct Mapping</a:t>
             </a:r>
           </a:p>
         </p:txBody>
@@ -16120,8 +16150,8 @@
         </p:nvSpPr>
         <p:spPr>
           <a:xfrm>
-            <a:off x="2514600" y="3474720"/>
-            <a:ext cx="1280160" cy="329184"/>
+            <a:off x="2514600" y="3630168"/>
+            <a:ext cx="1280160" cy="182880"/>
           </a:xfrm>
           <a:prstGeom prst="rect">
             <a:avLst/>
@@ -16139,6 +16169,125 @@
           <a:p>
             <a:pPr algn="l"/>
             <a:r>
+              <a:rPr lang="en-US" sz="1100" b="0" i="0" dirty="0">
+                <a:solidFill>
+                  <a:srgbClr val="1F2328"/>
+                </a:solidFill>
+                <a:latin typeface="Calibri"/>
+                <a:cs typeface="Calibri"/>
+              </a:rPr>
+              <a:t xml:space="preserve">LLM baseline</a:t>
+            </a:r>
+          </a:p>
+        </p:txBody>
+      </p:sp>
+      <p:sp>
+        <p:nvSpPr>
+          <p:cNvPr id="1169" name="None"/>
+          <p:cNvSpPr/>
+          <p:nvPr/>
+        </p:nvSpPr>
+        <p:spPr>
+          <a:xfrm>
+            <a:off x="3813048" y="3456432"/>
+            <a:ext cx="6711696" cy="347472"/>
+          </a:xfrm>
+          <a:prstGeom prst="rect">
+            <a:avLst/>
+          </a:prstGeom>
+          <a:solidFill>
+            <a:srgbClr val="F6DAD3"/>
+          </a:solidFill>
+          <a:ln>
+            <a:noFill/>
+          </a:ln>
+        </p:spPr>
+        <p:txBody>
+          <a:bodyPr wrap="square" lIns="0" tIns="0" rIns="0" bIns="0" anchor="ctr">
+            <a:noAutofit/>
+          </a:bodyPr>
+          <a:lstStyle/>
+          <a:p>
+            <a:pPr algn="ctr"/>
+            <a:r>
+              <a:rPr lang="en-US" sz="1150" b="0" i="1" dirty="0">
+                <a:solidFill>
+                  <a:srgbClr val="1F2328"/>
+                </a:solidFill>
+                <a:latin typeface="Calibri"/>
+                <a:cs typeface="Calibri"/>
+              </a:rPr>
+              <a:t xml:space="preserve">No labels, provenance or class hierarchy, in any run.</a:t>
+            </a:r>
+          </a:p>
+        </p:txBody>
+      </p:sp>
+      <p:sp>
+        <p:nvSpPr>
+          <p:cNvPr id="1170" name="Metric"/>
+          <p:cNvSpPr txBox="1"/>
+          <p:nvPr/>
+        </p:nvSpPr>
+        <p:spPr>
+          <a:xfrm>
+            <a:off x="1078992" y="3867912"/>
+            <a:ext cx="1417320" cy="512064"/>
+          </a:xfrm>
+          <a:prstGeom prst="rect">
+            <a:avLst/>
+          </a:prstGeom>
+          <a:noFill/>
+          <a:ln>
+            <a:noFill/>
+          </a:ln>
+        </p:spPr>
+        <p:txBody>
+          <a:bodyPr wrap="square" lIns="0" tIns="0" rIns="0" bIns="0" anchor="ctr">
+            <a:noAutofit/>
+          </a:bodyPr>
+          <a:lstStyle/>
+          <a:p>
+            <a:pPr algn="l"/>
+            <a:r>
+              <a:rPr lang="en-US" sz="1150" b="1" i="0" dirty="0">
+                <a:solidFill>
+                  <a:srgbClr val="2F6B78"/>
+                </a:solidFill>
+                <a:latin typeface="Calibri"/>
+                <a:cs typeface="Calibri"/>
+              </a:rPr>
+              <a:t xml:space="preserve">Labels &amp; comments</a:t>
+            </a:r>
+          </a:p>
+        </p:txBody>
+      </p:sp>
+      <p:sp>
+        <p:nvSpPr>
+          <p:cNvPr id="1171" name="Method"/>
+          <p:cNvSpPr txBox="1"/>
+          <p:nvPr/>
+        </p:nvSpPr>
+        <p:spPr>
+          <a:xfrm>
+            <a:off x="2514600" y="3867912"/>
+            <a:ext cx="1280160" cy="256032"/>
+          </a:xfrm>
+          <a:prstGeom prst="rect">
+            <a:avLst/>
+          </a:prstGeom>
+          <a:noFill/>
+          <a:ln>
+            <a:noFill/>
+          </a:ln>
+        </p:spPr>
+        <p:txBody>
+          <a:bodyPr wrap="square" lIns="0" tIns="0" rIns="0" bIns="0" anchor="ctr">
+            <a:noAutofit/>
+          </a:bodyPr>
+          <a:lstStyle/>
+          <a:p>
+            <a:pPr algn="l"/>
+            <a:r>
               <a:rPr lang="en-US" sz="1200" b="0" i="0" dirty="0">
                 <a:solidFill>
                   <a:srgbClr val="1F2328"/>
@@ -16146,130 +16295,7 @@
                 <a:latin typeface="Calibri"/>
                 <a:cs typeface="Calibri"/>
               </a:rPr>
-              <a:t xml:space="preserve">Non-Iterative</a:t>
-            </a:r>
-          </a:p>
-        </p:txBody>
-      </p:sp>
-      <p:sp>
-        <p:nvSpPr>
-          <p:cNvPr id="1169" name="Cell"/>
-          <p:cNvSpPr/>
-          <p:nvPr/>
-        </p:nvSpPr>
-        <p:spPr>
-          <a:xfrm>
-            <a:off x="3813048" y="3493008"/>
-            <a:ext cx="713231" cy="292608"/>
-          </a:xfrm>
-          <a:prstGeom prst="rect">
-            <a:avLst/>
-          </a:prstGeom>
-          <a:solidFill>
-            <a:srgbClr val="DDF0E5"/>
-          </a:solidFill>
-          <a:ln>
-            <a:noFill/>
-          </a:ln>
-        </p:spPr>
-        <p:txBody>
-          <a:bodyPr wrap="square" lIns="0" tIns="0" rIns="0" bIns="0" anchor="ctr">
-            <a:noAutofit/>
-          </a:bodyPr>
-          <a:lstStyle/>
-          <a:p>
-            <a:pPr algn="ctr"/>
-            <a:r>
-              <a:rPr lang="en-US" sz="1100" b="0" i="0" dirty="0">
-                <a:solidFill>
-                  <a:srgbClr val="1F2328"/>
-                </a:solidFill>
-                <a:latin typeface="Calibri"/>
-                <a:cs typeface="Calibri"/>
-              </a:rPr>
-              <a:t xml:space="preserve">680</a:t>
-            </a:r>
-          </a:p>
-        </p:txBody>
-      </p:sp>
-      <p:sp>
-        <p:nvSpPr>
-          <p:cNvPr id="1170" name="Cell"/>
-          <p:cNvSpPr/>
-          <p:nvPr/>
-        </p:nvSpPr>
-        <p:spPr>
-          <a:xfrm>
-            <a:off x="4562856" y="3493008"/>
-            <a:ext cx="713231" cy="292608"/>
-          </a:xfrm>
-          <a:prstGeom prst="rect">
-            <a:avLst/>
-          </a:prstGeom>
-          <a:solidFill>
-            <a:srgbClr val="F1F3F2"/>
-          </a:solidFill>
-          <a:ln>
-            <a:noFill/>
-          </a:ln>
-        </p:spPr>
-        <p:txBody>
-          <a:bodyPr wrap="square" lIns="0" tIns="0" rIns="0" bIns="0" anchor="ctr">
-            <a:noAutofit/>
-          </a:bodyPr>
-          <a:lstStyle/>
-          <a:p>
-            <a:pPr algn="ctr"/>
-            <a:r>
-              <a:rPr lang="en-US" sz="1100" b="0" i="0" dirty="0">
-                <a:solidFill>
-                  <a:srgbClr val="1F2328"/>
-                </a:solidFill>
-                <a:latin typeface="Calibri"/>
-                <a:cs typeface="Calibri"/>
-              </a:rPr>
-              <a:t xml:space="preserve">134</a:t>
-            </a:r>
-          </a:p>
-        </p:txBody>
-      </p:sp>
-      <p:sp>
-        <p:nvSpPr>
-          <p:cNvPr id="1171" name="Cell"/>
-          <p:cNvSpPr/>
-          <p:nvPr/>
-        </p:nvSpPr>
-        <p:spPr>
-          <a:xfrm>
-            <a:off x="5312664" y="3493008"/>
-            <a:ext cx="713231" cy="292608"/>
-          </a:xfrm>
-          <a:prstGeom prst="rect">
-            <a:avLst/>
-          </a:prstGeom>
-          <a:solidFill>
-            <a:srgbClr val="DDF0E5"/>
-          </a:solidFill>
-          <a:ln>
-            <a:noFill/>
-          </a:ln>
-        </p:spPr>
-        <p:txBody>
-          <a:bodyPr wrap="square" lIns="0" tIns="0" rIns="0" bIns="0" anchor="ctr">
-            <a:noAutofit/>
-          </a:bodyPr>
-          <a:lstStyle/>
-          <a:p>
-            <a:pPr algn="ctr"/>
-            <a:r>
-              <a:rPr lang="en-US" sz="1100" b="0" i="0" dirty="0">
-                <a:solidFill>
-                  <a:srgbClr val="1F2328"/>
-                </a:solidFill>
-                <a:latin typeface="Calibri"/>
-                <a:cs typeface="Calibri"/>
-              </a:rPr>
-              <a:t xml:space="preserve">736</a:t>
+              <a:t xml:space="preserve">Non-Iterative RAG</a:t>
             </a:r>
           </a:p>
         </p:txBody>
@@ -16282,14 +16308,14 @@
         </p:nvSpPr>
         <p:spPr>
           <a:xfrm>
-            <a:off x="6062472" y="3493008"/>
-            <a:ext cx="713231" cy="292608"/>
-          </a:xfrm>
-          <a:prstGeom prst="rect">
-            <a:avLst/>
-          </a:prstGeom>
-          <a:solidFill>
-            <a:srgbClr val="BFE3CF"/>
+            <a:off x="3813048" y="3886200"/>
+            <a:ext cx="713231" cy="219456"/>
+          </a:xfrm>
+          <a:prstGeom prst="rect">
+            <a:avLst/>
+          </a:prstGeom>
+          <a:solidFill>
+            <a:srgbClr val="DDF0E5"/>
           </a:solidFill>
           <a:ln>
             <a:noFill/>
@@ -16310,7 +16336,7 @@
                 <a:latin typeface="Calibri"/>
                 <a:cs typeface="Calibri"/>
               </a:rPr>
-              <a:t xml:space="preserve">877</a:t>
+              <a:t xml:space="preserve">680</a:t>
             </a:r>
           </a:p>
         </p:txBody>
@@ -16323,14 +16349,14 @@
         </p:nvSpPr>
         <p:spPr>
           <a:xfrm>
-            <a:off x="6812279" y="3493008"/>
-            <a:ext cx="713231" cy="292608"/>
-          </a:xfrm>
-          <a:prstGeom prst="rect">
-            <a:avLst/>
-          </a:prstGeom>
-          <a:solidFill>
-            <a:srgbClr val="F1F3F2"/>
+            <a:off x="4562856" y="3886200"/>
+            <a:ext cx="713231" cy="219456"/>
+          </a:xfrm>
+          <a:prstGeom prst="rect">
+            <a:avLst/>
+          </a:prstGeom>
+          <a:solidFill>
+            <a:srgbClr val="F6DAD3"/>
           </a:solidFill>
           <a:ln>
             <a:noFill/>
@@ -16351,7 +16377,7 @@
                 <a:latin typeface="Calibri"/>
                 <a:cs typeface="Calibri"/>
               </a:rPr>
-              <a:t xml:space="preserve">157</a:t>
+              <a:t xml:space="preserve">134</a:t>
             </a:r>
           </a:p>
         </p:txBody>
@@ -16364,8 +16390,8 @@
         </p:nvSpPr>
         <p:spPr>
           <a:xfrm>
-            <a:off x="7562088" y="3493008"/>
-            <a:ext cx="713231" cy="292608"/>
+            <a:off x="5312664" y="3886200"/>
+            <a:ext cx="713231" cy="219456"/>
           </a:xfrm>
           <a:prstGeom prst="rect">
             <a:avLst/>
@@ -16392,7 +16418,7 @@
                 <a:latin typeface="Calibri"/>
                 <a:cs typeface="Calibri"/>
               </a:rPr>
-              <a:t xml:space="preserve">743</a:t>
+              <a:t xml:space="preserve">736</a:t>
             </a:r>
           </a:p>
         </p:txBody>
@@ -16405,14 +16431,14 @@
         </p:nvSpPr>
         <p:spPr>
           <a:xfrm>
-            <a:off x="8311896" y="3493008"/>
-            <a:ext cx="713231" cy="292608"/>
-          </a:xfrm>
-          <a:prstGeom prst="rect">
-            <a:avLst/>
-          </a:prstGeom>
-          <a:solidFill>
-            <a:srgbClr val="F6DAD3"/>
+            <a:off x="6062472" y="3886200"/>
+            <a:ext cx="713231" cy="219456"/>
+          </a:xfrm>
+          <a:prstGeom prst="rect">
+            <a:avLst/>
+          </a:prstGeom>
+          <a:solidFill>
+            <a:srgbClr val="DDF0E5"/>
           </a:solidFill>
           <a:ln>
             <a:noFill/>
@@ -16433,7 +16459,7 @@
                 <a:latin typeface="Calibri"/>
                 <a:cs typeface="Calibri"/>
               </a:rPr>
-              <a:t xml:space="preserve">98</a:t>
+              <a:t xml:space="preserve">877</a:t>
             </a:r>
           </a:p>
         </p:txBody>
@@ -16446,8 +16472,8 @@
         </p:nvSpPr>
         <p:spPr>
           <a:xfrm>
-            <a:off x="9061704" y="3493008"/>
-            <a:ext cx="713231" cy="292608"/>
+            <a:off x="6812279" y="3886200"/>
+            <a:ext cx="713231" cy="219456"/>
           </a:xfrm>
           <a:prstGeom prst="rect">
             <a:avLst/>
@@ -16474,7 +16500,7 @@
                 <a:latin typeface="Calibri"/>
                 <a:cs typeface="Calibri"/>
               </a:rPr>
-              <a:t xml:space="preserve">14</a:t>
+              <a:t xml:space="preserve">157</a:t>
             </a:r>
           </a:p>
         </p:txBody>
@@ -16487,8 +16513,90 @@
         </p:nvSpPr>
         <p:spPr>
           <a:xfrm>
-            <a:off x="9811512" y="3493008"/>
-            <a:ext cx="713231" cy="292608"/>
+            <a:off x="7562088" y="3886200"/>
+            <a:ext cx="713231" cy="219456"/>
+          </a:xfrm>
+          <a:prstGeom prst="rect">
+            <a:avLst/>
+          </a:prstGeom>
+          <a:solidFill>
+            <a:srgbClr val="F1F3F2"/>
+          </a:solidFill>
+          <a:ln>
+            <a:noFill/>
+          </a:ln>
+        </p:spPr>
+        <p:txBody>
+          <a:bodyPr wrap="square" lIns="0" tIns="0" rIns="0" bIns="0" anchor="ctr">
+            <a:noAutofit/>
+          </a:bodyPr>
+          <a:lstStyle/>
+          <a:p>
+            <a:pPr algn="ctr"/>
+            <a:r>
+              <a:rPr lang="en-US" sz="1100" b="0" i="0" dirty="0">
+                <a:solidFill>
+                  <a:srgbClr val="1F2328"/>
+                </a:solidFill>
+                <a:latin typeface="Calibri"/>
+                <a:cs typeface="Calibri"/>
+              </a:rPr>
+              <a:t xml:space="preserve">743</a:t>
+            </a:r>
+          </a:p>
+        </p:txBody>
+      </p:sp>
+      <p:sp>
+        <p:nvSpPr>
+          <p:cNvPr id="1178" name="Cell"/>
+          <p:cNvSpPr/>
+          <p:nvPr/>
+        </p:nvSpPr>
+        <p:spPr>
+          <a:xfrm>
+            <a:off x="8311896" y="3886200"/>
+            <a:ext cx="713231" cy="219456"/>
+          </a:xfrm>
+          <a:prstGeom prst="rect">
+            <a:avLst/>
+          </a:prstGeom>
+          <a:solidFill>
+            <a:srgbClr val="F1F3F2"/>
+          </a:solidFill>
+          <a:ln>
+            <a:noFill/>
+          </a:ln>
+        </p:spPr>
+        <p:txBody>
+          <a:bodyPr wrap="square" lIns="0" tIns="0" rIns="0" bIns="0" anchor="ctr">
+            <a:noAutofit/>
+          </a:bodyPr>
+          <a:lstStyle/>
+          <a:p>
+            <a:pPr algn="ctr"/>
+            <a:r>
+              <a:rPr lang="en-US" sz="1100" b="0" i="0" dirty="0">
+                <a:solidFill>
+                  <a:srgbClr val="1F2328"/>
+                </a:solidFill>
+                <a:latin typeface="Calibri"/>
+                <a:cs typeface="Calibri"/>
+              </a:rPr>
+              <a:t xml:space="preserve">98</a:t>
+            </a:r>
+          </a:p>
+        </p:txBody>
+      </p:sp>
+      <p:sp>
+        <p:nvSpPr>
+          <p:cNvPr id="1179" name="Cell"/>
+          <p:cNvSpPr/>
+          <p:nvPr/>
+        </p:nvSpPr>
+        <p:spPr>
+          <a:xfrm>
+            <a:off x="9061704" y="3886200"/>
+            <a:ext cx="713231" cy="219456"/>
           </a:xfrm>
           <a:prstGeom prst="rect">
             <a:avLst/>
@@ -16515,85 +16623,7 @@
                 <a:latin typeface="Calibri"/>
                 <a:cs typeface="Calibri"/>
               </a:rPr>
-              <a:t xml:space="preserve">64</a:t>
-            </a:r>
-          </a:p>
-        </p:txBody>
-      </p:sp>
-      <p:sp>
-        <p:nvSpPr>
-          <p:cNvPr id="1178" name="Avg"/>
-          <p:cNvSpPr txBox="1"/>
-          <p:nvPr/>
-        </p:nvSpPr>
-        <p:spPr>
-          <a:xfrm>
-            <a:off x="10588752" y="3474720"/>
-            <a:ext cx="685800" cy="329184"/>
-          </a:xfrm>
-          <a:prstGeom prst="rect">
-            <a:avLst/>
-          </a:prstGeom>
-          <a:noFill/>
-          <a:ln>
-            <a:noFill/>
-          </a:ln>
-        </p:spPr>
-        <p:txBody>
-          <a:bodyPr wrap="square" lIns="0" tIns="0" rIns="0" bIns="0" anchor="ctr">
-            <a:noAutofit/>
-          </a:bodyPr>
-          <a:lstStyle/>
-          <a:p>
-            <a:pPr algn="ctr"/>
-            <a:r>
-              <a:rPr lang="en-US" sz="1250" b="0" i="0" dirty="0">
-                <a:solidFill>
-                  <a:srgbClr val="1F2328"/>
-                </a:solidFill>
-                <a:latin typeface="Calibri"/>
-                <a:cs typeface="Calibri"/>
-              </a:rPr>
-              <a:t xml:space="preserve">389</a:t>
-            </a:r>
-          </a:p>
-        </p:txBody>
-      </p:sp>
-      <p:sp>
-        <p:nvSpPr>
-          <p:cNvPr id="1179" name="Method"/>
-          <p:cNvSpPr txBox="1"/>
-          <p:nvPr/>
-        </p:nvSpPr>
-        <p:spPr>
-          <a:xfrm>
-            <a:off x="2514600" y="3803904"/>
-            <a:ext cx="1280160" cy="329184"/>
-          </a:xfrm>
-          <a:prstGeom prst="rect">
-            <a:avLst/>
-          </a:prstGeom>
-          <a:noFill/>
-          <a:ln>
-            <a:noFill/>
-          </a:ln>
-        </p:spPr>
-        <p:txBody>
-          <a:bodyPr wrap="square" lIns="0" tIns="0" rIns="0" bIns="0" anchor="ctr">
-            <a:noAutofit/>
-          </a:bodyPr>
-          <a:lstStyle/>
-          <a:p>
-            <a:pPr algn="l"/>
-            <a:r>
-              <a:rPr lang="en-US" sz="1200" b="1" i="0" dirty="0">
-                <a:solidFill>
-                  <a:srgbClr val="0B6E4F"/>
-                </a:solidFill>
-                <a:latin typeface="Calibri"/>
-                <a:cs typeface="Calibri"/>
-              </a:rPr>
-              <a:t xml:space="preserve">RIGOR</a:t>
+              <a:t xml:space="preserve">14</a:t>
             </a:r>
           </a:p>
         </p:txBody>
@@ -16606,117 +16636,113 @@
         </p:nvSpPr>
         <p:spPr>
           <a:xfrm>
-            <a:off x="3813048" y="3822191"/>
-            <a:ext cx="713231" cy="292608"/>
-          </a:xfrm>
-          <a:prstGeom prst="rect">
-            <a:avLst/>
-          </a:prstGeom>
-          <a:solidFill>
-            <a:srgbClr val="BFE3CF"/>
-          </a:solidFill>
-          <a:ln>
-            <a:noFill/>
-          </a:ln>
-        </p:spPr>
-        <p:txBody>
-          <a:bodyPr wrap="square" lIns="0" tIns="0" rIns="0" bIns="0" anchor="ctr">
-            <a:noAutofit/>
-          </a:bodyPr>
-          <a:lstStyle/>
-          <a:p>
-            <a:pPr algn="ctr"/>
-            <a:r>
-              <a:rPr lang="en-US" sz="1100" b="1" i="0" dirty="0">
-                <a:solidFill>
-                  <a:srgbClr val="1F2328"/>
-                </a:solidFill>
-                <a:latin typeface="Calibri"/>
-                <a:cs typeface="Calibri"/>
-              </a:rPr>
-              <a:t xml:space="preserve">1,029</a:t>
-            </a:r>
-          </a:p>
-        </p:txBody>
-      </p:sp>
-      <p:sp>
-        <p:nvSpPr>
-          <p:cNvPr id="1181" name="Cell"/>
-          <p:cNvSpPr/>
-          <p:nvPr/>
-        </p:nvSpPr>
-        <p:spPr>
-          <a:xfrm>
-            <a:off x="4562856" y="3822191"/>
-            <a:ext cx="713231" cy="292608"/>
-          </a:xfrm>
-          <a:prstGeom prst="rect">
-            <a:avLst/>
-          </a:prstGeom>
-          <a:solidFill>
-            <a:srgbClr val="BFE3CF"/>
-          </a:solidFill>
-          <a:ln>
-            <a:noFill/>
-          </a:ln>
-        </p:spPr>
-        <p:txBody>
-          <a:bodyPr wrap="square" lIns="0" tIns="0" rIns="0" bIns="0" anchor="ctr">
-            <a:noAutofit/>
-          </a:bodyPr>
-          <a:lstStyle/>
-          <a:p>
-            <a:pPr algn="ctr"/>
-            <a:r>
-              <a:rPr lang="en-US" sz="1100" b="1" i="0" dirty="0">
-                <a:solidFill>
-                  <a:srgbClr val="1F2328"/>
-                </a:solidFill>
-                <a:latin typeface="Calibri"/>
-                <a:cs typeface="Calibri"/>
-              </a:rPr>
-              <a:t xml:space="preserve">1,137</a:t>
-            </a:r>
-          </a:p>
-        </p:txBody>
-      </p:sp>
-      <p:sp>
-        <p:nvSpPr>
-          <p:cNvPr id="1182" name="Cell"/>
-          <p:cNvSpPr/>
-          <p:nvPr/>
-        </p:nvSpPr>
-        <p:spPr>
-          <a:xfrm>
-            <a:off x="5312664" y="3822191"/>
-            <a:ext cx="713231" cy="292608"/>
-          </a:xfrm>
-          <a:prstGeom prst="rect">
-            <a:avLst/>
-          </a:prstGeom>
-          <a:solidFill>
-            <a:srgbClr val="DDF0E5"/>
-          </a:solidFill>
-          <a:ln>
-            <a:noFill/>
-          </a:ln>
-        </p:spPr>
-        <p:txBody>
-          <a:bodyPr wrap="square" lIns="0" tIns="0" rIns="0" bIns="0" anchor="ctr">
-            <a:noAutofit/>
-          </a:bodyPr>
-          <a:lstStyle/>
-          <a:p>
-            <a:pPr algn="ctr"/>
-            <a:r>
-              <a:rPr lang="en-US" sz="1100" b="1" i="0" dirty="0">
-                <a:solidFill>
-                  <a:srgbClr val="1F2328"/>
-                </a:solidFill>
-                <a:latin typeface="Calibri"/>
-                <a:cs typeface="Calibri"/>
-              </a:rPr>
-              <a:t xml:space="preserve">341</a:t>
+            <a:off x="9811512" y="3886200"/>
+            <a:ext cx="713231" cy="219456"/>
+          </a:xfrm>
+          <a:prstGeom prst="rect">
+            <a:avLst/>
+          </a:prstGeom>
+          <a:solidFill>
+            <a:srgbClr val="F6DAD3"/>
+          </a:solidFill>
+          <a:ln>
+            <a:noFill/>
+          </a:ln>
+        </p:spPr>
+        <p:txBody>
+          <a:bodyPr wrap="square" lIns="0" tIns="0" rIns="0" bIns="0" anchor="ctr">
+            <a:noAutofit/>
+          </a:bodyPr>
+          <a:lstStyle/>
+          <a:p>
+            <a:pPr algn="ctr"/>
+            <a:r>
+              <a:rPr lang="en-US" sz="1100" b="0" i="0" dirty="0">
+                <a:solidFill>
+                  <a:srgbClr val="1F2328"/>
+                </a:solidFill>
+                <a:latin typeface="Calibri"/>
+                <a:cs typeface="Calibri"/>
+              </a:rPr>
+              <a:t xml:space="preserve">64</a:t>
+            </a:r>
+          </a:p>
+        </p:txBody>
+      </p:sp>
+      <p:sp>
+        <p:nvSpPr>
+          <p:cNvPr id="1181" name="Avg"/>
+          <p:cNvSpPr txBox="1"/>
+          <p:nvPr/>
+        </p:nvSpPr>
+        <p:spPr>
+          <a:xfrm>
+            <a:off x="10588752" y="3867912"/>
+            <a:ext cx="685800" cy="256032"/>
+          </a:xfrm>
+          <a:prstGeom prst="rect">
+            <a:avLst/>
+          </a:prstGeom>
+          <a:noFill/>
+          <a:ln>
+            <a:noFill/>
+          </a:ln>
+        </p:spPr>
+        <p:txBody>
+          <a:bodyPr wrap="square" lIns="0" tIns="0" rIns="0" bIns="0" anchor="ctr">
+            <a:noAutofit/>
+          </a:bodyPr>
+          <a:lstStyle/>
+          <a:p>
+            <a:pPr algn="ctr"/>
+            <a:r>
+              <a:rPr lang="en-US" sz="1250" b="0" i="0" dirty="0">
+                <a:solidFill>
+                  <a:srgbClr val="1F2328"/>
+                </a:solidFill>
+                <a:latin typeface="Calibri"/>
+                <a:cs typeface="Calibri"/>
+              </a:rPr>
+              <a:t xml:space="preserve">389</a:t>
+            </a:r>
+          </a:p>
+        </p:txBody>
+      </p:sp>
+      <p:sp>
+        <p:nvSpPr>
+          <p:cNvPr id="1182" name="Method"/>
+          <p:cNvSpPr txBox="1"/>
+          <p:nvPr/>
+        </p:nvSpPr>
+        <p:spPr>
+          <a:xfrm>
+            <a:off x="2514600" y="4123944"/>
+            <a:ext cx="1280160" cy="256032"/>
+          </a:xfrm>
+          <a:prstGeom prst="rect">
+            <a:avLst/>
+          </a:prstGeom>
+          <a:noFill/>
+          <a:ln>
+            <a:noFill/>
+          </a:ln>
+        </p:spPr>
+        <p:txBody>
+          <a:bodyPr wrap="square" lIns="0" tIns="0" rIns="0" bIns="0" anchor="ctr">
+            <a:noAutofit/>
+          </a:bodyPr>
+          <a:lstStyle/>
+          <a:p>
+            <a:pPr algn="l"/>
+            <a:r>
+              <a:rPr lang="en-US" sz="1200" b="1" i="0" dirty="0">
+                <a:solidFill>
+                  <a:srgbClr val="0B6E4F"/>
+                </a:solidFill>
+                <a:latin typeface="Calibri"/>
+                <a:cs typeface="Calibri"/>
+              </a:rPr>
+              <a:t xml:space="preserve">RIGOR</a:t>
             </a:r>
           </a:p>
         </p:txBody>
@@ -16729,8 +16755,8 @@
         </p:nvSpPr>
         <p:spPr>
           <a:xfrm>
-            <a:off x="6062472" y="3822191"/>
-            <a:ext cx="713231" cy="292608"/>
+            <a:off x="3813048" y="4142232"/>
+            <a:ext cx="713231" cy="219456"/>
           </a:xfrm>
           <a:prstGeom prst="rect">
             <a:avLst/>
@@ -16757,7 +16783,7 @@
                 <a:latin typeface="Calibri"/>
                 <a:cs typeface="Calibri"/>
               </a:rPr>
-              <a:t xml:space="preserve">1,291</a:t>
+              <a:t xml:space="preserve">1,029</a:t>
             </a:r>
           </a:p>
         </p:txBody>
@@ -16770,8 +16796,8 @@
         </p:nvSpPr>
         <p:spPr>
           <a:xfrm>
-            <a:off x="6812279" y="3822191"/>
-            <a:ext cx="713231" cy="292608"/>
+            <a:off x="4562856" y="4142232"/>
+            <a:ext cx="713231" cy="219456"/>
           </a:xfrm>
           <a:prstGeom prst="rect">
             <a:avLst/>
@@ -16798,7 +16824,7 @@
                 <a:latin typeface="Calibri"/>
                 <a:cs typeface="Calibri"/>
               </a:rPr>
-              <a:t xml:space="preserve">1,684</a:t>
+              <a:t xml:space="preserve">1,137</a:t>
             </a:r>
           </a:p>
         </p:txBody>
@@ -16811,14 +16837,14 @@
         </p:nvSpPr>
         <p:spPr>
           <a:xfrm>
-            <a:off x="7562088" y="3822191"/>
-            <a:ext cx="713231" cy="292608"/>
-          </a:xfrm>
-          <a:prstGeom prst="rect">
-            <a:avLst/>
-          </a:prstGeom>
-          <a:solidFill>
-            <a:srgbClr val="DDF0E5"/>
+            <a:off x="5312664" y="4142232"/>
+            <a:ext cx="713231" cy="219456"/>
+          </a:xfrm>
+          <a:prstGeom prst="rect">
+            <a:avLst/>
+          </a:prstGeom>
+          <a:solidFill>
+            <a:srgbClr val="F1F3F2"/>
           </a:solidFill>
           <a:ln>
             <a:noFill/>
@@ -16839,7 +16865,7 @@
                 <a:latin typeface="Calibri"/>
                 <a:cs typeface="Calibri"/>
               </a:rPr>
-              <a:t xml:space="preserve">435</a:t>
+              <a:t xml:space="preserve">341</a:t>
             </a:r>
           </a:p>
         </p:txBody>
@@ -16852,14 +16878,14 @@
         </p:nvSpPr>
         <p:spPr>
           <a:xfrm>
-            <a:off x="8311896" y="3822191"/>
-            <a:ext cx="713231" cy="292608"/>
-          </a:xfrm>
-          <a:prstGeom prst="rect">
-            <a:avLst/>
-          </a:prstGeom>
-          <a:solidFill>
-            <a:srgbClr val="DDF0E5"/>
+            <a:off x="6062472" y="4142232"/>
+            <a:ext cx="713231" cy="219456"/>
+          </a:xfrm>
+          <a:prstGeom prst="rect">
+            <a:avLst/>
+          </a:prstGeom>
+          <a:solidFill>
+            <a:srgbClr val="BFE3CF"/>
           </a:solidFill>
           <a:ln>
             <a:noFill/>
@@ -16880,7 +16906,7 @@
                 <a:latin typeface="Calibri"/>
                 <a:cs typeface="Calibri"/>
               </a:rPr>
-              <a:t xml:space="preserve">357</a:t>
+              <a:t xml:space="preserve">1,291</a:t>
             </a:r>
           </a:p>
         </p:txBody>
@@ -16893,14 +16919,14 @@
         </p:nvSpPr>
         <p:spPr>
           <a:xfrm>
-            <a:off x="9061704" y="3822191"/>
-            <a:ext cx="713231" cy="292608"/>
-          </a:xfrm>
-          <a:prstGeom prst="rect">
-            <a:avLst/>
-          </a:prstGeom>
-          <a:solidFill>
-            <a:srgbClr val="DDF0E5"/>
+            <a:off x="6812279" y="4142232"/>
+            <a:ext cx="713231" cy="219456"/>
+          </a:xfrm>
+          <a:prstGeom prst="rect">
+            <a:avLst/>
+          </a:prstGeom>
+          <a:solidFill>
+            <a:srgbClr val="BFE3CF"/>
           </a:solidFill>
           <a:ln>
             <a:noFill/>
@@ -16921,7 +16947,7 @@
                 <a:latin typeface="Calibri"/>
                 <a:cs typeface="Calibri"/>
               </a:rPr>
-              <a:t xml:space="preserve">362</a:t>
+              <a:t xml:space="preserve">1,684</a:t>
             </a:r>
           </a:p>
         </p:txBody>
@@ -16934,14 +16960,14 @@
         </p:nvSpPr>
         <p:spPr>
           <a:xfrm>
-            <a:off x="9811512" y="3822191"/>
-            <a:ext cx="713231" cy="292608"/>
-          </a:xfrm>
-          <a:prstGeom prst="rect">
-            <a:avLst/>
-          </a:prstGeom>
-          <a:solidFill>
-            <a:srgbClr val="DDF0E5"/>
+            <a:off x="7562088" y="4142232"/>
+            <a:ext cx="713231" cy="219456"/>
+          </a:xfrm>
+          <a:prstGeom prst="rect">
+            <a:avLst/>
+          </a:prstGeom>
+          <a:solidFill>
+            <a:srgbClr val="F1F3F2"/>
           </a:solidFill>
           <a:ln>
             <a:noFill/>
@@ -16962,6 +16988,129 @@
                 <a:latin typeface="Calibri"/>
                 <a:cs typeface="Calibri"/>
               </a:rPr>
+              <a:t xml:space="preserve">435</a:t>
+            </a:r>
+          </a:p>
+        </p:txBody>
+      </p:sp>
+      <p:sp>
+        <p:nvSpPr>
+          <p:cNvPr id="1189" name="Cell"/>
+          <p:cNvSpPr/>
+          <p:nvPr/>
+        </p:nvSpPr>
+        <p:spPr>
+          <a:xfrm>
+            <a:off x="8311896" y="4142232"/>
+            <a:ext cx="713231" cy="219456"/>
+          </a:xfrm>
+          <a:prstGeom prst="rect">
+            <a:avLst/>
+          </a:prstGeom>
+          <a:solidFill>
+            <a:srgbClr val="BFE3CF"/>
+          </a:solidFill>
+          <a:ln>
+            <a:noFill/>
+          </a:ln>
+        </p:spPr>
+        <p:txBody>
+          <a:bodyPr wrap="square" lIns="0" tIns="0" rIns="0" bIns="0" anchor="ctr">
+            <a:noAutofit/>
+          </a:bodyPr>
+          <a:lstStyle/>
+          <a:p>
+            <a:pPr algn="ctr"/>
+            <a:r>
+              <a:rPr lang="en-US" sz="1100" b="1" i="0" dirty="0">
+                <a:solidFill>
+                  <a:srgbClr val="1F2328"/>
+                </a:solidFill>
+                <a:latin typeface="Calibri"/>
+                <a:cs typeface="Calibri"/>
+              </a:rPr>
+              <a:t xml:space="preserve">357</a:t>
+            </a:r>
+          </a:p>
+        </p:txBody>
+      </p:sp>
+      <p:sp>
+        <p:nvSpPr>
+          <p:cNvPr id="1190" name="Cell"/>
+          <p:cNvSpPr/>
+          <p:nvPr/>
+        </p:nvSpPr>
+        <p:spPr>
+          <a:xfrm>
+            <a:off x="9061704" y="4142232"/>
+            <a:ext cx="713231" cy="219456"/>
+          </a:xfrm>
+          <a:prstGeom prst="rect">
+            <a:avLst/>
+          </a:prstGeom>
+          <a:solidFill>
+            <a:srgbClr val="BFE3CF"/>
+          </a:solidFill>
+          <a:ln>
+            <a:noFill/>
+          </a:ln>
+        </p:spPr>
+        <p:txBody>
+          <a:bodyPr wrap="square" lIns="0" tIns="0" rIns="0" bIns="0" anchor="ctr">
+            <a:noAutofit/>
+          </a:bodyPr>
+          <a:lstStyle/>
+          <a:p>
+            <a:pPr algn="ctr"/>
+            <a:r>
+              <a:rPr lang="en-US" sz="1100" b="1" i="0" dirty="0">
+                <a:solidFill>
+                  <a:srgbClr val="1F2328"/>
+                </a:solidFill>
+                <a:latin typeface="Calibri"/>
+                <a:cs typeface="Calibri"/>
+              </a:rPr>
+              <a:t xml:space="preserve">362</a:t>
+            </a:r>
+          </a:p>
+        </p:txBody>
+      </p:sp>
+      <p:sp>
+        <p:nvSpPr>
+          <p:cNvPr id="1191" name="Cell"/>
+          <p:cNvSpPr/>
+          <p:nvPr/>
+        </p:nvSpPr>
+        <p:spPr>
+          <a:xfrm>
+            <a:off x="9811512" y="4142232"/>
+            <a:ext cx="713231" cy="219456"/>
+          </a:xfrm>
+          <a:prstGeom prst="rect">
+            <a:avLst/>
+          </a:prstGeom>
+          <a:solidFill>
+            <a:srgbClr val="BFE3CF"/>
+          </a:solidFill>
+          <a:ln>
+            <a:noFill/>
+          </a:ln>
+        </p:spPr>
+        <p:txBody>
+          <a:bodyPr wrap="square" lIns="0" tIns="0" rIns="0" bIns="0" anchor="ctr">
+            <a:noAutofit/>
+          </a:bodyPr>
+          <a:lstStyle/>
+          <a:p>
+            <a:pPr algn="ctr"/>
+            <a:r>
+              <a:rPr lang="en-US" sz="1100" b="1" i="0" dirty="0">
+                <a:solidFill>
+                  <a:srgbClr val="1F2328"/>
+                </a:solidFill>
+                <a:latin typeface="Calibri"/>
+                <a:cs typeface="Calibri"/>
+              </a:rPr>
               <a:t xml:space="preserve">359</a:t>
             </a:r>
           </a:p>
@@ -16969,14 +17118,14 @@
       </p:sp>
       <p:sp>
         <p:nvSpPr>
-          <p:cNvPr id="1189" name="Avg"/>
+          <p:cNvPr id="1192" name="Avg"/>
           <p:cNvSpPr txBox="1"/>
           <p:nvPr/>
         </p:nvSpPr>
         <p:spPr>
           <a:xfrm>
-            <a:off x="10588752" y="3803904"/>
-            <a:ext cx="685800" cy="329184"/>
+            <a:off x="10588752" y="4123944"/>
+            <a:ext cx="685800" cy="256032"/>
           </a:xfrm>
           <a:prstGeom prst="rect">
             <a:avLst/>
@@ -17008,14 +17157,14 @@
       </p:sp>
       <p:sp>
         <p:nvSpPr>
-          <p:cNvPr id="1190" name="Metric"/>
+          <p:cNvPr id="1193" name="Metric"/>
           <p:cNvSpPr txBox="1"/>
           <p:nvPr/>
         </p:nvSpPr>
         <p:spPr>
           <a:xfrm>
-            <a:off x="1078992" y="4169664"/>
-            <a:ext cx="1417320" cy="658368"/>
+            <a:off x="1078992" y="4425696"/>
+            <a:ext cx="1417320" cy="512064"/>
           </a:xfrm>
           <a:prstGeom prst="rect">
             <a:avLst/>
@@ -17047,14 +17196,14 @@
       </p:sp>
       <p:sp>
         <p:nvSpPr>
-          <p:cNvPr id="1191" name="Method"/>
+          <p:cNvPr id="1194" name="Method"/>
           <p:cNvSpPr txBox="1"/>
           <p:nvPr/>
         </p:nvSpPr>
         <p:spPr>
           <a:xfrm>
-            <a:off x="2514600" y="4169664"/>
-            <a:ext cx="1280160" cy="329184"/>
+            <a:off x="2514600" y="4425696"/>
+            <a:ext cx="1280160" cy="256032"/>
           </a:xfrm>
           <a:prstGeom prst="rect">
             <a:avLst/>
@@ -17079,130 +17228,7 @@
                 <a:latin typeface="Calibri"/>
                 <a:cs typeface="Calibri"/>
               </a:rPr>
-              <a:t xml:space="preserve">Non-Iterative</a:t>
-            </a:r>
-          </a:p>
-        </p:txBody>
-      </p:sp>
-      <p:sp>
-        <p:nvSpPr>
-          <p:cNvPr id="1192" name="Cell"/>
-          <p:cNvSpPr/>
-          <p:nvPr/>
-        </p:nvSpPr>
-        <p:spPr>
-          <a:xfrm>
-            <a:off x="3813048" y="4187952"/>
-            <a:ext cx="713231" cy="292608"/>
-          </a:xfrm>
-          <a:prstGeom prst="rect">
-            <a:avLst/>
-          </a:prstGeom>
-          <a:solidFill>
-            <a:srgbClr val="EDB8AC"/>
-          </a:solidFill>
-          <a:ln>
-            <a:noFill/>
-          </a:ln>
-        </p:spPr>
-        <p:txBody>
-          <a:bodyPr wrap="square" lIns="0" tIns="0" rIns="0" bIns="0" anchor="ctr">
-            <a:noAutofit/>
-          </a:bodyPr>
-          <a:lstStyle/>
-          <a:p>
-            <a:pPr algn="ctr"/>
-            <a:r>
-              <a:rPr lang="en-US" sz="1100" b="0" i="0" dirty="0">
-                <a:solidFill>
-                  <a:srgbClr val="1F2328"/>
-                </a:solidFill>
-                <a:latin typeface="Calibri"/>
-                <a:cs typeface="Calibri"/>
-              </a:rPr>
-              <a:t xml:space="preserve">0</a:t>
-            </a:r>
-          </a:p>
-        </p:txBody>
-      </p:sp>
-      <p:sp>
-        <p:nvSpPr>
-          <p:cNvPr id="1193" name="Cell"/>
-          <p:cNvSpPr/>
-          <p:nvPr/>
-        </p:nvSpPr>
-        <p:spPr>
-          <a:xfrm>
-            <a:off x="4562856" y="4187952"/>
-            <a:ext cx="713231" cy="292608"/>
-          </a:xfrm>
-          <a:prstGeom prst="rect">
-            <a:avLst/>
-          </a:prstGeom>
-          <a:solidFill>
-            <a:srgbClr val="EDB8AC"/>
-          </a:solidFill>
-          <a:ln>
-            <a:noFill/>
-          </a:ln>
-        </p:spPr>
-        <p:txBody>
-          <a:bodyPr wrap="square" lIns="0" tIns="0" rIns="0" bIns="0" anchor="ctr">
-            <a:noAutofit/>
-          </a:bodyPr>
-          <a:lstStyle/>
-          <a:p>
-            <a:pPr algn="ctr"/>
-            <a:r>
-              <a:rPr lang="en-US" sz="1100" b="0" i="0" dirty="0">
-                <a:solidFill>
-                  <a:srgbClr val="1F2328"/>
-                </a:solidFill>
-                <a:latin typeface="Calibri"/>
-                <a:cs typeface="Calibri"/>
-              </a:rPr>
-              <a:t xml:space="preserve">0</a:t>
-            </a:r>
-          </a:p>
-        </p:txBody>
-      </p:sp>
-      <p:sp>
-        <p:nvSpPr>
-          <p:cNvPr id="1194" name="Cell"/>
-          <p:cNvSpPr/>
-          <p:nvPr/>
-        </p:nvSpPr>
-        <p:spPr>
-          <a:xfrm>
-            <a:off x="5312664" y="4187952"/>
-            <a:ext cx="713231" cy="292608"/>
-          </a:xfrm>
-          <a:prstGeom prst="rect">
-            <a:avLst/>
-          </a:prstGeom>
-          <a:solidFill>
-            <a:srgbClr val="EDB8AC"/>
-          </a:solidFill>
-          <a:ln>
-            <a:noFill/>
-          </a:ln>
-        </p:spPr>
-        <p:txBody>
-          <a:bodyPr wrap="square" lIns="0" tIns="0" rIns="0" bIns="0" anchor="ctr">
-            <a:noAutofit/>
-          </a:bodyPr>
-          <a:lstStyle/>
-          <a:p>
-            <a:pPr algn="ctr"/>
-            <a:r>
-              <a:rPr lang="en-US" sz="1100" b="0" i="0" dirty="0">
-                <a:solidFill>
-                  <a:srgbClr val="1F2328"/>
-                </a:solidFill>
-                <a:latin typeface="Calibri"/>
-                <a:cs typeface="Calibri"/>
-              </a:rPr>
-              <a:t xml:space="preserve">0</a:t>
+              <a:t xml:space="preserve">Non-Iterative RAG</a:t>
             </a:r>
           </a:p>
         </p:txBody>
@@ -17215,8 +17241,8 @@
         </p:nvSpPr>
         <p:spPr>
           <a:xfrm>
-            <a:off x="6062472" y="4187952"/>
-            <a:ext cx="713231" cy="292608"/>
+            <a:off x="3813048" y="4443984"/>
+            <a:ext cx="713231" cy="219456"/>
           </a:xfrm>
           <a:prstGeom prst="rect">
             <a:avLst/>
@@ -17256,8 +17282,8 @@
         </p:nvSpPr>
         <p:spPr>
           <a:xfrm>
-            <a:off x="6812279" y="4187952"/>
-            <a:ext cx="713231" cy="292608"/>
+            <a:off x="4562856" y="4443984"/>
+            <a:ext cx="713231" cy="219456"/>
           </a:xfrm>
           <a:prstGeom prst="rect">
             <a:avLst/>
@@ -17297,8 +17323,8 @@
         </p:nvSpPr>
         <p:spPr>
           <a:xfrm>
-            <a:off x="7562088" y="4187952"/>
-            <a:ext cx="713231" cy="292608"/>
+            <a:off x="5312664" y="4443984"/>
+            <a:ext cx="713231" cy="219456"/>
           </a:xfrm>
           <a:prstGeom prst="rect">
             <a:avLst/>
@@ -17338,8 +17364,8 @@
         </p:nvSpPr>
         <p:spPr>
           <a:xfrm>
-            <a:off x="8311896" y="4187952"/>
-            <a:ext cx="713231" cy="292608"/>
+            <a:off x="6062472" y="4443984"/>
+            <a:ext cx="713231" cy="219456"/>
           </a:xfrm>
           <a:prstGeom prst="rect">
             <a:avLst/>
@@ -17379,8 +17405,8 @@
         </p:nvSpPr>
         <p:spPr>
           <a:xfrm>
-            <a:off x="9061704" y="4187952"/>
-            <a:ext cx="713231" cy="292608"/>
+            <a:off x="6812279" y="4443984"/>
+            <a:ext cx="713231" cy="219456"/>
           </a:xfrm>
           <a:prstGeom prst="rect">
             <a:avLst/>
@@ -17420,8 +17446,8 @@
         </p:nvSpPr>
         <p:spPr>
           <a:xfrm>
-            <a:off x="9811512" y="4187952"/>
-            <a:ext cx="713231" cy="292608"/>
+            <a:off x="7562088" y="4443984"/>
+            <a:ext cx="713231" cy="219456"/>
           </a:xfrm>
           <a:prstGeom prst="rect">
             <a:avLst/>
@@ -17455,32 +17481,34 @@
       </p:sp>
       <p:sp>
         <p:nvSpPr>
-          <p:cNvPr id="1201" name="Avg"/>
-          <p:cNvSpPr txBox="1"/>
-          <p:nvPr/>
-        </p:nvSpPr>
-        <p:spPr>
-          <a:xfrm>
-            <a:off x="10588752" y="4169664"/>
-            <a:ext cx="685800" cy="329184"/>
-          </a:xfrm>
-          <a:prstGeom prst="rect">
-            <a:avLst/>
-          </a:prstGeom>
-          <a:noFill/>
-          <a:ln>
-            <a:noFill/>
-          </a:ln>
-        </p:spPr>
-        <p:txBody>
-          <a:bodyPr wrap="square" lIns="0" tIns="0" rIns="0" bIns="0" anchor="ctr">
-            <a:noAutofit/>
-          </a:bodyPr>
-          <a:lstStyle/>
-          <a:p>
-            <a:pPr algn="ctr"/>
-            <a:r>
-              <a:rPr lang="en-US" sz="1250" b="0" i="0" dirty="0">
+          <p:cNvPr id="1201" name="Cell"/>
+          <p:cNvSpPr/>
+          <p:nvPr/>
+        </p:nvSpPr>
+        <p:spPr>
+          <a:xfrm>
+            <a:off x="8311896" y="4443984"/>
+            <a:ext cx="713231" cy="219456"/>
+          </a:xfrm>
+          <a:prstGeom prst="rect">
+            <a:avLst/>
+          </a:prstGeom>
+          <a:solidFill>
+            <a:srgbClr val="EDB8AC"/>
+          </a:solidFill>
+          <a:ln>
+            <a:noFill/>
+          </a:ln>
+        </p:spPr>
+        <p:txBody>
+          <a:bodyPr wrap="square" lIns="0" tIns="0" rIns="0" bIns="0" anchor="ctr">
+            <a:noAutofit/>
+          </a:bodyPr>
+          <a:lstStyle/>
+          <a:p>
+            <a:pPr algn="ctr"/>
+            <a:r>
+              <a:rPr lang="en-US" sz="1100" b="0" i="0" dirty="0">
                 <a:solidFill>
                   <a:srgbClr val="1F2328"/>
                 </a:solidFill>
@@ -17494,39 +17522,41 @@
       </p:sp>
       <p:sp>
         <p:nvSpPr>
-          <p:cNvPr id="1202" name="Method"/>
-          <p:cNvSpPr txBox="1"/>
-          <p:nvPr/>
-        </p:nvSpPr>
-        <p:spPr>
-          <a:xfrm>
-            <a:off x="2514600" y="4498848"/>
-            <a:ext cx="1280160" cy="329184"/>
-          </a:xfrm>
-          <a:prstGeom prst="rect">
-            <a:avLst/>
-          </a:prstGeom>
-          <a:noFill/>
-          <a:ln>
-            <a:noFill/>
-          </a:ln>
-        </p:spPr>
-        <p:txBody>
-          <a:bodyPr wrap="square" lIns="0" tIns="0" rIns="0" bIns="0" anchor="ctr">
-            <a:noAutofit/>
-          </a:bodyPr>
-          <a:lstStyle/>
-          <a:p>
-            <a:pPr algn="l"/>
-            <a:r>
-              <a:rPr lang="en-US" sz="1200" b="1" i="0" dirty="0">
-                <a:solidFill>
-                  <a:srgbClr val="0B6E4F"/>
-                </a:solidFill>
-                <a:latin typeface="Calibri"/>
-                <a:cs typeface="Calibri"/>
-              </a:rPr>
-              <a:t xml:space="preserve">RIGOR</a:t>
+          <p:cNvPr id="1202" name="Cell"/>
+          <p:cNvSpPr/>
+          <p:nvPr/>
+        </p:nvSpPr>
+        <p:spPr>
+          <a:xfrm>
+            <a:off x="9061704" y="4443984"/>
+            <a:ext cx="713231" cy="219456"/>
+          </a:xfrm>
+          <a:prstGeom prst="rect">
+            <a:avLst/>
+          </a:prstGeom>
+          <a:solidFill>
+            <a:srgbClr val="EDB8AC"/>
+          </a:solidFill>
+          <a:ln>
+            <a:noFill/>
+          </a:ln>
+        </p:spPr>
+        <p:txBody>
+          <a:bodyPr wrap="square" lIns="0" tIns="0" rIns="0" bIns="0" anchor="ctr">
+            <a:noAutofit/>
+          </a:bodyPr>
+          <a:lstStyle/>
+          <a:p>
+            <a:pPr algn="ctr"/>
+            <a:r>
+              <a:rPr lang="en-US" sz="1100" b="0" i="0" dirty="0">
+                <a:solidFill>
+                  <a:srgbClr val="1F2328"/>
+                </a:solidFill>
+                <a:latin typeface="Calibri"/>
+                <a:cs typeface="Calibri"/>
+              </a:rPr>
+              <a:t xml:space="preserve">0</a:t>
             </a:r>
           </a:p>
         </p:txBody>
@@ -17539,117 +17569,113 @@
         </p:nvSpPr>
         <p:spPr>
           <a:xfrm>
-            <a:off x="3813048" y="4517136"/>
-            <a:ext cx="713231" cy="292608"/>
-          </a:xfrm>
-          <a:prstGeom prst="rect">
-            <a:avLst/>
-          </a:prstGeom>
-          <a:solidFill>
-            <a:srgbClr val="BFE3CF"/>
-          </a:solidFill>
-          <a:ln>
-            <a:noFill/>
-          </a:ln>
-        </p:spPr>
-        <p:txBody>
-          <a:bodyPr wrap="square" lIns="0" tIns="0" rIns="0" bIns="0" anchor="ctr">
-            <a:noAutofit/>
-          </a:bodyPr>
-          <a:lstStyle/>
-          <a:p>
-            <a:pPr algn="ctr"/>
-            <a:r>
-              <a:rPr lang="en-US" sz="1100" b="1" i="0" dirty="0">
-                <a:solidFill>
-                  <a:srgbClr val="1F2328"/>
-                </a:solidFill>
-                <a:latin typeface="Calibri"/>
-                <a:cs typeface="Calibri"/>
-              </a:rPr>
-              <a:t xml:space="preserve">336</a:t>
-            </a:r>
-          </a:p>
-        </p:txBody>
-      </p:sp>
-      <p:sp>
-        <p:nvSpPr>
-          <p:cNvPr id="1204" name="Cell"/>
-          <p:cNvSpPr/>
-          <p:nvPr/>
-        </p:nvSpPr>
-        <p:spPr>
-          <a:xfrm>
-            <a:off x="4562856" y="4517136"/>
-            <a:ext cx="713231" cy="292608"/>
-          </a:xfrm>
-          <a:prstGeom prst="rect">
-            <a:avLst/>
-          </a:prstGeom>
-          <a:solidFill>
-            <a:srgbClr val="BFE3CF"/>
-          </a:solidFill>
-          <a:ln>
-            <a:noFill/>
-          </a:ln>
-        </p:spPr>
-        <p:txBody>
-          <a:bodyPr wrap="square" lIns="0" tIns="0" rIns="0" bIns="0" anchor="ctr">
-            <a:noAutofit/>
-          </a:bodyPr>
-          <a:lstStyle/>
-          <a:p>
-            <a:pPr algn="ctr"/>
-            <a:r>
-              <a:rPr lang="en-US" sz="1100" b="1" i="0" dirty="0">
-                <a:solidFill>
-                  <a:srgbClr val="1F2328"/>
-                </a:solidFill>
-                <a:latin typeface="Calibri"/>
-                <a:cs typeface="Calibri"/>
-              </a:rPr>
-              <a:t xml:space="preserve">308</a:t>
-            </a:r>
-          </a:p>
-        </p:txBody>
-      </p:sp>
-      <p:sp>
-        <p:nvSpPr>
-          <p:cNvPr id="1205" name="Cell"/>
-          <p:cNvSpPr/>
-          <p:nvPr/>
-        </p:nvSpPr>
-        <p:spPr>
-          <a:xfrm>
-            <a:off x="5312664" y="4517136"/>
-            <a:ext cx="713231" cy="292608"/>
-          </a:xfrm>
-          <a:prstGeom prst="rect">
-            <a:avLst/>
-          </a:prstGeom>
-          <a:solidFill>
-            <a:srgbClr val="F6DAD3"/>
-          </a:solidFill>
-          <a:ln>
-            <a:noFill/>
-          </a:ln>
-        </p:spPr>
-        <p:txBody>
-          <a:bodyPr wrap="square" lIns="0" tIns="0" rIns="0" bIns="0" anchor="ctr">
-            <a:noAutofit/>
-          </a:bodyPr>
-          <a:lstStyle/>
-          <a:p>
-            <a:pPr algn="ctr"/>
-            <a:r>
-              <a:rPr lang="en-US" sz="1100" b="1" i="0" dirty="0">
-                <a:solidFill>
-                  <a:srgbClr val="1F2328"/>
-                </a:solidFill>
-                <a:latin typeface="Calibri"/>
-                <a:cs typeface="Calibri"/>
-              </a:rPr>
-              <a:t xml:space="preserve">22</a:t>
+            <a:off x="9811512" y="4443984"/>
+            <a:ext cx="713231" cy="219456"/>
+          </a:xfrm>
+          <a:prstGeom prst="rect">
+            <a:avLst/>
+          </a:prstGeom>
+          <a:solidFill>
+            <a:srgbClr val="EDB8AC"/>
+          </a:solidFill>
+          <a:ln>
+            <a:noFill/>
+          </a:ln>
+        </p:spPr>
+        <p:txBody>
+          <a:bodyPr wrap="square" lIns="0" tIns="0" rIns="0" bIns="0" anchor="ctr">
+            <a:noAutofit/>
+          </a:bodyPr>
+          <a:lstStyle/>
+          <a:p>
+            <a:pPr algn="ctr"/>
+            <a:r>
+              <a:rPr lang="en-US" sz="1100" b="0" i="0" dirty="0">
+                <a:solidFill>
+                  <a:srgbClr val="1F2328"/>
+                </a:solidFill>
+                <a:latin typeface="Calibri"/>
+                <a:cs typeface="Calibri"/>
+              </a:rPr>
+              <a:t xml:space="preserve">0</a:t>
+            </a:r>
+          </a:p>
+        </p:txBody>
+      </p:sp>
+      <p:sp>
+        <p:nvSpPr>
+          <p:cNvPr id="1204" name="Avg"/>
+          <p:cNvSpPr txBox="1"/>
+          <p:nvPr/>
+        </p:nvSpPr>
+        <p:spPr>
+          <a:xfrm>
+            <a:off x="10588752" y="4425696"/>
+            <a:ext cx="685800" cy="256032"/>
+          </a:xfrm>
+          <a:prstGeom prst="rect">
+            <a:avLst/>
+          </a:prstGeom>
+          <a:noFill/>
+          <a:ln>
+            <a:noFill/>
+          </a:ln>
+        </p:spPr>
+        <p:txBody>
+          <a:bodyPr wrap="square" lIns="0" tIns="0" rIns="0" bIns="0" anchor="ctr">
+            <a:noAutofit/>
+          </a:bodyPr>
+          <a:lstStyle/>
+          <a:p>
+            <a:pPr algn="ctr"/>
+            <a:r>
+              <a:rPr lang="en-US" sz="1250" b="0" i="0" dirty="0">
+                <a:solidFill>
+                  <a:srgbClr val="1F2328"/>
+                </a:solidFill>
+                <a:latin typeface="Calibri"/>
+                <a:cs typeface="Calibri"/>
+              </a:rPr>
+              <a:t xml:space="preserve">0</a:t>
+            </a:r>
+          </a:p>
+        </p:txBody>
+      </p:sp>
+      <p:sp>
+        <p:nvSpPr>
+          <p:cNvPr id="1205" name="Method"/>
+          <p:cNvSpPr txBox="1"/>
+          <p:nvPr/>
+        </p:nvSpPr>
+        <p:spPr>
+          <a:xfrm>
+            <a:off x="2514600" y="4681728"/>
+            <a:ext cx="1280160" cy="256032"/>
+          </a:xfrm>
+          <a:prstGeom prst="rect">
+            <a:avLst/>
+          </a:prstGeom>
+          <a:noFill/>
+          <a:ln>
+            <a:noFill/>
+          </a:ln>
+        </p:spPr>
+        <p:txBody>
+          <a:bodyPr wrap="square" lIns="0" tIns="0" rIns="0" bIns="0" anchor="ctr">
+            <a:noAutofit/>
+          </a:bodyPr>
+          <a:lstStyle/>
+          <a:p>
+            <a:pPr algn="l"/>
+            <a:r>
+              <a:rPr lang="en-US" sz="1200" b="1" i="0" dirty="0">
+                <a:solidFill>
+                  <a:srgbClr val="0B6E4F"/>
+                </a:solidFill>
+                <a:latin typeface="Calibri"/>
+                <a:cs typeface="Calibri"/>
+              </a:rPr>
+              <a:t xml:space="preserve">RIGOR</a:t>
             </a:r>
           </a:p>
         </p:txBody>
@@ -17662,8 +17688,8 @@
         </p:nvSpPr>
         <p:spPr>
           <a:xfrm>
-            <a:off x="6062472" y="4517136"/>
-            <a:ext cx="713231" cy="292608"/>
+            <a:off x="3813048" y="4700016"/>
+            <a:ext cx="713231" cy="219456"/>
           </a:xfrm>
           <a:prstGeom prst="rect">
             <a:avLst/>
@@ -17690,7 +17716,7 @@
                 <a:latin typeface="Calibri"/>
                 <a:cs typeface="Calibri"/>
               </a:rPr>
-              <a:t xml:space="preserve">423</a:t>
+              <a:t xml:space="preserve">336</a:t>
             </a:r>
           </a:p>
         </p:txBody>
@@ -17703,8 +17729,8 @@
         </p:nvSpPr>
         <p:spPr>
           <a:xfrm>
-            <a:off x="6812279" y="4517136"/>
-            <a:ext cx="713231" cy="292608"/>
+            <a:off x="4562856" y="4700016"/>
+            <a:ext cx="713231" cy="219456"/>
           </a:xfrm>
           <a:prstGeom prst="rect">
             <a:avLst/>
@@ -17731,7 +17757,7 @@
                 <a:latin typeface="Calibri"/>
                 <a:cs typeface="Calibri"/>
               </a:rPr>
-              <a:t xml:space="preserve">335</a:t>
+              <a:t xml:space="preserve">308</a:t>
             </a:r>
           </a:p>
         </p:txBody>
@@ -17744,14 +17770,14 @@
         </p:nvSpPr>
         <p:spPr>
           <a:xfrm>
-            <a:off x="7562088" y="4517136"/>
-            <a:ext cx="713231" cy="292608"/>
-          </a:xfrm>
-          <a:prstGeom prst="rect">
-            <a:avLst/>
-          </a:prstGeom>
-          <a:solidFill>
-            <a:srgbClr val="DDF0E5"/>
+            <a:off x="5312664" y="4700016"/>
+            <a:ext cx="713231" cy="219456"/>
+          </a:xfrm>
+          <a:prstGeom prst="rect">
+            <a:avLst/>
+          </a:prstGeom>
+          <a:solidFill>
+            <a:srgbClr val="F6DAD3"/>
           </a:solidFill>
           <a:ln>
             <a:noFill/>
@@ -17772,7 +17798,7 @@
                 <a:latin typeface="Calibri"/>
                 <a:cs typeface="Calibri"/>
               </a:rPr>
-              <a:t xml:space="preserve">99</a:t>
+              <a:t xml:space="preserve">22</a:t>
             </a:r>
           </a:p>
         </p:txBody>
@@ -17785,14 +17811,14 @@
         </p:nvSpPr>
         <p:spPr>
           <a:xfrm>
-            <a:off x="8311896" y="4517136"/>
-            <a:ext cx="713231" cy="292608"/>
-          </a:xfrm>
-          <a:prstGeom prst="rect">
-            <a:avLst/>
-          </a:prstGeom>
-          <a:solidFill>
-            <a:srgbClr val="DDF0E5"/>
+            <a:off x="6062472" y="4700016"/>
+            <a:ext cx="713231" cy="219456"/>
+          </a:xfrm>
+          <a:prstGeom prst="rect">
+            <a:avLst/>
+          </a:prstGeom>
+          <a:solidFill>
+            <a:srgbClr val="BFE3CF"/>
           </a:solidFill>
           <a:ln>
             <a:noFill/>
@@ -17813,7 +17839,7 @@
                 <a:latin typeface="Calibri"/>
                 <a:cs typeface="Calibri"/>
               </a:rPr>
-              <a:t xml:space="preserve">81</a:t>
+              <a:t xml:space="preserve">423</a:t>
             </a:r>
           </a:p>
         </p:txBody>
@@ -17826,14 +17852,14 @@
         </p:nvSpPr>
         <p:spPr>
           <a:xfrm>
-            <a:off x="9061704" y="4517136"/>
-            <a:ext cx="713231" cy="292608"/>
-          </a:xfrm>
-          <a:prstGeom prst="rect">
-            <a:avLst/>
-          </a:prstGeom>
-          <a:solidFill>
-            <a:srgbClr val="DDF0E5"/>
+            <a:off x="6812279" y="4700016"/>
+            <a:ext cx="713231" cy="219456"/>
+          </a:xfrm>
+          <a:prstGeom prst="rect">
+            <a:avLst/>
+          </a:prstGeom>
+          <a:solidFill>
+            <a:srgbClr val="BFE3CF"/>
           </a:solidFill>
           <a:ln>
             <a:noFill/>
@@ -17854,7 +17880,7 @@
                 <a:latin typeface="Calibri"/>
                 <a:cs typeface="Calibri"/>
               </a:rPr>
-              <a:t xml:space="preserve">83</a:t>
+              <a:t xml:space="preserve">335</a:t>
             </a:r>
           </a:p>
         </p:txBody>
@@ -17867,14 +17893,14 @@
         </p:nvSpPr>
         <p:spPr>
           <a:xfrm>
-            <a:off x="9811512" y="4517136"/>
-            <a:ext cx="713231" cy="292608"/>
-          </a:xfrm>
-          <a:prstGeom prst="rect">
-            <a:avLst/>
-          </a:prstGeom>
-          <a:solidFill>
-            <a:srgbClr val="F1F3F2"/>
+            <a:off x="7562088" y="4700016"/>
+            <a:ext cx="713231" cy="219456"/>
+          </a:xfrm>
+          <a:prstGeom prst="rect">
+            <a:avLst/>
+          </a:prstGeom>
+          <a:solidFill>
+            <a:srgbClr val="F6DAD3"/>
           </a:solidFill>
           <a:ln>
             <a:noFill/>
@@ -17895,6 +17921,129 @@
                 <a:latin typeface="Calibri"/>
                 <a:cs typeface="Calibri"/>
               </a:rPr>
+              <a:t xml:space="preserve">99</a:t>
+            </a:r>
+          </a:p>
+        </p:txBody>
+      </p:sp>
+      <p:sp>
+        <p:nvSpPr>
+          <p:cNvPr id="1212" name="Cell"/>
+          <p:cNvSpPr/>
+          <p:nvPr/>
+        </p:nvSpPr>
+        <p:spPr>
+          <a:xfrm>
+            <a:off x="8311896" y="4700016"/>
+            <a:ext cx="713231" cy="219456"/>
+          </a:xfrm>
+          <a:prstGeom prst="rect">
+            <a:avLst/>
+          </a:prstGeom>
+          <a:solidFill>
+            <a:srgbClr val="BFE3CF"/>
+          </a:solidFill>
+          <a:ln>
+            <a:noFill/>
+          </a:ln>
+        </p:spPr>
+        <p:txBody>
+          <a:bodyPr wrap="square" lIns="0" tIns="0" rIns="0" bIns="0" anchor="ctr">
+            <a:noAutofit/>
+          </a:bodyPr>
+          <a:lstStyle/>
+          <a:p>
+            <a:pPr algn="ctr"/>
+            <a:r>
+              <a:rPr lang="en-US" sz="1100" b="1" i="0" dirty="0">
+                <a:solidFill>
+                  <a:srgbClr val="1F2328"/>
+                </a:solidFill>
+                <a:latin typeface="Calibri"/>
+                <a:cs typeface="Calibri"/>
+              </a:rPr>
+              <a:t xml:space="preserve">81</a:t>
+            </a:r>
+          </a:p>
+        </p:txBody>
+      </p:sp>
+      <p:sp>
+        <p:nvSpPr>
+          <p:cNvPr id="1213" name="Cell"/>
+          <p:cNvSpPr/>
+          <p:nvPr/>
+        </p:nvSpPr>
+        <p:spPr>
+          <a:xfrm>
+            <a:off x="9061704" y="4700016"/>
+            <a:ext cx="713231" cy="219456"/>
+          </a:xfrm>
+          <a:prstGeom prst="rect">
+            <a:avLst/>
+          </a:prstGeom>
+          <a:solidFill>
+            <a:srgbClr val="BFE3CF"/>
+          </a:solidFill>
+          <a:ln>
+            <a:noFill/>
+          </a:ln>
+        </p:spPr>
+        <p:txBody>
+          <a:bodyPr wrap="square" lIns="0" tIns="0" rIns="0" bIns="0" anchor="ctr">
+            <a:noAutofit/>
+          </a:bodyPr>
+          <a:lstStyle/>
+          <a:p>
+            <a:pPr algn="ctr"/>
+            <a:r>
+              <a:rPr lang="en-US" sz="1100" b="1" i="0" dirty="0">
+                <a:solidFill>
+                  <a:srgbClr val="1F2328"/>
+                </a:solidFill>
+                <a:latin typeface="Calibri"/>
+                <a:cs typeface="Calibri"/>
+              </a:rPr>
+              <a:t xml:space="preserve">83</a:t>
+            </a:r>
+          </a:p>
+        </p:txBody>
+      </p:sp>
+      <p:sp>
+        <p:nvSpPr>
+          <p:cNvPr id="1214" name="Cell"/>
+          <p:cNvSpPr/>
+          <p:nvPr/>
+        </p:nvSpPr>
+        <p:spPr>
+          <a:xfrm>
+            <a:off x="9811512" y="4700016"/>
+            <a:ext cx="713231" cy="219456"/>
+          </a:xfrm>
+          <a:prstGeom prst="rect">
+            <a:avLst/>
+          </a:prstGeom>
+          <a:solidFill>
+            <a:srgbClr val="BFE3CF"/>
+          </a:solidFill>
+          <a:ln>
+            <a:noFill/>
+          </a:ln>
+        </p:spPr>
+        <p:txBody>
+          <a:bodyPr wrap="square" lIns="0" tIns="0" rIns="0" bIns="0" anchor="ctr">
+            <a:noAutofit/>
+          </a:bodyPr>
+          <a:lstStyle/>
+          <a:p>
+            <a:pPr algn="ctr"/>
+            <a:r>
+              <a:rPr lang="en-US" sz="1100" b="1" i="0" dirty="0">
+                <a:solidFill>
+                  <a:srgbClr val="1F2328"/>
+                </a:solidFill>
+                <a:latin typeface="Calibri"/>
+                <a:cs typeface="Calibri"/>
+              </a:rPr>
               <a:t xml:space="preserve">75</a:t>
             </a:r>
           </a:p>
@@ -17902,14 +18051,14 @@
       </p:sp>
       <p:sp>
         <p:nvSpPr>
-          <p:cNvPr id="1212" name="Avg"/>
+          <p:cNvPr id="1215" name="Avg"/>
           <p:cNvSpPr txBox="1"/>
           <p:nvPr/>
         </p:nvSpPr>
         <p:spPr>
           <a:xfrm>
-            <a:off x="10588752" y="4498848"/>
-            <a:ext cx="685800" cy="329184"/>
+            <a:off x="10588752" y="4681728"/>
+            <a:ext cx="685800" cy="256032"/>
           </a:xfrm>
           <a:prstGeom prst="rect">
             <a:avLst/>
@@ -17941,14 +18090,14 @@
       </p:sp>
       <p:sp>
         <p:nvSpPr>
-          <p:cNvPr id="1213" name="Metric"/>
+          <p:cNvPr id="1216" name="Metric"/>
           <p:cNvSpPr txBox="1"/>
           <p:nvPr/>
         </p:nvSpPr>
         <p:spPr>
           <a:xfrm>
-            <a:off x="1078992" y="4864608"/>
-            <a:ext cx="1417320" cy="658368"/>
+            <a:off x="1078992" y="5001768"/>
+            <a:ext cx="1417320" cy="237744"/>
           </a:xfrm>
           <a:prstGeom prst="rect">
             <a:avLst/>
@@ -17973,21 +18122,21 @@
                 <a:latin typeface="Calibri"/>
                 <a:cs typeface="Calibri"/>
               </a:rPr>
-              <a:t xml:space="preserve">Subclass axioms</a:t>
-            </a:r>
-          </a:p>
-        </p:txBody>
-      </p:sp>
-      <p:sp>
-        <p:nvSpPr>
-          <p:cNvPr id="1214" name="Method"/>
+              <a:t xml:space="preserve">Class hierarchy</a:t>
+            </a:r>
+          </a:p>
+        </p:txBody>
+      </p:sp>
+      <p:sp>
+        <p:nvSpPr>
+          <p:cNvPr id="1217" name="Metric note"/>
           <p:cNvSpPr txBox="1"/>
           <p:nvPr/>
         </p:nvSpPr>
         <p:spPr>
           <a:xfrm>
-            <a:off x="2514600" y="4864608"/>
-            <a:ext cx="1280160" cy="329184"/>
+            <a:off x="1078992" y="5239512"/>
+            <a:ext cx="1417320" cy="219456"/>
           </a:xfrm>
           <a:prstGeom prst="rect">
             <a:avLst/>
@@ -18005,6 +18154,45 @@
           <a:p>
             <a:pPr algn="l"/>
             <a:r>
+              <a:rPr lang="en-US" sz="950" b="0" i="1" dirty="0">
+                <a:solidFill>
+                  <a:srgbClr val="5B6770"/>
+                </a:solidFill>
+                <a:latin typeface="Calibri"/>
+                <a:cs typeface="Calibri"/>
+              </a:rPr>
+              <a:t xml:space="preserve">inheritance richness</a:t>
+            </a:r>
+          </a:p>
+        </p:txBody>
+      </p:sp>
+      <p:sp>
+        <p:nvSpPr>
+          <p:cNvPr id="1218" name="Method"/>
+          <p:cNvSpPr txBox="1"/>
+          <p:nvPr/>
+        </p:nvSpPr>
+        <p:spPr>
+          <a:xfrm>
+            <a:off x="2514600" y="4983480"/>
+            <a:ext cx="1280160" cy="256032"/>
+          </a:xfrm>
+          <a:prstGeom prst="rect">
+            <a:avLst/>
+          </a:prstGeom>
+          <a:noFill/>
+          <a:ln>
+            <a:noFill/>
+          </a:ln>
+        </p:spPr>
+        <p:txBody>
+          <a:bodyPr wrap="square" lIns="0" tIns="0" rIns="0" bIns="0" anchor="ctr">
+            <a:noAutofit/>
+          </a:bodyPr>
+          <a:lstStyle/>
+          <a:p>
+            <a:pPr algn="l"/>
+            <a:r>
               <a:rPr lang="en-US" sz="1200" b="0" i="0" dirty="0">
                 <a:solidFill>
                   <a:srgbClr val="1F2328"/>
@@ -18012,171 +18200,7 @@
                 <a:latin typeface="Calibri"/>
                 <a:cs typeface="Calibri"/>
               </a:rPr>
-              <a:t xml:space="preserve">Non-Iterative</a:t>
-            </a:r>
-          </a:p>
-        </p:txBody>
-      </p:sp>
-      <p:sp>
-        <p:nvSpPr>
-          <p:cNvPr id="1215" name="Cell"/>
-          <p:cNvSpPr/>
-          <p:nvPr/>
-        </p:nvSpPr>
-        <p:spPr>
-          <a:xfrm>
-            <a:off x="3813048" y="4882896"/>
-            <a:ext cx="713231" cy="292608"/>
-          </a:xfrm>
-          <a:prstGeom prst="rect">
-            <a:avLst/>
-          </a:prstGeom>
-          <a:solidFill>
-            <a:srgbClr val="EDB8AC"/>
-          </a:solidFill>
-          <a:ln>
-            <a:noFill/>
-          </a:ln>
-        </p:spPr>
-        <p:txBody>
-          <a:bodyPr wrap="square" lIns="0" tIns="0" rIns="0" bIns="0" anchor="ctr">
-            <a:noAutofit/>
-          </a:bodyPr>
-          <a:lstStyle/>
-          <a:p>
-            <a:pPr algn="ctr"/>
-            <a:r>
-              <a:rPr lang="en-US" sz="1100" b="0" i="0" dirty="0">
-                <a:solidFill>
-                  <a:srgbClr val="1F2328"/>
-                </a:solidFill>
-                <a:latin typeface="Calibri"/>
-                <a:cs typeface="Calibri"/>
-              </a:rPr>
-              <a:t xml:space="preserve">0</a:t>
-            </a:r>
-          </a:p>
-        </p:txBody>
-      </p:sp>
-      <p:sp>
-        <p:nvSpPr>
-          <p:cNvPr id="1216" name="Cell"/>
-          <p:cNvSpPr/>
-          <p:nvPr/>
-        </p:nvSpPr>
-        <p:spPr>
-          <a:xfrm>
-            <a:off x="4562856" y="4882896"/>
-            <a:ext cx="713231" cy="292608"/>
-          </a:xfrm>
-          <a:prstGeom prst="rect">
-            <a:avLst/>
-          </a:prstGeom>
-          <a:solidFill>
-            <a:srgbClr val="EDB8AC"/>
-          </a:solidFill>
-          <a:ln>
-            <a:noFill/>
-          </a:ln>
-        </p:spPr>
-        <p:txBody>
-          <a:bodyPr wrap="square" lIns="0" tIns="0" rIns="0" bIns="0" anchor="ctr">
-            <a:noAutofit/>
-          </a:bodyPr>
-          <a:lstStyle/>
-          <a:p>
-            <a:pPr algn="ctr"/>
-            <a:r>
-              <a:rPr lang="en-US" sz="1100" b="0" i="0" dirty="0">
-                <a:solidFill>
-                  <a:srgbClr val="1F2328"/>
-                </a:solidFill>
-                <a:latin typeface="Calibri"/>
-                <a:cs typeface="Calibri"/>
-              </a:rPr>
-              <a:t xml:space="preserve">0</a:t>
-            </a:r>
-          </a:p>
-        </p:txBody>
-      </p:sp>
-      <p:sp>
-        <p:nvSpPr>
-          <p:cNvPr id="1217" name="Cell"/>
-          <p:cNvSpPr/>
-          <p:nvPr/>
-        </p:nvSpPr>
-        <p:spPr>
-          <a:xfrm>
-            <a:off x="5312664" y="4882896"/>
-            <a:ext cx="713231" cy="292608"/>
-          </a:xfrm>
-          <a:prstGeom prst="rect">
-            <a:avLst/>
-          </a:prstGeom>
-          <a:solidFill>
-            <a:srgbClr val="EDB8AC"/>
-          </a:solidFill>
-          <a:ln>
-            <a:noFill/>
-          </a:ln>
-        </p:spPr>
-        <p:txBody>
-          <a:bodyPr wrap="square" lIns="0" tIns="0" rIns="0" bIns="0" anchor="ctr">
-            <a:noAutofit/>
-          </a:bodyPr>
-          <a:lstStyle/>
-          <a:p>
-            <a:pPr algn="ctr"/>
-            <a:r>
-              <a:rPr lang="en-US" sz="1100" b="0" i="0" dirty="0">
-                <a:solidFill>
-                  <a:srgbClr val="1F2328"/>
-                </a:solidFill>
-                <a:latin typeface="Calibri"/>
-                <a:cs typeface="Calibri"/>
-              </a:rPr>
-              <a:t xml:space="preserve">0</a:t>
-            </a:r>
-          </a:p>
-        </p:txBody>
-      </p:sp>
-      <p:sp>
-        <p:nvSpPr>
-          <p:cNvPr id="1218" name="Cell"/>
-          <p:cNvSpPr/>
-          <p:nvPr/>
-        </p:nvSpPr>
-        <p:spPr>
-          <a:xfrm>
-            <a:off x="6062472" y="4882896"/>
-            <a:ext cx="713231" cy="292608"/>
-          </a:xfrm>
-          <a:prstGeom prst="rect">
-            <a:avLst/>
-          </a:prstGeom>
-          <a:solidFill>
-            <a:srgbClr val="EDB8AC"/>
-          </a:solidFill>
-          <a:ln>
-            <a:noFill/>
-          </a:ln>
-        </p:spPr>
-        <p:txBody>
-          <a:bodyPr wrap="square" lIns="0" tIns="0" rIns="0" bIns="0" anchor="ctr">
-            <a:noAutofit/>
-          </a:bodyPr>
-          <a:lstStyle/>
-          <a:p>
-            <a:pPr algn="ctr"/>
-            <a:r>
-              <a:rPr lang="en-US" sz="1100" b="0" i="0" dirty="0">
-                <a:solidFill>
-                  <a:srgbClr val="1F2328"/>
-                </a:solidFill>
-                <a:latin typeface="Calibri"/>
-                <a:cs typeface="Calibri"/>
-              </a:rPr>
-              <a:t xml:space="preserve">0</a:t>
+              <a:t xml:space="preserve">Non-Iterative RAG</a:t>
             </a:r>
           </a:p>
         </p:txBody>
@@ -18189,8 +18213,8 @@
         </p:nvSpPr>
         <p:spPr>
           <a:xfrm>
-            <a:off x="6812279" y="4882896"/>
-            <a:ext cx="713231" cy="292608"/>
+            <a:off x="3813048" y="5001768"/>
+            <a:ext cx="713231" cy="219456"/>
           </a:xfrm>
           <a:prstGeom prst="rect">
             <a:avLst/>
@@ -18217,7 +18241,7 @@
                 <a:latin typeface="Calibri"/>
                 <a:cs typeface="Calibri"/>
               </a:rPr>
-              <a:t xml:space="preserve">0</a:t>
+              <a:t xml:space="preserve">0.00</a:t>
             </a:r>
           </a:p>
         </p:txBody>
@@ -18230,8 +18254,8 @@
         </p:nvSpPr>
         <p:spPr>
           <a:xfrm>
-            <a:off x="7562088" y="4882896"/>
-            <a:ext cx="713231" cy="292608"/>
+            <a:off x="4562856" y="5001768"/>
+            <a:ext cx="713231" cy="219456"/>
           </a:xfrm>
           <a:prstGeom prst="rect">
             <a:avLst/>
@@ -18258,7 +18282,7 @@
                 <a:latin typeface="Calibri"/>
                 <a:cs typeface="Calibri"/>
               </a:rPr>
-              <a:t xml:space="preserve">0</a:t>
+              <a:t xml:space="preserve">0.00</a:t>
             </a:r>
           </a:p>
         </p:txBody>
@@ -18271,8 +18295,8 @@
         </p:nvSpPr>
         <p:spPr>
           <a:xfrm>
-            <a:off x="8311896" y="4882896"/>
-            <a:ext cx="713231" cy="292608"/>
+            <a:off x="5312664" y="5001768"/>
+            <a:ext cx="713231" cy="219456"/>
           </a:xfrm>
           <a:prstGeom prst="rect">
             <a:avLst/>
@@ -18299,7 +18323,7 @@
                 <a:latin typeface="Calibri"/>
                 <a:cs typeface="Calibri"/>
               </a:rPr>
-              <a:t xml:space="preserve">0</a:t>
+              <a:t xml:space="preserve">0.00</a:t>
             </a:r>
           </a:p>
         </p:txBody>
@@ -18312,8 +18336,8 @@
         </p:nvSpPr>
         <p:spPr>
           <a:xfrm>
-            <a:off x="9061704" y="4882896"/>
-            <a:ext cx="713231" cy="292608"/>
+            <a:off x="6062472" y="5001768"/>
+            <a:ext cx="713231" cy="219456"/>
           </a:xfrm>
           <a:prstGeom prst="rect">
             <a:avLst/>
@@ -18340,7 +18364,7 @@
                 <a:latin typeface="Calibri"/>
                 <a:cs typeface="Calibri"/>
               </a:rPr>
-              <a:t xml:space="preserve">0</a:t>
+              <a:t xml:space="preserve">0.00</a:t>
             </a:r>
           </a:p>
         </p:txBody>
@@ -18353,8 +18377,8 @@
         </p:nvSpPr>
         <p:spPr>
           <a:xfrm>
-            <a:off x="9811512" y="4882896"/>
-            <a:ext cx="713231" cy="292608"/>
+            <a:off x="6812279" y="5001768"/>
+            <a:ext cx="713231" cy="219456"/>
           </a:xfrm>
           <a:prstGeom prst="rect">
             <a:avLst/>
@@ -18381,85 +18405,89 @@
                 <a:latin typeface="Calibri"/>
                 <a:cs typeface="Calibri"/>
               </a:rPr>
-              <a:t xml:space="preserve">0</a:t>
-            </a:r>
-          </a:p>
-        </p:txBody>
-      </p:sp>
-      <p:sp>
-        <p:nvSpPr>
-          <p:cNvPr id="1224" name="Avg"/>
-          <p:cNvSpPr txBox="1"/>
-          <p:nvPr/>
-        </p:nvSpPr>
-        <p:spPr>
-          <a:xfrm>
-            <a:off x="10588752" y="4864608"/>
-            <a:ext cx="685800" cy="329184"/>
-          </a:xfrm>
-          <a:prstGeom prst="rect">
-            <a:avLst/>
-          </a:prstGeom>
-          <a:noFill/>
-          <a:ln>
-            <a:noFill/>
-          </a:ln>
-        </p:spPr>
-        <p:txBody>
-          <a:bodyPr wrap="square" lIns="0" tIns="0" rIns="0" bIns="0" anchor="ctr">
-            <a:noAutofit/>
-          </a:bodyPr>
-          <a:lstStyle/>
-          <a:p>
-            <a:pPr algn="ctr"/>
-            <a:r>
-              <a:rPr lang="en-US" sz="1250" b="0" i="0" dirty="0">
-                <a:solidFill>
-                  <a:srgbClr val="1F2328"/>
-                </a:solidFill>
-                <a:latin typeface="Calibri"/>
-                <a:cs typeface="Calibri"/>
-              </a:rPr>
-              <a:t xml:space="preserve">0</a:t>
-            </a:r>
-          </a:p>
-        </p:txBody>
-      </p:sp>
-      <p:sp>
-        <p:nvSpPr>
-          <p:cNvPr id="1225" name="Method"/>
-          <p:cNvSpPr txBox="1"/>
-          <p:nvPr/>
-        </p:nvSpPr>
-        <p:spPr>
-          <a:xfrm>
-            <a:off x="2514600" y="5193792"/>
-            <a:ext cx="1280160" cy="329184"/>
-          </a:xfrm>
-          <a:prstGeom prst="rect">
-            <a:avLst/>
-          </a:prstGeom>
-          <a:noFill/>
-          <a:ln>
-            <a:noFill/>
-          </a:ln>
-        </p:spPr>
-        <p:txBody>
-          <a:bodyPr wrap="square" lIns="0" tIns="0" rIns="0" bIns="0" anchor="ctr">
-            <a:noAutofit/>
-          </a:bodyPr>
-          <a:lstStyle/>
-          <a:p>
-            <a:pPr algn="l"/>
-            <a:r>
-              <a:rPr lang="en-US" sz="1200" b="1" i="0" dirty="0">
-                <a:solidFill>
-                  <a:srgbClr val="0B6E4F"/>
-                </a:solidFill>
-                <a:latin typeface="Calibri"/>
-                <a:cs typeface="Calibri"/>
-              </a:rPr>
-              <a:t xml:space="preserve">RIGOR</a:t>
+              <a:t xml:space="preserve">0.00</a:t>
+            </a:r>
+          </a:p>
+        </p:txBody>
+      </p:sp>
+      <p:sp>
+        <p:nvSpPr>
+          <p:cNvPr id="1224" name="Cell"/>
+          <p:cNvSpPr/>
+          <p:nvPr/>
+        </p:nvSpPr>
+        <p:spPr>
+          <a:xfrm>
+            <a:off x="7562088" y="5001768"/>
+            <a:ext cx="713231" cy="219456"/>
+          </a:xfrm>
+          <a:prstGeom prst="rect">
+            <a:avLst/>
+          </a:prstGeom>
+          <a:solidFill>
+            <a:srgbClr val="EDB8AC"/>
+          </a:solidFill>
+          <a:ln>
+            <a:noFill/>
+          </a:ln>
+        </p:spPr>
+        <p:txBody>
+          <a:bodyPr wrap="square" lIns="0" tIns="0" rIns="0" bIns="0" anchor="ctr">
+            <a:noAutofit/>
+          </a:bodyPr>
+          <a:lstStyle/>
+          <a:p>
+            <a:pPr algn="ctr"/>
+            <a:r>
+              <a:rPr lang="en-US" sz="1100" b="0" i="0" dirty="0">
+                <a:solidFill>
+                  <a:srgbClr val="1F2328"/>
+                </a:solidFill>
+                <a:latin typeface="Calibri"/>
+                <a:cs typeface="Calibri"/>
+              </a:rPr>
+              <a:t xml:space="preserve">0.00</a:t>
+            </a:r>
+          </a:p>
+        </p:txBody>
+      </p:sp>
+      <p:sp>
+        <p:nvSpPr>
+          <p:cNvPr id="1225" name="Cell"/>
+          <p:cNvSpPr/>
+          <p:nvPr/>
+        </p:nvSpPr>
+        <p:spPr>
+          <a:xfrm>
+            <a:off x="8311896" y="5001768"/>
+            <a:ext cx="713231" cy="219456"/>
+          </a:xfrm>
+          <a:prstGeom prst="rect">
+            <a:avLst/>
+          </a:prstGeom>
+          <a:solidFill>
+            <a:srgbClr val="EDB8AC"/>
+          </a:solidFill>
+          <a:ln>
+            <a:noFill/>
+          </a:ln>
+        </p:spPr>
+        <p:txBody>
+          <a:bodyPr wrap="square" lIns="0" tIns="0" rIns="0" bIns="0" anchor="ctr">
+            <a:noAutofit/>
+          </a:bodyPr>
+          <a:lstStyle/>
+          <a:p>
+            <a:pPr algn="ctr"/>
+            <a:r>
+              <a:rPr lang="en-US" sz="1100" b="0" i="0" dirty="0">
+                <a:solidFill>
+                  <a:srgbClr val="1F2328"/>
+                </a:solidFill>
+                <a:latin typeface="Calibri"/>
+                <a:cs typeface="Calibri"/>
+              </a:rPr>
+              <a:t xml:space="preserve">0.00</a:t>
             </a:r>
           </a:p>
         </p:txBody>
@@ -18472,35 +18500,35 @@
         </p:nvSpPr>
         <p:spPr>
           <a:xfrm>
-            <a:off x="3813048" y="5212080"/>
-            <a:ext cx="713231" cy="292608"/>
-          </a:xfrm>
-          <a:prstGeom prst="rect">
-            <a:avLst/>
-          </a:prstGeom>
-          <a:solidFill>
-            <a:srgbClr val="F1F3F2"/>
-          </a:solidFill>
-          <a:ln>
-            <a:noFill/>
-          </a:ln>
-        </p:spPr>
-        <p:txBody>
-          <a:bodyPr wrap="square" lIns="0" tIns="0" rIns="0" bIns="0" anchor="ctr">
-            <a:noAutofit/>
-          </a:bodyPr>
-          <a:lstStyle/>
-          <a:p>
-            <a:pPr algn="ctr"/>
-            <a:r>
-              <a:rPr lang="en-US" sz="1100" b="1" i="0" dirty="0">
-                <a:solidFill>
-                  <a:srgbClr val="1F2328"/>
-                </a:solidFill>
-                <a:latin typeface="Calibri"/>
-                <a:cs typeface="Calibri"/>
-              </a:rPr>
-              <a:t xml:space="preserve">14</a:t>
+            <a:off x="9061704" y="5001768"/>
+            <a:ext cx="713231" cy="219456"/>
+          </a:xfrm>
+          <a:prstGeom prst="rect">
+            <a:avLst/>
+          </a:prstGeom>
+          <a:solidFill>
+            <a:srgbClr val="EDB8AC"/>
+          </a:solidFill>
+          <a:ln>
+            <a:noFill/>
+          </a:ln>
+        </p:spPr>
+        <p:txBody>
+          <a:bodyPr wrap="square" lIns="0" tIns="0" rIns="0" bIns="0" anchor="ctr">
+            <a:noAutofit/>
+          </a:bodyPr>
+          <a:lstStyle/>
+          <a:p>
+            <a:pPr algn="ctr"/>
+            <a:r>
+              <a:rPr lang="en-US" sz="1100" b="0" i="0" dirty="0">
+                <a:solidFill>
+                  <a:srgbClr val="1F2328"/>
+                </a:solidFill>
+                <a:latin typeface="Calibri"/>
+                <a:cs typeface="Calibri"/>
+              </a:rPr>
+              <a:t xml:space="preserve">0.00</a:t>
             </a:r>
           </a:p>
         </p:txBody>
@@ -18513,117 +18541,113 @@
         </p:nvSpPr>
         <p:spPr>
           <a:xfrm>
-            <a:off x="4562856" y="5212080"/>
-            <a:ext cx="713231" cy="292608"/>
-          </a:xfrm>
-          <a:prstGeom prst="rect">
-            <a:avLst/>
-          </a:prstGeom>
-          <a:solidFill>
-            <a:srgbClr val="F1F3F2"/>
-          </a:solidFill>
-          <a:ln>
-            <a:noFill/>
-          </a:ln>
-        </p:spPr>
-        <p:txBody>
-          <a:bodyPr wrap="square" lIns="0" tIns="0" rIns="0" bIns="0" anchor="ctr">
-            <a:noAutofit/>
-          </a:bodyPr>
-          <a:lstStyle/>
-          <a:p>
-            <a:pPr algn="ctr"/>
-            <a:r>
-              <a:rPr lang="en-US" sz="1100" b="1" i="0" dirty="0">
-                <a:solidFill>
-                  <a:srgbClr val="1F2328"/>
-                </a:solidFill>
-                <a:latin typeface="Calibri"/>
-                <a:cs typeface="Calibri"/>
-              </a:rPr>
-              <a:t xml:space="preserve">12</a:t>
-            </a:r>
-          </a:p>
-        </p:txBody>
-      </p:sp>
-      <p:sp>
-        <p:nvSpPr>
-          <p:cNvPr id="1228" name="Cell"/>
-          <p:cNvSpPr/>
-          <p:nvPr/>
-        </p:nvSpPr>
-        <p:spPr>
-          <a:xfrm>
-            <a:off x="5312664" y="5212080"/>
-            <a:ext cx="713231" cy="292608"/>
-          </a:xfrm>
-          <a:prstGeom prst="rect">
-            <a:avLst/>
-          </a:prstGeom>
-          <a:solidFill>
-            <a:srgbClr val="F6DAD3"/>
-          </a:solidFill>
-          <a:ln>
-            <a:noFill/>
-          </a:ln>
-        </p:spPr>
-        <p:txBody>
-          <a:bodyPr wrap="square" lIns="0" tIns="0" rIns="0" bIns="0" anchor="ctr">
-            <a:noAutofit/>
-          </a:bodyPr>
-          <a:lstStyle/>
-          <a:p>
-            <a:pPr algn="ctr"/>
-            <a:r>
-              <a:rPr lang="en-US" sz="1100" b="1" i="0" dirty="0">
-                <a:solidFill>
-                  <a:srgbClr val="1F2328"/>
-                </a:solidFill>
-                <a:latin typeface="Calibri"/>
-                <a:cs typeface="Calibri"/>
-              </a:rPr>
-              <a:t xml:space="preserve">2</a:t>
-            </a:r>
-          </a:p>
-        </p:txBody>
-      </p:sp>
-      <p:sp>
-        <p:nvSpPr>
-          <p:cNvPr id="1229" name="Cell"/>
-          <p:cNvSpPr/>
-          <p:nvPr/>
-        </p:nvSpPr>
-        <p:spPr>
-          <a:xfrm>
-            <a:off x="6062472" y="5212080"/>
-            <a:ext cx="713231" cy="292608"/>
-          </a:xfrm>
-          <a:prstGeom prst="rect">
-            <a:avLst/>
-          </a:prstGeom>
-          <a:solidFill>
-            <a:srgbClr val="DDF0E5"/>
-          </a:solidFill>
-          <a:ln>
-            <a:noFill/>
-          </a:ln>
-        </p:spPr>
-        <p:txBody>
-          <a:bodyPr wrap="square" lIns="0" tIns="0" rIns="0" bIns="0" anchor="ctr">
-            <a:noAutofit/>
-          </a:bodyPr>
-          <a:lstStyle/>
-          <a:p>
-            <a:pPr algn="ctr"/>
-            <a:r>
-              <a:rPr lang="en-US" sz="1100" b="1" i="0" dirty="0">
-                <a:solidFill>
-                  <a:srgbClr val="1F2328"/>
-                </a:solidFill>
-                <a:latin typeface="Calibri"/>
-                <a:cs typeface="Calibri"/>
-              </a:rPr>
-              <a:t xml:space="preserve">21</a:t>
+            <a:off x="9811512" y="5001768"/>
+            <a:ext cx="713231" cy="219456"/>
+          </a:xfrm>
+          <a:prstGeom prst="rect">
+            <a:avLst/>
+          </a:prstGeom>
+          <a:solidFill>
+            <a:srgbClr val="EDB8AC"/>
+          </a:solidFill>
+          <a:ln>
+            <a:noFill/>
+          </a:ln>
+        </p:spPr>
+        <p:txBody>
+          <a:bodyPr wrap="square" lIns="0" tIns="0" rIns="0" bIns="0" anchor="ctr">
+            <a:noAutofit/>
+          </a:bodyPr>
+          <a:lstStyle/>
+          <a:p>
+            <a:pPr algn="ctr"/>
+            <a:r>
+              <a:rPr lang="en-US" sz="1100" b="0" i="0" dirty="0">
+                <a:solidFill>
+                  <a:srgbClr val="1F2328"/>
+                </a:solidFill>
+                <a:latin typeface="Calibri"/>
+                <a:cs typeface="Calibri"/>
+              </a:rPr>
+              <a:t xml:space="preserve">0.00</a:t>
+            </a:r>
+          </a:p>
+        </p:txBody>
+      </p:sp>
+      <p:sp>
+        <p:nvSpPr>
+          <p:cNvPr id="1228" name="Avg"/>
+          <p:cNvSpPr txBox="1"/>
+          <p:nvPr/>
+        </p:nvSpPr>
+        <p:spPr>
+          <a:xfrm>
+            <a:off x="10588752" y="4983480"/>
+            <a:ext cx="685800" cy="256032"/>
+          </a:xfrm>
+          <a:prstGeom prst="rect">
+            <a:avLst/>
+          </a:prstGeom>
+          <a:noFill/>
+          <a:ln>
+            <a:noFill/>
+          </a:ln>
+        </p:spPr>
+        <p:txBody>
+          <a:bodyPr wrap="square" lIns="0" tIns="0" rIns="0" bIns="0" anchor="ctr">
+            <a:noAutofit/>
+          </a:bodyPr>
+          <a:lstStyle/>
+          <a:p>
+            <a:pPr algn="ctr"/>
+            <a:r>
+              <a:rPr lang="en-US" sz="1250" b="0" i="0" dirty="0">
+                <a:solidFill>
+                  <a:srgbClr val="1F2328"/>
+                </a:solidFill>
+                <a:latin typeface="Calibri"/>
+                <a:cs typeface="Calibri"/>
+              </a:rPr>
+              <a:t xml:space="preserve">0.00</a:t>
+            </a:r>
+          </a:p>
+        </p:txBody>
+      </p:sp>
+      <p:sp>
+        <p:nvSpPr>
+          <p:cNvPr id="1229" name="Method"/>
+          <p:cNvSpPr txBox="1"/>
+          <p:nvPr/>
+        </p:nvSpPr>
+        <p:spPr>
+          <a:xfrm>
+            <a:off x="2514600" y="5239512"/>
+            <a:ext cx="1280160" cy="256032"/>
+          </a:xfrm>
+          <a:prstGeom prst="rect">
+            <a:avLst/>
+          </a:prstGeom>
+          <a:noFill/>
+          <a:ln>
+            <a:noFill/>
+          </a:ln>
+        </p:spPr>
+        <p:txBody>
+          <a:bodyPr wrap="square" lIns="0" tIns="0" rIns="0" bIns="0" anchor="ctr">
+            <a:noAutofit/>
+          </a:bodyPr>
+          <a:lstStyle/>
+          <a:p>
+            <a:pPr algn="l"/>
+            <a:r>
+              <a:rPr lang="en-US" sz="1200" b="1" i="0" dirty="0">
+                <a:solidFill>
+                  <a:srgbClr val="0B6E4F"/>
+                </a:solidFill>
+                <a:latin typeface="Calibri"/>
+                <a:cs typeface="Calibri"/>
+              </a:rPr>
+              <a:t xml:space="preserve">RIGOR</a:t>
             </a:r>
           </a:p>
         </p:txBody>
@@ -18636,14 +18660,14 @@
         </p:nvSpPr>
         <p:spPr>
           <a:xfrm>
-            <a:off x="6812279" y="5212080"/>
-            <a:ext cx="713231" cy="292608"/>
-          </a:xfrm>
-          <a:prstGeom prst="rect">
-            <a:avLst/>
-          </a:prstGeom>
-          <a:solidFill>
-            <a:srgbClr val="DDF0E5"/>
+            <a:off x="3813048" y="5257800"/>
+            <a:ext cx="713231" cy="219456"/>
+          </a:xfrm>
+          <a:prstGeom prst="rect">
+            <a:avLst/>
+          </a:prstGeom>
+          <a:solidFill>
+            <a:srgbClr val="BFE3CF"/>
           </a:solidFill>
           <a:ln>
             <a:noFill/>
@@ -18664,7 +18688,7 @@
                 <a:latin typeface="Calibri"/>
                 <a:cs typeface="Calibri"/>
               </a:rPr>
-              <a:t xml:space="preserve">59</a:t>
+              <a:t xml:space="preserve">0.70</a:t>
             </a:r>
           </a:p>
         </p:txBody>
@@ -18677,14 +18701,14 @@
         </p:nvSpPr>
         <p:spPr>
           <a:xfrm>
-            <a:off x="7562088" y="5212080"/>
-            <a:ext cx="713231" cy="292608"/>
-          </a:xfrm>
-          <a:prstGeom prst="rect">
-            <a:avLst/>
-          </a:prstGeom>
-          <a:solidFill>
-            <a:srgbClr val="F6DAD3"/>
+            <a:off x="4562856" y="5257800"/>
+            <a:ext cx="713231" cy="219456"/>
+          </a:xfrm>
+          <a:prstGeom prst="rect">
+            <a:avLst/>
+          </a:prstGeom>
+          <a:solidFill>
+            <a:srgbClr val="DDF0E5"/>
           </a:solidFill>
           <a:ln>
             <a:noFill/>
@@ -18705,7 +18729,7 @@
                 <a:latin typeface="Calibri"/>
                 <a:cs typeface="Calibri"/>
               </a:rPr>
-              <a:t xml:space="preserve">3</a:t>
+              <a:t xml:space="preserve">0.39</a:t>
             </a:r>
           </a:p>
         </p:txBody>
@@ -18718,14 +18742,14 @@
         </p:nvSpPr>
         <p:spPr>
           <a:xfrm>
-            <a:off x="8311896" y="5212080"/>
-            <a:ext cx="713231" cy="292608"/>
-          </a:xfrm>
-          <a:prstGeom prst="rect">
-            <a:avLst/>
-          </a:prstGeom>
-          <a:solidFill>
-            <a:srgbClr val="BFE3CF"/>
+            <a:off x="5312664" y="5257800"/>
+            <a:ext cx="713231" cy="219456"/>
+          </a:xfrm>
+          <a:prstGeom prst="rect">
+            <a:avLst/>
+          </a:prstGeom>
+          <a:solidFill>
+            <a:srgbClr val="F6DAD3"/>
           </a:solidFill>
           <a:ln>
             <a:noFill/>
@@ -18746,7 +18770,7 @@
                 <a:latin typeface="Calibri"/>
                 <a:cs typeface="Calibri"/>
               </a:rPr>
-              <a:t xml:space="preserve">157</a:t>
+              <a:t xml:space="preserve">0.13</a:t>
             </a:r>
           </a:p>
         </p:txBody>
@@ -18759,8 +18783,8 @@
         </p:nvSpPr>
         <p:spPr>
           <a:xfrm>
-            <a:off x="9061704" y="5212080"/>
-            <a:ext cx="713231" cy="292608"/>
+            <a:off x="6062472" y="5257800"/>
+            <a:ext cx="713231" cy="219456"/>
           </a:xfrm>
           <a:prstGeom prst="rect">
             <a:avLst/>
@@ -18787,7 +18811,7 @@
                 <a:latin typeface="Calibri"/>
                 <a:cs typeface="Calibri"/>
               </a:rPr>
-              <a:t xml:space="preserve">147</a:t>
+              <a:t xml:space="preserve">0.62</a:t>
             </a:r>
           </a:p>
         </p:txBody>
@@ -18800,8 +18824,8 @@
         </p:nvSpPr>
         <p:spPr>
           <a:xfrm>
-            <a:off x="9811512" y="5212080"/>
-            <a:ext cx="713231" cy="292608"/>
+            <a:off x="6812279" y="5257800"/>
+            <a:ext cx="713231" cy="219456"/>
           </a:xfrm>
           <a:prstGeom prst="rect">
             <a:avLst/>
@@ -18828,21 +18852,185 @@
                 <a:latin typeface="Calibri"/>
                 <a:cs typeface="Calibri"/>
               </a:rPr>
-              <a:t xml:space="preserve">114</a:t>
-            </a:r>
-          </a:p>
-        </p:txBody>
-      </p:sp>
-      <p:sp>
-        <p:nvSpPr>
-          <p:cNvPr id="1235" name="Avg"/>
+              <a:t xml:space="preserve">0.49</a:t>
+            </a:r>
+          </a:p>
+        </p:txBody>
+      </p:sp>
+      <p:sp>
+        <p:nvSpPr>
+          <p:cNvPr id="1235" name="Cell"/>
+          <p:cNvSpPr/>
+          <p:nvPr/>
+        </p:nvSpPr>
+        <p:spPr>
+          <a:xfrm>
+            <a:off x="7562088" y="5257800"/>
+            <a:ext cx="713231" cy="219456"/>
+          </a:xfrm>
+          <a:prstGeom prst="rect">
+            <a:avLst/>
+          </a:prstGeom>
+          <a:solidFill>
+            <a:srgbClr val="F6DAD3"/>
+          </a:solidFill>
+          <a:ln>
+            <a:noFill/>
+          </a:ln>
+        </p:spPr>
+        <p:txBody>
+          <a:bodyPr wrap="square" lIns="0" tIns="0" rIns="0" bIns="0" anchor="ctr">
+            <a:noAutofit/>
+          </a:bodyPr>
+          <a:lstStyle/>
+          <a:p>
+            <a:pPr algn="ctr"/>
+            <a:r>
+              <a:rPr lang="en-US" sz="1100" b="1" i="0" dirty="0">
+                <a:solidFill>
+                  <a:srgbClr val="1F2328"/>
+                </a:solidFill>
+                <a:latin typeface="Calibri"/>
+                <a:cs typeface="Calibri"/>
+              </a:rPr>
+              <a:t xml:space="preserve">0.10</a:t>
+            </a:r>
+          </a:p>
+        </p:txBody>
+      </p:sp>
+      <p:sp>
+        <p:nvSpPr>
+          <p:cNvPr id="1236" name="Cell"/>
+          <p:cNvSpPr/>
+          <p:nvPr/>
+        </p:nvSpPr>
+        <p:spPr>
+          <a:xfrm>
+            <a:off x="8311896" y="5257800"/>
+            <a:ext cx="713231" cy="219456"/>
+          </a:xfrm>
+          <a:prstGeom prst="rect">
+            <a:avLst/>
+          </a:prstGeom>
+          <a:solidFill>
+            <a:srgbClr val="DDF0E5"/>
+          </a:solidFill>
+          <a:ln>
+            <a:noFill/>
+          </a:ln>
+        </p:spPr>
+        <p:txBody>
+          <a:bodyPr wrap="square" lIns="0" tIns="0" rIns="0" bIns="0" anchor="ctr">
+            <a:noAutofit/>
+          </a:bodyPr>
+          <a:lstStyle/>
+          <a:p>
+            <a:pPr algn="ctr"/>
+            <a:r>
+              <a:rPr lang="en-US" sz="1100" b="1" i="0" dirty="0">
+                <a:solidFill>
+                  <a:srgbClr val="1F2328"/>
+                </a:solidFill>
+                <a:latin typeface="Calibri"/>
+                <a:cs typeface="Calibri"/>
+              </a:rPr>
+              <a:t xml:space="preserve">2.12</a:t>
+            </a:r>
+          </a:p>
+        </p:txBody>
+      </p:sp>
+      <p:sp>
+        <p:nvSpPr>
+          <p:cNvPr id="1237" name="Cell"/>
+          <p:cNvSpPr/>
+          <p:nvPr/>
+        </p:nvSpPr>
+        <p:spPr>
+          <a:xfrm>
+            <a:off x="9061704" y="5257800"/>
+            <a:ext cx="713231" cy="219456"/>
+          </a:xfrm>
+          <a:prstGeom prst="rect">
+            <a:avLst/>
+          </a:prstGeom>
+          <a:solidFill>
+            <a:srgbClr val="DDF0E5"/>
+          </a:solidFill>
+          <a:ln>
+            <a:noFill/>
+          </a:ln>
+        </p:spPr>
+        <p:txBody>
+          <a:bodyPr wrap="square" lIns="0" tIns="0" rIns="0" bIns="0" anchor="ctr">
+            <a:noAutofit/>
+          </a:bodyPr>
+          <a:lstStyle/>
+          <a:p>
+            <a:pPr algn="ctr"/>
+            <a:r>
+              <a:rPr lang="en-US" sz="1100" b="1" i="0" dirty="0">
+                <a:solidFill>
+                  <a:srgbClr val="1F2328"/>
+                </a:solidFill>
+                <a:latin typeface="Calibri"/>
+                <a:cs typeface="Calibri"/>
+              </a:rPr>
+              <a:t xml:space="preserve">2.72</a:t>
+            </a:r>
+          </a:p>
+        </p:txBody>
+      </p:sp>
+      <p:sp>
+        <p:nvSpPr>
+          <p:cNvPr id="1238" name="Cell"/>
+          <p:cNvSpPr/>
+          <p:nvPr/>
+        </p:nvSpPr>
+        <p:spPr>
+          <a:xfrm>
+            <a:off x="9811512" y="5257800"/>
+            <a:ext cx="713231" cy="219456"/>
+          </a:xfrm>
+          <a:prstGeom prst="rect">
+            <a:avLst/>
+          </a:prstGeom>
+          <a:solidFill>
+            <a:srgbClr val="BFE3CF"/>
+          </a:solidFill>
+          <a:ln>
+            <a:noFill/>
+          </a:ln>
+        </p:spPr>
+        <p:txBody>
+          <a:bodyPr wrap="square" lIns="0" tIns="0" rIns="0" bIns="0" anchor="ctr">
+            <a:noAutofit/>
+          </a:bodyPr>
+          <a:lstStyle/>
+          <a:p>
+            <a:pPr algn="ctr"/>
+            <a:r>
+              <a:rPr lang="en-US" sz="1100" b="1" i="0" dirty="0">
+                <a:solidFill>
+                  <a:srgbClr val="1F2328"/>
+                </a:solidFill>
+                <a:latin typeface="Calibri"/>
+                <a:cs typeface="Calibri"/>
+              </a:rPr>
+              <a:t xml:space="preserve">4.07</a:t>
+            </a:r>
+          </a:p>
+        </p:txBody>
+      </p:sp>
+      <p:sp>
+        <p:nvSpPr>
+          <p:cNvPr id="1239" name="Avg"/>
           <p:cNvSpPr txBox="1"/>
           <p:nvPr/>
         </p:nvSpPr>
         <p:spPr>
           <a:xfrm>
-            <a:off x="10588752" y="5193792"/>
-            <a:ext cx="685800" cy="329184"/>
+            <a:off x="10588752" y="5239512"/>
+            <a:ext cx="685800" cy="256032"/>
           </a:xfrm>
           <a:prstGeom prst="rect">
             <a:avLst/>
@@ -18867,14 +19055,14 @@
                 <a:latin typeface="Calibri"/>
                 <a:cs typeface="Calibri"/>
               </a:rPr>
-              <a:t xml:space="preserve">59</a:t>
-            </a:r>
-          </a:p>
-        </p:txBody>
-      </p:sp>
-      <p:sp>
-        <p:nvSpPr>
-          <p:cNvPr id="1236" name="Strip"/>
+              <a:t xml:space="preserve">1.26</a:t>
+            </a:r>
+          </a:p>
+        </p:txBody>
+      </p:sp>
+      <p:sp>
+        <p:nvSpPr>
+          <p:cNvPr id="1240" name="Strip"/>
           <p:cNvSpPr/>
           <p:nvPr/>
         </p:nvSpPr>
@@ -18910,40 +19098,50 @@
                 <a:latin typeface="Calibri"/>
                 <a:cs typeface="Calibri"/>
               </a:rPr>
-              <a:t xml:space="preserve">Hierarchies follow what the LLM knows: </a:t>
+              <a:t xml:space="preserve">Only RIGOR adds labels, provenance </a:t>
             </a:r>
             <a:r>
               <a:rPr lang="en-US" sz="1400" b="1" i="0" dirty="0">
                 <a:solidFill>
+                  <a:srgbClr val="1F2328"/>
+                </a:solidFill>
+                <a:latin typeface="Calibri"/>
+                <a:cs typeface="Calibri"/>
+              </a:rPr>
+              <a:t xml:space="preserve">and</a:t>
+            </a:r>
+            <a:r>
+              <a:rPr lang="en-US" sz="1400" b="0" i="0" dirty="0">
+                <a:solidFill>
+                  <a:srgbClr val="3A434C"/>
+                </a:solidFill>
+                <a:latin typeface="Calibri"/>
+                <a:cs typeface="Calibri"/>
+              </a:rPr>
+              <a:t xml:space="preserve"> a class hierarchy: </a:t>
+            </a:r>
+            <a:r>
+              <a:rPr lang="en-US" sz="1400" b="1" i="0" dirty="0">
+                <a:solidFill>
                   <a:srgbClr val="0B6E4F"/>
                 </a:solidFill>
                 <a:latin typeface="Calibri"/>
                 <a:cs typeface="Calibri"/>
               </a:rPr>
-              <a:t xml:space="preserve">114–157 subclass axioms for the music store</a:t>
-            </a:r>
-            <a:r>
-              <a:rPr lang="en-US" sz="1400" b="0" i="0" dirty="0">
-                <a:solidFill>
-                  <a:srgbClr val="3A434C"/>
-                </a:solidFill>
-                <a:latin typeface="Calibri"/>
-                <a:cs typeface="Calibri"/>
-              </a:rPr>
-              <a:t xml:space="preserve">, 2–59 for the clinical schemas.</a:t>
-            </a:r>
-          </a:p>
-        </p:txBody>
-      </p:sp>
-      <p:sp>
-        <p:nvSpPr>
-          <p:cNvPr id="1237" name="Source"/>
+              <a:t xml:space="preserve">with every LLM, in every database.</a:t>
+            </a:r>
+          </a:p>
+        </p:txBody>
+      </p:sp>
+      <p:sp>
+        <p:nvSpPr>
+          <p:cNvPr id="1241" name="Source"/>
           <p:cNvSpPr txBox="1"/>
           <p:nvPr/>
         </p:nvSpPr>
         <p:spPr>
           <a:xfrm>
-            <a:off x="822960" y="6382512"/>
+            <a:off x="822960" y="6345936"/>
             <a:ext cx="10607040" cy="237744"/>
           </a:xfrm>
           <a:prstGeom prst="rect">
@@ -18969,7 +19167,7 @@
                 <a:latin typeface="Calibri"/>
                 <a:cs typeface="Calibri"/>
               </a:rPr>
-              <a:t xml:space="preserve">Paper Table 8: annotation assertions (labels and comments), prov:wasDerivedFrom assertions, rdfs:subClassOf axioms.</a:t>
+              <a:t xml:space="preserve">Labels &amp; comments: annotation assertions; provenance: prov:wasDerivedFrom (paper Table 8). Hierarchy: inheritance richness, subclass axioms per class [OntoQA: Tartir et al., KADASH 2005; OntoMetrics: Lantow, KEOD 2016], from Table 8. Shading compares cells within each database.</a:t>
             </a:r>
           </a:p>
         </p:txBody>

--- a/presentation/RIGOR_results.pptx
+++ b/presentation/RIGOR_results.pptx
@@ -2309,7 +2309,7 @@
                 <a:cs typeface="Calibri"/>
                 <a:sym typeface="Calibri"/>
               </a:rPr>
-              <a:t>[11:07–11:58]  SPOKEN SCRIPT (82 words)</a:t>
+              <a:t>[11:07–12:03]  SPOKEN SCRIPT (91 words)</a:t>
             </a:r>
           </a:p>
           <a:p>
@@ -2323,7 +2323,7 @@
                 <a:cs typeface="Calibri"/>
                 <a:sym typeface="Calibri"/>
               </a:rPr>
-              <a:t>Automatic checks agree. Do evaluators agree? Both judged each table against its competency questions: what the ontology must be able to answer, five per table, verified by a domain expert. An LLM judge ranked RIGOR first on all fifty-eight tables, with its largest lead on the liver registry that no LLM has seen. [pause] Ten ontology experts ranked RIGOR first in twenty-eight of forty rankings. [pause] Direct mapping gives structure without meaning. LLMs alone give meaning without structure. RIGOR gives both, and checks them.</a:t>
+              <a:t>Automatic checks agree. Do evaluators agree? For each table, an LLM judge and ten ontology experts saw the schema, five competency questions, the questions the ontology must answer, and four anonymized ontologies. They scored each on seven quality dimensions and ranked them. The LLM judge put RIGOR first on every table, in all three databases. [pause] The experts put RIGOR first in seven of ten rankings, with the highest average score on both databases. [pause] Direct mapping gives structure without meaning. LLMs alone give meaning without structure. RIGOR gives both, and checks them.</a:t>
             </a:r>
           </a:p>
           <a:p/>
@@ -2338,7 +2338,7 @@
                 <a:cs typeface="Calibri"/>
                 <a:sym typeface="Calibri"/>
               </a:rPr>
-              <a:t>PRESENTER / POINTER: Read the competency question aloud; then 58 of 58; then 28 of 40; then the closing strip.</a:t>
+              <a:t>PRESENTER / POINTER: The 'How they judged' box in one breath; then the two claims; then the closing strip.</a:t>
             </a:r>
           </a:p>
           <a:p>
@@ -2352,7 +2352,7 @@
                 <a:cs typeface="Calibri"/>
                 <a:sym typeface="Calibri"/>
               </a:rPr>
-              <a:t>AUDIENCE TAKEAWAY: Judged against competency questions, an LLM judge and human experts both rank RIGOR first.</a:t>
+              <a:t>AUDIENCE TAKEAWAY: Judged blind against competency questions, an LLM judge and human experts both rank RIGOR first.</a:t>
             </a:r>
           </a:p>
           <a:p>
@@ -2366,7 +2366,7 @@
                 <a:cs typeface="Calibri"/>
                 <a:sym typeface="Calibri"/>
               </a:rPr>
-              <a:t>SOURCE AND SCOPE: Paper Sec. 4.2 (5 CQs per table, LLM-generated, expert-verified; 290 in total), Table 6 (example), Table 1 (scores, rankings), Table 12 (Kendall's W 0.39-0.72). Judge: Claude ontologies.</a:t>
+              <a:t>SOURCE AND SCOPE: Paper Sec. 4.2 and 4.6 (5 expert-verified CQs per table, 7 dimensions, ranking), Table 1 (judge scores and first places: 58 of 58 tables), Table 11 (expert scores), Table 12 (Kendall's W 0.39-0.72). Judge evaluated the Claude ontologies; experts 4 medical tables, 28 of 40 first places.</a:t>
             </a:r>
           </a:p>
           <a:p>
@@ -2380,7 +2380,22 @@
                 <a:cs typeface="Calibri"/>
                 <a:sym typeface="Calibri"/>
               </a:rPr>
-              <a:t>IF RUNNING LATE, DROP: "with its largest lead on the liver registry that no LLM has seen"</a:t>
+              <a:t>IF RUNNING LATE, DROP: "with the highest average score on both databases"</a:t>
+            </a:r>
+          </a:p>
+          <a:p/>
+          <a:p>
+            <a:r>
+              <a:rPr lang="en-US" sz="1200">
+                <a:solidFill>
+                  <a:schemeClr val="dk1"/>
+                </a:solidFill>
+                <a:latin typeface="Calibri"/>
+                <a:ea typeface="Calibri"/>
+                <a:cs typeface="Calibri"/>
+                <a:sym typeface="Calibri"/>
+              </a:rPr>
+              <a:t>IF ASKED HOW MANY: the judge ranked RIGOR first on 58 of 58 tables (16 Liver Cancer, 31 eICU-CRD, 11 Chinook); the experts in 28 of 40 rankings (10 experts x 4 tables).</a:t>
             </a:r>
           </a:p>
         </p:txBody>
@@ -10464,7 +10479,7 @@
                 <a:latin typeface="Calibri"/>
                 <a:cs typeface="Calibri"/>
               </a:rPr>
-              <a:t xml:space="preserve">Both ranked four anonymized ontologies per table, judged against that table's competency questions.</a:t>
+              <a:t xml:space="preserve">Blind evaluation: nobody knew which ontology came from which method.</a:t>
             </a:r>
           </a:p>
         </p:txBody>
@@ -10676,14 +10691,14 @@
       </p:sp>
       <p:sp>
         <p:nvSpPr>
-          <p:cNvPr id="1264" name="CQ strip"/>
+          <p:cNvPr id="1264" name="How"/>
           <p:cNvSpPr/>
           <p:nvPr/>
         </p:nvSpPr>
         <p:spPr>
           <a:xfrm>
             <a:off x="804672" y="2606040"/>
-            <a:ext cx="10579608" cy="475488"/>
+            <a:ext cx="10579608" cy="658368"/>
           </a:xfrm>
           <a:prstGeom prst="roundRect">
             <a:avLst>
@@ -10714,27 +10729,17 @@
                 <a:latin typeface="Consolas"/>
                 <a:cs typeface="Consolas"/>
               </a:rPr>
-              <a:t xml:space="preserve">COMPETENCY QUESTIONS  </a:t>
-            </a:r>
-            <a:r>
-              <a:rPr lang="en-US" sz="1150" b="0" i="0" dirty="0">
+              <a:t xml:space="preserve">HOW THEY JUDGED   </a:t>
+            </a:r>
+            <a:r>
+              <a:rPr lang="en-US" sz="1200" b="0" i="0" dirty="0">
                 <a:solidFill>
                   <a:srgbClr val="3A434C"/>
                 </a:solidFill>
                 <a:latin typeface="Calibri"/>
                 <a:cs typeface="Calibri"/>
               </a:rPr>
-              <a:t xml:space="preserve">what the ontology must answer. 5 per table, 290 in total, expert-verified.  </a:t>
-            </a:r>
-            <a:r>
-              <a:rPr lang="en-US" sz="1150" b="0" i="1" dirty="0">
-                <a:solidFill>
-                  <a:srgbClr val="1F2328"/>
-                </a:solidFill>
-                <a:latin typeface="Calibri"/>
-                <a:cs typeface="Calibri"/>
-              </a:rPr>
-              <a:t xml:space="preserve">e.g. “Which patients had abnormal physical exam findings?”</a:t>
+              <a:t xml:space="preserve">For each table: its schema, its 5 competency questions (what the ontology must answer) and four anonymized ontologies. Each scored 0–5 on accuracy, completeness, conciseness, adaptability, clarity, consistency and domain enrichment, then ranked 1st–4th.</a:t>
             </a:r>
           </a:p>
         </p:txBody>
@@ -10747,8 +10752,8 @@
         </p:nvSpPr>
         <p:spPr>
           <a:xfrm>
-            <a:off x="804672" y="3172968"/>
-            <a:ext cx="5760720" cy="2587752"/>
+            <a:off x="804672" y="3355848"/>
+            <a:ext cx="5760720" cy="2404872"/>
           </a:xfrm>
           <a:prstGeom prst="roundRect">
             <a:avLst>
@@ -10782,7 +10787,7 @@
         </p:nvSpPr>
         <p:spPr>
           <a:xfrm>
-            <a:off x="1078992" y="3355848"/>
+            <a:off x="1078992" y="3538728"/>
             <a:ext cx="5212080" cy="274320"/>
           </a:xfrm>
           <a:prstGeom prst="rect">
@@ -10815,14 +10820,14 @@
       </p:sp>
       <p:sp>
         <p:nvSpPr>
-          <p:cNvPr id="1267" name="Big"/>
+          <p:cNvPr id="1267" name="Claim"/>
           <p:cNvSpPr txBox="1"/>
           <p:nvPr/>
         </p:nvSpPr>
         <p:spPr>
           <a:xfrm>
-            <a:off x="1078992" y="3557016"/>
-            <a:ext cx="2194560" cy="566928"/>
+            <a:off x="1078992" y="3794760"/>
+            <a:ext cx="5212080" cy="365760"/>
           </a:xfrm>
           <a:prstGeom prst="rect">
             <a:avLst/>
@@ -10833,60 +10838,70 @@
           </a:ln>
         </p:spPr>
         <p:txBody>
-          <a:bodyPr wrap="square" lIns="0" tIns="0" rIns="0" bIns="0" anchor="t">
+          <a:bodyPr wrap="square" lIns="0" tIns="0" rIns="0" bIns="0" anchor="ctr">
             <a:noAutofit/>
           </a:bodyPr>
           <a:lstStyle/>
           <a:p>
             <a:pPr algn="l"/>
             <a:r>
-              <a:rPr lang="en-US" sz="3400" b="1" i="0" dirty="0">
+              <a:rPr lang="en-US" sz="1800" b="1" i="0" dirty="0">
+                <a:solidFill>
+                  <a:srgbClr val="0B6E4F"/>
+                </a:solidFill>
+                <a:latin typeface="Calibri"/>
+                <a:cs typeface="Calibri"/>
+              </a:rPr>
+              <a:t xml:space="preserve">First on every table</a:t>
+            </a:r>
+            <a:r>
+              <a:rPr lang="en-US" sz="1500" b="0" i="0" dirty="0">
+                <a:solidFill>
+                  <a:srgbClr val="3A434C"/>
+                </a:solidFill>
+                <a:latin typeface="Calibri"/>
+                <a:cs typeface="Calibri"/>
+              </a:rPr>
+              <a:t xml:space="preserve">, in all three databases</a:t>
+            </a:r>
+          </a:p>
+        </p:txBody>
+      </p:sp>
+      <p:sp>
+        <p:nvSpPr>
+          <p:cNvPr id="1268" name="Database"/>
+          <p:cNvSpPr txBox="1"/>
+          <p:nvPr/>
+        </p:nvSpPr>
+        <p:spPr>
+          <a:xfrm>
+            <a:off x="2542032" y="4251960"/>
+            <a:ext cx="1243584" cy="219456"/>
+          </a:xfrm>
+          <a:prstGeom prst="rect">
+            <a:avLst/>
+          </a:prstGeom>
+          <a:noFill/>
+          <a:ln>
+            <a:noFill/>
+          </a:ln>
+        </p:spPr>
+        <p:txBody>
+          <a:bodyPr wrap="square" lIns="0" tIns="0" rIns="0" bIns="0" anchor="ctr">
+            <a:noAutofit/>
+          </a:bodyPr>
+          <a:lstStyle/>
+          <a:p>
+            <a:pPr algn="ctr"/>
+            <a:r>
+              <a:rPr lang="en-US" sz="1100" b="1" i="0" dirty="0">
                 <a:solidFill>
                   <a:srgbClr val="1F2328"/>
                 </a:solidFill>
-                <a:latin typeface="Cambria"/>
-                <a:cs typeface="Cambria"/>
-              </a:rPr>
-              <a:t xml:space="preserve">58 / 58</a:t>
-            </a:r>
-          </a:p>
-        </p:txBody>
-      </p:sp>
-      <p:sp>
-        <p:nvSpPr>
-          <p:cNvPr id="1268" name="Claim"/>
-          <p:cNvSpPr txBox="1"/>
-          <p:nvPr/>
-        </p:nvSpPr>
-        <p:spPr>
-          <a:xfrm>
-            <a:off x="3136391" y="3584448"/>
-            <a:ext cx="3200400" cy="502920"/>
-          </a:xfrm>
-          <a:prstGeom prst="rect">
-            <a:avLst/>
-          </a:prstGeom>
-          <a:noFill/>
-          <a:ln>
-            <a:noFill/>
-          </a:ln>
-        </p:spPr>
-        <p:txBody>
-          <a:bodyPr wrap="square" lIns="0" tIns="0" rIns="0" bIns="0" anchor="ctr">
-            <a:noAutofit/>
-          </a:bodyPr>
-          <a:lstStyle/>
-          <a:p>
-            <a:pPr algn="l"/>
-            <a:r>
-              <a:rPr lang="en-US" sz="1500" b="1" i="0" dirty="0">
-                <a:solidFill>
-                  <a:srgbClr val="0B6E4F"/>
-                </a:solidFill>
-                <a:latin typeface="Calibri"/>
-                <a:cs typeface="Calibri"/>
-              </a:rPr>
-              <a:t xml:space="preserve">tables with RIGOR ranked first</a:t>
+                <a:latin typeface="Calibri"/>
+                <a:cs typeface="Calibri"/>
+              </a:rPr>
+              <a:t xml:space="preserve">Liver Cancer</a:t>
             </a:r>
           </a:p>
         </p:txBody>
@@ -10899,8 +10914,8 @@
         </p:nvSpPr>
         <p:spPr>
           <a:xfrm>
-            <a:off x="2359152" y="4160520"/>
-            <a:ext cx="1298448" cy="219456"/>
+            <a:off x="3785615" y="4251960"/>
+            <a:ext cx="1243584" cy="219456"/>
           </a:xfrm>
           <a:prstGeom prst="rect">
             <a:avLst/>
@@ -10925,7 +10940,7 @@
                 <a:latin typeface="Calibri"/>
                 <a:cs typeface="Calibri"/>
               </a:rPr>
-              <a:t xml:space="preserve">Liver Cancer</a:t>
+              <a:t xml:space="preserve">eICU-CRD</a:t>
             </a:r>
           </a:p>
         </p:txBody>
@@ -10938,8 +10953,8 @@
         </p:nvSpPr>
         <p:spPr>
           <a:xfrm>
-            <a:off x="3657600" y="4160520"/>
-            <a:ext cx="1298448" cy="219456"/>
+            <a:off x="5029200" y="4251960"/>
+            <a:ext cx="1243584" cy="219456"/>
           </a:xfrm>
           <a:prstGeom prst="rect">
             <a:avLst/>
@@ -10964,21 +10979,21 @@
                 <a:latin typeface="Calibri"/>
                 <a:cs typeface="Calibri"/>
               </a:rPr>
-              <a:t xml:space="preserve">eICU-CRD</a:t>
-            </a:r>
-          </a:p>
-        </p:txBody>
-      </p:sp>
-      <p:sp>
-        <p:nvSpPr>
-          <p:cNvPr id="1271" name="Database"/>
+              <a:t xml:space="preserve">Chinook</a:t>
+            </a:r>
+          </a:p>
+        </p:txBody>
+      </p:sp>
+      <p:sp>
+        <p:nvSpPr>
+          <p:cNvPr id="1271" name="Method"/>
           <p:cNvSpPr txBox="1"/>
           <p:nvPr/>
         </p:nvSpPr>
         <p:spPr>
           <a:xfrm>
-            <a:off x="4956048" y="4160520"/>
-            <a:ext cx="1298448" cy="219456"/>
+            <a:off x="1033271" y="4507992"/>
+            <a:ext cx="1508760" cy="292608"/>
           </a:xfrm>
           <a:prstGeom prst="rect">
             <a:avLst/>
@@ -10994,55 +11009,57 @@
           </a:bodyPr>
           <a:lstStyle/>
           <a:p>
-            <a:pPr algn="ctr"/>
-            <a:r>
-              <a:rPr lang="en-US" sz="1100" b="1" i="0" dirty="0">
+            <a:pPr algn="l"/>
+            <a:r>
+              <a:rPr lang="en-US" sz="1200" b="0" i="0" dirty="0">
                 <a:solidFill>
                   <a:srgbClr val="1F2328"/>
                 </a:solidFill>
                 <a:latin typeface="Calibri"/>
                 <a:cs typeface="Calibri"/>
               </a:rPr>
-              <a:t xml:space="preserve">Chinook</a:t>
-            </a:r>
-          </a:p>
-        </p:txBody>
-      </p:sp>
-      <p:sp>
-        <p:nvSpPr>
-          <p:cNvPr id="1272" name="Method"/>
-          <p:cNvSpPr txBox="1"/>
-          <p:nvPr/>
-        </p:nvSpPr>
-        <p:spPr>
-          <a:xfrm>
-            <a:off x="1033271" y="4416552"/>
-            <a:ext cx="1325880" cy="310896"/>
-          </a:xfrm>
-          <a:prstGeom prst="rect">
-            <a:avLst/>
-          </a:prstGeom>
-          <a:noFill/>
-          <a:ln>
-            <a:noFill/>
-          </a:ln>
-        </p:spPr>
-        <p:txBody>
-          <a:bodyPr wrap="square" lIns="0" tIns="0" rIns="0" bIns="0" anchor="ctr">
-            <a:noAutofit/>
-          </a:bodyPr>
-          <a:lstStyle/>
-          <a:p>
-            <a:pPr algn="l"/>
-            <a:r>
-              <a:rPr lang="en-US" sz="1200" b="0" i="0" dirty="0">
+              <a:t xml:space="preserve">Direct Mapping</a:t>
+            </a:r>
+          </a:p>
+        </p:txBody>
+      </p:sp>
+      <p:sp>
+        <p:nvSpPr>
+          <p:cNvPr id="1272" name="Cell"/>
+          <p:cNvSpPr/>
+          <p:nvPr/>
+        </p:nvSpPr>
+        <p:spPr>
+          <a:xfrm>
+            <a:off x="2560320" y="4526280"/>
+            <a:ext cx="1207008" cy="256032"/>
+          </a:xfrm>
+          <a:prstGeom prst="rect">
+            <a:avLst/>
+          </a:prstGeom>
+          <a:solidFill>
+            <a:srgbClr val="F1F3F2"/>
+          </a:solidFill>
+          <a:ln>
+            <a:noFill/>
+          </a:ln>
+        </p:spPr>
+        <p:txBody>
+          <a:bodyPr wrap="square" lIns="0" tIns="0" rIns="0" bIns="0" anchor="ctr">
+            <a:noAutofit/>
+          </a:bodyPr>
+          <a:lstStyle/>
+          <a:p>
+            <a:pPr algn="ctr"/>
+            <a:r>
+              <a:rPr lang="en-US" sz="1100" b="0" i="0" dirty="0">
                 <a:solidFill>
                   <a:srgbClr val="1F2328"/>
                 </a:solidFill>
                 <a:latin typeface="Calibri"/>
                 <a:cs typeface="Calibri"/>
               </a:rPr>
-              <a:t xml:space="preserve">Direct Mapping</a:t>
+              <a:t xml:space="preserve">2.05</a:t>
             </a:r>
           </a:p>
         </p:txBody>
@@ -11055,8 +11072,8 @@
         </p:nvSpPr>
         <p:spPr>
           <a:xfrm>
-            <a:off x="2377440" y="4434840"/>
-            <a:ext cx="1261872" cy="274320"/>
+            <a:off x="3803903" y="4526280"/>
+            <a:ext cx="1207008" cy="256032"/>
           </a:xfrm>
           <a:prstGeom prst="rect">
             <a:avLst/>
@@ -11083,7 +11100,7 @@
                 <a:latin typeface="Calibri"/>
                 <a:cs typeface="Calibri"/>
               </a:rPr>
-              <a:t xml:space="preserve">2.05</a:t>
+              <a:t xml:space="preserve">2.13</a:t>
             </a:r>
           </a:p>
         </p:txBody>
@@ -11096,14 +11113,14 @@
         </p:nvSpPr>
         <p:spPr>
           <a:xfrm>
-            <a:off x="3675887" y="4434840"/>
-            <a:ext cx="1261872" cy="274320"/>
-          </a:xfrm>
-          <a:prstGeom prst="rect">
-            <a:avLst/>
-          </a:prstGeom>
-          <a:solidFill>
-            <a:srgbClr val="F1F3F2"/>
+            <a:off x="5047488" y="4526280"/>
+            <a:ext cx="1207008" cy="256032"/>
+          </a:xfrm>
+          <a:prstGeom prst="rect">
+            <a:avLst/>
+          </a:prstGeom>
+          <a:solidFill>
+            <a:srgbClr val="EDB8AC"/>
           </a:solidFill>
           <a:ln>
             <a:noFill/>
@@ -11124,27 +11141,66 @@
                 <a:latin typeface="Calibri"/>
                 <a:cs typeface="Calibri"/>
               </a:rPr>
-              <a:t xml:space="preserve">2.13</a:t>
-            </a:r>
-          </a:p>
-        </p:txBody>
-      </p:sp>
-      <p:sp>
-        <p:nvSpPr>
-          <p:cNvPr id="1275" name="Cell"/>
+              <a:t xml:space="preserve">0.13</a:t>
+            </a:r>
+          </a:p>
+        </p:txBody>
+      </p:sp>
+      <p:sp>
+        <p:nvSpPr>
+          <p:cNvPr id="1275" name="Method"/>
+          <p:cNvSpPr txBox="1"/>
+          <p:nvPr/>
+        </p:nvSpPr>
+        <p:spPr>
+          <a:xfrm>
+            <a:off x="1033271" y="4800600"/>
+            <a:ext cx="1508760" cy="292608"/>
+          </a:xfrm>
+          <a:prstGeom prst="rect">
+            <a:avLst/>
+          </a:prstGeom>
+          <a:noFill/>
+          <a:ln>
+            <a:noFill/>
+          </a:ln>
+        </p:spPr>
+        <p:txBody>
+          <a:bodyPr wrap="square" lIns="0" tIns="0" rIns="0" bIns="0" anchor="ctr">
+            <a:noAutofit/>
+          </a:bodyPr>
+          <a:lstStyle/>
+          <a:p>
+            <a:pPr algn="l"/>
+            <a:r>
+              <a:rPr lang="en-US" sz="1200" b="0" i="0" dirty="0">
+                <a:solidFill>
+                  <a:srgbClr val="1F2328"/>
+                </a:solidFill>
+                <a:latin typeface="Calibri"/>
+                <a:cs typeface="Calibri"/>
+              </a:rPr>
+              <a:t xml:space="preserve">LLM baseline</a:t>
+            </a:r>
+          </a:p>
+        </p:txBody>
+      </p:sp>
+      <p:sp>
+        <p:nvSpPr>
+          <p:cNvPr id="1276" name="Cell"/>
           <p:cNvSpPr/>
           <p:nvPr/>
         </p:nvSpPr>
         <p:spPr>
           <a:xfrm>
-            <a:off x="4974336" y="4434840"/>
-            <a:ext cx="1261872" cy="274320"/>
-          </a:xfrm>
-          <a:prstGeom prst="rect">
-            <a:avLst/>
-          </a:prstGeom>
-          <a:solidFill>
-            <a:srgbClr val="EDB8AC"/>
+            <a:off x="2560320" y="4818888"/>
+            <a:ext cx="1207008" cy="256032"/>
+          </a:xfrm>
+          <a:prstGeom prst="rect">
+            <a:avLst/>
+          </a:prstGeom>
+          <a:solidFill>
+            <a:srgbClr val="F6DAD3"/>
           </a:solidFill>
           <a:ln>
             <a:noFill/>
@@ -11165,46 +11221,7 @@
                 <a:latin typeface="Calibri"/>
                 <a:cs typeface="Calibri"/>
               </a:rPr>
-              <a:t xml:space="preserve">0.13</a:t>
-            </a:r>
-          </a:p>
-        </p:txBody>
-      </p:sp>
-      <p:sp>
-        <p:nvSpPr>
-          <p:cNvPr id="1276" name="Method"/>
-          <p:cNvSpPr txBox="1"/>
-          <p:nvPr/>
-        </p:nvSpPr>
-        <p:spPr>
-          <a:xfrm>
-            <a:off x="1033271" y="4727448"/>
-            <a:ext cx="1325880" cy="310896"/>
-          </a:xfrm>
-          <a:prstGeom prst="rect">
-            <a:avLst/>
-          </a:prstGeom>
-          <a:noFill/>
-          <a:ln>
-            <a:noFill/>
-          </a:ln>
-        </p:spPr>
-        <p:txBody>
-          <a:bodyPr wrap="square" lIns="0" tIns="0" rIns="0" bIns="0" anchor="ctr">
-            <a:noAutofit/>
-          </a:bodyPr>
-          <a:lstStyle/>
-          <a:p>
-            <a:pPr algn="l"/>
-            <a:r>
-              <a:rPr lang="en-US" sz="1200" b="0" i="0" dirty="0">
-                <a:solidFill>
-                  <a:srgbClr val="1F2328"/>
-                </a:solidFill>
-                <a:latin typeface="Calibri"/>
-                <a:cs typeface="Calibri"/>
-              </a:rPr>
-              <a:t xml:space="preserve">LLM baseline</a:t>
+              <a:t xml:space="preserve">1.38</a:t>
             </a:r>
           </a:p>
         </p:txBody>
@@ -11217,14 +11234,14 @@
         </p:nvSpPr>
         <p:spPr>
           <a:xfrm>
-            <a:off x="2377440" y="4745736"/>
-            <a:ext cx="1261872" cy="274320"/>
-          </a:xfrm>
-          <a:prstGeom prst="rect">
-            <a:avLst/>
-          </a:prstGeom>
-          <a:solidFill>
-            <a:srgbClr val="F6DAD3"/>
+            <a:off x="3803903" y="4818888"/>
+            <a:ext cx="1207008" cy="256032"/>
+          </a:xfrm>
+          <a:prstGeom prst="rect">
+            <a:avLst/>
+          </a:prstGeom>
+          <a:solidFill>
+            <a:srgbClr val="EDB8AC"/>
           </a:solidFill>
           <a:ln>
             <a:noFill/>
@@ -11245,7 +11262,7 @@
                 <a:latin typeface="Calibri"/>
                 <a:cs typeface="Calibri"/>
               </a:rPr>
-              <a:t xml:space="preserve">1.38</a:t>
+              <a:t xml:space="preserve">0.28</a:t>
             </a:r>
           </a:p>
         </p:txBody>
@@ -11258,14 +11275,14 @@
         </p:nvSpPr>
         <p:spPr>
           <a:xfrm>
-            <a:off x="3675887" y="4745736"/>
-            <a:ext cx="1261872" cy="274320"/>
-          </a:xfrm>
-          <a:prstGeom prst="rect">
-            <a:avLst/>
-          </a:prstGeom>
-          <a:solidFill>
-            <a:srgbClr val="EDB8AC"/>
+            <a:off x="5047488" y="4818888"/>
+            <a:ext cx="1207008" cy="256032"/>
+          </a:xfrm>
+          <a:prstGeom prst="rect">
+            <a:avLst/>
+          </a:prstGeom>
+          <a:solidFill>
+            <a:srgbClr val="F6DAD3"/>
           </a:solidFill>
           <a:ln>
             <a:noFill/>
@@ -11286,21 +11303,60 @@
                 <a:latin typeface="Calibri"/>
                 <a:cs typeface="Calibri"/>
               </a:rPr>
-              <a:t xml:space="preserve">0.28</a:t>
-            </a:r>
-          </a:p>
-        </p:txBody>
-      </p:sp>
-      <p:sp>
-        <p:nvSpPr>
-          <p:cNvPr id="1279" name="Cell"/>
+              <a:t xml:space="preserve">1.48</a:t>
+            </a:r>
+          </a:p>
+        </p:txBody>
+      </p:sp>
+      <p:sp>
+        <p:nvSpPr>
+          <p:cNvPr id="1279" name="Method"/>
+          <p:cNvSpPr txBox="1"/>
+          <p:nvPr/>
+        </p:nvSpPr>
+        <p:spPr>
+          <a:xfrm>
+            <a:off x="1033271" y="5093208"/>
+            <a:ext cx="1508760" cy="292608"/>
+          </a:xfrm>
+          <a:prstGeom prst="rect">
+            <a:avLst/>
+          </a:prstGeom>
+          <a:noFill/>
+          <a:ln>
+            <a:noFill/>
+          </a:ln>
+        </p:spPr>
+        <p:txBody>
+          <a:bodyPr wrap="square" lIns="0" tIns="0" rIns="0" bIns="0" anchor="ctr">
+            <a:noAutofit/>
+          </a:bodyPr>
+          <a:lstStyle/>
+          <a:p>
+            <a:pPr algn="l"/>
+            <a:r>
+              <a:rPr lang="en-US" sz="1200" b="0" i="0" dirty="0">
+                <a:solidFill>
+                  <a:srgbClr val="1F2328"/>
+                </a:solidFill>
+                <a:latin typeface="Calibri"/>
+                <a:cs typeface="Calibri"/>
+              </a:rPr>
+              <a:t xml:space="preserve">Non-Iterative RAG</a:t>
+            </a:r>
+          </a:p>
+        </p:txBody>
+      </p:sp>
+      <p:sp>
+        <p:nvSpPr>
+          <p:cNvPr id="1280" name="Cell"/>
           <p:cNvSpPr/>
           <p:nvPr/>
         </p:nvSpPr>
         <p:spPr>
           <a:xfrm>
-            <a:off x="4974336" y="4745736"/>
-            <a:ext cx="1261872" cy="274320"/>
+            <a:off x="2560320" y="5111496"/>
+            <a:ext cx="1207008" cy="256032"/>
           </a:xfrm>
           <a:prstGeom prst="rect">
             <a:avLst/>
@@ -11327,46 +11383,7 @@
                 <a:latin typeface="Calibri"/>
                 <a:cs typeface="Calibri"/>
               </a:rPr>
-              <a:t xml:space="preserve">1.48</a:t>
-            </a:r>
-          </a:p>
-        </p:txBody>
-      </p:sp>
-      <p:sp>
-        <p:nvSpPr>
-          <p:cNvPr id="1280" name="Method"/>
-          <p:cNvSpPr txBox="1"/>
-          <p:nvPr/>
-        </p:nvSpPr>
-        <p:spPr>
-          <a:xfrm>
-            <a:off x="1033271" y="5038344"/>
-            <a:ext cx="1325880" cy="310896"/>
-          </a:xfrm>
-          <a:prstGeom prst="rect">
-            <a:avLst/>
-          </a:prstGeom>
-          <a:noFill/>
-          <a:ln>
-            <a:noFill/>
-          </a:ln>
-        </p:spPr>
-        <p:txBody>
-          <a:bodyPr wrap="square" lIns="0" tIns="0" rIns="0" bIns="0" anchor="ctr">
-            <a:noAutofit/>
-          </a:bodyPr>
-          <a:lstStyle/>
-          <a:p>
-            <a:pPr algn="l"/>
-            <a:r>
-              <a:rPr lang="en-US" sz="1200" b="0" i="0" dirty="0">
-                <a:solidFill>
-                  <a:srgbClr val="1F2328"/>
-                </a:solidFill>
-                <a:latin typeface="Calibri"/>
-                <a:cs typeface="Calibri"/>
-              </a:rPr>
-              <a:t xml:space="preserve">Non-Iterative</a:t>
+              <a:t xml:space="preserve">1.89</a:t>
             </a:r>
           </a:p>
         </p:txBody>
@@ -11379,14 +11396,14 @@
         </p:nvSpPr>
         <p:spPr>
           <a:xfrm>
-            <a:off x="2377440" y="5056632"/>
-            <a:ext cx="1261872" cy="274320"/>
-          </a:xfrm>
-          <a:prstGeom prst="rect">
-            <a:avLst/>
-          </a:prstGeom>
-          <a:solidFill>
-            <a:srgbClr val="F6DAD3"/>
+            <a:off x="3803903" y="5111496"/>
+            <a:ext cx="1207008" cy="256032"/>
+          </a:xfrm>
+          <a:prstGeom prst="rect">
+            <a:avLst/>
+          </a:prstGeom>
+          <a:solidFill>
+            <a:srgbClr val="EDB8AC"/>
           </a:solidFill>
           <a:ln>
             <a:noFill/>
@@ -11407,7 +11424,7 @@
                 <a:latin typeface="Calibri"/>
                 <a:cs typeface="Calibri"/>
               </a:rPr>
-              <a:t xml:space="preserve">1.89</a:t>
+              <a:t xml:space="preserve">0.67</a:t>
             </a:r>
           </a:p>
         </p:txBody>
@@ -11420,14 +11437,14 @@
         </p:nvSpPr>
         <p:spPr>
           <a:xfrm>
-            <a:off x="3675887" y="5056632"/>
-            <a:ext cx="1261872" cy="274320"/>
-          </a:xfrm>
-          <a:prstGeom prst="rect">
-            <a:avLst/>
-          </a:prstGeom>
-          <a:solidFill>
-            <a:srgbClr val="EDB8AC"/>
+            <a:off x="5047488" y="5111496"/>
+            <a:ext cx="1207008" cy="256032"/>
+          </a:xfrm>
+          <a:prstGeom prst="rect">
+            <a:avLst/>
+          </a:prstGeom>
+          <a:solidFill>
+            <a:srgbClr val="F1F3F2"/>
           </a:solidFill>
           <a:ln>
             <a:noFill/>
@@ -11448,87 +11465,87 @@
                 <a:latin typeface="Calibri"/>
                 <a:cs typeface="Calibri"/>
               </a:rPr>
-              <a:t xml:space="preserve">0.67</a:t>
-            </a:r>
-          </a:p>
-        </p:txBody>
-      </p:sp>
-      <p:sp>
-        <p:nvSpPr>
-          <p:cNvPr id="1283" name="Cell"/>
+              <a:t xml:space="preserve">2.77</a:t>
+            </a:r>
+          </a:p>
+        </p:txBody>
+      </p:sp>
+      <p:sp>
+        <p:nvSpPr>
+          <p:cNvPr id="1283" name="Method"/>
+          <p:cNvSpPr txBox="1"/>
+          <p:nvPr/>
+        </p:nvSpPr>
+        <p:spPr>
+          <a:xfrm>
+            <a:off x="1033271" y="5385816"/>
+            <a:ext cx="1508760" cy="292608"/>
+          </a:xfrm>
+          <a:prstGeom prst="rect">
+            <a:avLst/>
+          </a:prstGeom>
+          <a:noFill/>
+          <a:ln>
+            <a:noFill/>
+          </a:ln>
+        </p:spPr>
+        <p:txBody>
+          <a:bodyPr wrap="square" lIns="0" tIns="0" rIns="0" bIns="0" anchor="ctr">
+            <a:noAutofit/>
+          </a:bodyPr>
+          <a:lstStyle/>
+          <a:p>
+            <a:pPr algn="l"/>
+            <a:r>
+              <a:rPr lang="en-US" sz="1200" b="1" i="0" dirty="0">
+                <a:solidFill>
+                  <a:srgbClr val="0B6E4F"/>
+                </a:solidFill>
+                <a:latin typeface="Calibri"/>
+                <a:cs typeface="Calibri"/>
+              </a:rPr>
+              <a:t xml:space="preserve">RIGOR</a:t>
+            </a:r>
+          </a:p>
+        </p:txBody>
+      </p:sp>
+      <p:sp>
+        <p:nvSpPr>
+          <p:cNvPr id="1284" name="Cell"/>
           <p:cNvSpPr/>
           <p:nvPr/>
         </p:nvSpPr>
         <p:spPr>
           <a:xfrm>
-            <a:off x="4974336" y="5056632"/>
-            <a:ext cx="1261872" cy="274320"/>
-          </a:xfrm>
-          <a:prstGeom prst="rect">
-            <a:avLst/>
-          </a:prstGeom>
-          <a:solidFill>
-            <a:srgbClr val="F1F3F2"/>
-          </a:solidFill>
-          <a:ln>
-            <a:noFill/>
-          </a:ln>
-        </p:spPr>
-        <p:txBody>
-          <a:bodyPr wrap="square" lIns="0" tIns="0" rIns="0" bIns="0" anchor="ctr">
-            <a:noAutofit/>
-          </a:bodyPr>
-          <a:lstStyle/>
-          <a:p>
-            <a:pPr algn="ctr"/>
-            <a:r>
-              <a:rPr lang="en-US" sz="1100" b="0" i="0" dirty="0">
+            <a:off x="2560320" y="5404104"/>
+            <a:ext cx="1207008" cy="256032"/>
+          </a:xfrm>
+          <a:prstGeom prst="rect">
+            <a:avLst/>
+          </a:prstGeom>
+          <a:solidFill>
+            <a:srgbClr val="BFE3CF"/>
+          </a:solidFill>
+          <a:ln>
+            <a:noFill/>
+          </a:ln>
+        </p:spPr>
+        <p:txBody>
+          <a:bodyPr wrap="square" lIns="0" tIns="0" rIns="0" bIns="0" anchor="ctr">
+            <a:noAutofit/>
+          </a:bodyPr>
+          <a:lstStyle/>
+          <a:p>
+            <a:pPr algn="ctr"/>
+            <a:r>
+              <a:rPr lang="en-US" sz="1100" b="1" i="0" dirty="0">
                 <a:solidFill>
                   <a:srgbClr val="1F2328"/>
                 </a:solidFill>
                 <a:latin typeface="Calibri"/>
                 <a:cs typeface="Calibri"/>
               </a:rPr>
-              <a:t xml:space="preserve">2.77</a:t>
-            </a:r>
-          </a:p>
-        </p:txBody>
-      </p:sp>
-      <p:sp>
-        <p:nvSpPr>
-          <p:cNvPr id="1284" name="Method"/>
-          <p:cNvSpPr txBox="1"/>
-          <p:nvPr/>
-        </p:nvSpPr>
-        <p:spPr>
-          <a:xfrm>
-            <a:off x="1033271" y="5349240"/>
-            <a:ext cx="1325880" cy="310896"/>
-          </a:xfrm>
-          <a:prstGeom prst="rect">
-            <a:avLst/>
-          </a:prstGeom>
-          <a:noFill/>
-          <a:ln>
-            <a:noFill/>
-          </a:ln>
-        </p:spPr>
-        <p:txBody>
-          <a:bodyPr wrap="square" lIns="0" tIns="0" rIns="0" bIns="0" anchor="ctr">
-            <a:noAutofit/>
-          </a:bodyPr>
-          <a:lstStyle/>
-          <a:p>
-            <a:pPr algn="l"/>
-            <a:r>
-              <a:rPr lang="en-US" sz="1200" b="1" i="0" dirty="0">
-                <a:solidFill>
-                  <a:srgbClr val="0B6E4F"/>
-                </a:solidFill>
-                <a:latin typeface="Calibri"/>
-                <a:cs typeface="Calibri"/>
-              </a:rPr>
-              <a:t xml:space="preserve">RIGOR</a:t>
+              <a:t xml:space="preserve">3.93</a:t>
             </a:r>
           </a:p>
         </p:txBody>
@@ -11541,8 +11558,8 @@
         </p:nvSpPr>
         <p:spPr>
           <a:xfrm>
-            <a:off x="2377440" y="5367528"/>
-            <a:ext cx="1261872" cy="274320"/>
+            <a:off x="3803903" y="5404104"/>
+            <a:ext cx="1207008" cy="256032"/>
           </a:xfrm>
           <a:prstGeom prst="rect">
             <a:avLst/>
@@ -11569,7 +11586,7 @@
                 <a:latin typeface="Calibri"/>
                 <a:cs typeface="Calibri"/>
               </a:rPr>
-              <a:t xml:space="preserve">3.93</a:t>
+              <a:t xml:space="preserve">3.64</a:t>
             </a:r>
           </a:p>
         </p:txBody>
@@ -11582,14 +11599,14 @@
         </p:nvSpPr>
         <p:spPr>
           <a:xfrm>
-            <a:off x="3675887" y="5367528"/>
-            <a:ext cx="1261872" cy="274320"/>
-          </a:xfrm>
-          <a:prstGeom prst="rect">
-            <a:avLst/>
-          </a:prstGeom>
-          <a:solidFill>
-            <a:srgbClr val="BFE3CF"/>
+            <a:off x="5047488" y="5404104"/>
+            <a:ext cx="1207008" cy="256032"/>
+          </a:xfrm>
+          <a:prstGeom prst="rect">
+            <a:avLst/>
+          </a:prstGeom>
+          <a:solidFill>
+            <a:srgbClr val="DDF0E5"/>
           </a:solidFill>
           <a:ln>
             <a:noFill/>
@@ -11610,62 +11627,21 @@
                 <a:latin typeface="Calibri"/>
                 <a:cs typeface="Calibri"/>
               </a:rPr>
-              <a:t xml:space="preserve">3.64</a:t>
-            </a:r>
-          </a:p>
-        </p:txBody>
-      </p:sp>
-      <p:sp>
-        <p:nvSpPr>
-          <p:cNvPr id="1287" name="Cell"/>
+              <a:t xml:space="preserve">3.32</a:t>
+            </a:r>
+          </a:p>
+        </p:txBody>
+      </p:sp>
+      <p:sp>
+        <p:nvSpPr>
+          <p:cNvPr id="1287" name="Card"/>
           <p:cNvSpPr/>
           <p:nvPr/>
         </p:nvSpPr>
         <p:spPr>
           <a:xfrm>
-            <a:off x="4974336" y="5367528"/>
-            <a:ext cx="1261872" cy="274320"/>
-          </a:xfrm>
-          <a:prstGeom prst="rect">
-            <a:avLst/>
-          </a:prstGeom>
-          <a:solidFill>
-            <a:srgbClr val="DDF0E5"/>
-          </a:solidFill>
-          <a:ln>
-            <a:noFill/>
-          </a:ln>
-        </p:spPr>
-        <p:txBody>
-          <a:bodyPr wrap="square" lIns="0" tIns="0" rIns="0" bIns="0" anchor="ctr">
-            <a:noAutofit/>
-          </a:bodyPr>
-          <a:lstStyle/>
-          <a:p>
-            <a:pPr algn="ctr"/>
-            <a:r>
-              <a:rPr lang="en-US" sz="1100" b="1" i="0" dirty="0">
-                <a:solidFill>
-                  <a:srgbClr val="1F2328"/>
-                </a:solidFill>
-                <a:latin typeface="Calibri"/>
-                <a:cs typeface="Calibri"/>
-              </a:rPr>
-              <a:t xml:space="preserve">3.32</a:t>
-            </a:r>
-          </a:p>
-        </p:txBody>
-      </p:sp>
-      <p:sp>
-        <p:nvSpPr>
-          <p:cNvPr id="1288" name="Card"/>
-          <p:cNvSpPr/>
-          <p:nvPr/>
-        </p:nvSpPr>
-        <p:spPr>
-          <a:xfrm>
-            <a:off x="6702552" y="3172968"/>
-            <a:ext cx="4681728" cy="2587752"/>
+            <a:off x="6702552" y="3355848"/>
+            <a:ext cx="4681728" cy="2404872"/>
           </a:xfrm>
           <a:prstGeom prst="roundRect">
             <a:avLst>
@@ -11693,13 +11669,13 @@
       </p:sp>
       <p:sp>
         <p:nvSpPr>
-          <p:cNvPr id="1289" name="Card label"/>
+          <p:cNvPr id="1288" name="Card label"/>
           <p:cNvSpPr txBox="1"/>
           <p:nvPr/>
         </p:nvSpPr>
         <p:spPr>
           <a:xfrm>
-            <a:off x="6976872" y="3355848"/>
+            <a:off x="6976872" y="3538728"/>
             <a:ext cx="4133088" cy="274320"/>
           </a:xfrm>
           <a:prstGeom prst="rect">
@@ -11732,14 +11708,14 @@
       </p:sp>
       <p:sp>
         <p:nvSpPr>
-          <p:cNvPr id="1290" name="Big"/>
+          <p:cNvPr id="1289" name="Claim"/>
           <p:cNvSpPr txBox="1"/>
           <p:nvPr/>
         </p:nvSpPr>
         <p:spPr>
           <a:xfrm>
-            <a:off x="6976872" y="3557016"/>
-            <a:ext cx="2194560" cy="566928"/>
+            <a:off x="6976872" y="3794760"/>
+            <a:ext cx="4133088" cy="365760"/>
           </a:xfrm>
           <a:prstGeom prst="rect">
             <a:avLst/>
@@ -11750,35 +11726,74 @@
           </a:ln>
         </p:spPr>
         <p:txBody>
-          <a:bodyPr wrap="square" lIns="0" tIns="0" rIns="0" bIns="0" anchor="t">
+          <a:bodyPr wrap="square" lIns="0" tIns="0" rIns="0" bIns="0" anchor="ctr">
             <a:noAutofit/>
           </a:bodyPr>
           <a:lstStyle/>
           <a:p>
             <a:pPr algn="l"/>
             <a:r>
-              <a:rPr lang="en-US" sz="3400" b="1" i="0" dirty="0">
+              <a:rPr lang="en-US" sz="1800" b="1" i="0" dirty="0">
+                <a:solidFill>
+                  <a:srgbClr val="0B6E4F"/>
+                </a:solidFill>
+                <a:latin typeface="Calibri"/>
+                <a:cs typeface="Calibri"/>
+              </a:rPr>
+              <a:t xml:space="preserve">First in 7 of 10 rankings</a:t>
+            </a:r>
+          </a:p>
+        </p:txBody>
+      </p:sp>
+      <p:sp>
+        <p:nvSpPr>
+          <p:cNvPr id="1290" name="Database"/>
+          <p:cNvSpPr txBox="1"/>
+          <p:nvPr/>
+        </p:nvSpPr>
+        <p:spPr>
+          <a:xfrm>
+            <a:off x="8439912" y="4251960"/>
+            <a:ext cx="1353312" cy="219456"/>
+          </a:xfrm>
+          <a:prstGeom prst="rect">
+            <a:avLst/>
+          </a:prstGeom>
+          <a:noFill/>
+          <a:ln>
+            <a:noFill/>
+          </a:ln>
+        </p:spPr>
+        <p:txBody>
+          <a:bodyPr wrap="square" lIns="0" tIns="0" rIns="0" bIns="0" anchor="ctr">
+            <a:noAutofit/>
+          </a:bodyPr>
+          <a:lstStyle/>
+          <a:p>
+            <a:pPr algn="ctr"/>
+            <a:r>
+              <a:rPr lang="en-US" sz="1100" b="1" i="0" dirty="0">
                 <a:solidFill>
                   <a:srgbClr val="1F2328"/>
                 </a:solidFill>
-                <a:latin typeface="Cambria"/>
-                <a:cs typeface="Cambria"/>
-              </a:rPr>
-              <a:t xml:space="preserve">28 / 40</a:t>
-            </a:r>
-          </a:p>
-        </p:txBody>
-      </p:sp>
-      <p:sp>
-        <p:nvSpPr>
-          <p:cNvPr id="1291" name="Claim"/>
+                <a:latin typeface="Calibri"/>
+                <a:cs typeface="Calibri"/>
+              </a:rPr>
+              <a:t xml:space="preserve">Liver Cancer</a:t>
+            </a:r>
+          </a:p>
+        </p:txBody>
+      </p:sp>
+      <p:sp>
+        <p:nvSpPr>
+          <p:cNvPr id="1291" name="Database"/>
           <p:cNvSpPr txBox="1"/>
           <p:nvPr/>
         </p:nvSpPr>
         <p:spPr>
           <a:xfrm>
-            <a:off x="8942832" y="3584448"/>
-            <a:ext cx="2304288" cy="502920"/>
+            <a:off x="9793224" y="4251960"/>
+            <a:ext cx="1353312" cy="219456"/>
           </a:xfrm>
           <a:prstGeom prst="rect">
             <a:avLst/>
@@ -11794,30 +11809,151 @@
           </a:bodyPr>
           <a:lstStyle/>
           <a:p>
+            <a:pPr algn="ctr"/>
+            <a:r>
+              <a:rPr lang="en-US" sz="1100" b="1" i="0" dirty="0">
+                <a:solidFill>
+                  <a:srgbClr val="1F2328"/>
+                </a:solidFill>
+                <a:latin typeface="Calibri"/>
+                <a:cs typeface="Calibri"/>
+              </a:rPr>
+              <a:t xml:space="preserve">eICU-CRD</a:t>
+            </a:r>
+          </a:p>
+        </p:txBody>
+      </p:sp>
+      <p:sp>
+        <p:nvSpPr>
+          <p:cNvPr id="1292" name="Method"/>
+          <p:cNvSpPr txBox="1"/>
+          <p:nvPr/>
+        </p:nvSpPr>
+        <p:spPr>
+          <a:xfrm>
+            <a:off x="6931152" y="4507992"/>
+            <a:ext cx="1508760" cy="292608"/>
+          </a:xfrm>
+          <a:prstGeom prst="rect">
+            <a:avLst/>
+          </a:prstGeom>
+          <a:noFill/>
+          <a:ln>
+            <a:noFill/>
+          </a:ln>
+        </p:spPr>
+        <p:txBody>
+          <a:bodyPr wrap="square" lIns="0" tIns="0" rIns="0" bIns="0" anchor="ctr">
+            <a:noAutofit/>
+          </a:bodyPr>
+          <a:lstStyle/>
+          <a:p>
             <a:pPr algn="l"/>
             <a:r>
-              <a:rPr lang="en-US" sz="1500" b="1" i="0" dirty="0">
-                <a:solidFill>
-                  <a:srgbClr val="0B6E4F"/>
-                </a:solidFill>
-                <a:latin typeface="Calibri"/>
-                <a:cs typeface="Calibri"/>
-              </a:rPr>
-              <a:t xml:space="preserve">rankings with RIGOR first (70%)</a:t>
-            </a:r>
-          </a:p>
-        </p:txBody>
-      </p:sp>
-      <p:sp>
-        <p:nvSpPr>
-          <p:cNvPr id="1292" name="Database"/>
+              <a:rPr lang="en-US" sz="1200" b="0" i="0" dirty="0">
+                <a:solidFill>
+                  <a:srgbClr val="1F2328"/>
+                </a:solidFill>
+                <a:latin typeface="Calibri"/>
+                <a:cs typeface="Calibri"/>
+              </a:rPr>
+              <a:t xml:space="preserve">Direct Mapping</a:t>
+            </a:r>
+          </a:p>
+        </p:txBody>
+      </p:sp>
+      <p:sp>
+        <p:nvSpPr>
+          <p:cNvPr id="1293" name="Cell"/>
+          <p:cNvSpPr/>
+          <p:nvPr/>
+        </p:nvSpPr>
+        <p:spPr>
+          <a:xfrm>
+            <a:off x="8458200" y="4526280"/>
+            <a:ext cx="1316736" cy="256032"/>
+          </a:xfrm>
+          <a:prstGeom prst="rect">
+            <a:avLst/>
+          </a:prstGeom>
+          <a:solidFill>
+            <a:srgbClr val="F1F3F2"/>
+          </a:solidFill>
+          <a:ln>
+            <a:noFill/>
+          </a:ln>
+        </p:spPr>
+        <p:txBody>
+          <a:bodyPr wrap="square" lIns="0" tIns="0" rIns="0" bIns="0" anchor="ctr">
+            <a:noAutofit/>
+          </a:bodyPr>
+          <a:lstStyle/>
+          <a:p>
+            <a:pPr algn="ctr"/>
+            <a:r>
+              <a:rPr lang="en-US" sz="1100" b="0" i="0" dirty="0">
+                <a:solidFill>
+                  <a:srgbClr val="1F2328"/>
+                </a:solidFill>
+                <a:latin typeface="Calibri"/>
+                <a:cs typeface="Calibri"/>
+              </a:rPr>
+              <a:t xml:space="preserve">2.95</a:t>
+            </a:r>
+          </a:p>
+        </p:txBody>
+      </p:sp>
+      <p:sp>
+        <p:nvSpPr>
+          <p:cNvPr id="1294" name="Cell"/>
+          <p:cNvSpPr/>
+          <p:nvPr/>
+        </p:nvSpPr>
+        <p:spPr>
+          <a:xfrm>
+            <a:off x="9811512" y="4526280"/>
+            <a:ext cx="1316736" cy="256032"/>
+          </a:xfrm>
+          <a:prstGeom prst="rect">
+            <a:avLst/>
+          </a:prstGeom>
+          <a:solidFill>
+            <a:srgbClr val="F1F3F2"/>
+          </a:solidFill>
+          <a:ln>
+            <a:noFill/>
+          </a:ln>
+        </p:spPr>
+        <p:txBody>
+          <a:bodyPr wrap="square" lIns="0" tIns="0" rIns="0" bIns="0" anchor="ctr">
+            <a:noAutofit/>
+          </a:bodyPr>
+          <a:lstStyle/>
+          <a:p>
+            <a:pPr algn="ctr"/>
+            <a:r>
+              <a:rPr lang="en-US" sz="1100" b="0" i="0" dirty="0">
+                <a:solidFill>
+                  <a:srgbClr val="1F2328"/>
+                </a:solidFill>
+                <a:latin typeface="Calibri"/>
+                <a:cs typeface="Calibri"/>
+              </a:rPr>
+              <a:t xml:space="preserve">2.59</a:t>
+            </a:r>
+          </a:p>
+        </p:txBody>
+      </p:sp>
+      <p:sp>
+        <p:nvSpPr>
+          <p:cNvPr id="1295" name="Method"/>
           <p:cNvSpPr txBox="1"/>
           <p:nvPr/>
         </p:nvSpPr>
         <p:spPr>
           <a:xfrm>
-            <a:off x="8257031" y="4160520"/>
-            <a:ext cx="1417320" cy="219456"/>
+            <a:off x="6931152" y="4800600"/>
+            <a:ext cx="1508760" cy="292608"/>
           </a:xfrm>
           <a:prstGeom prst="rect">
             <a:avLst/>
@@ -11833,135 +11969,16 @@
           </a:bodyPr>
           <a:lstStyle/>
           <a:p>
-            <a:pPr algn="ctr"/>
-            <a:r>
-              <a:rPr lang="en-US" sz="1100" b="1" i="0" dirty="0">
+            <a:pPr algn="l"/>
+            <a:r>
+              <a:rPr lang="en-US" sz="1200" b="0" i="0" dirty="0">
                 <a:solidFill>
                   <a:srgbClr val="1F2328"/>
                 </a:solidFill>
                 <a:latin typeface="Calibri"/>
                 <a:cs typeface="Calibri"/>
               </a:rPr>
-              <a:t xml:space="preserve">Liver Cancer</a:t>
-            </a:r>
-          </a:p>
-        </p:txBody>
-      </p:sp>
-      <p:sp>
-        <p:nvSpPr>
-          <p:cNvPr id="1293" name="Database"/>
-          <p:cNvSpPr txBox="1"/>
-          <p:nvPr/>
-        </p:nvSpPr>
-        <p:spPr>
-          <a:xfrm>
-            <a:off x="9674352" y="4160520"/>
-            <a:ext cx="1417320" cy="219456"/>
-          </a:xfrm>
-          <a:prstGeom prst="rect">
-            <a:avLst/>
-          </a:prstGeom>
-          <a:noFill/>
-          <a:ln>
-            <a:noFill/>
-          </a:ln>
-        </p:spPr>
-        <p:txBody>
-          <a:bodyPr wrap="square" lIns="0" tIns="0" rIns="0" bIns="0" anchor="ctr">
-            <a:noAutofit/>
-          </a:bodyPr>
-          <a:lstStyle/>
-          <a:p>
-            <a:pPr algn="ctr"/>
-            <a:r>
-              <a:rPr lang="en-US" sz="1100" b="1" i="0" dirty="0">
-                <a:solidFill>
-                  <a:srgbClr val="1F2328"/>
-                </a:solidFill>
-                <a:latin typeface="Calibri"/>
-                <a:cs typeface="Calibri"/>
-              </a:rPr>
-              <a:t xml:space="preserve">eICU-CRD</a:t>
-            </a:r>
-          </a:p>
-        </p:txBody>
-      </p:sp>
-      <p:sp>
-        <p:nvSpPr>
-          <p:cNvPr id="1294" name="Method"/>
-          <p:cNvSpPr txBox="1"/>
-          <p:nvPr/>
-        </p:nvSpPr>
-        <p:spPr>
-          <a:xfrm>
-            <a:off x="6931152" y="4416552"/>
-            <a:ext cx="1325880" cy="310896"/>
-          </a:xfrm>
-          <a:prstGeom prst="rect">
-            <a:avLst/>
-          </a:prstGeom>
-          <a:noFill/>
-          <a:ln>
-            <a:noFill/>
-          </a:ln>
-        </p:spPr>
-        <p:txBody>
-          <a:bodyPr wrap="square" lIns="0" tIns="0" rIns="0" bIns="0" anchor="ctr">
-            <a:noAutofit/>
-          </a:bodyPr>
-          <a:lstStyle/>
-          <a:p>
-            <a:pPr algn="l"/>
-            <a:r>
-              <a:rPr lang="en-US" sz="1200" b="0" i="0" dirty="0">
-                <a:solidFill>
-                  <a:srgbClr val="1F2328"/>
-                </a:solidFill>
-                <a:latin typeface="Calibri"/>
-                <a:cs typeface="Calibri"/>
-              </a:rPr>
-              <a:t xml:space="preserve">Direct Mapping</a:t>
-            </a:r>
-          </a:p>
-        </p:txBody>
-      </p:sp>
-      <p:sp>
-        <p:nvSpPr>
-          <p:cNvPr id="1295" name="Cell"/>
-          <p:cNvSpPr/>
-          <p:nvPr/>
-        </p:nvSpPr>
-        <p:spPr>
-          <a:xfrm>
-            <a:off x="8275319" y="4434840"/>
-            <a:ext cx="1380744" cy="274320"/>
-          </a:xfrm>
-          <a:prstGeom prst="rect">
-            <a:avLst/>
-          </a:prstGeom>
-          <a:solidFill>
-            <a:srgbClr val="F1F3F2"/>
-          </a:solidFill>
-          <a:ln>
-            <a:noFill/>
-          </a:ln>
-        </p:spPr>
-        <p:txBody>
-          <a:bodyPr wrap="square" lIns="0" tIns="0" rIns="0" bIns="0" anchor="ctr">
-            <a:noAutofit/>
-          </a:bodyPr>
-          <a:lstStyle/>
-          <a:p>
-            <a:pPr algn="ctr"/>
-            <a:r>
-              <a:rPr lang="en-US" sz="1100" b="0" i="0" dirty="0">
-                <a:solidFill>
-                  <a:srgbClr val="1F2328"/>
-                </a:solidFill>
-                <a:latin typeface="Calibri"/>
-                <a:cs typeface="Calibri"/>
-              </a:rPr>
-              <a:t xml:space="preserve">3</a:t>
+              <a:t xml:space="preserve">LLM baseline</a:t>
             </a:r>
           </a:p>
         </p:txBody>
@@ -11974,14 +11991,14 @@
         </p:nvSpPr>
         <p:spPr>
           <a:xfrm>
-            <a:off x="9692640" y="4434840"/>
-            <a:ext cx="1380744" cy="274320"/>
-          </a:xfrm>
-          <a:prstGeom prst="rect">
-            <a:avLst/>
-          </a:prstGeom>
-          <a:solidFill>
-            <a:srgbClr val="F6DAD3"/>
+            <a:off x="8458200" y="4818888"/>
+            <a:ext cx="1316736" cy="256032"/>
+          </a:xfrm>
+          <a:prstGeom prst="rect">
+            <a:avLst/>
+          </a:prstGeom>
+          <a:solidFill>
+            <a:srgbClr val="F1F3F2"/>
           </a:solidFill>
           <a:ln>
             <a:noFill/>
@@ -12002,21 +12019,62 @@
                 <a:latin typeface="Calibri"/>
                 <a:cs typeface="Calibri"/>
               </a:rPr>
-              <a:t xml:space="preserve">2</a:t>
-            </a:r>
-          </a:p>
-        </p:txBody>
-      </p:sp>
-      <p:sp>
-        <p:nvSpPr>
-          <p:cNvPr id="1297" name="Method"/>
+              <a:t xml:space="preserve">2.74</a:t>
+            </a:r>
+          </a:p>
+        </p:txBody>
+      </p:sp>
+      <p:sp>
+        <p:nvSpPr>
+          <p:cNvPr id="1297" name="Cell"/>
+          <p:cNvSpPr/>
+          <p:nvPr/>
+        </p:nvSpPr>
+        <p:spPr>
+          <a:xfrm>
+            <a:off x="9811512" y="4818888"/>
+            <a:ext cx="1316736" cy="256032"/>
+          </a:xfrm>
+          <a:prstGeom prst="rect">
+            <a:avLst/>
+          </a:prstGeom>
+          <a:solidFill>
+            <a:srgbClr val="DDF0E5"/>
+          </a:solidFill>
+          <a:ln>
+            <a:noFill/>
+          </a:ln>
+        </p:spPr>
+        <p:txBody>
+          <a:bodyPr wrap="square" lIns="0" tIns="0" rIns="0" bIns="0" anchor="ctr">
+            <a:noAutofit/>
+          </a:bodyPr>
+          <a:lstStyle/>
+          <a:p>
+            <a:pPr algn="ctr"/>
+            <a:r>
+              <a:rPr lang="en-US" sz="1100" b="0" i="0" dirty="0">
+                <a:solidFill>
+                  <a:srgbClr val="1F2328"/>
+                </a:solidFill>
+                <a:latin typeface="Calibri"/>
+                <a:cs typeface="Calibri"/>
+              </a:rPr>
+              <a:t xml:space="preserve">3.01</a:t>
+            </a:r>
+          </a:p>
+        </p:txBody>
+      </p:sp>
+      <p:sp>
+        <p:nvSpPr>
+          <p:cNvPr id="1298" name="Method"/>
           <p:cNvSpPr txBox="1"/>
           <p:nvPr/>
         </p:nvSpPr>
         <p:spPr>
           <a:xfrm>
-            <a:off x="6931152" y="4727448"/>
-            <a:ext cx="1325880" cy="310896"/>
+            <a:off x="6931152" y="5093208"/>
+            <a:ext cx="1508760" cy="292608"/>
           </a:xfrm>
           <a:prstGeom prst="rect">
             <a:avLst/>
@@ -12041,48 +12099,7 @@
                 <a:latin typeface="Calibri"/>
                 <a:cs typeface="Calibri"/>
               </a:rPr>
-              <a:t xml:space="preserve">LLM baseline</a:t>
-            </a:r>
-          </a:p>
-        </p:txBody>
-      </p:sp>
-      <p:sp>
-        <p:nvSpPr>
-          <p:cNvPr id="1298" name="Cell"/>
-          <p:cNvSpPr/>
-          <p:nvPr/>
-        </p:nvSpPr>
-        <p:spPr>
-          <a:xfrm>
-            <a:off x="8275319" y="4745736"/>
-            <a:ext cx="1380744" cy="274320"/>
-          </a:xfrm>
-          <a:prstGeom prst="rect">
-            <a:avLst/>
-          </a:prstGeom>
-          <a:solidFill>
-            <a:srgbClr val="F6DAD3"/>
-          </a:solidFill>
-          <a:ln>
-            <a:noFill/>
-          </a:ln>
-        </p:spPr>
-        <p:txBody>
-          <a:bodyPr wrap="square" lIns="0" tIns="0" rIns="0" bIns="0" anchor="ctr">
-            <a:noAutofit/>
-          </a:bodyPr>
-          <a:lstStyle/>
-          <a:p>
-            <a:pPr algn="ctr"/>
-            <a:r>
-              <a:rPr lang="en-US" sz="1100" b="0" i="0" dirty="0">
-                <a:solidFill>
-                  <a:srgbClr val="1F2328"/>
-                </a:solidFill>
-                <a:latin typeface="Calibri"/>
-                <a:cs typeface="Calibri"/>
-              </a:rPr>
-              <a:t xml:space="preserve">1</a:t>
+              <a:t xml:space="preserve">Non-Iterative RAG</a:t>
             </a:r>
           </a:p>
         </p:txBody>
@@ -12095,8 +12112,8 @@
         </p:nvSpPr>
         <p:spPr>
           <a:xfrm>
-            <a:off x="9692640" y="4745736"/>
-            <a:ext cx="1380744" cy="274320"/>
+            <a:off x="8458200" y="5111496"/>
+            <a:ext cx="1316736" cy="256032"/>
           </a:xfrm>
           <a:prstGeom prst="rect">
             <a:avLst/>
@@ -12123,21 +12140,62 @@
                 <a:latin typeface="Calibri"/>
                 <a:cs typeface="Calibri"/>
               </a:rPr>
-              <a:t xml:space="preserve">4</a:t>
-            </a:r>
-          </a:p>
-        </p:txBody>
-      </p:sp>
-      <p:sp>
-        <p:nvSpPr>
-          <p:cNvPr id="1300" name="Method"/>
+              <a:t xml:space="preserve">2.39</a:t>
+            </a:r>
+          </a:p>
+        </p:txBody>
+      </p:sp>
+      <p:sp>
+        <p:nvSpPr>
+          <p:cNvPr id="1300" name="Cell"/>
+          <p:cNvSpPr/>
+          <p:nvPr/>
+        </p:nvSpPr>
+        <p:spPr>
+          <a:xfrm>
+            <a:off x="9811512" y="5111496"/>
+            <a:ext cx="1316736" cy="256032"/>
+          </a:xfrm>
+          <a:prstGeom prst="rect">
+            <a:avLst/>
+          </a:prstGeom>
+          <a:solidFill>
+            <a:srgbClr val="F6DAD3"/>
+          </a:solidFill>
+          <a:ln>
+            <a:noFill/>
+          </a:ln>
+        </p:spPr>
+        <p:txBody>
+          <a:bodyPr wrap="square" lIns="0" tIns="0" rIns="0" bIns="0" anchor="ctr">
+            <a:noAutofit/>
+          </a:bodyPr>
+          <a:lstStyle/>
+          <a:p>
+            <a:pPr algn="ctr"/>
+            <a:r>
+              <a:rPr lang="en-US" sz="1100" b="0" i="0" dirty="0">
+                <a:solidFill>
+                  <a:srgbClr val="1F2328"/>
+                </a:solidFill>
+                <a:latin typeface="Calibri"/>
+                <a:cs typeface="Calibri"/>
+              </a:rPr>
+              <a:t xml:space="preserve">1.24</a:t>
+            </a:r>
+          </a:p>
+        </p:txBody>
+      </p:sp>
+      <p:sp>
+        <p:nvSpPr>
+          <p:cNvPr id="1301" name="Method"/>
           <p:cNvSpPr txBox="1"/>
           <p:nvPr/>
         </p:nvSpPr>
         <p:spPr>
           <a:xfrm>
-            <a:off x="6931152" y="5038344"/>
-            <a:ext cx="1325880" cy="310896"/>
+            <a:off x="6931152" y="5385816"/>
+            <a:ext cx="1508760" cy="292608"/>
           </a:xfrm>
           <a:prstGeom prst="rect">
             <a:avLst/>
@@ -12155,55 +12213,14 @@
           <a:p>
             <a:pPr algn="l"/>
             <a:r>
-              <a:rPr lang="en-US" sz="1200" b="0" i="0" dirty="0">
-                <a:solidFill>
-                  <a:srgbClr val="1F2328"/>
-                </a:solidFill>
-                <a:latin typeface="Calibri"/>
-                <a:cs typeface="Calibri"/>
-              </a:rPr>
-              <a:t xml:space="preserve">Non-Iterative</a:t>
-            </a:r>
-          </a:p>
-        </p:txBody>
-      </p:sp>
-      <p:sp>
-        <p:nvSpPr>
-          <p:cNvPr id="1301" name="Cell"/>
-          <p:cNvSpPr/>
-          <p:nvPr/>
-        </p:nvSpPr>
-        <p:spPr>
-          <a:xfrm>
-            <a:off x="8275319" y="5056632"/>
-            <a:ext cx="1380744" cy="274320"/>
-          </a:xfrm>
-          <a:prstGeom prst="rect">
-            <a:avLst/>
-          </a:prstGeom>
-          <a:solidFill>
-            <a:srgbClr val="F6DAD3"/>
-          </a:solidFill>
-          <a:ln>
-            <a:noFill/>
-          </a:ln>
-        </p:spPr>
-        <p:txBody>
-          <a:bodyPr wrap="square" lIns="0" tIns="0" rIns="0" bIns="0" anchor="ctr">
-            <a:noAutofit/>
-          </a:bodyPr>
-          <a:lstStyle/>
-          <a:p>
-            <a:pPr algn="ctr"/>
-            <a:r>
-              <a:rPr lang="en-US" sz="1100" b="0" i="0" dirty="0">
-                <a:solidFill>
-                  <a:srgbClr val="1F2328"/>
-                </a:solidFill>
-                <a:latin typeface="Calibri"/>
-                <a:cs typeface="Calibri"/>
-              </a:rPr>
-              <a:t xml:space="preserve">2</a:t>
+              <a:rPr lang="en-US" sz="1200" b="1" i="0" dirty="0">
+                <a:solidFill>
+                  <a:srgbClr val="0B6E4F"/>
+                </a:solidFill>
+                <a:latin typeface="Calibri"/>
+                <a:cs typeface="Calibri"/>
+              </a:rPr>
+              <a:t xml:space="preserve">RIGOR</a:t>
             </a:r>
           </a:p>
         </p:txBody>
@@ -12216,88 +12233,49 @@
         </p:nvSpPr>
         <p:spPr>
           <a:xfrm>
-            <a:off x="9692640" y="5056632"/>
-            <a:ext cx="1380744" cy="274320"/>
-          </a:xfrm>
-          <a:prstGeom prst="rect">
-            <a:avLst/>
-          </a:prstGeom>
-          <a:solidFill>
-            <a:srgbClr val="EDB8AC"/>
-          </a:solidFill>
-          <a:ln>
-            <a:noFill/>
-          </a:ln>
-        </p:spPr>
-        <p:txBody>
-          <a:bodyPr wrap="square" lIns="0" tIns="0" rIns="0" bIns="0" anchor="ctr">
-            <a:noAutofit/>
-          </a:bodyPr>
-          <a:lstStyle/>
-          <a:p>
-            <a:pPr algn="ctr"/>
-            <a:r>
-              <a:rPr lang="en-US" sz="1100" b="0" i="0" dirty="0">
+            <a:off x="8458200" y="5404104"/>
+            <a:ext cx="1316736" cy="256032"/>
+          </a:xfrm>
+          <a:prstGeom prst="rect">
+            <a:avLst/>
+          </a:prstGeom>
+          <a:solidFill>
+            <a:srgbClr val="DDF0E5"/>
+          </a:solidFill>
+          <a:ln>
+            <a:noFill/>
+          </a:ln>
+        </p:spPr>
+        <p:txBody>
+          <a:bodyPr wrap="square" lIns="0" tIns="0" rIns="0" bIns="0" anchor="ctr">
+            <a:noAutofit/>
+          </a:bodyPr>
+          <a:lstStyle/>
+          <a:p>
+            <a:pPr algn="ctr"/>
+            <a:r>
+              <a:rPr lang="en-US" sz="1100" b="1" i="0" dirty="0">
                 <a:solidFill>
                   <a:srgbClr val="1F2328"/>
                 </a:solidFill>
                 <a:latin typeface="Calibri"/>
                 <a:cs typeface="Calibri"/>
               </a:rPr>
-              <a:t xml:space="preserve">0</a:t>
-            </a:r>
-          </a:p>
-        </p:txBody>
-      </p:sp>
-      <p:sp>
-        <p:nvSpPr>
-          <p:cNvPr id="1303" name="Method"/>
-          <p:cNvSpPr txBox="1"/>
-          <p:nvPr/>
-        </p:nvSpPr>
-        <p:spPr>
-          <a:xfrm>
-            <a:off x="6931152" y="5349240"/>
-            <a:ext cx="1325880" cy="310896"/>
-          </a:xfrm>
-          <a:prstGeom prst="rect">
-            <a:avLst/>
-          </a:prstGeom>
-          <a:noFill/>
-          <a:ln>
-            <a:noFill/>
-          </a:ln>
-        </p:spPr>
-        <p:txBody>
-          <a:bodyPr wrap="square" lIns="0" tIns="0" rIns="0" bIns="0" anchor="ctr">
-            <a:noAutofit/>
-          </a:bodyPr>
-          <a:lstStyle/>
-          <a:p>
-            <a:pPr algn="l"/>
-            <a:r>
-              <a:rPr lang="en-US" sz="1200" b="1" i="0" dirty="0">
-                <a:solidFill>
-                  <a:srgbClr val="0B6E4F"/>
-                </a:solidFill>
-                <a:latin typeface="Calibri"/>
-                <a:cs typeface="Calibri"/>
-              </a:rPr>
-              <a:t xml:space="preserve">RIGOR</a:t>
-            </a:r>
-          </a:p>
-        </p:txBody>
-      </p:sp>
-      <p:sp>
-        <p:nvSpPr>
-          <p:cNvPr id="1304" name="Cell"/>
+              <a:t xml:space="preserve">3.44</a:t>
+            </a:r>
+          </a:p>
+        </p:txBody>
+      </p:sp>
+      <p:sp>
+        <p:nvSpPr>
+          <p:cNvPr id="1303" name="Cell"/>
           <p:cNvSpPr/>
           <p:nvPr/>
         </p:nvSpPr>
         <p:spPr>
           <a:xfrm>
-            <a:off x="8275319" y="5367528"/>
-            <a:ext cx="1380744" cy="274320"/>
+            <a:off x="9811512" y="5404104"/>
+            <a:ext cx="1316736" cy="256032"/>
           </a:xfrm>
           <a:prstGeom prst="rect">
             <a:avLst/>
@@ -12324,55 +12302,14 @@
                 <a:latin typeface="Calibri"/>
                 <a:cs typeface="Calibri"/>
               </a:rPr>
-              <a:t xml:space="preserve">14</a:t>
-            </a:r>
-          </a:p>
-        </p:txBody>
-      </p:sp>
-      <p:sp>
-        <p:nvSpPr>
-          <p:cNvPr id="1305" name="Cell"/>
-          <p:cNvSpPr/>
-          <p:nvPr/>
-        </p:nvSpPr>
-        <p:spPr>
-          <a:xfrm>
-            <a:off x="9692640" y="5367528"/>
-            <a:ext cx="1380744" cy="274320"/>
-          </a:xfrm>
-          <a:prstGeom prst="rect">
-            <a:avLst/>
-          </a:prstGeom>
-          <a:solidFill>
-            <a:srgbClr val="BFE3CF"/>
-          </a:solidFill>
-          <a:ln>
-            <a:noFill/>
-          </a:ln>
-        </p:spPr>
-        <p:txBody>
-          <a:bodyPr wrap="square" lIns="0" tIns="0" rIns="0" bIns="0" anchor="ctr">
-            <a:noAutofit/>
-          </a:bodyPr>
-          <a:lstStyle/>
-          <a:p>
-            <a:pPr algn="ctr"/>
-            <a:r>
-              <a:rPr lang="en-US" sz="1100" b="1" i="0" dirty="0">
-                <a:solidFill>
-                  <a:srgbClr val="1F2328"/>
-                </a:solidFill>
-                <a:latin typeface="Calibri"/>
-                <a:cs typeface="Calibri"/>
-              </a:rPr>
-              <a:t xml:space="preserve">14</a:t>
-            </a:r>
-          </a:p>
-        </p:txBody>
-      </p:sp>
-      <p:sp>
-        <p:nvSpPr>
-          <p:cNvPr id="1306" name="Strip"/>
+              <a:t xml:space="preserve">3.53</a:t>
+            </a:r>
+          </a:p>
+        </p:txBody>
+      </p:sp>
+      <p:sp>
+        <p:nvSpPr>
+          <p:cNvPr id="1304" name="Strip"/>
           <p:cNvSpPr/>
           <p:nvPr/>
         </p:nvSpPr>
@@ -12425,7 +12362,7 @@
       </p:sp>
       <p:sp>
         <p:nvSpPr>
-          <p:cNvPr id="1307" name="Source"/>
+          <p:cNvPr id="1305" name="Source"/>
           <p:cNvSpPr txBox="1"/>
           <p:nvPr/>
         </p:nvSpPr>
@@ -12457,7 +12394,7 @@
                 <a:latin typeface="Calibri"/>
                 <a:cs typeface="Calibri"/>
               </a:rPr>
-              <a:t xml:space="preserve">Judge: average score 0–5 per database, Claude ontologies, 58 tables. Experts: first places of 20 per database, 4 medical tables, Kendall's W 0.39–0.72. Paper Tables 1, 6, 12.</a:t>
+              <a:t xml:space="preserve">Average scores (0–5) per database. Judge: all 58 tables, ontologies generated with Claude. Experts: 4 medical tables, significant agreement (Kendall's W). Paper Sec. 4.6, Tables 1, 10–12.</a:t>
             </a:r>
           </a:p>
         </p:txBody>

--- a/presentation/RIGOR_results.pptx
+++ b/presentation/RIGOR_results.pptx
@@ -2309,7 +2309,7 @@
                 <a:cs typeface="Calibri"/>
                 <a:sym typeface="Calibri"/>
               </a:rPr>
-              <a:t>[11:07–12:03]  SPOKEN SCRIPT (91 words)</a:t>
+              <a:t>[11:07–12:00]  SPOKEN SCRIPT (86 words)</a:t>
             </a:r>
           </a:p>
           <a:p>
@@ -2323,7 +2323,7 @@
                 <a:cs typeface="Calibri"/>
                 <a:sym typeface="Calibri"/>
               </a:rPr>
-              <a:t>Automatic checks agree. Do evaluators agree? For each table, an LLM judge and ten ontology experts saw the schema, five competency questions, the questions the ontology must answer, and four anonymized ontologies. They scored each on seven quality dimensions and ranked them. The LLM judge put RIGOR first on every table, in all three databases. [pause] The experts put RIGOR first in seven of ten rankings, with the highest average score on both databases. [pause] Direct mapping gives structure without meaning. LLMs alone give meaning without structure. RIGOR gives both, and checks them.</a:t>
+              <a:t>Automatic checks agree. Do evaluators agree? For each table, an LLM judge and ten ontology experts saw the schema, five competency questions, the questions the ontology must answer, and four anonymized ontologies. They scored each on seven quality dimensions and ranked them first to fourth. The LLM judge ranked RIGOR first every time. [pause] The experts ranked RIGOR first seventy percent of the time, with the highest average score. [pause] Direct mapping gives structure without meaning. LLMs alone give meaning without structure. RIGOR gives both, and checks them.</a:t>
             </a:r>
           </a:p>
           <a:p/>
@@ -2380,7 +2380,7 @@
                 <a:cs typeface="Calibri"/>
                 <a:sym typeface="Calibri"/>
               </a:rPr>
-              <a:t>IF RUNNING LATE, DROP: "with the highest average score on both databases"</a:t>
+              <a:t>IF RUNNING LATE, DROP: "with the highest average score"</a:t>
             </a:r>
           </a:p>
           <a:p/>
@@ -10852,17 +10852,7 @@
                 <a:latin typeface="Calibri"/>
                 <a:cs typeface="Calibri"/>
               </a:rPr>
-              <a:t xml:space="preserve">First on every table</a:t>
-            </a:r>
-            <a:r>
-              <a:rPr lang="en-US" sz="1500" b="0" i="0" dirty="0">
-                <a:solidFill>
-                  <a:srgbClr val="3A434C"/>
-                </a:solidFill>
-                <a:latin typeface="Calibri"/>
-                <a:cs typeface="Calibri"/>
-              </a:rPr>
-              <a:t xml:space="preserve">, in all three databases</a:t>
+              <a:t xml:space="preserve">Ranked RIGOR first every time</a:t>
             </a:r>
           </a:p>
         </p:txBody>
@@ -11740,7 +11730,7 @@
                 <a:latin typeface="Calibri"/>
                 <a:cs typeface="Calibri"/>
               </a:rPr>
-              <a:t xml:space="preserve">First in 7 of 10 rankings</a:t>
+              <a:t xml:space="preserve">Ranked RIGOR first 70% of the time</a:t>
             </a:r>
           </a:p>
         </p:txBody>
@@ -12394,7 +12384,7 @@
                 <a:latin typeface="Calibri"/>
                 <a:cs typeface="Calibri"/>
               </a:rPr>
-              <a:t xml:space="preserve">Average scores (0–5) per database. Judge: all 58 tables, ontologies generated with Claude. Experts: 4 medical tables, significant agreement (Kendall's W). Paper Sec. 4.6, Tables 1, 10–12.</a:t>
+              <a:t xml:space="preserve">Average scores (0–5) per database. Judge: ontologies generated with Claude. Experts: significant agreement (Kendall's W). Paper Sec. 4.6, Tables 1, 10–12.</a:t>
             </a:r>
           </a:p>
         </p:txBody>
